--- a/slides/MiCM_IntroToR.pptx
+++ b/slides/MiCM_IntroToR.pptx
@@ -1,8 +1,8 @@
 
 <file path=ppt/presentation.xml><?xml version="1.0" encoding="utf-8"?>
-<p:presentation xmlns:a="http://schemas.openxmlformats.org/drawingml/2006/main" xmlns:r="http://schemas.openxmlformats.org/officeDocument/2006/relationships" xmlns:p="http://schemas.openxmlformats.org/presentationml/2006/main" saveSubsetFonts="1" autoCompressPictures="0">
+<p:presentation xmlns:a="http://schemas.openxmlformats.org/drawingml/2006/main" xmlns:r="http://schemas.openxmlformats.org/officeDocument/2006/relationships" xmlns:p="http://schemas.openxmlformats.org/presentationml/2006/main" autoCompressPictures="0">
   <p:sldMasterIdLst>
-    <p:sldMasterId id="2147483660" r:id="rId1"/>
+    <p:sldMasterId id="2147483648" r:id="rId1"/>
   </p:sldMasterIdLst>
   <p:notesMasterIdLst>
     <p:notesMasterId r:id="rId61"/>
@@ -74,8 +74,8 @@
     <a:defPPr>
       <a:defRPr lang="fr-FR"/>
     </a:defPPr>
-    <a:lvl1pPr marL="0" algn="l" defTabSz="914226" rtl="0" eaLnBrk="1" latinLnBrk="0" hangingPunct="1">
-      <a:defRPr sz="1801" kern="1200">
+    <a:lvl1pPr marL="0" algn="l" defTabSz="914400" rtl="0" eaLnBrk="1" latinLnBrk="0" hangingPunct="1">
+      <a:defRPr sz="1800" kern="1200">
         <a:solidFill>
           <a:schemeClr val="tx1"/>
         </a:solidFill>
@@ -84,8 +84,8 @@
         <a:cs typeface="+mn-cs"/>
       </a:defRPr>
     </a:lvl1pPr>
-    <a:lvl2pPr marL="457113" algn="l" defTabSz="914226" rtl="0" eaLnBrk="1" latinLnBrk="0" hangingPunct="1">
-      <a:defRPr sz="1801" kern="1200">
+    <a:lvl2pPr marL="457200" algn="l" defTabSz="914400" rtl="0" eaLnBrk="1" latinLnBrk="0" hangingPunct="1">
+      <a:defRPr sz="1800" kern="1200">
         <a:solidFill>
           <a:schemeClr val="tx1"/>
         </a:solidFill>
@@ -94,8 +94,8 @@
         <a:cs typeface="+mn-cs"/>
       </a:defRPr>
     </a:lvl2pPr>
-    <a:lvl3pPr marL="914226" algn="l" defTabSz="914226" rtl="0" eaLnBrk="1" latinLnBrk="0" hangingPunct="1">
-      <a:defRPr sz="1801" kern="1200">
+    <a:lvl3pPr marL="914400" algn="l" defTabSz="914400" rtl="0" eaLnBrk="1" latinLnBrk="0" hangingPunct="1">
+      <a:defRPr sz="1800" kern="1200">
         <a:solidFill>
           <a:schemeClr val="tx1"/>
         </a:solidFill>
@@ -104,8 +104,8 @@
         <a:cs typeface="+mn-cs"/>
       </a:defRPr>
     </a:lvl3pPr>
-    <a:lvl4pPr marL="1371341" algn="l" defTabSz="914226" rtl="0" eaLnBrk="1" latinLnBrk="0" hangingPunct="1">
-      <a:defRPr sz="1801" kern="1200">
+    <a:lvl4pPr marL="1371600" algn="l" defTabSz="914400" rtl="0" eaLnBrk="1" latinLnBrk="0" hangingPunct="1">
+      <a:defRPr sz="1800" kern="1200">
         <a:solidFill>
           <a:schemeClr val="tx1"/>
         </a:solidFill>
@@ -114,8 +114,8 @@
         <a:cs typeface="+mn-cs"/>
       </a:defRPr>
     </a:lvl4pPr>
-    <a:lvl5pPr marL="1828453" algn="l" defTabSz="914226" rtl="0" eaLnBrk="1" latinLnBrk="0" hangingPunct="1">
-      <a:defRPr sz="1801" kern="1200">
+    <a:lvl5pPr marL="1828165" algn="l" defTabSz="914400" rtl="0" eaLnBrk="1" latinLnBrk="0" hangingPunct="1">
+      <a:defRPr sz="1800" kern="1200">
         <a:solidFill>
           <a:schemeClr val="tx1"/>
         </a:solidFill>
@@ -124,8 +124,8 @@
         <a:cs typeface="+mn-cs"/>
       </a:defRPr>
     </a:lvl5pPr>
-    <a:lvl6pPr marL="2285566" algn="l" defTabSz="914226" rtl="0" eaLnBrk="1" latinLnBrk="0" hangingPunct="1">
-      <a:defRPr sz="1801" kern="1200">
+    <a:lvl6pPr marL="2285365" algn="l" defTabSz="914400" rtl="0" eaLnBrk="1" latinLnBrk="0" hangingPunct="1">
+      <a:defRPr sz="1800" kern="1200">
         <a:solidFill>
           <a:schemeClr val="tx1"/>
         </a:solidFill>
@@ -134,8 +134,8 @@
         <a:cs typeface="+mn-cs"/>
       </a:defRPr>
     </a:lvl6pPr>
-    <a:lvl7pPr marL="2742679" algn="l" defTabSz="914226" rtl="0" eaLnBrk="1" latinLnBrk="0" hangingPunct="1">
-      <a:defRPr sz="1801" kern="1200">
+    <a:lvl7pPr marL="2742565" algn="l" defTabSz="914400" rtl="0" eaLnBrk="1" latinLnBrk="0" hangingPunct="1">
+      <a:defRPr sz="1800" kern="1200">
         <a:solidFill>
           <a:schemeClr val="tx1"/>
         </a:solidFill>
@@ -144,8 +144,8 @@
         <a:cs typeface="+mn-cs"/>
       </a:defRPr>
     </a:lvl7pPr>
-    <a:lvl8pPr marL="3199794" algn="l" defTabSz="914226" rtl="0" eaLnBrk="1" latinLnBrk="0" hangingPunct="1">
-      <a:defRPr sz="1801" kern="1200">
+    <a:lvl8pPr marL="3199765" algn="l" defTabSz="914400" rtl="0" eaLnBrk="1" latinLnBrk="0" hangingPunct="1">
+      <a:defRPr sz="1800" kern="1200">
         <a:solidFill>
           <a:schemeClr val="tx1"/>
         </a:solidFill>
@@ -154,8 +154,8 @@
         <a:cs typeface="+mn-cs"/>
       </a:defRPr>
     </a:lvl8pPr>
-    <a:lvl9pPr marL="3656907" algn="l" defTabSz="914226" rtl="0" eaLnBrk="1" latinLnBrk="0" hangingPunct="1">
-      <a:defRPr sz="1801" kern="1200">
+    <a:lvl9pPr marL="3656965" algn="l" defTabSz="914400" rtl="0" eaLnBrk="1" latinLnBrk="0" hangingPunct="1">
+      <a:defRPr sz="1800" kern="1200">
         <a:solidFill>
           <a:schemeClr val="tx1"/>
         </a:solidFill>
@@ -271,2067 +271,6 @@
 </p:presentation>
 </file>
 
-<file path=ppt/revisionInfo.xml><?xml version="1.0" encoding="utf-8"?>
-<p1510:revInfo xmlns:a="http://schemas.openxmlformats.org/drawingml/2006/main" xmlns:r="http://schemas.openxmlformats.org/officeDocument/2006/relationships" xmlns:p1510="http://schemas.microsoft.com/office/powerpoint/2015/10/main">
-  <p1510:revLst>
-    <p1510:client id="{CF93B0C4-2B24-4D73-92D8-6EAA22D04A70}" v="25" dt="2025-02-13T15:33:23.487"/>
-  </p1510:revLst>
-</p1510:revInfo>
-</file>
-
-<file path=ppt/changesInfos/changesInfo1.xml><?xml version="1.0" encoding="utf-8"?>
-<pc:chgInfo xmlns:a="http://schemas.openxmlformats.org/drawingml/2006/main" xmlns:r="http://schemas.openxmlformats.org/officeDocument/2006/relationships" xmlns:ac="http://schemas.microsoft.com/office/drawing/2013/main/command" xmlns:pc="http://schemas.microsoft.com/office/powerpoint/2013/main/command">
-  <pc:docChgLst>
-    <pc:chgData name="Larisa Morales Soto" userId="ae55080d-17f4-48de-9309-0024c0e8fdbf" providerId="ADAL" clId="{794C632D-D3BD-C142-B93F-C90E6BDD7C20}"/>
-    <pc:docChg chg="undo custSel modSld modMainMaster modNotesMaster">
-      <pc:chgData name="Larisa Morales Soto" userId="ae55080d-17f4-48de-9309-0024c0e8fdbf" providerId="ADAL" clId="{794C632D-D3BD-C142-B93F-C90E6BDD7C20}" dt="2022-05-26T18:32:06.214" v="16" actId="478"/>
-      <pc:docMkLst>
-        <pc:docMk/>
-      </pc:docMkLst>
-      <pc:sldChg chg="modNotes">
-        <pc:chgData name="Larisa Morales Soto" userId="ae55080d-17f4-48de-9309-0024c0e8fdbf" providerId="ADAL" clId="{794C632D-D3BD-C142-B93F-C90E6BDD7C20}" dt="2022-05-26T18:32:00.009" v="14"/>
-        <pc:sldMkLst>
-          <pc:docMk/>
-          <pc:sldMk cId="3133242724" sldId="262"/>
-        </pc:sldMkLst>
-      </pc:sldChg>
-      <pc:sldChg chg="addSp delSp modSp mod">
-        <pc:chgData name="Larisa Morales Soto" userId="ae55080d-17f4-48de-9309-0024c0e8fdbf" providerId="ADAL" clId="{794C632D-D3BD-C142-B93F-C90E6BDD7C20}" dt="2022-05-26T18:32:06.214" v="16" actId="478"/>
-        <pc:sldMkLst>
-          <pc:docMk/>
-          <pc:sldMk cId="2115249166" sldId="263"/>
-        </pc:sldMkLst>
-      </pc:sldChg>
-      <pc:sldChg chg="modSp">
-        <pc:chgData name="Larisa Morales Soto" userId="ae55080d-17f4-48de-9309-0024c0e8fdbf" providerId="ADAL" clId="{794C632D-D3BD-C142-B93F-C90E6BDD7C20}" dt="2022-05-26T18:32:00.009" v="14"/>
-        <pc:sldMkLst>
-          <pc:docMk/>
-          <pc:sldMk cId="3891667287" sldId="277"/>
-        </pc:sldMkLst>
-      </pc:sldChg>
-      <pc:sldChg chg="modSp">
-        <pc:chgData name="Larisa Morales Soto" userId="ae55080d-17f4-48de-9309-0024c0e8fdbf" providerId="ADAL" clId="{794C632D-D3BD-C142-B93F-C90E6BDD7C20}" dt="2022-05-26T18:32:00.009" v="14"/>
-        <pc:sldMkLst>
-          <pc:docMk/>
-          <pc:sldMk cId="2389275097" sldId="316"/>
-        </pc:sldMkLst>
-      </pc:sldChg>
-      <pc:sldChg chg="modSp">
-        <pc:chgData name="Larisa Morales Soto" userId="ae55080d-17f4-48de-9309-0024c0e8fdbf" providerId="ADAL" clId="{794C632D-D3BD-C142-B93F-C90E6BDD7C20}" dt="2022-05-26T18:32:00.009" v="14"/>
-        <pc:sldMkLst>
-          <pc:docMk/>
-          <pc:sldMk cId="3390364454" sldId="317"/>
-        </pc:sldMkLst>
-      </pc:sldChg>
-      <pc:sldMasterChg chg="modSp modSldLayout">
-        <pc:chgData name="Larisa Morales Soto" userId="ae55080d-17f4-48de-9309-0024c0e8fdbf" providerId="ADAL" clId="{794C632D-D3BD-C142-B93F-C90E6BDD7C20}" dt="2022-05-26T18:32:00.009" v="14"/>
-        <pc:sldMasterMkLst>
-          <pc:docMk/>
-          <pc:sldMasterMk cId="1449374226" sldId="2147483660"/>
-        </pc:sldMasterMkLst>
-        <pc:sldLayoutChg chg="modSp">
-          <pc:chgData name="Larisa Morales Soto" userId="ae55080d-17f4-48de-9309-0024c0e8fdbf" providerId="ADAL" clId="{794C632D-D3BD-C142-B93F-C90E6BDD7C20}" dt="2022-05-26T18:32:00.009" v="14"/>
-          <pc:sldLayoutMkLst>
-            <pc:docMk/>
-            <pc:sldMasterMk cId="1449374226" sldId="2147483660"/>
-            <pc:sldLayoutMk cId="3264083727" sldId="2147483661"/>
-          </pc:sldLayoutMkLst>
-        </pc:sldLayoutChg>
-        <pc:sldLayoutChg chg="modSp">
-          <pc:chgData name="Larisa Morales Soto" userId="ae55080d-17f4-48de-9309-0024c0e8fdbf" providerId="ADAL" clId="{794C632D-D3BD-C142-B93F-C90E6BDD7C20}" dt="2022-05-26T18:32:00.009" v="14"/>
-          <pc:sldLayoutMkLst>
-            <pc:docMk/>
-            <pc:sldMasterMk cId="1449374226" sldId="2147483660"/>
-            <pc:sldLayoutMk cId="1311720174" sldId="2147483663"/>
-          </pc:sldLayoutMkLst>
-        </pc:sldLayoutChg>
-        <pc:sldLayoutChg chg="modSp">
-          <pc:chgData name="Larisa Morales Soto" userId="ae55080d-17f4-48de-9309-0024c0e8fdbf" providerId="ADAL" clId="{794C632D-D3BD-C142-B93F-C90E6BDD7C20}" dt="2022-05-26T18:32:00.009" v="14"/>
-          <pc:sldLayoutMkLst>
-            <pc:docMk/>
-            <pc:sldMasterMk cId="1449374226" sldId="2147483660"/>
-            <pc:sldLayoutMk cId="1884908084" sldId="2147483664"/>
-          </pc:sldLayoutMkLst>
-        </pc:sldLayoutChg>
-        <pc:sldLayoutChg chg="modSp">
-          <pc:chgData name="Larisa Morales Soto" userId="ae55080d-17f4-48de-9309-0024c0e8fdbf" providerId="ADAL" clId="{794C632D-D3BD-C142-B93F-C90E6BDD7C20}" dt="2022-05-26T18:32:00.009" v="14"/>
-          <pc:sldLayoutMkLst>
-            <pc:docMk/>
-            <pc:sldMasterMk cId="1449374226" sldId="2147483660"/>
-            <pc:sldLayoutMk cId="2749933113" sldId="2147483669"/>
-          </pc:sldLayoutMkLst>
-        </pc:sldLayoutChg>
-        <pc:sldLayoutChg chg="modSp">
-          <pc:chgData name="Larisa Morales Soto" userId="ae55080d-17f4-48de-9309-0024c0e8fdbf" providerId="ADAL" clId="{794C632D-D3BD-C142-B93F-C90E6BDD7C20}" dt="2022-05-26T18:32:00.009" v="14"/>
-          <pc:sldLayoutMkLst>
-            <pc:docMk/>
-            <pc:sldMasterMk cId="1449374226" sldId="2147483660"/>
-            <pc:sldLayoutMk cId="322694191" sldId="2147483670"/>
-          </pc:sldLayoutMkLst>
-        </pc:sldLayoutChg>
-        <pc:sldLayoutChg chg="modSp">
-          <pc:chgData name="Larisa Morales Soto" userId="ae55080d-17f4-48de-9309-0024c0e8fdbf" providerId="ADAL" clId="{794C632D-D3BD-C142-B93F-C90E6BDD7C20}" dt="2022-05-26T18:32:00.009" v="14"/>
-          <pc:sldLayoutMkLst>
-            <pc:docMk/>
-            <pc:sldMasterMk cId="1449374226" sldId="2147483660"/>
-            <pc:sldLayoutMk cId="3350706779" sldId="2147483671"/>
-          </pc:sldLayoutMkLst>
-        </pc:sldLayoutChg>
-      </pc:sldMasterChg>
-      <pc:sldMasterChg chg="addSp modSp modSldLayout">
-        <pc:chgData name="Larisa Morales Soto" userId="ae55080d-17f4-48de-9309-0024c0e8fdbf" providerId="ADAL" clId="{794C632D-D3BD-C142-B93F-C90E6BDD7C20}" dt="2022-05-26T18:32:00.009" v="14"/>
-        <pc:sldMasterMkLst>
-          <pc:docMk/>
-          <pc:sldMasterMk cId="2429453867" sldId="2147483672"/>
-        </pc:sldMasterMkLst>
-        <pc:sldLayoutChg chg="modSp">
-          <pc:chgData name="Larisa Morales Soto" userId="ae55080d-17f4-48de-9309-0024c0e8fdbf" providerId="ADAL" clId="{794C632D-D3BD-C142-B93F-C90E6BDD7C20}" dt="2022-05-26T18:31:59.724" v="12"/>
-          <pc:sldLayoutMkLst>
-            <pc:docMk/>
-            <pc:sldMasterMk cId="1449374226" sldId="2147483660"/>
-            <pc:sldLayoutMk cId="322694191" sldId="2147483670"/>
-          </pc:sldLayoutMkLst>
-        </pc:sldLayoutChg>
-        <pc:sldLayoutChg chg="modSp">
-          <pc:chgData name="Larisa Morales Soto" userId="ae55080d-17f4-48de-9309-0024c0e8fdbf" providerId="ADAL" clId="{794C632D-D3BD-C142-B93F-C90E6BDD7C20}" dt="2022-05-26T18:31:59.724" v="12"/>
-          <pc:sldLayoutMkLst>
-            <pc:docMk/>
-            <pc:sldMasterMk cId="2429453867" sldId="2147483672"/>
-            <pc:sldLayoutMk cId="1223760123" sldId="2147483673"/>
-          </pc:sldLayoutMkLst>
-        </pc:sldLayoutChg>
-        <pc:sldLayoutChg chg="modSp">
-          <pc:chgData name="Larisa Morales Soto" userId="ae55080d-17f4-48de-9309-0024c0e8fdbf" providerId="ADAL" clId="{794C632D-D3BD-C142-B93F-C90E6BDD7C20}" dt="2022-05-26T18:31:59.724" v="12"/>
-          <pc:sldLayoutMkLst>
-            <pc:docMk/>
-            <pc:sldMasterMk cId="2429453867" sldId="2147483672"/>
-            <pc:sldLayoutMk cId="194222866" sldId="2147483675"/>
-          </pc:sldLayoutMkLst>
-        </pc:sldLayoutChg>
-        <pc:sldLayoutChg chg="modSp">
-          <pc:chgData name="Larisa Morales Soto" userId="ae55080d-17f4-48de-9309-0024c0e8fdbf" providerId="ADAL" clId="{794C632D-D3BD-C142-B93F-C90E6BDD7C20}" dt="2022-05-26T18:31:59.724" v="12"/>
-          <pc:sldLayoutMkLst>
-            <pc:docMk/>
-            <pc:sldMasterMk cId="2429453867" sldId="2147483672"/>
-            <pc:sldLayoutMk cId="69049621" sldId="2147483676"/>
-          </pc:sldLayoutMkLst>
-        </pc:sldLayoutChg>
-        <pc:sldLayoutChg chg="modSp">
-          <pc:chgData name="Larisa Morales Soto" userId="ae55080d-17f4-48de-9309-0024c0e8fdbf" providerId="ADAL" clId="{794C632D-D3BD-C142-B93F-C90E6BDD7C20}" dt="2022-05-26T18:31:59.724" v="12"/>
-          <pc:sldLayoutMkLst>
-            <pc:docMk/>
-            <pc:sldMasterMk cId="2429453867" sldId="2147483672"/>
-            <pc:sldLayoutMk cId="1887183444" sldId="2147483677"/>
-          </pc:sldLayoutMkLst>
-        </pc:sldLayoutChg>
-        <pc:sldLayoutChg chg="modSp">
-          <pc:chgData name="Larisa Morales Soto" userId="ae55080d-17f4-48de-9309-0024c0e8fdbf" providerId="ADAL" clId="{794C632D-D3BD-C142-B93F-C90E6BDD7C20}" dt="2022-05-26T18:31:59.724" v="12"/>
-          <pc:sldLayoutMkLst>
-            <pc:docMk/>
-            <pc:sldMasterMk cId="2429453867" sldId="2147483672"/>
-            <pc:sldLayoutMk cId="3722513088" sldId="2147483680"/>
-          </pc:sldLayoutMkLst>
-        </pc:sldLayoutChg>
-        <pc:sldLayoutChg chg="modSp">
-          <pc:chgData name="Larisa Morales Soto" userId="ae55080d-17f4-48de-9309-0024c0e8fdbf" providerId="ADAL" clId="{794C632D-D3BD-C142-B93F-C90E6BDD7C20}" dt="2022-05-26T18:31:59.724" v="12"/>
-          <pc:sldLayoutMkLst>
-            <pc:docMk/>
-            <pc:sldMasterMk cId="2429453867" sldId="2147483672"/>
-            <pc:sldLayoutMk cId="2791925798" sldId="2147483681"/>
-          </pc:sldLayoutMkLst>
-        </pc:sldLayoutChg>
-        <pc:sldLayoutChg chg="modSp">
-          <pc:chgData name="Larisa Morales Soto" userId="ae55080d-17f4-48de-9309-0024c0e8fdbf" providerId="ADAL" clId="{794C632D-D3BD-C142-B93F-C90E6BDD7C20}" dt="2022-05-26T18:31:59.724" v="12"/>
-          <pc:sldLayoutMkLst>
-            <pc:docMk/>
-            <pc:sldMasterMk cId="2429453867" sldId="2147483672"/>
-            <pc:sldLayoutMk cId="1738391065" sldId="2147483683"/>
-          </pc:sldLayoutMkLst>
-        </pc:sldLayoutChg>
-        <pc:sldLayoutChg chg="modSp">
-          <pc:chgData name="Larisa Morales Soto" userId="ae55080d-17f4-48de-9309-0024c0e8fdbf" providerId="ADAL" clId="{794C632D-D3BD-C142-B93F-C90E6BDD7C20}" dt="2022-05-26T18:31:59.724" v="12"/>
-          <pc:sldLayoutMkLst>
-            <pc:docMk/>
-            <pc:sldMasterMk cId="2429453867" sldId="2147483672"/>
-            <pc:sldLayoutMk cId="3329746215" sldId="2147483684"/>
-          </pc:sldLayoutMkLst>
-        </pc:sldLayoutChg>
-        <pc:sldLayoutChg chg="modSp mod">
-          <pc:chgData name="Larisa Morales Soto" userId="ae55080d-17f4-48de-9309-0024c0e8fdbf" providerId="ADAL" clId="{794C632D-D3BD-C142-B93F-C90E6BDD7C20}" dt="2022-05-26T18:32:00.009" v="14"/>
-          <pc:sldLayoutMkLst>
-            <pc:docMk/>
-            <pc:sldMasterMk cId="2429453867" sldId="2147483672"/>
-            <pc:sldLayoutMk cId="3920586521" sldId="2147483685"/>
-          </pc:sldLayoutMkLst>
-        </pc:sldLayoutChg>
-      </pc:sldMasterChg>
-      <pc:sldMasterChg chg="addSp modSp modSldLayout">
-        <pc:chgData name="Larisa Morales Soto" userId="ae55080d-17f4-48de-9309-0024c0e8fdbf" providerId="ADAL" clId="{794C632D-D3BD-C142-B93F-C90E6BDD7C20}" dt="2022-05-26T18:31:59.724" v="12"/>
-        <pc:sldMasterMkLst>
-          <pc:docMk/>
-          <pc:sldMasterMk cId="1084967830" sldId="2147483686"/>
-        </pc:sldMasterMkLst>
-        <pc:sldLayoutChg chg="modSp">
-          <pc:chgData name="Larisa Morales Soto" userId="ae55080d-17f4-48de-9309-0024c0e8fdbf" providerId="ADAL" clId="{794C632D-D3BD-C142-B93F-C90E6BDD7C20}" dt="2022-05-26T18:31:59.450" v="10"/>
-          <pc:sldLayoutMkLst>
-            <pc:docMk/>
-            <pc:sldMasterMk cId="1449374226" sldId="2147483660"/>
-            <pc:sldLayoutMk cId="322694191" sldId="2147483670"/>
-          </pc:sldLayoutMkLst>
-        </pc:sldLayoutChg>
-        <pc:sldLayoutChg chg="modSp">
-          <pc:chgData name="Larisa Morales Soto" userId="ae55080d-17f4-48de-9309-0024c0e8fdbf" providerId="ADAL" clId="{794C632D-D3BD-C142-B93F-C90E6BDD7C20}" dt="2022-05-26T18:31:59.450" v="10"/>
-          <pc:sldLayoutMkLst>
-            <pc:docMk/>
-            <pc:sldMasterMk cId="1084967830" sldId="2147483686"/>
-            <pc:sldLayoutMk cId="1616251476" sldId="2147483687"/>
-          </pc:sldLayoutMkLst>
-        </pc:sldLayoutChg>
-        <pc:sldLayoutChg chg="modSp">
-          <pc:chgData name="Larisa Morales Soto" userId="ae55080d-17f4-48de-9309-0024c0e8fdbf" providerId="ADAL" clId="{794C632D-D3BD-C142-B93F-C90E6BDD7C20}" dt="2022-05-26T18:31:59.450" v="10"/>
-          <pc:sldLayoutMkLst>
-            <pc:docMk/>
-            <pc:sldMasterMk cId="1084967830" sldId="2147483686"/>
-            <pc:sldLayoutMk cId="3111707705" sldId="2147483689"/>
-          </pc:sldLayoutMkLst>
-        </pc:sldLayoutChg>
-        <pc:sldLayoutChg chg="modSp">
-          <pc:chgData name="Larisa Morales Soto" userId="ae55080d-17f4-48de-9309-0024c0e8fdbf" providerId="ADAL" clId="{794C632D-D3BD-C142-B93F-C90E6BDD7C20}" dt="2022-05-26T18:31:59.450" v="10"/>
-          <pc:sldLayoutMkLst>
-            <pc:docMk/>
-            <pc:sldMasterMk cId="1084967830" sldId="2147483686"/>
-            <pc:sldLayoutMk cId="1523099180" sldId="2147483690"/>
-          </pc:sldLayoutMkLst>
-        </pc:sldLayoutChg>
-        <pc:sldLayoutChg chg="modSp">
-          <pc:chgData name="Larisa Morales Soto" userId="ae55080d-17f4-48de-9309-0024c0e8fdbf" providerId="ADAL" clId="{794C632D-D3BD-C142-B93F-C90E6BDD7C20}" dt="2022-05-26T18:31:59.450" v="10"/>
-          <pc:sldLayoutMkLst>
-            <pc:docMk/>
-            <pc:sldMasterMk cId="1084967830" sldId="2147483686"/>
-            <pc:sldLayoutMk cId="3265358256" sldId="2147483691"/>
-          </pc:sldLayoutMkLst>
-        </pc:sldLayoutChg>
-        <pc:sldLayoutChg chg="modSp">
-          <pc:chgData name="Larisa Morales Soto" userId="ae55080d-17f4-48de-9309-0024c0e8fdbf" providerId="ADAL" clId="{794C632D-D3BD-C142-B93F-C90E6BDD7C20}" dt="2022-05-26T18:31:59.450" v="10"/>
-          <pc:sldLayoutMkLst>
-            <pc:docMk/>
-            <pc:sldMasterMk cId="1084967830" sldId="2147483686"/>
-            <pc:sldLayoutMk cId="1530771108" sldId="2147483694"/>
-          </pc:sldLayoutMkLst>
-        </pc:sldLayoutChg>
-        <pc:sldLayoutChg chg="modSp">
-          <pc:chgData name="Larisa Morales Soto" userId="ae55080d-17f4-48de-9309-0024c0e8fdbf" providerId="ADAL" clId="{794C632D-D3BD-C142-B93F-C90E6BDD7C20}" dt="2022-05-26T18:31:59.450" v="10"/>
-          <pc:sldLayoutMkLst>
-            <pc:docMk/>
-            <pc:sldMasterMk cId="1084967830" sldId="2147483686"/>
-            <pc:sldLayoutMk cId="933287088" sldId="2147483695"/>
-          </pc:sldLayoutMkLst>
-        </pc:sldLayoutChg>
-        <pc:sldLayoutChg chg="modSp">
-          <pc:chgData name="Larisa Morales Soto" userId="ae55080d-17f4-48de-9309-0024c0e8fdbf" providerId="ADAL" clId="{794C632D-D3BD-C142-B93F-C90E6BDD7C20}" dt="2022-05-26T18:31:59.450" v="10"/>
-          <pc:sldLayoutMkLst>
-            <pc:docMk/>
-            <pc:sldMasterMk cId="1084967830" sldId="2147483686"/>
-            <pc:sldLayoutMk cId="4092914174" sldId="2147483697"/>
-          </pc:sldLayoutMkLst>
-        </pc:sldLayoutChg>
-        <pc:sldLayoutChg chg="modSp">
-          <pc:chgData name="Larisa Morales Soto" userId="ae55080d-17f4-48de-9309-0024c0e8fdbf" providerId="ADAL" clId="{794C632D-D3BD-C142-B93F-C90E6BDD7C20}" dt="2022-05-26T18:31:59.450" v="10"/>
-          <pc:sldLayoutMkLst>
-            <pc:docMk/>
-            <pc:sldMasterMk cId="1084967830" sldId="2147483686"/>
-            <pc:sldLayoutMk cId="3507166476" sldId="2147483698"/>
-          </pc:sldLayoutMkLst>
-        </pc:sldLayoutChg>
-        <pc:sldLayoutChg chg="modSp mod">
-          <pc:chgData name="Larisa Morales Soto" userId="ae55080d-17f4-48de-9309-0024c0e8fdbf" providerId="ADAL" clId="{794C632D-D3BD-C142-B93F-C90E6BDD7C20}" dt="2022-05-26T18:31:59.724" v="12"/>
-          <pc:sldLayoutMkLst>
-            <pc:docMk/>
-            <pc:sldMasterMk cId="1084967830" sldId="2147483686"/>
-            <pc:sldLayoutMk cId="3633522739" sldId="2147483699"/>
-          </pc:sldLayoutMkLst>
-        </pc:sldLayoutChg>
-      </pc:sldMasterChg>
-      <pc:sldMasterChg chg="addSp modSp modSldLayout">
-        <pc:chgData name="Larisa Morales Soto" userId="ae55080d-17f4-48de-9309-0024c0e8fdbf" providerId="ADAL" clId="{794C632D-D3BD-C142-B93F-C90E6BDD7C20}" dt="2022-05-26T18:31:59.197" v="9"/>
-        <pc:sldMasterMkLst>
-          <pc:docMk/>
-          <pc:sldMasterMk cId="758119265" sldId="2147483700"/>
-        </pc:sldMasterMkLst>
-        <pc:sldLayoutChg chg="modSp">
-          <pc:chgData name="Larisa Morales Soto" userId="ae55080d-17f4-48de-9309-0024c0e8fdbf" providerId="ADAL" clId="{794C632D-D3BD-C142-B93F-C90E6BDD7C20}" dt="2022-05-26T18:31:59.197" v="9"/>
-          <pc:sldLayoutMkLst>
-            <pc:docMk/>
-            <pc:sldMasterMk cId="1449374226" sldId="2147483660"/>
-            <pc:sldLayoutMk cId="322694191" sldId="2147483670"/>
-          </pc:sldLayoutMkLst>
-        </pc:sldLayoutChg>
-        <pc:sldLayoutChg chg="modSp">
-          <pc:chgData name="Larisa Morales Soto" userId="ae55080d-17f4-48de-9309-0024c0e8fdbf" providerId="ADAL" clId="{794C632D-D3BD-C142-B93F-C90E6BDD7C20}" dt="2022-05-26T18:31:59.197" v="9"/>
-          <pc:sldLayoutMkLst>
-            <pc:docMk/>
-            <pc:sldMasterMk cId="758119265" sldId="2147483700"/>
-            <pc:sldLayoutMk cId="1204291474" sldId="2147483701"/>
-          </pc:sldLayoutMkLst>
-        </pc:sldLayoutChg>
-        <pc:sldLayoutChg chg="modSp">
-          <pc:chgData name="Larisa Morales Soto" userId="ae55080d-17f4-48de-9309-0024c0e8fdbf" providerId="ADAL" clId="{794C632D-D3BD-C142-B93F-C90E6BDD7C20}" dt="2022-05-26T18:31:59.197" v="9"/>
-          <pc:sldLayoutMkLst>
-            <pc:docMk/>
-            <pc:sldMasterMk cId="758119265" sldId="2147483700"/>
-            <pc:sldLayoutMk cId="1018720976" sldId="2147483703"/>
-          </pc:sldLayoutMkLst>
-        </pc:sldLayoutChg>
-        <pc:sldLayoutChg chg="modSp">
-          <pc:chgData name="Larisa Morales Soto" userId="ae55080d-17f4-48de-9309-0024c0e8fdbf" providerId="ADAL" clId="{794C632D-D3BD-C142-B93F-C90E6BDD7C20}" dt="2022-05-26T18:31:59.197" v="9"/>
-          <pc:sldLayoutMkLst>
-            <pc:docMk/>
-            <pc:sldMasterMk cId="758119265" sldId="2147483700"/>
-            <pc:sldLayoutMk cId="1702188569" sldId="2147483704"/>
-          </pc:sldLayoutMkLst>
-        </pc:sldLayoutChg>
-        <pc:sldLayoutChg chg="modSp">
-          <pc:chgData name="Larisa Morales Soto" userId="ae55080d-17f4-48de-9309-0024c0e8fdbf" providerId="ADAL" clId="{794C632D-D3BD-C142-B93F-C90E6BDD7C20}" dt="2022-05-26T18:31:59.197" v="9"/>
-          <pc:sldLayoutMkLst>
-            <pc:docMk/>
-            <pc:sldMasterMk cId="758119265" sldId="2147483700"/>
-            <pc:sldLayoutMk cId="2284658209" sldId="2147483705"/>
-          </pc:sldLayoutMkLst>
-        </pc:sldLayoutChg>
-        <pc:sldLayoutChg chg="modSp">
-          <pc:chgData name="Larisa Morales Soto" userId="ae55080d-17f4-48de-9309-0024c0e8fdbf" providerId="ADAL" clId="{794C632D-D3BD-C142-B93F-C90E6BDD7C20}" dt="2022-05-26T18:31:59.197" v="9"/>
-          <pc:sldLayoutMkLst>
-            <pc:docMk/>
-            <pc:sldMasterMk cId="758119265" sldId="2147483700"/>
-            <pc:sldLayoutMk cId="1115046667" sldId="2147483708"/>
-          </pc:sldLayoutMkLst>
-        </pc:sldLayoutChg>
-        <pc:sldLayoutChg chg="modSp">
-          <pc:chgData name="Larisa Morales Soto" userId="ae55080d-17f4-48de-9309-0024c0e8fdbf" providerId="ADAL" clId="{794C632D-D3BD-C142-B93F-C90E6BDD7C20}" dt="2022-05-26T18:31:59.197" v="9"/>
-          <pc:sldLayoutMkLst>
-            <pc:docMk/>
-            <pc:sldMasterMk cId="758119265" sldId="2147483700"/>
-            <pc:sldLayoutMk cId="254514637" sldId="2147483709"/>
-          </pc:sldLayoutMkLst>
-        </pc:sldLayoutChg>
-        <pc:sldLayoutChg chg="modSp">
-          <pc:chgData name="Larisa Morales Soto" userId="ae55080d-17f4-48de-9309-0024c0e8fdbf" providerId="ADAL" clId="{794C632D-D3BD-C142-B93F-C90E6BDD7C20}" dt="2022-05-26T18:31:59.197" v="9"/>
-          <pc:sldLayoutMkLst>
-            <pc:docMk/>
-            <pc:sldMasterMk cId="758119265" sldId="2147483700"/>
-            <pc:sldLayoutMk cId="3446685975" sldId="2147483711"/>
-          </pc:sldLayoutMkLst>
-        </pc:sldLayoutChg>
-        <pc:sldLayoutChg chg="modSp">
-          <pc:chgData name="Larisa Morales Soto" userId="ae55080d-17f4-48de-9309-0024c0e8fdbf" providerId="ADAL" clId="{794C632D-D3BD-C142-B93F-C90E6BDD7C20}" dt="2022-05-26T18:31:59.197" v="9"/>
-          <pc:sldLayoutMkLst>
-            <pc:docMk/>
-            <pc:sldMasterMk cId="758119265" sldId="2147483700"/>
-            <pc:sldLayoutMk cId="1926200463" sldId="2147483712"/>
-          </pc:sldLayoutMkLst>
-        </pc:sldLayoutChg>
-        <pc:sldLayoutChg chg="modSp">
-          <pc:chgData name="Larisa Morales Soto" userId="ae55080d-17f4-48de-9309-0024c0e8fdbf" providerId="ADAL" clId="{794C632D-D3BD-C142-B93F-C90E6BDD7C20}" dt="2022-05-26T18:31:59.197" v="9"/>
-          <pc:sldLayoutMkLst>
-            <pc:docMk/>
-            <pc:sldMasterMk cId="758119265" sldId="2147483700"/>
-            <pc:sldLayoutMk cId="2147748066" sldId="2147483713"/>
-          </pc:sldLayoutMkLst>
-        </pc:sldLayoutChg>
-      </pc:sldMasterChg>
-      <pc:sldMasterChg chg="addSp">
-        <pc:chgData name="Larisa Morales Soto" userId="ae55080d-17f4-48de-9309-0024c0e8fdbf" providerId="ADAL" clId="{794C632D-D3BD-C142-B93F-C90E6BDD7C20}" dt="2022-05-26T18:31:52.959" v="6"/>
-        <pc:sldMasterMkLst>
-          <pc:docMk/>
-          <pc:sldMasterMk cId="142938108" sldId="2147483714"/>
-        </pc:sldMasterMkLst>
-      </pc:sldMasterChg>
-    </pc:docChg>
-  </pc:docChgLst>
-  <pc:docChgLst>
-    <pc:chgData name="Adrien Osakwe" userId="7a3e290c-eb83-484b-8e3d-d46ef2333477" providerId="ADAL" clId="{CF93B0C4-2B24-4D73-92D8-6EAA22D04A70}"/>
-    <pc:docChg chg="undo custSel modSld sldOrd modMainMaster modSection">
-      <pc:chgData name="Adrien Osakwe" userId="7a3e290c-eb83-484b-8e3d-d46ef2333477" providerId="ADAL" clId="{CF93B0C4-2B24-4D73-92D8-6EAA22D04A70}" dt="2025-02-13T17:04:14.050" v="315"/>
-      <pc:docMkLst>
-        <pc:docMk/>
-      </pc:docMkLst>
-      <pc:sldChg chg="modSp mod">
-        <pc:chgData name="Adrien Osakwe" userId="7a3e290c-eb83-484b-8e3d-d46ef2333477" providerId="ADAL" clId="{CF93B0C4-2B24-4D73-92D8-6EAA22D04A70}" dt="2025-02-08T22:46:18.183" v="152" actId="1076"/>
-        <pc:sldMkLst>
-          <pc:docMk/>
-          <pc:sldMk cId="3440444125" sldId="318"/>
-        </pc:sldMkLst>
-        <pc:spChg chg="mod">
-          <ac:chgData name="Adrien Osakwe" userId="7a3e290c-eb83-484b-8e3d-d46ef2333477" providerId="ADAL" clId="{CF93B0C4-2B24-4D73-92D8-6EAA22D04A70}" dt="2025-02-08T22:46:18.183" v="152" actId="1076"/>
-          <ac:spMkLst>
-            <pc:docMk/>
-            <pc:sldMk cId="3440444125" sldId="318"/>
-            <ac:spMk id="2" creationId="{D93C00C8-C4EE-C6CE-86E8-2F381261BEDB}"/>
-          </ac:spMkLst>
-        </pc:spChg>
-      </pc:sldChg>
-      <pc:sldChg chg="addSp delSp modSp mod">
-        <pc:chgData name="Adrien Osakwe" userId="7a3e290c-eb83-484b-8e3d-d46ef2333477" providerId="ADAL" clId="{CF93B0C4-2B24-4D73-92D8-6EAA22D04A70}" dt="2025-02-08T22:47:34.981" v="179" actId="1076"/>
-        <pc:sldMkLst>
-          <pc:docMk/>
-          <pc:sldMk cId="2289177498" sldId="319"/>
-        </pc:sldMkLst>
-        <pc:spChg chg="add mod">
-          <ac:chgData name="Adrien Osakwe" userId="7a3e290c-eb83-484b-8e3d-d46ef2333477" providerId="ADAL" clId="{CF93B0C4-2B24-4D73-92D8-6EAA22D04A70}" dt="2025-02-08T22:47:26.647" v="177" actId="20577"/>
-          <ac:spMkLst>
-            <pc:docMk/>
-            <pc:sldMk cId="2289177498" sldId="319"/>
-            <ac:spMk id="12" creationId="{503F5533-65A3-F6D5-477E-31357CB6661E}"/>
-          </ac:spMkLst>
-        </pc:spChg>
-        <pc:grpChg chg="mod">
-          <ac:chgData name="Adrien Osakwe" userId="7a3e290c-eb83-484b-8e3d-d46ef2333477" providerId="ADAL" clId="{CF93B0C4-2B24-4D73-92D8-6EAA22D04A70}" dt="2025-02-08T22:47:34.981" v="179" actId="1076"/>
-          <ac:grpSpMkLst>
-            <pc:docMk/>
-            <pc:sldMk cId="2289177498" sldId="319"/>
-            <ac:grpSpMk id="2" creationId="{34A2480D-8A2E-B875-B2D9-0DEB22E4D564}"/>
-          </ac:grpSpMkLst>
-        </pc:grpChg>
-        <pc:grpChg chg="mod">
-          <ac:chgData name="Adrien Osakwe" userId="7a3e290c-eb83-484b-8e3d-d46ef2333477" providerId="ADAL" clId="{CF93B0C4-2B24-4D73-92D8-6EAA22D04A70}" dt="2025-02-08T22:47:34.981" v="179" actId="1076"/>
-          <ac:grpSpMkLst>
-            <pc:docMk/>
-            <pc:sldMk cId="2289177498" sldId="319"/>
-            <ac:grpSpMk id="16" creationId="{7CC81CB7-1EDD-55C6-3B98-ACECA03BA4EC}"/>
-          </ac:grpSpMkLst>
-        </pc:grpChg>
-        <pc:grpChg chg="mod">
-          <ac:chgData name="Adrien Osakwe" userId="7a3e290c-eb83-484b-8e3d-d46ef2333477" providerId="ADAL" clId="{CF93B0C4-2B24-4D73-92D8-6EAA22D04A70}" dt="2025-02-08T22:47:34.981" v="179" actId="1076"/>
-          <ac:grpSpMkLst>
-            <pc:docMk/>
-            <pc:sldMk cId="2289177498" sldId="319"/>
-            <ac:grpSpMk id="17" creationId="{3EA19582-54E0-F957-436E-76D62CA944C4}"/>
-          </ac:grpSpMkLst>
-        </pc:grpChg>
-      </pc:sldChg>
-      <pc:sldChg chg="modSp mod">
-        <pc:chgData name="Adrien Osakwe" userId="7a3e290c-eb83-484b-8e3d-d46ef2333477" providerId="ADAL" clId="{CF93B0C4-2B24-4D73-92D8-6EAA22D04A70}" dt="2025-02-08T22:47:55.222" v="182" actId="1076"/>
-        <pc:sldMkLst>
-          <pc:docMk/>
-          <pc:sldMk cId="2200063611" sldId="320"/>
-        </pc:sldMkLst>
-        <pc:spChg chg="mod">
-          <ac:chgData name="Adrien Osakwe" userId="7a3e290c-eb83-484b-8e3d-d46ef2333477" providerId="ADAL" clId="{CF93B0C4-2B24-4D73-92D8-6EAA22D04A70}" dt="2025-02-08T22:46:54.584" v="154" actId="120"/>
-          <ac:spMkLst>
-            <pc:docMk/>
-            <pc:sldMk cId="2200063611" sldId="320"/>
-            <ac:spMk id="4" creationId="{A45C165F-BC2D-0A42-B582-A27AE4DBB9CF}"/>
-          </ac:spMkLst>
-        </pc:spChg>
-        <pc:grpChg chg="mod">
-          <ac:chgData name="Adrien Osakwe" userId="7a3e290c-eb83-484b-8e3d-d46ef2333477" providerId="ADAL" clId="{CF93B0C4-2B24-4D73-92D8-6EAA22D04A70}" dt="2025-02-08T22:47:55.222" v="182" actId="1076"/>
-          <ac:grpSpMkLst>
-            <pc:docMk/>
-            <pc:sldMk cId="2200063611" sldId="320"/>
-            <ac:grpSpMk id="8" creationId="{40870E13-8C46-3144-F075-ABDB40A04758}"/>
-          </ac:grpSpMkLst>
-        </pc:grpChg>
-        <pc:grpChg chg="mod">
-          <ac:chgData name="Adrien Osakwe" userId="7a3e290c-eb83-484b-8e3d-d46ef2333477" providerId="ADAL" clId="{CF93B0C4-2B24-4D73-92D8-6EAA22D04A70}" dt="2025-02-08T22:47:55.222" v="182" actId="1076"/>
-          <ac:grpSpMkLst>
-            <pc:docMk/>
-            <pc:sldMk cId="2200063611" sldId="320"/>
-            <ac:grpSpMk id="16" creationId="{7CC81CB7-1EDD-55C6-3B98-ACECA03BA4EC}"/>
-          </ac:grpSpMkLst>
-        </pc:grpChg>
-        <pc:grpChg chg="mod">
-          <ac:chgData name="Adrien Osakwe" userId="7a3e290c-eb83-484b-8e3d-d46ef2333477" providerId="ADAL" clId="{CF93B0C4-2B24-4D73-92D8-6EAA22D04A70}" dt="2025-02-08T22:47:55.222" v="182" actId="1076"/>
-          <ac:grpSpMkLst>
-            <pc:docMk/>
-            <pc:sldMk cId="2200063611" sldId="320"/>
-            <ac:grpSpMk id="17" creationId="{3EA19582-54E0-F957-436E-76D62CA944C4}"/>
-          </ac:grpSpMkLst>
-        </pc:grpChg>
-        <pc:grpChg chg="mod">
-          <ac:chgData name="Adrien Osakwe" userId="7a3e290c-eb83-484b-8e3d-d46ef2333477" providerId="ADAL" clId="{CF93B0C4-2B24-4D73-92D8-6EAA22D04A70}" dt="2025-02-08T22:47:55.222" v="182" actId="1076"/>
-          <ac:grpSpMkLst>
-            <pc:docMk/>
-            <pc:sldMk cId="2200063611" sldId="320"/>
-            <ac:grpSpMk id="22" creationId="{BC0FC20B-884C-A1CB-A592-6A70C0DCFE32}"/>
-          </ac:grpSpMkLst>
-        </pc:grpChg>
-      </pc:sldChg>
-      <pc:sldChg chg="modSp mod">
-        <pc:chgData name="Adrien Osakwe" userId="7a3e290c-eb83-484b-8e3d-d46ef2333477" providerId="ADAL" clId="{CF93B0C4-2B24-4D73-92D8-6EAA22D04A70}" dt="2025-02-08T22:44:12.900" v="59" actId="20577"/>
-        <pc:sldMkLst>
-          <pc:docMk/>
-          <pc:sldMk cId="1324269546" sldId="395"/>
-        </pc:sldMkLst>
-        <pc:spChg chg="mod">
-          <ac:chgData name="Adrien Osakwe" userId="7a3e290c-eb83-484b-8e3d-d46ef2333477" providerId="ADAL" clId="{CF93B0C4-2B24-4D73-92D8-6EAA22D04A70}" dt="2025-02-08T22:44:00.248" v="16" actId="1076"/>
-          <ac:spMkLst>
-            <pc:docMk/>
-            <pc:sldMk cId="1324269546" sldId="395"/>
-            <ac:spMk id="3" creationId="{8E0D0C58-4777-B836-81EE-F027A53CFFAF}"/>
-          </ac:spMkLst>
-        </pc:spChg>
-        <pc:spChg chg="mod">
-          <ac:chgData name="Adrien Osakwe" userId="7a3e290c-eb83-484b-8e3d-d46ef2333477" providerId="ADAL" clId="{CF93B0C4-2B24-4D73-92D8-6EAA22D04A70}" dt="2025-02-08T22:44:12.900" v="59" actId="20577"/>
-          <ac:spMkLst>
-            <pc:docMk/>
-            <pc:sldMk cId="1324269546" sldId="395"/>
-            <ac:spMk id="4" creationId="{8AE12D43-9137-DB7C-570B-E48AB2308897}"/>
-          </ac:spMkLst>
-        </pc:spChg>
-      </pc:sldChg>
-      <pc:sldChg chg="addSp delSp modSp mod">
-        <pc:chgData name="Adrien Osakwe" userId="7a3e290c-eb83-484b-8e3d-d46ef2333477" providerId="ADAL" clId="{CF93B0C4-2B24-4D73-92D8-6EAA22D04A70}" dt="2025-02-13T15:33:40.430" v="288" actId="1076"/>
-        <pc:sldMkLst>
-          <pc:docMk/>
-          <pc:sldMk cId="3301951615" sldId="396"/>
-        </pc:sldMkLst>
-        <pc:spChg chg="del mod">
-          <ac:chgData name="Adrien Osakwe" userId="7a3e290c-eb83-484b-8e3d-d46ef2333477" providerId="ADAL" clId="{CF93B0C4-2B24-4D73-92D8-6EAA22D04A70}" dt="2025-02-13T15:33:23.122" v="280" actId="21"/>
-          <ac:spMkLst>
-            <pc:docMk/>
-            <pc:sldMk cId="3301951615" sldId="396"/>
-            <ac:spMk id="2" creationId="{573637BB-7408-0828-6BB1-1D8D6339B867}"/>
-          </ac:spMkLst>
-        </pc:spChg>
-        <pc:spChg chg="add mod">
-          <ac:chgData name="Adrien Osakwe" userId="7a3e290c-eb83-484b-8e3d-d46ef2333477" providerId="ADAL" clId="{CF93B0C4-2B24-4D73-92D8-6EAA22D04A70}" dt="2025-02-13T15:33:30.909" v="285" actId="1036"/>
-          <ac:spMkLst>
-            <pc:docMk/>
-            <pc:sldMk cId="3301951615" sldId="396"/>
-            <ac:spMk id="6" creationId="{573637BB-7408-0828-6BB1-1D8D6339B867}"/>
-          </ac:spMkLst>
-        </pc:spChg>
-        <pc:spChg chg="mod">
-          <ac:chgData name="Adrien Osakwe" userId="7a3e290c-eb83-484b-8e3d-d46ef2333477" providerId="ADAL" clId="{CF93B0C4-2B24-4D73-92D8-6EAA22D04A70}" dt="2025-02-13T15:33:40.430" v="288" actId="1076"/>
-          <ac:spMkLst>
-            <pc:docMk/>
-            <pc:sldMk cId="3301951615" sldId="396"/>
-            <ac:spMk id="17" creationId="{16AE1CEB-BA97-61DD-841E-10CAC5F24A90}"/>
-          </ac:spMkLst>
-        </pc:spChg>
-        <pc:picChg chg="add mod">
-          <ac:chgData name="Adrien Osakwe" userId="7a3e290c-eb83-484b-8e3d-d46ef2333477" providerId="ADAL" clId="{CF93B0C4-2B24-4D73-92D8-6EAA22D04A70}" dt="2025-02-13T15:33:20.532" v="279" actId="1076"/>
-          <ac:picMkLst>
-            <pc:docMk/>
-            <pc:sldMk cId="3301951615" sldId="396"/>
-            <ac:picMk id="4" creationId="{7C19C895-4399-89B8-DCCC-8181165094DF}"/>
-          </ac:picMkLst>
-        </pc:picChg>
-        <pc:picChg chg="add del mod">
-          <ac:chgData name="Adrien Osakwe" userId="7a3e290c-eb83-484b-8e3d-d46ef2333477" providerId="ADAL" clId="{CF93B0C4-2B24-4D73-92D8-6EAA22D04A70}" dt="2025-02-13T15:33:17.300" v="277" actId="478"/>
-          <ac:picMkLst>
-            <pc:docMk/>
-            <pc:sldMk cId="3301951615" sldId="396"/>
-            <ac:picMk id="5" creationId="{F157E14F-2B7F-1757-0254-0D1D4434199D}"/>
-          </ac:picMkLst>
-        </pc:picChg>
-      </pc:sldChg>
-      <pc:sldChg chg="addSp delSp modSp mod">
-        <pc:chgData name="Adrien Osakwe" userId="7a3e290c-eb83-484b-8e3d-d46ef2333477" providerId="ADAL" clId="{CF93B0C4-2B24-4D73-92D8-6EAA22D04A70}" dt="2025-02-08T22:50:18.250" v="196" actId="1076"/>
-        <pc:sldMkLst>
-          <pc:docMk/>
-          <pc:sldMk cId="25426801" sldId="399"/>
-        </pc:sldMkLst>
-        <pc:picChg chg="add mod">
-          <ac:chgData name="Adrien Osakwe" userId="7a3e290c-eb83-484b-8e3d-d46ef2333477" providerId="ADAL" clId="{CF93B0C4-2B24-4D73-92D8-6EAA22D04A70}" dt="2025-02-08T22:50:18.250" v="196" actId="1076"/>
-          <ac:picMkLst>
-            <pc:docMk/>
-            <pc:sldMk cId="25426801" sldId="399"/>
-            <ac:picMk id="5" creationId="{E8D5DA77-8A91-8C31-6E6C-C97671E7D73F}"/>
-          </ac:picMkLst>
-        </pc:picChg>
-      </pc:sldChg>
-      <pc:sldChg chg="modSp mod">
-        <pc:chgData name="Adrien Osakwe" userId="7a3e290c-eb83-484b-8e3d-d46ef2333477" providerId="ADAL" clId="{CF93B0C4-2B24-4D73-92D8-6EAA22D04A70}" dt="2025-02-13T15:38:49.862" v="297" actId="1076"/>
-        <pc:sldMkLst>
-          <pc:docMk/>
-          <pc:sldMk cId="513973128" sldId="419"/>
-        </pc:sldMkLst>
-        <pc:picChg chg="mod">
-          <ac:chgData name="Adrien Osakwe" userId="7a3e290c-eb83-484b-8e3d-d46ef2333477" providerId="ADAL" clId="{CF93B0C4-2B24-4D73-92D8-6EAA22D04A70}" dt="2025-02-13T15:38:49.862" v="297" actId="1076"/>
-          <ac:picMkLst>
-            <pc:docMk/>
-            <pc:sldMk cId="513973128" sldId="419"/>
-            <ac:picMk id="6" creationId="{0AD5A4F3-E6B7-B0C3-A92B-857039AD24EF}"/>
-          </ac:picMkLst>
-        </pc:picChg>
-      </pc:sldChg>
-      <pc:sldChg chg="modSp mod">
-        <pc:chgData name="Adrien Osakwe" userId="7a3e290c-eb83-484b-8e3d-d46ef2333477" providerId="ADAL" clId="{CF93B0C4-2B24-4D73-92D8-6EAA22D04A70}" dt="2025-02-13T15:38:36.341" v="295" actId="1076"/>
-        <pc:sldMkLst>
-          <pc:docMk/>
-          <pc:sldMk cId="108575568" sldId="423"/>
-        </pc:sldMkLst>
-        <pc:picChg chg="mod">
-          <ac:chgData name="Adrien Osakwe" userId="7a3e290c-eb83-484b-8e3d-d46ef2333477" providerId="ADAL" clId="{CF93B0C4-2B24-4D73-92D8-6EAA22D04A70}" dt="2025-02-13T15:38:36.341" v="295" actId="1076"/>
-          <ac:picMkLst>
-            <pc:docMk/>
-            <pc:sldMk cId="108575568" sldId="423"/>
-            <ac:picMk id="7" creationId="{C1920284-4CB7-F127-9832-3A0D4E06581E}"/>
-          </ac:picMkLst>
-        </pc:picChg>
-        <pc:picChg chg="mod">
-          <ac:chgData name="Adrien Osakwe" userId="7a3e290c-eb83-484b-8e3d-d46ef2333477" providerId="ADAL" clId="{CF93B0C4-2B24-4D73-92D8-6EAA22D04A70}" dt="2025-02-13T15:38:34.786" v="294" actId="14100"/>
-          <ac:picMkLst>
-            <pc:docMk/>
-            <pc:sldMk cId="108575568" sldId="423"/>
-            <ac:picMk id="9" creationId="{111A5905-312C-42E6-58B5-01CA3BAC7402}"/>
-          </ac:picMkLst>
-        </pc:picChg>
-      </pc:sldChg>
-      <pc:sldChg chg="modSp mod">
-        <pc:chgData name="Adrien Osakwe" userId="7a3e290c-eb83-484b-8e3d-d46ef2333477" providerId="ADAL" clId="{CF93B0C4-2B24-4D73-92D8-6EAA22D04A70}" dt="2025-02-13T15:38:27.219" v="291" actId="1076"/>
-        <pc:sldMkLst>
-          <pc:docMk/>
-          <pc:sldMk cId="3223212124" sldId="426"/>
-        </pc:sldMkLst>
-        <pc:picChg chg="mod">
-          <ac:chgData name="Adrien Osakwe" userId="7a3e290c-eb83-484b-8e3d-d46ef2333477" providerId="ADAL" clId="{CF93B0C4-2B24-4D73-92D8-6EAA22D04A70}" dt="2025-02-13T15:38:27.219" v="291" actId="1076"/>
-          <ac:picMkLst>
-            <pc:docMk/>
-            <pc:sldMk cId="3223212124" sldId="426"/>
-            <ac:picMk id="5" creationId="{CCDD5D10-1374-47DC-8E92-79C7586523D2}"/>
-          </ac:picMkLst>
-        </pc:picChg>
-      </pc:sldChg>
-      <pc:sldChg chg="ord">
-        <pc:chgData name="Adrien Osakwe" userId="7a3e290c-eb83-484b-8e3d-d46ef2333477" providerId="ADAL" clId="{CF93B0C4-2B24-4D73-92D8-6EAA22D04A70}" dt="2025-02-13T17:04:14.050" v="315"/>
-        <pc:sldMkLst>
-          <pc:docMk/>
-          <pc:sldMk cId="3281809004" sldId="429"/>
-        </pc:sldMkLst>
-      </pc:sldChg>
-      <pc:sldChg chg="ord">
-        <pc:chgData name="Adrien Osakwe" userId="7a3e290c-eb83-484b-8e3d-d46ef2333477" providerId="ADAL" clId="{CF93B0C4-2B24-4D73-92D8-6EAA22D04A70}" dt="2025-02-09T03:58:47.341" v="262"/>
-        <pc:sldMkLst>
-          <pc:docMk/>
-          <pc:sldMk cId="2267835305" sldId="430"/>
-        </pc:sldMkLst>
-      </pc:sldChg>
-      <pc:sldChg chg="ord">
-        <pc:chgData name="Adrien Osakwe" userId="7a3e290c-eb83-484b-8e3d-d46ef2333477" providerId="ADAL" clId="{CF93B0C4-2B24-4D73-92D8-6EAA22D04A70}" dt="2025-02-09T03:58:47.341" v="262"/>
-        <pc:sldMkLst>
-          <pc:docMk/>
-          <pc:sldMk cId="2889724734" sldId="431"/>
-        </pc:sldMkLst>
-      </pc:sldChg>
-      <pc:sldChg chg="modSp mod ord">
-        <pc:chgData name="Adrien Osakwe" userId="7a3e290c-eb83-484b-8e3d-d46ef2333477" providerId="ADAL" clId="{CF93B0C4-2B24-4D73-92D8-6EAA22D04A70}" dt="2025-02-13T15:38:21.049" v="290" actId="14100"/>
-        <pc:sldMkLst>
-          <pc:docMk/>
-          <pc:sldMk cId="701040556" sldId="432"/>
-        </pc:sldMkLst>
-        <pc:graphicFrameChg chg="mod modGraphic">
-          <ac:chgData name="Adrien Osakwe" userId="7a3e290c-eb83-484b-8e3d-d46ef2333477" providerId="ADAL" clId="{CF93B0C4-2B24-4D73-92D8-6EAA22D04A70}" dt="2025-02-13T15:38:21.049" v="290" actId="14100"/>
-          <ac:graphicFrameMkLst>
-            <pc:docMk/>
-            <pc:sldMk cId="701040556" sldId="432"/>
-            <ac:graphicFrameMk id="6" creationId="{1CCCAAEC-0C0C-6803-FF0D-76478E24A0FD}"/>
-          </ac:graphicFrameMkLst>
-        </pc:graphicFrameChg>
-      </pc:sldChg>
-      <pc:sldChg chg="addSp delSp modSp mod">
-        <pc:chgData name="Adrien Osakwe" userId="7a3e290c-eb83-484b-8e3d-d46ef2333477" providerId="ADAL" clId="{CF93B0C4-2B24-4D73-92D8-6EAA22D04A70}" dt="2025-02-09T19:46:25.231" v="267" actId="207"/>
-        <pc:sldMkLst>
-          <pc:docMk/>
-          <pc:sldMk cId="2659381662" sldId="434"/>
-        </pc:sldMkLst>
-        <pc:picChg chg="add mod">
-          <ac:chgData name="Adrien Osakwe" userId="7a3e290c-eb83-484b-8e3d-d46ef2333477" providerId="ADAL" clId="{CF93B0C4-2B24-4D73-92D8-6EAA22D04A70}" dt="2025-02-09T19:46:25.231" v="267" actId="207"/>
-          <ac:picMkLst>
-            <pc:docMk/>
-            <pc:sldMk cId="2659381662" sldId="434"/>
-            <ac:picMk id="2" creationId="{79210FCD-0A78-2B0B-8F4F-746848DA1890}"/>
-          </ac:picMkLst>
-        </pc:picChg>
-      </pc:sldChg>
-      <pc:sldChg chg="modSp mod">
-        <pc:chgData name="Adrien Osakwe" userId="7a3e290c-eb83-484b-8e3d-d46ef2333477" providerId="ADAL" clId="{CF93B0C4-2B24-4D73-92D8-6EAA22D04A70}" dt="2025-02-09T19:46:15.442" v="264" actId="1076"/>
-        <pc:sldMkLst>
-          <pc:docMk/>
-          <pc:sldMk cId="97489599" sldId="436"/>
-        </pc:sldMkLst>
-        <pc:picChg chg="mod">
-          <ac:chgData name="Adrien Osakwe" userId="7a3e290c-eb83-484b-8e3d-d46ef2333477" providerId="ADAL" clId="{CF93B0C4-2B24-4D73-92D8-6EAA22D04A70}" dt="2025-02-09T19:46:15.442" v="264" actId="1076"/>
-          <ac:picMkLst>
-            <pc:docMk/>
-            <pc:sldMk cId="97489599" sldId="436"/>
-            <ac:picMk id="4" creationId="{70DE0736-483F-677A-8E95-94D086D3C63F}"/>
-          </ac:picMkLst>
-        </pc:picChg>
-      </pc:sldChg>
-      <pc:sldChg chg="addSp delSp modSp mod">
-        <pc:chgData name="Adrien Osakwe" userId="7a3e290c-eb83-484b-8e3d-d46ef2333477" providerId="ADAL" clId="{CF93B0C4-2B24-4D73-92D8-6EAA22D04A70}" dt="2025-02-09T19:46:45.468" v="273" actId="207"/>
-        <pc:sldMkLst>
-          <pc:docMk/>
-          <pc:sldMk cId="3380746435" sldId="437"/>
-        </pc:sldMkLst>
-        <pc:picChg chg="add mod">
-          <ac:chgData name="Adrien Osakwe" userId="7a3e290c-eb83-484b-8e3d-d46ef2333477" providerId="ADAL" clId="{CF93B0C4-2B24-4D73-92D8-6EAA22D04A70}" dt="2025-02-09T19:46:45.468" v="273" actId="207"/>
-          <ac:picMkLst>
-            <pc:docMk/>
-            <pc:sldMk cId="3380746435" sldId="437"/>
-            <ac:picMk id="2" creationId="{2E2F79D3-19E5-8341-6850-851EAB62359B}"/>
-          </ac:picMkLst>
-        </pc:picChg>
-      </pc:sldChg>
-      <pc:sldChg chg="addSp delSp modSp mod">
-        <pc:chgData name="Adrien Osakwe" userId="7a3e290c-eb83-484b-8e3d-d46ef2333477" providerId="ADAL" clId="{CF93B0C4-2B24-4D73-92D8-6EAA22D04A70}" dt="2025-02-09T19:46:31.975" v="270" actId="207"/>
-        <pc:sldMkLst>
-          <pc:docMk/>
-          <pc:sldMk cId="2459570573" sldId="439"/>
-        </pc:sldMkLst>
-        <pc:picChg chg="add mod">
-          <ac:chgData name="Adrien Osakwe" userId="7a3e290c-eb83-484b-8e3d-d46ef2333477" providerId="ADAL" clId="{CF93B0C4-2B24-4D73-92D8-6EAA22D04A70}" dt="2025-02-09T19:46:31.975" v="270" actId="207"/>
-          <ac:picMkLst>
-            <pc:docMk/>
-            <pc:sldMk cId="2459570573" sldId="439"/>
-            <ac:picMk id="2" creationId="{756070B3-9BB5-6FCC-5A1C-026EF222F00C}"/>
-          </ac:picMkLst>
-        </pc:picChg>
-      </pc:sldChg>
-      <pc:sldChg chg="modSp mod">
-        <pc:chgData name="Adrien Osakwe" userId="7a3e290c-eb83-484b-8e3d-d46ef2333477" providerId="ADAL" clId="{CF93B0C4-2B24-4D73-92D8-6EAA22D04A70}" dt="2025-02-13T15:39:20.380" v="309" actId="1035"/>
-        <pc:sldMkLst>
-          <pc:docMk/>
-          <pc:sldMk cId="450508802" sldId="451"/>
-        </pc:sldMkLst>
-        <pc:spChg chg="mod">
-          <ac:chgData name="Adrien Osakwe" userId="7a3e290c-eb83-484b-8e3d-d46ef2333477" providerId="ADAL" clId="{CF93B0C4-2B24-4D73-92D8-6EAA22D04A70}" dt="2025-02-13T15:39:20.380" v="309" actId="1035"/>
-          <ac:spMkLst>
-            <pc:docMk/>
-            <pc:sldMk cId="450508802" sldId="451"/>
-            <ac:spMk id="4" creationId="{E479E549-E694-F66E-D719-C01F55AE1000}"/>
-          </ac:spMkLst>
-        </pc:spChg>
-      </pc:sldChg>
-      <pc:sldChg chg="addSp delSp modSp mod">
-        <pc:chgData name="Adrien Osakwe" userId="7a3e290c-eb83-484b-8e3d-d46ef2333477" providerId="ADAL" clId="{CF93B0C4-2B24-4D73-92D8-6EAA22D04A70}" dt="2025-02-09T19:47:01.537" v="276" actId="20577"/>
-        <pc:sldMkLst>
-          <pc:docMk/>
-          <pc:sldMk cId="3241240956" sldId="458"/>
-        </pc:sldMkLst>
-        <pc:spChg chg="mod">
-          <ac:chgData name="Adrien Osakwe" userId="7a3e290c-eb83-484b-8e3d-d46ef2333477" providerId="ADAL" clId="{CF93B0C4-2B24-4D73-92D8-6EAA22D04A70}" dt="2025-02-09T19:47:01.537" v="276" actId="20577"/>
-          <ac:spMkLst>
-            <pc:docMk/>
-            <pc:sldMk cId="3241240956" sldId="458"/>
-            <ac:spMk id="2" creationId="{9153FADE-07F0-2C14-7F30-A360808CDA65}"/>
-          </ac:spMkLst>
-        </pc:spChg>
-        <pc:picChg chg="add mod">
-          <ac:chgData name="Adrien Osakwe" userId="7a3e290c-eb83-484b-8e3d-d46ef2333477" providerId="ADAL" clId="{CF93B0C4-2B24-4D73-92D8-6EAA22D04A70}" dt="2025-02-08T22:55:49.913" v="260" actId="1076"/>
-          <ac:picMkLst>
-            <pc:docMk/>
-            <pc:sldMk cId="3241240956" sldId="458"/>
-            <ac:picMk id="4" creationId="{FFD733B6-352A-B23F-E203-324034C168DC}"/>
-          </ac:picMkLst>
-        </pc:picChg>
-      </pc:sldChg>
-      <pc:sldChg chg="modSp mod">
-        <pc:chgData name="Adrien Osakwe" userId="7a3e290c-eb83-484b-8e3d-d46ef2333477" providerId="ADAL" clId="{CF93B0C4-2B24-4D73-92D8-6EAA22D04A70}" dt="2025-02-08T22:48:34.729" v="186" actId="1076"/>
-        <pc:sldMkLst>
-          <pc:docMk/>
-          <pc:sldMk cId="2048934135" sldId="462"/>
-        </pc:sldMkLst>
-        <pc:spChg chg="mod">
-          <ac:chgData name="Adrien Osakwe" userId="7a3e290c-eb83-484b-8e3d-d46ef2333477" providerId="ADAL" clId="{CF93B0C4-2B24-4D73-92D8-6EAA22D04A70}" dt="2025-02-08T22:48:34.729" v="186" actId="1076"/>
-          <ac:spMkLst>
-            <pc:docMk/>
-            <pc:sldMk cId="2048934135" sldId="462"/>
-            <ac:spMk id="6" creationId="{60FC3492-0525-B7D3-C7EC-0293C4436286}"/>
-          </ac:spMkLst>
-        </pc:spChg>
-        <pc:spChg chg="mod">
-          <ac:chgData name="Adrien Osakwe" userId="7a3e290c-eb83-484b-8e3d-d46ef2333477" providerId="ADAL" clId="{CF93B0C4-2B24-4D73-92D8-6EAA22D04A70}" dt="2025-02-08T22:48:34.729" v="186" actId="1076"/>
-          <ac:spMkLst>
-            <pc:docMk/>
-            <pc:sldMk cId="2048934135" sldId="462"/>
-            <ac:spMk id="7" creationId="{CED16953-8F90-3617-668F-897342721F2C}"/>
-          </ac:spMkLst>
-        </pc:spChg>
-        <pc:spChg chg="mod">
-          <ac:chgData name="Adrien Osakwe" userId="7a3e290c-eb83-484b-8e3d-d46ef2333477" providerId="ADAL" clId="{CF93B0C4-2B24-4D73-92D8-6EAA22D04A70}" dt="2025-02-08T22:48:34.729" v="186" actId="1076"/>
-          <ac:spMkLst>
-            <pc:docMk/>
-            <pc:sldMk cId="2048934135" sldId="462"/>
-            <ac:spMk id="8" creationId="{04D0206C-FDD4-0CA7-9EA2-A1AAB7C5A3BC}"/>
-          </ac:spMkLst>
-        </pc:spChg>
-        <pc:spChg chg="mod">
-          <ac:chgData name="Adrien Osakwe" userId="7a3e290c-eb83-484b-8e3d-d46ef2333477" providerId="ADAL" clId="{CF93B0C4-2B24-4D73-92D8-6EAA22D04A70}" dt="2025-02-08T22:48:34.729" v="186" actId="1076"/>
-          <ac:spMkLst>
-            <pc:docMk/>
-            <pc:sldMk cId="2048934135" sldId="462"/>
-            <ac:spMk id="9" creationId="{7B4EAB9C-DB99-E683-2A6F-F7ACCD59A1C2}"/>
-          </ac:spMkLst>
-        </pc:spChg>
-        <pc:spChg chg="mod">
-          <ac:chgData name="Adrien Osakwe" userId="7a3e290c-eb83-484b-8e3d-d46ef2333477" providerId="ADAL" clId="{CF93B0C4-2B24-4D73-92D8-6EAA22D04A70}" dt="2025-02-08T22:48:34.729" v="186" actId="1076"/>
-          <ac:spMkLst>
-            <pc:docMk/>
-            <pc:sldMk cId="2048934135" sldId="462"/>
-            <ac:spMk id="10" creationId="{F79D85A1-0A24-81BC-140C-33BCE757E4AA}"/>
-          </ac:spMkLst>
-        </pc:spChg>
-        <pc:spChg chg="mod">
-          <ac:chgData name="Adrien Osakwe" userId="7a3e290c-eb83-484b-8e3d-d46ef2333477" providerId="ADAL" clId="{CF93B0C4-2B24-4D73-92D8-6EAA22D04A70}" dt="2025-02-08T22:48:34.729" v="186" actId="1076"/>
-          <ac:spMkLst>
-            <pc:docMk/>
-            <pc:sldMk cId="2048934135" sldId="462"/>
-            <ac:spMk id="11" creationId="{91E19A34-D091-B75F-CB9E-A4A89A651F0E}"/>
-          </ac:spMkLst>
-        </pc:spChg>
-        <pc:spChg chg="mod">
-          <ac:chgData name="Adrien Osakwe" userId="7a3e290c-eb83-484b-8e3d-d46ef2333477" providerId="ADAL" clId="{CF93B0C4-2B24-4D73-92D8-6EAA22D04A70}" dt="2025-02-08T22:48:29.668" v="184" actId="1076"/>
-          <ac:spMkLst>
-            <pc:docMk/>
-            <pc:sldMk cId="2048934135" sldId="462"/>
-            <ac:spMk id="12" creationId="{B8A76522-419B-E808-8F28-60E5DAFF3BE1}"/>
-          </ac:spMkLst>
-        </pc:spChg>
-        <pc:spChg chg="mod">
-          <ac:chgData name="Adrien Osakwe" userId="7a3e290c-eb83-484b-8e3d-d46ef2333477" providerId="ADAL" clId="{CF93B0C4-2B24-4D73-92D8-6EAA22D04A70}" dt="2025-02-08T22:48:34.729" v="186" actId="1076"/>
-          <ac:spMkLst>
-            <pc:docMk/>
-            <pc:sldMk cId="2048934135" sldId="462"/>
-            <ac:spMk id="13" creationId="{5F1501B4-9A7B-6D2C-32AC-BCECF8F737E2}"/>
-          </ac:spMkLst>
-        </pc:spChg>
-        <pc:spChg chg="mod">
-          <ac:chgData name="Adrien Osakwe" userId="7a3e290c-eb83-484b-8e3d-d46ef2333477" providerId="ADAL" clId="{CF93B0C4-2B24-4D73-92D8-6EAA22D04A70}" dt="2025-02-08T22:48:29.668" v="184" actId="1076"/>
-          <ac:spMkLst>
-            <pc:docMk/>
-            <pc:sldMk cId="2048934135" sldId="462"/>
-            <ac:spMk id="14" creationId="{52AE3262-76B8-841B-67E7-5549F9CCFCA1}"/>
-          </ac:spMkLst>
-        </pc:spChg>
-        <pc:spChg chg="mod">
-          <ac:chgData name="Adrien Osakwe" userId="7a3e290c-eb83-484b-8e3d-d46ef2333477" providerId="ADAL" clId="{CF93B0C4-2B24-4D73-92D8-6EAA22D04A70}" dt="2025-02-08T22:48:34.729" v="186" actId="1076"/>
-          <ac:spMkLst>
-            <pc:docMk/>
-            <pc:sldMk cId="2048934135" sldId="462"/>
-            <ac:spMk id="15" creationId="{86D462B3-E1BA-CAAB-220B-E60B5EA2BC50}"/>
-          </ac:spMkLst>
-        </pc:spChg>
-        <pc:spChg chg="mod">
-          <ac:chgData name="Adrien Osakwe" userId="7a3e290c-eb83-484b-8e3d-d46ef2333477" providerId="ADAL" clId="{CF93B0C4-2B24-4D73-92D8-6EAA22D04A70}" dt="2025-02-08T22:48:34.729" v="186" actId="1076"/>
-          <ac:spMkLst>
-            <pc:docMk/>
-            <pc:sldMk cId="2048934135" sldId="462"/>
-            <ac:spMk id="16" creationId="{B9D35B4B-5236-0ED6-E316-7DB15B009090}"/>
-          </ac:spMkLst>
-        </pc:spChg>
-        <pc:spChg chg="mod">
-          <ac:chgData name="Adrien Osakwe" userId="7a3e290c-eb83-484b-8e3d-d46ef2333477" providerId="ADAL" clId="{CF93B0C4-2B24-4D73-92D8-6EAA22D04A70}" dt="2025-02-08T22:48:34.729" v="186" actId="1076"/>
-          <ac:spMkLst>
-            <pc:docMk/>
-            <pc:sldMk cId="2048934135" sldId="462"/>
-            <ac:spMk id="17" creationId="{DF21D9B7-27F4-C94D-A89A-C7288E67B1A2}"/>
-          </ac:spMkLst>
-        </pc:spChg>
-      </pc:sldChg>
-      <pc:sldMasterChg chg="addSp modSp modSldLayout">
-        <pc:chgData name="Adrien Osakwe" userId="7a3e290c-eb83-484b-8e3d-d46ef2333477" providerId="ADAL" clId="{CF93B0C4-2B24-4D73-92D8-6EAA22D04A70}" dt="2025-02-08T22:43:36.749" v="15" actId="14100"/>
-        <pc:sldMasterMkLst>
-          <pc:docMk/>
-          <pc:sldMasterMk cId="1449374226" sldId="2147483660"/>
-        </pc:sldMasterMkLst>
-        <pc:picChg chg="add mod">
-          <ac:chgData name="Adrien Osakwe" userId="7a3e290c-eb83-484b-8e3d-d46ef2333477" providerId="ADAL" clId="{CF93B0C4-2B24-4D73-92D8-6EAA22D04A70}" dt="2025-02-08T22:43:29.673" v="14"/>
-          <ac:picMkLst>
-            <pc:docMk/>
-            <pc:sldMasterMk cId="1449374226" sldId="2147483660"/>
-            <ac:picMk id="4" creationId="{324E6FFA-69DC-6C4F-0AA7-6FD47215DCBF}"/>
-          </ac:picMkLst>
-        </pc:picChg>
-        <pc:sldLayoutChg chg="addSp modSp mod">
-          <pc:chgData name="Adrien Osakwe" userId="7a3e290c-eb83-484b-8e3d-d46ef2333477" providerId="ADAL" clId="{CF93B0C4-2B24-4D73-92D8-6EAA22D04A70}" dt="2025-02-08T22:43:36.749" v="15" actId="14100"/>
-          <pc:sldLayoutMkLst>
-            <pc:docMk/>
-            <pc:sldMasterMk cId="1449374226" sldId="2147483660"/>
-            <pc:sldLayoutMk cId="3264083727" sldId="2147483661"/>
-          </pc:sldLayoutMkLst>
-          <pc:picChg chg="add mod">
-            <ac:chgData name="Adrien Osakwe" userId="7a3e290c-eb83-484b-8e3d-d46ef2333477" providerId="ADAL" clId="{CF93B0C4-2B24-4D73-92D8-6EAA22D04A70}" dt="2025-02-08T22:43:27.428" v="13"/>
-            <ac:picMkLst>
-              <pc:docMk/>
-              <pc:sldMasterMk cId="1449374226" sldId="2147483660"/>
-              <pc:sldLayoutMk cId="3264083727" sldId="2147483661"/>
-              <ac:picMk id="2" creationId="{32E7C634-3E4C-4136-B1E6-433EF28D65A3}"/>
-            </ac:picMkLst>
-          </pc:picChg>
-          <pc:picChg chg="mod">
-            <ac:chgData name="Adrien Osakwe" userId="7a3e290c-eb83-484b-8e3d-d46ef2333477" providerId="ADAL" clId="{CF93B0C4-2B24-4D73-92D8-6EAA22D04A70}" dt="2025-02-08T22:43:36.749" v="15" actId="14100"/>
-            <ac:picMkLst>
-              <pc:docMk/>
-              <pc:sldMasterMk cId="1449374226" sldId="2147483660"/>
-              <pc:sldLayoutMk cId="3264083727" sldId="2147483661"/>
-              <ac:picMk id="18" creationId="{E31CC8AE-4D70-174F-9C92-FBBC12BFB767}"/>
-            </ac:picMkLst>
-          </pc:picChg>
-        </pc:sldLayoutChg>
-        <pc:sldLayoutChg chg="addSp modSp">
-          <pc:chgData name="Adrien Osakwe" userId="7a3e290c-eb83-484b-8e3d-d46ef2333477" providerId="ADAL" clId="{CF93B0C4-2B24-4D73-92D8-6EAA22D04A70}" dt="2025-02-08T22:43:22.613" v="10"/>
-          <pc:sldLayoutMkLst>
-            <pc:docMk/>
-            <pc:sldMasterMk cId="1449374226" sldId="2147483660"/>
-            <pc:sldLayoutMk cId="910829051" sldId="2147483662"/>
-          </pc:sldLayoutMkLst>
-          <pc:picChg chg="add mod">
-            <ac:chgData name="Adrien Osakwe" userId="7a3e290c-eb83-484b-8e3d-d46ef2333477" providerId="ADAL" clId="{CF93B0C4-2B24-4D73-92D8-6EAA22D04A70}" dt="2025-02-08T22:43:22.613" v="10"/>
-            <ac:picMkLst>
-              <pc:docMk/>
-              <pc:sldMasterMk cId="1449374226" sldId="2147483660"/>
-              <pc:sldLayoutMk cId="910829051" sldId="2147483662"/>
-              <ac:picMk id="4" creationId="{25E8D640-4F2A-C273-93CD-ED27648644DC}"/>
-            </ac:picMkLst>
-          </pc:picChg>
-        </pc:sldLayoutChg>
-        <pc:sldLayoutChg chg="addSp modSp">
-          <pc:chgData name="Adrien Osakwe" userId="7a3e290c-eb83-484b-8e3d-d46ef2333477" providerId="ADAL" clId="{CF93B0C4-2B24-4D73-92D8-6EAA22D04A70}" dt="2025-02-08T22:43:21.249" v="9"/>
-          <pc:sldLayoutMkLst>
-            <pc:docMk/>
-            <pc:sldMasterMk cId="1449374226" sldId="2147483660"/>
-            <pc:sldLayoutMk cId="1311720174" sldId="2147483663"/>
-          </pc:sldLayoutMkLst>
-          <pc:picChg chg="add mod">
-            <ac:chgData name="Adrien Osakwe" userId="7a3e290c-eb83-484b-8e3d-d46ef2333477" providerId="ADAL" clId="{CF93B0C4-2B24-4D73-92D8-6EAA22D04A70}" dt="2025-02-08T22:43:21.249" v="9"/>
-            <ac:picMkLst>
-              <pc:docMk/>
-              <pc:sldMasterMk cId="1449374226" sldId="2147483660"/>
-              <pc:sldLayoutMk cId="1311720174" sldId="2147483663"/>
-              <ac:picMk id="4" creationId="{B8B56C79-C699-74BA-2B42-5F3300D7BF5F}"/>
-            </ac:picMkLst>
-          </pc:picChg>
-        </pc:sldLayoutChg>
-        <pc:sldLayoutChg chg="addSp modSp">
-          <pc:chgData name="Adrien Osakwe" userId="7a3e290c-eb83-484b-8e3d-d46ef2333477" providerId="ADAL" clId="{CF93B0C4-2B24-4D73-92D8-6EAA22D04A70}" dt="2025-02-08T22:43:18.116" v="8"/>
-          <pc:sldLayoutMkLst>
-            <pc:docMk/>
-            <pc:sldMasterMk cId="1449374226" sldId="2147483660"/>
-            <pc:sldLayoutMk cId="1884908084" sldId="2147483664"/>
-          </pc:sldLayoutMkLst>
-          <pc:picChg chg="add mod">
-            <ac:chgData name="Adrien Osakwe" userId="7a3e290c-eb83-484b-8e3d-d46ef2333477" providerId="ADAL" clId="{CF93B0C4-2B24-4D73-92D8-6EAA22D04A70}" dt="2025-02-08T22:43:18.116" v="8"/>
-            <ac:picMkLst>
-              <pc:docMk/>
-              <pc:sldMasterMk cId="1449374226" sldId="2147483660"/>
-              <pc:sldLayoutMk cId="1884908084" sldId="2147483664"/>
-              <ac:picMk id="5" creationId="{AA007C17-E97F-E07B-1C14-D41394EC80D6}"/>
-            </ac:picMkLst>
-          </pc:picChg>
-        </pc:sldLayoutChg>
-        <pc:sldLayoutChg chg="addSp modSp">
-          <pc:chgData name="Adrien Osakwe" userId="7a3e290c-eb83-484b-8e3d-d46ef2333477" providerId="ADAL" clId="{CF93B0C4-2B24-4D73-92D8-6EAA22D04A70}" dt="2025-02-08T22:43:14.844" v="7"/>
-          <pc:sldLayoutMkLst>
-            <pc:docMk/>
-            <pc:sldMasterMk cId="1449374226" sldId="2147483660"/>
-            <pc:sldLayoutMk cId="3433175628" sldId="2147483666"/>
-          </pc:sldLayoutMkLst>
-          <pc:picChg chg="add mod">
-            <ac:chgData name="Adrien Osakwe" userId="7a3e290c-eb83-484b-8e3d-d46ef2333477" providerId="ADAL" clId="{CF93B0C4-2B24-4D73-92D8-6EAA22D04A70}" dt="2025-02-08T22:43:14.844" v="7"/>
-            <ac:picMkLst>
-              <pc:docMk/>
-              <pc:sldMasterMk cId="1449374226" sldId="2147483660"/>
-              <pc:sldLayoutMk cId="3433175628" sldId="2147483666"/>
-              <ac:picMk id="3" creationId="{C69E5790-C23F-BC76-928A-1D960C6FA536}"/>
-            </ac:picMkLst>
-          </pc:picChg>
-        </pc:sldLayoutChg>
-        <pc:sldLayoutChg chg="addSp modSp mod">
-          <pc:chgData name="Adrien Osakwe" userId="7a3e290c-eb83-484b-8e3d-d46ef2333477" providerId="ADAL" clId="{CF93B0C4-2B24-4D73-92D8-6EAA22D04A70}" dt="2025-02-08T22:43:05.380" v="5" actId="1036"/>
-          <pc:sldLayoutMkLst>
-            <pc:docMk/>
-            <pc:sldMasterMk cId="1449374226" sldId="2147483660"/>
-            <pc:sldLayoutMk cId="2110274006" sldId="2147483667"/>
-          </pc:sldLayoutMkLst>
-          <pc:picChg chg="add mod">
-            <ac:chgData name="Adrien Osakwe" userId="7a3e290c-eb83-484b-8e3d-d46ef2333477" providerId="ADAL" clId="{CF93B0C4-2B24-4D73-92D8-6EAA22D04A70}" dt="2025-02-08T22:43:05.380" v="5" actId="1036"/>
-            <ac:picMkLst>
-              <pc:docMk/>
-              <pc:sldMasterMk cId="1449374226" sldId="2147483660"/>
-              <pc:sldLayoutMk cId="2110274006" sldId="2147483667"/>
-              <ac:picMk id="2" creationId="{D5EEAA7F-1EAC-3E0E-2A62-6D95ADE986AA}"/>
-            </ac:picMkLst>
-          </pc:picChg>
-        </pc:sldLayoutChg>
-        <pc:sldLayoutChg chg="addSp modSp">
-          <pc:chgData name="Adrien Osakwe" userId="7a3e290c-eb83-484b-8e3d-d46ef2333477" providerId="ADAL" clId="{CF93B0C4-2B24-4D73-92D8-6EAA22D04A70}" dt="2025-02-08T22:43:12.578" v="6"/>
-          <pc:sldLayoutMkLst>
-            <pc:docMk/>
-            <pc:sldMasterMk cId="1449374226" sldId="2147483660"/>
-            <pc:sldLayoutMk cId="2749933113" sldId="2147483669"/>
-          </pc:sldLayoutMkLst>
-          <pc:picChg chg="add mod">
-            <ac:chgData name="Adrien Osakwe" userId="7a3e290c-eb83-484b-8e3d-d46ef2333477" providerId="ADAL" clId="{CF93B0C4-2B24-4D73-92D8-6EAA22D04A70}" dt="2025-02-08T22:43:12.578" v="6"/>
-            <ac:picMkLst>
-              <pc:docMk/>
-              <pc:sldMasterMk cId="1449374226" sldId="2147483660"/>
-              <pc:sldLayoutMk cId="2749933113" sldId="2147483669"/>
-              <ac:picMk id="5" creationId="{4231E1BA-2B66-F075-D01A-13F01F7EF7AE}"/>
-            </ac:picMkLst>
-          </pc:picChg>
-        </pc:sldLayoutChg>
-        <pc:sldLayoutChg chg="addSp modSp">
-          <pc:chgData name="Adrien Osakwe" userId="7a3e290c-eb83-484b-8e3d-d46ef2333477" providerId="ADAL" clId="{CF93B0C4-2B24-4D73-92D8-6EAA22D04A70}" dt="2025-02-08T22:43:25.518" v="12"/>
-          <pc:sldLayoutMkLst>
-            <pc:docMk/>
-            <pc:sldMasterMk cId="1449374226" sldId="2147483660"/>
-            <pc:sldLayoutMk cId="322694191" sldId="2147483670"/>
-          </pc:sldLayoutMkLst>
-          <pc:picChg chg="add mod">
-            <ac:chgData name="Adrien Osakwe" userId="7a3e290c-eb83-484b-8e3d-d46ef2333477" providerId="ADAL" clId="{CF93B0C4-2B24-4D73-92D8-6EAA22D04A70}" dt="2025-02-08T22:43:25.518" v="12"/>
-            <ac:picMkLst>
-              <pc:docMk/>
-              <pc:sldMasterMk cId="1449374226" sldId="2147483660"/>
-              <pc:sldLayoutMk cId="322694191" sldId="2147483670"/>
-              <ac:picMk id="2" creationId="{3912B842-61AA-DE8F-1C57-2F28FF993E8E}"/>
-            </ac:picMkLst>
-          </pc:picChg>
-        </pc:sldLayoutChg>
-        <pc:sldLayoutChg chg="addSp modSp">
-          <pc:chgData name="Adrien Osakwe" userId="7a3e290c-eb83-484b-8e3d-d46ef2333477" providerId="ADAL" clId="{CF93B0C4-2B24-4D73-92D8-6EAA22D04A70}" dt="2025-02-08T22:43:24.096" v="11"/>
-          <pc:sldLayoutMkLst>
-            <pc:docMk/>
-            <pc:sldMasterMk cId="1449374226" sldId="2147483660"/>
-            <pc:sldLayoutMk cId="3350706779" sldId="2147483671"/>
-          </pc:sldLayoutMkLst>
-          <pc:picChg chg="add mod">
-            <ac:chgData name="Adrien Osakwe" userId="7a3e290c-eb83-484b-8e3d-d46ef2333477" providerId="ADAL" clId="{CF93B0C4-2B24-4D73-92D8-6EAA22D04A70}" dt="2025-02-08T22:43:24.096" v="11"/>
-            <ac:picMkLst>
-              <pc:docMk/>
-              <pc:sldMasterMk cId="1449374226" sldId="2147483660"/>
-              <pc:sldLayoutMk cId="3350706779" sldId="2147483671"/>
-              <ac:picMk id="2" creationId="{46A07C23-87D0-3CD0-CDD8-163E9231650A}"/>
-            </ac:picMkLst>
-          </pc:picChg>
-        </pc:sldLayoutChg>
-      </pc:sldMasterChg>
-    </pc:docChg>
-  </pc:docChgLst>
-  <pc:docChgLst>
-    <pc:chgData name="Larisa Morales Soto" userId="ae55080d-17f4-48de-9309-0024c0e8fdbf" providerId="ADAL" clId="{541A01B5-5A3A-8342-B8EA-5269667745D8}"/>
-    <pc:docChg chg="undo custSel addSld delSld modSld sldOrd addSection modSection">
-      <pc:chgData name="Larisa Morales Soto" userId="ae55080d-17f4-48de-9309-0024c0e8fdbf" providerId="ADAL" clId="{541A01B5-5A3A-8342-B8EA-5269667745D8}" dt="2022-09-15T03:03:39.095" v="9859" actId="20577"/>
-      <pc:docMkLst>
-        <pc:docMk/>
-      </pc:docMkLst>
-      <pc:sldChg chg="addSp delSp modSp mod">
-        <pc:chgData name="Larisa Morales Soto" userId="ae55080d-17f4-48de-9309-0024c0e8fdbf" providerId="ADAL" clId="{541A01B5-5A3A-8342-B8EA-5269667745D8}" dt="2022-09-13T12:41:54.239" v="2"/>
-        <pc:sldMkLst>
-          <pc:docMk/>
-          <pc:sldMk cId="3133242724" sldId="262"/>
-        </pc:sldMkLst>
-      </pc:sldChg>
-      <pc:sldChg chg="addSp delSp modSp del mod">
-        <pc:chgData name="Larisa Morales Soto" userId="ae55080d-17f4-48de-9309-0024c0e8fdbf" providerId="ADAL" clId="{541A01B5-5A3A-8342-B8EA-5269667745D8}" dt="2022-09-13T12:42:21.801" v="20" actId="2696"/>
-        <pc:sldMkLst>
-          <pc:docMk/>
-          <pc:sldMk cId="2115249166" sldId="263"/>
-        </pc:sldMkLst>
-      </pc:sldChg>
-      <pc:sldChg chg="addSp delSp modSp mod ord">
-        <pc:chgData name="Larisa Morales Soto" userId="ae55080d-17f4-48de-9309-0024c0e8fdbf" providerId="ADAL" clId="{541A01B5-5A3A-8342-B8EA-5269667745D8}" dt="2022-09-13T16:00:10.364" v="2655" actId="20578"/>
-        <pc:sldMkLst>
-          <pc:docMk/>
-          <pc:sldMk cId="3891667287" sldId="277"/>
-        </pc:sldMkLst>
-      </pc:sldChg>
-      <pc:sldChg chg="del">
-        <pc:chgData name="Larisa Morales Soto" userId="ae55080d-17f4-48de-9309-0024c0e8fdbf" providerId="ADAL" clId="{541A01B5-5A3A-8342-B8EA-5269667745D8}" dt="2022-09-13T12:53:24.116" v="120" actId="2696"/>
-        <pc:sldMkLst>
-          <pc:docMk/>
-          <pc:sldMk cId="2389275097" sldId="316"/>
-        </pc:sldMkLst>
-      </pc:sldChg>
-      <pc:sldChg chg="addSp delSp modSp mod modClrScheme chgLayout">
-        <pc:chgData name="Larisa Morales Soto" userId="ae55080d-17f4-48de-9309-0024c0e8fdbf" providerId="ADAL" clId="{541A01B5-5A3A-8342-B8EA-5269667745D8}" dt="2022-09-13T13:29:14.871" v="1767" actId="113"/>
-        <pc:sldMkLst>
-          <pc:docMk/>
-          <pc:sldMk cId="3390364454" sldId="317"/>
-        </pc:sldMkLst>
-      </pc:sldChg>
-      <pc:sldChg chg="modSp new mod">
-        <pc:chgData name="Larisa Morales Soto" userId="ae55080d-17f4-48de-9309-0024c0e8fdbf" providerId="ADAL" clId="{541A01B5-5A3A-8342-B8EA-5269667745D8}" dt="2022-09-13T12:53:08.284" v="118" actId="20577"/>
-        <pc:sldMkLst>
-          <pc:docMk/>
-          <pc:sldMk cId="3440444125" sldId="318"/>
-        </pc:sldMkLst>
-      </pc:sldChg>
-      <pc:sldChg chg="addSp delSp modSp add mod">
-        <pc:chgData name="Larisa Morales Soto" userId="ae55080d-17f4-48de-9309-0024c0e8fdbf" providerId="ADAL" clId="{541A01B5-5A3A-8342-B8EA-5269667745D8}" dt="2022-09-13T15:00:38.574" v="2443" actId="20577"/>
-        <pc:sldMkLst>
-          <pc:docMk/>
-          <pc:sldMk cId="2289177498" sldId="319"/>
-        </pc:sldMkLst>
-      </pc:sldChg>
-      <pc:sldChg chg="addSp delSp modSp add mod">
-        <pc:chgData name="Larisa Morales Soto" userId="ae55080d-17f4-48de-9309-0024c0e8fdbf" providerId="ADAL" clId="{541A01B5-5A3A-8342-B8EA-5269667745D8}" dt="2022-09-15T02:57:56.707" v="9643" actId="14100"/>
-        <pc:sldMkLst>
-          <pc:docMk/>
-          <pc:sldMk cId="2200063611" sldId="320"/>
-        </pc:sldMkLst>
-      </pc:sldChg>
-      <pc:sldChg chg="addSp delSp modSp add mod ord setBg addAnim">
-        <pc:chgData name="Larisa Morales Soto" userId="ae55080d-17f4-48de-9309-0024c0e8fdbf" providerId="ADAL" clId="{541A01B5-5A3A-8342-B8EA-5269667745D8}" dt="2022-09-13T13:25:05.290" v="1556" actId="20578"/>
-        <pc:sldMkLst>
-          <pc:docMk/>
-          <pc:sldMk cId="2151930685" sldId="409"/>
-        </pc:sldMkLst>
-      </pc:sldChg>
-      <pc:sldChg chg="addSp delSp modSp new mod modClrScheme chgLayout">
-        <pc:chgData name="Larisa Morales Soto" userId="ae55080d-17f4-48de-9309-0024c0e8fdbf" providerId="ADAL" clId="{541A01B5-5A3A-8342-B8EA-5269667745D8}" dt="2022-09-13T15:05:57.905" v="2530" actId="20577"/>
-        <pc:sldMkLst>
-          <pc:docMk/>
-          <pc:sldMk cId="2361305861" sldId="410"/>
-        </pc:sldMkLst>
-      </pc:sldChg>
-      <pc:sldChg chg="addSp delSp modSp new mod ord">
-        <pc:chgData name="Larisa Morales Soto" userId="ae55080d-17f4-48de-9309-0024c0e8fdbf" providerId="ADAL" clId="{541A01B5-5A3A-8342-B8EA-5269667745D8}" dt="2022-09-13T16:44:25.538" v="2979" actId="21"/>
-        <pc:sldMkLst>
-          <pc:docMk/>
-          <pc:sldMk cId="98069860" sldId="411"/>
-        </pc:sldMkLst>
-      </pc:sldChg>
-      <pc:sldChg chg="addSp delSp modSp new mod">
-        <pc:chgData name="Larisa Morales Soto" userId="ae55080d-17f4-48de-9309-0024c0e8fdbf" providerId="ADAL" clId="{541A01B5-5A3A-8342-B8EA-5269667745D8}" dt="2022-09-15T02:58:24.371" v="9680" actId="20577"/>
-        <pc:sldMkLst>
-          <pc:docMk/>
-          <pc:sldMk cId="4111024130" sldId="412"/>
-        </pc:sldMkLst>
-      </pc:sldChg>
-      <pc:sldChg chg="add del">
-        <pc:chgData name="Larisa Morales Soto" userId="ae55080d-17f4-48de-9309-0024c0e8fdbf" providerId="ADAL" clId="{541A01B5-5A3A-8342-B8EA-5269667745D8}" dt="2022-09-13T16:00:00.093" v="2652"/>
-        <pc:sldMkLst>
-          <pc:docMk/>
-          <pc:sldMk cId="1345299640" sldId="413"/>
-        </pc:sldMkLst>
-      </pc:sldChg>
-      <pc:sldChg chg="addSp delSp modSp add mod">
-        <pc:chgData name="Larisa Morales Soto" userId="ae55080d-17f4-48de-9309-0024c0e8fdbf" providerId="ADAL" clId="{541A01B5-5A3A-8342-B8EA-5269667745D8}" dt="2022-09-14T12:10:23.720" v="8302" actId="1076"/>
-        <pc:sldMkLst>
-          <pc:docMk/>
-          <pc:sldMk cId="2428786264" sldId="413"/>
-        </pc:sldMkLst>
-      </pc:sldChg>
-      <pc:sldChg chg="addSp delSp modSp add mod">
-        <pc:chgData name="Larisa Morales Soto" userId="ae55080d-17f4-48de-9309-0024c0e8fdbf" providerId="ADAL" clId="{541A01B5-5A3A-8342-B8EA-5269667745D8}" dt="2022-09-13T20:35:08.329" v="6137"/>
-        <pc:sldMkLst>
-          <pc:docMk/>
-          <pc:sldMk cId="4293633584" sldId="414"/>
-        </pc:sldMkLst>
-      </pc:sldChg>
-      <pc:sldChg chg="addSp delSp modSp add mod">
-        <pc:chgData name="Larisa Morales Soto" userId="ae55080d-17f4-48de-9309-0024c0e8fdbf" providerId="ADAL" clId="{541A01B5-5A3A-8342-B8EA-5269667745D8}" dt="2022-09-15T03:00:11.253" v="9734" actId="20577"/>
-        <pc:sldMkLst>
-          <pc:docMk/>
-          <pc:sldMk cId="1189678410" sldId="415"/>
-        </pc:sldMkLst>
-      </pc:sldChg>
-      <pc:sldChg chg="addSp delSp modSp add mod modClrScheme chgLayout">
-        <pc:chgData name="Larisa Morales Soto" userId="ae55080d-17f4-48de-9309-0024c0e8fdbf" providerId="ADAL" clId="{541A01B5-5A3A-8342-B8EA-5269667745D8}" dt="2022-09-15T00:31:31.207" v="8988" actId="700"/>
-        <pc:sldMkLst>
-          <pc:docMk/>
-          <pc:sldMk cId="2444987695" sldId="416"/>
-        </pc:sldMkLst>
-      </pc:sldChg>
-      <pc:sldChg chg="modSp add mod">
-        <pc:chgData name="Larisa Morales Soto" userId="ae55080d-17f4-48de-9309-0024c0e8fdbf" providerId="ADAL" clId="{541A01B5-5A3A-8342-B8EA-5269667745D8}" dt="2022-09-13T21:46:28.260" v="7837" actId="1076"/>
-        <pc:sldMkLst>
-          <pc:docMk/>
-          <pc:sldMk cId="2634833872" sldId="417"/>
-        </pc:sldMkLst>
-      </pc:sldChg>
-      <pc:sldChg chg="addSp delSp modSp add mod">
-        <pc:chgData name="Larisa Morales Soto" userId="ae55080d-17f4-48de-9309-0024c0e8fdbf" providerId="ADAL" clId="{541A01B5-5A3A-8342-B8EA-5269667745D8}" dt="2022-09-15T03:01:29.756" v="9737" actId="478"/>
-        <pc:sldMkLst>
-          <pc:docMk/>
-          <pc:sldMk cId="1346597622" sldId="418"/>
-        </pc:sldMkLst>
-      </pc:sldChg>
-      <pc:sldChg chg="addSp delSp modSp new mod">
-        <pc:chgData name="Larisa Morales Soto" userId="ae55080d-17f4-48de-9309-0024c0e8fdbf" providerId="ADAL" clId="{541A01B5-5A3A-8342-B8EA-5269667745D8}" dt="2022-09-13T18:19:34.832" v="3245" actId="20577"/>
-        <pc:sldMkLst>
-          <pc:docMk/>
-          <pc:sldMk cId="2227572526" sldId="419"/>
-        </pc:sldMkLst>
-      </pc:sldChg>
-      <pc:sldChg chg="addSp delSp modSp new mod">
-        <pc:chgData name="Larisa Morales Soto" userId="ae55080d-17f4-48de-9309-0024c0e8fdbf" providerId="ADAL" clId="{541A01B5-5A3A-8342-B8EA-5269667745D8}" dt="2022-09-13T18:32:07.716" v="4083" actId="1076"/>
-        <pc:sldMkLst>
-          <pc:docMk/>
-          <pc:sldMk cId="1880436319" sldId="420"/>
-        </pc:sldMkLst>
-      </pc:sldChg>
-      <pc:sldChg chg="addSp delSp modSp add mod">
-        <pc:chgData name="Larisa Morales Soto" userId="ae55080d-17f4-48de-9309-0024c0e8fdbf" providerId="ADAL" clId="{541A01B5-5A3A-8342-B8EA-5269667745D8}" dt="2022-09-14T12:08:30.406" v="8112" actId="1035"/>
-        <pc:sldMkLst>
-          <pc:docMk/>
-          <pc:sldMk cId="1410062465" sldId="421"/>
-        </pc:sldMkLst>
-      </pc:sldChg>
-      <pc:sldChg chg="add del">
-        <pc:chgData name="Larisa Morales Soto" userId="ae55080d-17f4-48de-9309-0024c0e8fdbf" providerId="ADAL" clId="{541A01B5-5A3A-8342-B8EA-5269667745D8}" dt="2022-09-13T19:17:08.390" v="5755" actId="2696"/>
-        <pc:sldMkLst>
-          <pc:docMk/>
-          <pc:sldMk cId="637996262" sldId="422"/>
-        </pc:sldMkLst>
-      </pc:sldChg>
-      <pc:sldChg chg="addSp delSp modSp add mod chgLayout">
-        <pc:chgData name="Larisa Morales Soto" userId="ae55080d-17f4-48de-9309-0024c0e8fdbf" providerId="ADAL" clId="{541A01B5-5A3A-8342-B8EA-5269667745D8}" dt="2022-09-13T18:17:20.725" v="3191" actId="700"/>
-        <pc:sldMkLst>
-          <pc:docMk/>
-          <pc:sldMk cId="108575568" sldId="423"/>
-        </pc:sldMkLst>
-      </pc:sldChg>
-      <pc:sldChg chg="addSp delSp modSp new del mod ord">
-        <pc:chgData name="Larisa Morales Soto" userId="ae55080d-17f4-48de-9309-0024c0e8fdbf" providerId="ADAL" clId="{541A01B5-5A3A-8342-B8EA-5269667745D8}" dt="2022-09-13T18:40:13.114" v="4490" actId="2696"/>
-        <pc:sldMkLst>
-          <pc:docMk/>
-          <pc:sldMk cId="1177225583" sldId="424"/>
-        </pc:sldMkLst>
-      </pc:sldChg>
-      <pc:sldChg chg="new del">
-        <pc:chgData name="Larisa Morales Soto" userId="ae55080d-17f4-48de-9309-0024c0e8fdbf" providerId="ADAL" clId="{541A01B5-5A3A-8342-B8EA-5269667745D8}" dt="2022-09-13T18:29:59.134" v="3937" actId="680"/>
-        <pc:sldMkLst>
-          <pc:docMk/>
-          <pc:sldMk cId="516464824" sldId="425"/>
-        </pc:sldMkLst>
-      </pc:sldChg>
-      <pc:sldChg chg="addSp delSp modSp new mod">
-        <pc:chgData name="Larisa Morales Soto" userId="ae55080d-17f4-48de-9309-0024c0e8fdbf" providerId="ADAL" clId="{541A01B5-5A3A-8342-B8EA-5269667745D8}" dt="2022-09-14T12:09:49.088" v="8278" actId="113"/>
-        <pc:sldMkLst>
-          <pc:docMk/>
-          <pc:sldMk cId="1212990023" sldId="425"/>
-        </pc:sldMkLst>
-      </pc:sldChg>
-      <pc:sldChg chg="addSp delSp modSp add mod ord">
-        <pc:chgData name="Larisa Morales Soto" userId="ae55080d-17f4-48de-9309-0024c0e8fdbf" providerId="ADAL" clId="{541A01B5-5A3A-8342-B8EA-5269667745D8}" dt="2022-09-13T18:40:07.319" v="4489" actId="1076"/>
-        <pc:sldMkLst>
-          <pc:docMk/>
-          <pc:sldMk cId="3223212124" sldId="426"/>
-        </pc:sldMkLst>
-      </pc:sldChg>
-      <pc:sldChg chg="addSp delSp modSp add del mod">
-        <pc:chgData name="Larisa Morales Soto" userId="ae55080d-17f4-48de-9309-0024c0e8fdbf" providerId="ADAL" clId="{541A01B5-5A3A-8342-B8EA-5269667745D8}" dt="2022-09-13T18:32:45.696" v="4146" actId="2696"/>
-        <pc:sldMkLst>
-          <pc:docMk/>
-          <pc:sldMk cId="30915407" sldId="427"/>
-        </pc:sldMkLst>
-      </pc:sldChg>
-      <pc:sldChg chg="addSp delSp modSp add mod">
-        <pc:chgData name="Larisa Morales Soto" userId="ae55080d-17f4-48de-9309-0024c0e8fdbf" providerId="ADAL" clId="{541A01B5-5A3A-8342-B8EA-5269667745D8}" dt="2022-09-13T19:03:39.304" v="5596" actId="21"/>
-        <pc:sldMkLst>
-          <pc:docMk/>
-          <pc:sldMk cId="4245281921" sldId="428"/>
-        </pc:sldMkLst>
-      </pc:sldChg>
-      <pc:sldChg chg="addSp delSp modSp add mod">
-        <pc:chgData name="Larisa Morales Soto" userId="ae55080d-17f4-48de-9309-0024c0e8fdbf" providerId="ADAL" clId="{541A01B5-5A3A-8342-B8EA-5269667745D8}" dt="2022-09-15T03:03:39.095" v="9859" actId="20577"/>
-        <pc:sldMkLst>
-          <pc:docMk/>
-          <pc:sldMk cId="3281809004" sldId="429"/>
-        </pc:sldMkLst>
-      </pc:sldChg>
-      <pc:sldChg chg="addSp delSp modSp add mod">
-        <pc:chgData name="Larisa Morales Soto" userId="ae55080d-17f4-48de-9309-0024c0e8fdbf" providerId="ADAL" clId="{541A01B5-5A3A-8342-B8EA-5269667745D8}" dt="2022-09-13T18:56:07.974" v="5335" actId="1076"/>
-        <pc:sldMkLst>
-          <pc:docMk/>
-          <pc:sldMk cId="2267835305" sldId="430"/>
-        </pc:sldMkLst>
-      </pc:sldChg>
-      <pc:sldChg chg="add">
-        <pc:chgData name="Larisa Morales Soto" userId="ae55080d-17f4-48de-9309-0024c0e8fdbf" providerId="ADAL" clId="{541A01B5-5A3A-8342-B8EA-5269667745D8}" dt="2022-09-13T18:53:05.780" v="5206"/>
-        <pc:sldMkLst>
-          <pc:docMk/>
-          <pc:sldMk cId="2889724734" sldId="431"/>
-        </pc:sldMkLst>
-      </pc:sldChg>
-      <pc:sldChg chg="modSp add mod">
-        <pc:chgData name="Larisa Morales Soto" userId="ae55080d-17f4-48de-9309-0024c0e8fdbf" providerId="ADAL" clId="{541A01B5-5A3A-8342-B8EA-5269667745D8}" dt="2022-09-13T22:20:19.089" v="7922" actId="1076"/>
-        <pc:sldMkLst>
-          <pc:docMk/>
-          <pc:sldMk cId="701040556" sldId="432"/>
-        </pc:sldMkLst>
-      </pc:sldChg>
-      <pc:sldChg chg="addSp delSp modSp new del mod">
-        <pc:chgData name="Larisa Morales Soto" userId="ae55080d-17f4-48de-9309-0024c0e8fdbf" providerId="ADAL" clId="{541A01B5-5A3A-8342-B8EA-5269667745D8}" dt="2022-09-13T19:11:25.996" v="5645" actId="2696"/>
-        <pc:sldMkLst>
-          <pc:docMk/>
-          <pc:sldMk cId="1317319283" sldId="433"/>
-        </pc:sldMkLst>
-      </pc:sldChg>
-      <pc:sldChg chg="addSp delSp modSp new mod setBg modClrScheme chgLayout">
-        <pc:chgData name="Larisa Morales Soto" userId="ae55080d-17f4-48de-9309-0024c0e8fdbf" providerId="ADAL" clId="{541A01B5-5A3A-8342-B8EA-5269667745D8}" dt="2022-09-13T19:15:28.789" v="5747" actId="1076"/>
-        <pc:sldMkLst>
-          <pc:docMk/>
-          <pc:sldMk cId="3314207375" sldId="433"/>
-        </pc:sldMkLst>
-      </pc:sldChg>
-      <pc:sldChg chg="modSp add mod setBg">
-        <pc:chgData name="Larisa Morales Soto" userId="ae55080d-17f4-48de-9309-0024c0e8fdbf" providerId="ADAL" clId="{541A01B5-5A3A-8342-B8EA-5269667745D8}" dt="2022-09-13T19:18:07.958" v="5763" actId="207"/>
-        <pc:sldMkLst>
-          <pc:docMk/>
-          <pc:sldMk cId="2659381662" sldId="434"/>
-        </pc:sldMkLst>
-      </pc:sldChg>
-      <pc:sldChg chg="add del setBg">
-        <pc:chgData name="Larisa Morales Soto" userId="ae55080d-17f4-48de-9309-0024c0e8fdbf" providerId="ADAL" clId="{541A01B5-5A3A-8342-B8EA-5269667745D8}" dt="2022-09-13T19:17:09.421" v="5756" actId="2696"/>
-        <pc:sldMkLst>
-          <pc:docMk/>
-          <pc:sldMk cId="626908531" sldId="435"/>
-        </pc:sldMkLst>
-      </pc:sldChg>
-      <pc:sldChg chg="modSp add mod setBg">
-        <pc:chgData name="Larisa Morales Soto" userId="ae55080d-17f4-48de-9309-0024c0e8fdbf" providerId="ADAL" clId="{541A01B5-5A3A-8342-B8EA-5269667745D8}" dt="2022-09-13T19:17:40.696" v="5762" actId="207"/>
-        <pc:sldMkLst>
-          <pc:docMk/>
-          <pc:sldMk cId="97489599" sldId="436"/>
-        </pc:sldMkLst>
-      </pc:sldChg>
-      <pc:sldChg chg="modSp add mod setBg">
-        <pc:chgData name="Larisa Morales Soto" userId="ae55080d-17f4-48de-9309-0024c0e8fdbf" providerId="ADAL" clId="{541A01B5-5A3A-8342-B8EA-5269667745D8}" dt="2022-09-13T19:18:21.962" v="5764" actId="207"/>
-        <pc:sldMkLst>
-          <pc:docMk/>
-          <pc:sldMk cId="3380746435" sldId="437"/>
-        </pc:sldMkLst>
-      </pc:sldChg>
-      <pc:sldChg chg="add del setBg">
-        <pc:chgData name="Larisa Morales Soto" userId="ae55080d-17f4-48de-9309-0024c0e8fdbf" providerId="ADAL" clId="{541A01B5-5A3A-8342-B8EA-5269667745D8}" dt="2022-09-13T19:14:35.153" v="5741" actId="2696"/>
-        <pc:sldMkLst>
-          <pc:docMk/>
-          <pc:sldMk cId="4143562184" sldId="438"/>
-        </pc:sldMkLst>
-      </pc:sldChg>
-      <pc:sldChg chg="modSp add mod setBg">
-        <pc:chgData name="Larisa Morales Soto" userId="ae55080d-17f4-48de-9309-0024c0e8fdbf" providerId="ADAL" clId="{541A01B5-5A3A-8342-B8EA-5269667745D8}" dt="2022-09-13T19:18:57.979" v="5766" actId="207"/>
-        <pc:sldMkLst>
-          <pc:docMk/>
-          <pc:sldMk cId="1029239482" sldId="439"/>
-        </pc:sldMkLst>
-      </pc:sldChg>
-      <pc:sldChg chg="add del setBg">
-        <pc:chgData name="Larisa Morales Soto" userId="ae55080d-17f4-48de-9309-0024c0e8fdbf" providerId="ADAL" clId="{541A01B5-5A3A-8342-B8EA-5269667745D8}" dt="2022-09-13T19:14:28.887" v="5739"/>
-        <pc:sldMkLst>
-          <pc:docMk/>
-          <pc:sldMk cId="2251274176" sldId="439"/>
-        </pc:sldMkLst>
-      </pc:sldChg>
-      <pc:sldChg chg="modSp add del mod setBg">
-        <pc:chgData name="Larisa Morales Soto" userId="ae55080d-17f4-48de-9309-0024c0e8fdbf" providerId="ADAL" clId="{541A01B5-5A3A-8342-B8EA-5269667745D8}" dt="2022-09-14T00:59:24.493" v="7923" actId="2696"/>
-        <pc:sldMkLst>
-          <pc:docMk/>
-          <pc:sldMk cId="1378302912" sldId="440"/>
-        </pc:sldMkLst>
-      </pc:sldChg>
-      <pc:sldChg chg="new del">
-        <pc:chgData name="Larisa Morales Soto" userId="ae55080d-17f4-48de-9309-0024c0e8fdbf" providerId="ADAL" clId="{541A01B5-5A3A-8342-B8EA-5269667745D8}" dt="2022-09-13T19:21:28.754" v="5774" actId="2696"/>
-        <pc:sldMkLst>
-          <pc:docMk/>
-          <pc:sldMk cId="2838082963" sldId="441"/>
-        </pc:sldMkLst>
-      </pc:sldChg>
-      <pc:sldChg chg="modSp add mod ord">
-        <pc:chgData name="Larisa Morales Soto" userId="ae55080d-17f4-48de-9309-0024c0e8fdbf" providerId="ADAL" clId="{541A01B5-5A3A-8342-B8EA-5269667745D8}" dt="2022-09-15T02:45:40.334" v="9563" actId="20577"/>
-        <pc:sldMkLst>
-          <pc:docMk/>
-          <pc:sldMk cId="4003718646" sldId="441"/>
-        </pc:sldMkLst>
-      </pc:sldChg>
-      <pc:sldChg chg="new del">
-        <pc:chgData name="Larisa Morales Soto" userId="ae55080d-17f4-48de-9309-0024c0e8fdbf" providerId="ADAL" clId="{541A01B5-5A3A-8342-B8EA-5269667745D8}" dt="2022-09-13T20:35:09.213" v="6138" actId="2696"/>
-        <pc:sldMkLst>
-          <pc:docMk/>
-          <pc:sldMk cId="4056102722" sldId="441"/>
-        </pc:sldMkLst>
-      </pc:sldChg>
-      <pc:sldChg chg="addSp delSp modSp add mod">
-        <pc:chgData name="Larisa Morales Soto" userId="ae55080d-17f4-48de-9309-0024c0e8fdbf" providerId="ADAL" clId="{541A01B5-5A3A-8342-B8EA-5269667745D8}" dt="2022-09-14T12:09:56.079" v="8283" actId="113"/>
-        <pc:sldMkLst>
-          <pc:docMk/>
-          <pc:sldMk cId="1491768522" sldId="442"/>
-        </pc:sldMkLst>
-      </pc:sldChg>
-      <pc:sldChg chg="addSp delSp modSp new mod">
-        <pc:chgData name="Larisa Morales Soto" userId="ae55080d-17f4-48de-9309-0024c0e8fdbf" providerId="ADAL" clId="{541A01B5-5A3A-8342-B8EA-5269667745D8}" dt="2022-09-15T02:58:59.898" v="9692" actId="20577"/>
-        <pc:sldMkLst>
-          <pc:docMk/>
-          <pc:sldMk cId="1920594278" sldId="443"/>
-        </pc:sldMkLst>
-      </pc:sldChg>
-      <pc:sldChg chg="addSp delSp modSp add mod">
-        <pc:chgData name="Larisa Morales Soto" userId="ae55080d-17f4-48de-9309-0024c0e8fdbf" providerId="ADAL" clId="{541A01B5-5A3A-8342-B8EA-5269667745D8}" dt="2022-09-14T20:35:55.076" v="8473" actId="1076"/>
-        <pc:sldMkLst>
-          <pc:docMk/>
-          <pc:sldMk cId="3928505110" sldId="444"/>
-        </pc:sldMkLst>
-      </pc:sldChg>
-      <pc:sldChg chg="modSp new mod">
-        <pc:chgData name="Larisa Morales Soto" userId="ae55080d-17f4-48de-9309-0024c0e8fdbf" providerId="ADAL" clId="{541A01B5-5A3A-8342-B8EA-5269667745D8}" dt="2022-09-15T02:59:21.183" v="9697" actId="20577"/>
-        <pc:sldMkLst>
-          <pc:docMk/>
-          <pc:sldMk cId="3964093048" sldId="445"/>
-        </pc:sldMkLst>
-      </pc:sldChg>
-      <pc:sldChg chg="addSp delSp modSp new mod">
-        <pc:chgData name="Larisa Morales Soto" userId="ae55080d-17f4-48de-9309-0024c0e8fdbf" providerId="ADAL" clId="{541A01B5-5A3A-8342-B8EA-5269667745D8}" dt="2022-09-15T00:58:06.471" v="9028" actId="1076"/>
-        <pc:sldMkLst>
-          <pc:docMk/>
-          <pc:sldMk cId="250423083" sldId="446"/>
-        </pc:sldMkLst>
-      </pc:sldChg>
-      <pc:sldChg chg="new del">
-        <pc:chgData name="Larisa Morales Soto" userId="ae55080d-17f4-48de-9309-0024c0e8fdbf" providerId="ADAL" clId="{541A01B5-5A3A-8342-B8EA-5269667745D8}" dt="2022-09-14T21:57:53.583" v="8881" actId="680"/>
-        <pc:sldMkLst>
-          <pc:docMk/>
-          <pc:sldMk cId="4096331040" sldId="446"/>
-        </pc:sldMkLst>
-      </pc:sldChg>
-      <pc:sldChg chg="addSp delSp modSp new mod">
-        <pc:chgData name="Larisa Morales Soto" userId="ae55080d-17f4-48de-9309-0024c0e8fdbf" providerId="ADAL" clId="{541A01B5-5A3A-8342-B8EA-5269667745D8}" dt="2022-09-15T00:57:50.040" v="9023" actId="478"/>
-        <pc:sldMkLst>
-          <pc:docMk/>
-          <pc:sldMk cId="241318341" sldId="447"/>
-        </pc:sldMkLst>
-      </pc:sldChg>
-      <pc:sldChg chg="addSp delSp modSp new mod">
-        <pc:chgData name="Larisa Morales Soto" userId="ae55080d-17f4-48de-9309-0024c0e8fdbf" providerId="ADAL" clId="{541A01B5-5A3A-8342-B8EA-5269667745D8}" dt="2022-09-15T00:57:54.090" v="9025"/>
-        <pc:sldMkLst>
-          <pc:docMk/>
-          <pc:sldMk cId="3470290159" sldId="448"/>
-        </pc:sldMkLst>
-      </pc:sldChg>
-      <pc:sldChg chg="new del">
-        <pc:chgData name="Larisa Morales Soto" userId="ae55080d-17f4-48de-9309-0024c0e8fdbf" providerId="ADAL" clId="{541A01B5-5A3A-8342-B8EA-5269667745D8}" dt="2022-09-14T22:42:42.921" v="8966" actId="680"/>
-        <pc:sldMkLst>
-          <pc:docMk/>
-          <pc:sldMk cId="548128685" sldId="449"/>
-        </pc:sldMkLst>
-      </pc:sldChg>
-      <pc:sldChg chg="addSp delSp modSp new mod">
-        <pc:chgData name="Larisa Morales Soto" userId="ae55080d-17f4-48de-9309-0024c0e8fdbf" providerId="ADAL" clId="{541A01B5-5A3A-8342-B8EA-5269667745D8}" dt="2022-09-15T00:57:58.873" v="9027" actId="1076"/>
-        <pc:sldMkLst>
-          <pc:docMk/>
-          <pc:sldMk cId="4269158014" sldId="449"/>
-        </pc:sldMkLst>
-      </pc:sldChg>
-      <pc:sldChg chg="new del">
-        <pc:chgData name="Larisa Morales Soto" userId="ae55080d-17f4-48de-9309-0024c0e8fdbf" providerId="ADAL" clId="{541A01B5-5A3A-8342-B8EA-5269667745D8}" dt="2022-09-15T00:31:14.033" v="8986" actId="2696"/>
-        <pc:sldMkLst>
-          <pc:docMk/>
-          <pc:sldMk cId="1593490041" sldId="450"/>
-        </pc:sldMkLst>
-      </pc:sldChg>
-      <pc:sldChg chg="addSp delSp modSp new mod">
-        <pc:chgData name="Larisa Morales Soto" userId="ae55080d-17f4-48de-9309-0024c0e8fdbf" providerId="ADAL" clId="{541A01B5-5A3A-8342-B8EA-5269667745D8}" dt="2022-09-15T01:08:28.549" v="9039" actId="1076"/>
-        <pc:sldMkLst>
-          <pc:docMk/>
-          <pc:sldMk cId="3813321520" sldId="450"/>
-        </pc:sldMkLst>
-      </pc:sldChg>
-      <pc:sldChg chg="addSp modSp new mod">
-        <pc:chgData name="Larisa Morales Soto" userId="ae55080d-17f4-48de-9309-0024c0e8fdbf" providerId="ADAL" clId="{541A01B5-5A3A-8342-B8EA-5269667745D8}" dt="2022-09-15T01:17:07.329" v="9391" actId="27636"/>
-        <pc:sldMkLst>
-          <pc:docMk/>
-          <pc:sldMk cId="450508802" sldId="451"/>
-        </pc:sldMkLst>
-      </pc:sldChg>
-      <pc:sldChg chg="addSp delSp modSp new mod">
-        <pc:chgData name="Larisa Morales Soto" userId="ae55080d-17f4-48de-9309-0024c0e8fdbf" providerId="ADAL" clId="{541A01B5-5A3A-8342-B8EA-5269667745D8}" dt="2022-09-15T01:23:07.629" v="9553" actId="20577"/>
-        <pc:sldMkLst>
-          <pc:docMk/>
-          <pc:sldMk cId="1454694018" sldId="452"/>
-        </pc:sldMkLst>
-      </pc:sldChg>
-      <pc:sldChg chg="addSp delSp modSp new mod">
-        <pc:chgData name="Larisa Morales Soto" userId="ae55080d-17f4-48de-9309-0024c0e8fdbf" providerId="ADAL" clId="{541A01B5-5A3A-8342-B8EA-5269667745D8}" dt="2022-09-15T01:14:22.781" v="9379" actId="1076"/>
-        <pc:sldMkLst>
-          <pc:docMk/>
-          <pc:sldMk cId="1256192499" sldId="453"/>
-        </pc:sldMkLst>
-      </pc:sldChg>
-      <pc:sldChg chg="addSp delSp modSp new mod">
-        <pc:chgData name="Larisa Morales Soto" userId="ae55080d-17f4-48de-9309-0024c0e8fdbf" providerId="ADAL" clId="{541A01B5-5A3A-8342-B8EA-5269667745D8}" dt="2022-09-15T01:14:52.156" v="9385" actId="1076"/>
-        <pc:sldMkLst>
-          <pc:docMk/>
-          <pc:sldMk cId="3594387439" sldId="454"/>
-        </pc:sldMkLst>
-      </pc:sldChg>
-      <pc:sldChg chg="modSp add mod">
-        <pc:chgData name="Larisa Morales Soto" userId="ae55080d-17f4-48de-9309-0024c0e8fdbf" providerId="ADAL" clId="{541A01B5-5A3A-8342-B8EA-5269667745D8}" dt="2022-09-15T03:02:23.348" v="9811" actId="20577"/>
-        <pc:sldMkLst>
-          <pc:docMk/>
-          <pc:sldMk cId="920428551" sldId="455"/>
-        </pc:sldMkLst>
-      </pc:sldChg>
-      <pc:sldChg chg="addSp delSp modSp add mod">
-        <pc:chgData name="Larisa Morales Soto" userId="ae55080d-17f4-48de-9309-0024c0e8fdbf" providerId="ADAL" clId="{541A01B5-5A3A-8342-B8EA-5269667745D8}" dt="2022-09-15T03:02:38.965" v="9823" actId="1035"/>
-        <pc:sldMkLst>
-          <pc:docMk/>
-          <pc:sldMk cId="2446723814" sldId="456"/>
-        </pc:sldMkLst>
-      </pc:sldChg>
-    </pc:docChg>
-  </pc:docChgLst>
-  <pc:docChgLst>
-    <pc:chgData name="Adrien Osakwe" userId="7a3e290c-eb83-484b-8e3d-d46ef2333477" providerId="ADAL" clId="{6FBBC003-63E5-4DAA-8405-CD7EEDECBC2E}"/>
-    <pc:docChg chg="undo custSel addSld delSld modSld sldOrd modSection">
-      <pc:chgData name="Adrien Osakwe" userId="7a3e290c-eb83-484b-8e3d-d46ef2333477" providerId="ADAL" clId="{6FBBC003-63E5-4DAA-8405-CD7EEDECBC2E}" dt="2024-02-14T16:01:30.496" v="3472" actId="729"/>
-      <pc:docMkLst>
-        <pc:docMk/>
-      </pc:docMkLst>
-      <pc:sldChg chg="del">
-        <pc:chgData name="Adrien Osakwe" userId="7a3e290c-eb83-484b-8e3d-d46ef2333477" providerId="ADAL" clId="{6FBBC003-63E5-4DAA-8405-CD7EEDECBC2E}" dt="2024-02-13T14:01:53.885" v="149" actId="47"/>
-        <pc:sldMkLst>
-          <pc:docMk/>
-          <pc:sldMk cId="3133242724" sldId="262"/>
-        </pc:sldMkLst>
-      </pc:sldChg>
-      <pc:sldChg chg="modSp mod modAnim">
-        <pc:chgData name="Adrien Osakwe" userId="7a3e290c-eb83-484b-8e3d-d46ef2333477" providerId="ADAL" clId="{6FBBC003-63E5-4DAA-8405-CD7EEDECBC2E}" dt="2024-02-14T04:28:51.003" v="3291" actId="113"/>
-        <pc:sldMkLst>
-          <pc:docMk/>
-          <pc:sldMk cId="3891667287" sldId="277"/>
-        </pc:sldMkLst>
-      </pc:sldChg>
-      <pc:sldChg chg="del">
-        <pc:chgData name="Adrien Osakwe" userId="7a3e290c-eb83-484b-8e3d-d46ef2333477" providerId="ADAL" clId="{6FBBC003-63E5-4DAA-8405-CD7EEDECBC2E}" dt="2024-02-13T14:02:27.239" v="154" actId="47"/>
-        <pc:sldMkLst>
-          <pc:docMk/>
-          <pc:sldMk cId="3390364454" sldId="317"/>
-        </pc:sldMkLst>
-      </pc:sldChg>
-      <pc:sldChg chg="modSp mod">
-        <pc:chgData name="Adrien Osakwe" userId="7a3e290c-eb83-484b-8e3d-d46ef2333477" providerId="ADAL" clId="{6FBBC003-63E5-4DAA-8405-CD7EEDECBC2E}" dt="2024-02-14T04:39:54.220" v="3366" actId="20577"/>
-        <pc:sldMkLst>
-          <pc:docMk/>
-          <pc:sldMk cId="3440444125" sldId="318"/>
-        </pc:sldMkLst>
-      </pc:sldChg>
-      <pc:sldChg chg="addSp delSp modSp mod">
-        <pc:chgData name="Adrien Osakwe" userId="7a3e290c-eb83-484b-8e3d-d46ef2333477" providerId="ADAL" clId="{6FBBC003-63E5-4DAA-8405-CD7EEDECBC2E}" dt="2024-02-14T00:48:00.918" v="1450" actId="20577"/>
-        <pc:sldMkLst>
-          <pc:docMk/>
-          <pc:sldMk cId="2289177498" sldId="319"/>
-        </pc:sldMkLst>
-      </pc:sldChg>
-      <pc:sldChg chg="addSp delSp modSp mod">
-        <pc:chgData name="Adrien Osakwe" userId="7a3e290c-eb83-484b-8e3d-d46ef2333477" providerId="ADAL" clId="{6FBBC003-63E5-4DAA-8405-CD7EEDECBC2E}" dt="2024-02-13T14:19:01.310" v="185" actId="20577"/>
-        <pc:sldMkLst>
-          <pc:docMk/>
-          <pc:sldMk cId="2200063611" sldId="320"/>
-        </pc:sldMkLst>
-      </pc:sldChg>
-      <pc:sldChg chg="add ord">
-        <pc:chgData name="Adrien Osakwe" userId="7a3e290c-eb83-484b-8e3d-d46ef2333477" providerId="ADAL" clId="{6FBBC003-63E5-4DAA-8405-CD7EEDECBC2E}" dt="2024-02-13T14:01:56.886" v="152"/>
-        <pc:sldMkLst>
-          <pc:docMk/>
-          <pc:sldMk cId="1324269546" sldId="395"/>
-        </pc:sldMkLst>
-      </pc:sldChg>
-      <pc:sldChg chg="addSp modSp add mod ord">
-        <pc:chgData name="Adrien Osakwe" userId="7a3e290c-eb83-484b-8e3d-d46ef2333477" providerId="ADAL" clId="{6FBBC003-63E5-4DAA-8405-CD7EEDECBC2E}" dt="2024-02-14T00:45:41.456" v="1347" actId="208"/>
-        <pc:sldMkLst>
-          <pc:docMk/>
-          <pc:sldMk cId="3301951615" sldId="396"/>
-        </pc:sldMkLst>
-      </pc:sldChg>
-      <pc:sldChg chg="add">
-        <pc:chgData name="Adrien Osakwe" userId="7a3e290c-eb83-484b-8e3d-d46ef2333477" providerId="ADAL" clId="{6FBBC003-63E5-4DAA-8405-CD7EEDECBC2E}" dt="2024-02-13T14:02:28.836" v="155"/>
-        <pc:sldMkLst>
-          <pc:docMk/>
-          <pc:sldMk cId="25426801" sldId="399"/>
-        </pc:sldMkLst>
-      </pc:sldChg>
-      <pc:sldChg chg="del">
-        <pc:chgData name="Adrien Osakwe" userId="7a3e290c-eb83-484b-8e3d-d46ef2333477" providerId="ADAL" clId="{6FBBC003-63E5-4DAA-8405-CD7EEDECBC2E}" dt="2024-02-13T14:02:22.476" v="153" actId="47"/>
-        <pc:sldMkLst>
-          <pc:docMk/>
-          <pc:sldMk cId="2151930685" sldId="409"/>
-        </pc:sldMkLst>
-      </pc:sldChg>
-      <pc:sldChg chg="modSp modAnim">
-        <pc:chgData name="Adrien Osakwe" userId="7a3e290c-eb83-484b-8e3d-d46ef2333477" providerId="ADAL" clId="{6FBBC003-63E5-4DAA-8405-CD7EEDECBC2E}" dt="2024-02-14T04:29:30.520" v="3292"/>
-        <pc:sldMkLst>
-          <pc:docMk/>
-          <pc:sldMk cId="98069860" sldId="411"/>
-        </pc:sldMkLst>
-      </pc:sldChg>
-      <pc:sldChg chg="modSp mod">
-        <pc:chgData name="Adrien Osakwe" userId="7a3e290c-eb83-484b-8e3d-d46ef2333477" providerId="ADAL" clId="{6FBBC003-63E5-4DAA-8405-CD7EEDECBC2E}" dt="2024-02-14T00:52:12.308" v="1544" actId="20577"/>
-        <pc:sldMkLst>
-          <pc:docMk/>
-          <pc:sldMk cId="4111024130" sldId="412"/>
-        </pc:sldMkLst>
-      </pc:sldChg>
-      <pc:sldChg chg="modSp mod">
-        <pc:chgData name="Adrien Osakwe" userId="7a3e290c-eb83-484b-8e3d-d46ef2333477" providerId="ADAL" clId="{6FBBC003-63E5-4DAA-8405-CD7EEDECBC2E}" dt="2024-02-14T01:46:58.308" v="2599" actId="207"/>
-        <pc:sldMkLst>
-          <pc:docMk/>
-          <pc:sldMk cId="2428786264" sldId="413"/>
-        </pc:sldMkLst>
-      </pc:sldChg>
-      <pc:sldChg chg="modSp mod">
-        <pc:chgData name="Adrien Osakwe" userId="7a3e290c-eb83-484b-8e3d-d46ef2333477" providerId="ADAL" clId="{6FBBC003-63E5-4DAA-8405-CD7EEDECBC2E}" dt="2024-02-14T04:01:19.276" v="3242" actId="207"/>
-        <pc:sldMkLst>
-          <pc:docMk/>
-          <pc:sldMk cId="4293633584" sldId="414"/>
-        </pc:sldMkLst>
-      </pc:sldChg>
-      <pc:sldChg chg="modSp mod">
-        <pc:chgData name="Adrien Osakwe" userId="7a3e290c-eb83-484b-8e3d-d46ef2333477" providerId="ADAL" clId="{6FBBC003-63E5-4DAA-8405-CD7EEDECBC2E}" dt="2024-02-14T04:08:15.728" v="3243" actId="207"/>
-        <pc:sldMkLst>
-          <pc:docMk/>
-          <pc:sldMk cId="1189678410" sldId="415"/>
-        </pc:sldMkLst>
-      </pc:sldChg>
-      <pc:sldChg chg="modSp mod">
-        <pc:chgData name="Adrien Osakwe" userId="7a3e290c-eb83-484b-8e3d-d46ef2333477" providerId="ADAL" clId="{6FBBC003-63E5-4DAA-8405-CD7EEDECBC2E}" dt="2024-02-14T04:11:47.623" v="3246" actId="207"/>
-        <pc:sldMkLst>
-          <pc:docMk/>
-          <pc:sldMk cId="2444987695" sldId="416"/>
-        </pc:sldMkLst>
-      </pc:sldChg>
-      <pc:sldChg chg="modSp add del mod">
-        <pc:chgData name="Adrien Osakwe" userId="7a3e290c-eb83-484b-8e3d-d46ef2333477" providerId="ADAL" clId="{6FBBC003-63E5-4DAA-8405-CD7EEDECBC2E}" dt="2024-02-14T03:55:29.429" v="2969" actId="207"/>
-        <pc:sldMkLst>
-          <pc:docMk/>
-          <pc:sldMk cId="439019801" sldId="417"/>
-        </pc:sldMkLst>
-      </pc:sldChg>
-      <pc:sldChg chg="modSp del mod">
-        <pc:chgData name="Adrien Osakwe" userId="7a3e290c-eb83-484b-8e3d-d46ef2333477" providerId="ADAL" clId="{6FBBC003-63E5-4DAA-8405-CD7EEDECBC2E}" dt="2024-02-14T02:39:17.480" v="2962" actId="2696"/>
-        <pc:sldMkLst>
-          <pc:docMk/>
-          <pc:sldMk cId="2634833872" sldId="417"/>
-        </pc:sldMkLst>
-      </pc:sldChg>
-      <pc:sldChg chg="modSp mod">
-        <pc:chgData name="Adrien Osakwe" userId="7a3e290c-eb83-484b-8e3d-d46ef2333477" providerId="ADAL" clId="{6FBBC003-63E5-4DAA-8405-CD7EEDECBC2E}" dt="2024-02-14T04:11:36.152" v="3244" actId="207"/>
-        <pc:sldMkLst>
-          <pc:docMk/>
-          <pc:sldMk cId="1346597622" sldId="418"/>
-        </pc:sldMkLst>
-      </pc:sldChg>
-      <pc:sldChg chg="add">
-        <pc:chgData name="Adrien Osakwe" userId="7a3e290c-eb83-484b-8e3d-d46ef2333477" providerId="ADAL" clId="{6FBBC003-63E5-4DAA-8405-CD7EEDECBC2E}" dt="2024-02-14T03:45:21.495" v="2967"/>
-        <pc:sldMkLst>
-          <pc:docMk/>
-          <pc:sldMk cId="513973128" sldId="419"/>
-        </pc:sldMkLst>
-      </pc:sldChg>
-      <pc:sldChg chg="modSp del mod">
-        <pc:chgData name="Adrien Osakwe" userId="7a3e290c-eb83-484b-8e3d-d46ef2333477" providerId="ADAL" clId="{6FBBC003-63E5-4DAA-8405-CD7EEDECBC2E}" dt="2024-02-14T02:39:17.480" v="2962" actId="2696"/>
-        <pc:sldMkLst>
-          <pc:docMk/>
-          <pc:sldMk cId="2227572526" sldId="419"/>
-        </pc:sldMkLst>
-      </pc:sldChg>
-      <pc:sldChg chg="add del">
-        <pc:chgData name="Adrien Osakwe" userId="7a3e290c-eb83-484b-8e3d-d46ef2333477" providerId="ADAL" clId="{6FBBC003-63E5-4DAA-8405-CD7EEDECBC2E}" dt="2024-02-14T03:45:16.997" v="2966" actId="2696"/>
-        <pc:sldMkLst>
-          <pc:docMk/>
-          <pc:sldMk cId="3785448673" sldId="419"/>
-        </pc:sldMkLst>
-      </pc:sldChg>
-      <pc:sldChg chg="modSp mod">
-        <pc:chgData name="Adrien Osakwe" userId="7a3e290c-eb83-484b-8e3d-d46ef2333477" providerId="ADAL" clId="{6FBBC003-63E5-4DAA-8405-CD7EEDECBC2E}" dt="2024-02-13T14:48:56.653" v="217" actId="113"/>
-        <pc:sldMkLst>
-          <pc:docMk/>
-          <pc:sldMk cId="1880436319" sldId="420"/>
-        </pc:sldMkLst>
-      </pc:sldChg>
-      <pc:sldChg chg="modSp mod ord">
-        <pc:chgData name="Adrien Osakwe" userId="7a3e290c-eb83-484b-8e3d-d46ef2333477" providerId="ADAL" clId="{6FBBC003-63E5-4DAA-8405-CD7EEDECBC2E}" dt="2024-02-14T02:28:44.632" v="2646"/>
-        <pc:sldMkLst>
-          <pc:docMk/>
-          <pc:sldMk cId="1410062465" sldId="421"/>
-        </pc:sldMkLst>
-      </pc:sldChg>
-      <pc:sldChg chg="modSp mod ord">
-        <pc:chgData name="Adrien Osakwe" userId="7a3e290c-eb83-484b-8e3d-d46ef2333477" providerId="ADAL" clId="{6FBBC003-63E5-4DAA-8405-CD7EEDECBC2E}" dt="2024-02-14T02:27:47.922" v="2644"/>
-        <pc:sldMkLst>
-          <pc:docMk/>
-          <pc:sldMk cId="108575568" sldId="423"/>
-        </pc:sldMkLst>
-      </pc:sldChg>
-      <pc:sldChg chg="modSp mod">
-        <pc:chgData name="Adrien Osakwe" userId="7a3e290c-eb83-484b-8e3d-d46ef2333477" providerId="ADAL" clId="{6FBBC003-63E5-4DAA-8405-CD7EEDECBC2E}" dt="2024-02-14T02:08:06.158" v="2642" actId="5736"/>
-        <pc:sldMkLst>
-          <pc:docMk/>
-          <pc:sldMk cId="1212990023" sldId="425"/>
-        </pc:sldMkLst>
-      </pc:sldChg>
-      <pc:sldChg chg="modSp mod">
-        <pc:chgData name="Adrien Osakwe" userId="7a3e290c-eb83-484b-8e3d-d46ef2333477" providerId="ADAL" clId="{6FBBC003-63E5-4DAA-8405-CD7EEDECBC2E}" dt="2024-02-13T14:48:59.570" v="218" actId="113"/>
-        <pc:sldMkLst>
-          <pc:docMk/>
-          <pc:sldMk cId="3223212124" sldId="426"/>
-        </pc:sldMkLst>
-      </pc:sldChg>
-      <pc:sldChg chg="modSp mod">
-        <pc:chgData name="Adrien Osakwe" userId="7a3e290c-eb83-484b-8e3d-d46ef2333477" providerId="ADAL" clId="{6FBBC003-63E5-4DAA-8405-CD7EEDECBC2E}" dt="2024-02-13T14:49:02.150" v="219" actId="113"/>
-        <pc:sldMkLst>
-          <pc:docMk/>
-          <pc:sldMk cId="4245281921" sldId="428"/>
-        </pc:sldMkLst>
-      </pc:sldChg>
-      <pc:sldChg chg="modSp mod">
-        <pc:chgData name="Adrien Osakwe" userId="7a3e290c-eb83-484b-8e3d-d46ef2333477" providerId="ADAL" clId="{6FBBC003-63E5-4DAA-8405-CD7EEDECBC2E}" dt="2024-02-13T14:49:04.485" v="220" actId="113"/>
-        <pc:sldMkLst>
-          <pc:docMk/>
-          <pc:sldMk cId="3281809004" sldId="429"/>
-        </pc:sldMkLst>
-      </pc:sldChg>
-      <pc:sldChg chg="modSp mod">
-        <pc:chgData name="Adrien Osakwe" userId="7a3e290c-eb83-484b-8e3d-d46ef2333477" providerId="ADAL" clId="{6FBBC003-63E5-4DAA-8405-CD7EEDECBC2E}" dt="2024-02-13T14:48:10.877" v="205" actId="113"/>
-        <pc:sldMkLst>
-          <pc:docMk/>
-          <pc:sldMk cId="2267835305" sldId="430"/>
-        </pc:sldMkLst>
-      </pc:sldChg>
-      <pc:sldChg chg="modSp mod">
-        <pc:chgData name="Adrien Osakwe" userId="7a3e290c-eb83-484b-8e3d-d46ef2333477" providerId="ADAL" clId="{6FBBC003-63E5-4DAA-8405-CD7EEDECBC2E}" dt="2024-02-14T01:58:50.083" v="2635" actId="5736"/>
-        <pc:sldMkLst>
-          <pc:docMk/>
-          <pc:sldMk cId="2889724734" sldId="431"/>
-        </pc:sldMkLst>
-      </pc:sldChg>
-      <pc:sldChg chg="modSp mod">
-        <pc:chgData name="Adrien Osakwe" userId="7a3e290c-eb83-484b-8e3d-d46ef2333477" providerId="ADAL" clId="{6FBBC003-63E5-4DAA-8405-CD7EEDECBC2E}" dt="2024-02-14T01:26:31.104" v="2443" actId="5736"/>
-        <pc:sldMkLst>
-          <pc:docMk/>
-          <pc:sldMk cId="701040556" sldId="432"/>
-        </pc:sldMkLst>
-      </pc:sldChg>
-      <pc:sldChg chg="del">
-        <pc:chgData name="Adrien Osakwe" userId="7a3e290c-eb83-484b-8e3d-d46ef2333477" providerId="ADAL" clId="{6FBBC003-63E5-4DAA-8405-CD7EEDECBC2E}" dt="2024-02-14T02:34:21.485" v="2647" actId="47"/>
-        <pc:sldMkLst>
-          <pc:docMk/>
-          <pc:sldMk cId="3314207375" sldId="433"/>
-        </pc:sldMkLst>
-      </pc:sldChg>
-      <pc:sldChg chg="del">
-        <pc:chgData name="Adrien Osakwe" userId="7a3e290c-eb83-484b-8e3d-d46ef2333477" providerId="ADAL" clId="{6FBBC003-63E5-4DAA-8405-CD7EEDECBC2E}" dt="2024-02-14T02:39:17.480" v="2962" actId="2696"/>
-        <pc:sldMkLst>
-          <pc:docMk/>
-          <pc:sldMk cId="1029239482" sldId="439"/>
-        </pc:sldMkLst>
-      </pc:sldChg>
-      <pc:sldChg chg="add ord">
-        <pc:chgData name="Adrien Osakwe" userId="7a3e290c-eb83-484b-8e3d-d46ef2333477" providerId="ADAL" clId="{6FBBC003-63E5-4DAA-8405-CD7EEDECBC2E}" dt="2024-02-14T04:36:45.184" v="3356"/>
-        <pc:sldMkLst>
-          <pc:docMk/>
-          <pc:sldMk cId="2459570573" sldId="439"/>
-        </pc:sldMkLst>
-      </pc:sldChg>
-      <pc:sldChg chg="modSp mod">
-        <pc:chgData name="Adrien Osakwe" userId="7a3e290c-eb83-484b-8e3d-d46ef2333477" providerId="ADAL" clId="{6FBBC003-63E5-4DAA-8405-CD7EEDECBC2E}" dt="2024-02-14T04:11:41.916" v="3245" actId="207"/>
-        <pc:sldMkLst>
-          <pc:docMk/>
-          <pc:sldMk cId="4003718646" sldId="441"/>
-        </pc:sldMkLst>
-      </pc:sldChg>
-      <pc:sldChg chg="modSp mod">
-        <pc:chgData name="Adrien Osakwe" userId="7a3e290c-eb83-484b-8e3d-d46ef2333477" providerId="ADAL" clId="{6FBBC003-63E5-4DAA-8405-CD7EEDECBC2E}" dt="2024-02-14T02:03:05.199" v="2637" actId="5736"/>
-        <pc:sldMkLst>
-          <pc:docMk/>
-          <pc:sldMk cId="1491768522" sldId="442"/>
-        </pc:sldMkLst>
-      </pc:sldChg>
-      <pc:sldChg chg="modSp del mod">
-        <pc:chgData name="Adrien Osakwe" userId="7a3e290c-eb83-484b-8e3d-d46ef2333477" providerId="ADAL" clId="{6FBBC003-63E5-4DAA-8405-CD7EEDECBC2E}" dt="2024-02-14T02:39:17.480" v="2962" actId="2696"/>
-        <pc:sldMkLst>
-          <pc:docMk/>
-          <pc:sldMk cId="1920594278" sldId="443"/>
-        </pc:sldMkLst>
-      </pc:sldChg>
-      <pc:sldChg chg="add">
-        <pc:chgData name="Adrien Osakwe" userId="7a3e290c-eb83-484b-8e3d-d46ef2333477" providerId="ADAL" clId="{6FBBC003-63E5-4DAA-8405-CD7EEDECBC2E}" dt="2024-02-14T02:39:24.219" v="2963"/>
-        <pc:sldMkLst>
-          <pc:docMk/>
-          <pc:sldMk cId="4191426825" sldId="443"/>
-        </pc:sldMkLst>
-      </pc:sldChg>
-      <pc:sldChg chg="addSp delSp add mod">
-        <pc:chgData name="Adrien Osakwe" userId="7a3e290c-eb83-484b-8e3d-d46ef2333477" providerId="ADAL" clId="{6FBBC003-63E5-4DAA-8405-CD7EEDECBC2E}" dt="2024-02-14T04:33:50.744" v="3305" actId="22"/>
-        <pc:sldMkLst>
-          <pc:docMk/>
-          <pc:sldMk cId="1956759140" sldId="444"/>
-        </pc:sldMkLst>
-      </pc:sldChg>
-      <pc:sldChg chg="modSp del mod">
-        <pc:chgData name="Adrien Osakwe" userId="7a3e290c-eb83-484b-8e3d-d46ef2333477" providerId="ADAL" clId="{6FBBC003-63E5-4DAA-8405-CD7EEDECBC2E}" dt="2024-02-14T02:39:17.480" v="2962" actId="2696"/>
-        <pc:sldMkLst>
-          <pc:docMk/>
-          <pc:sldMk cId="3928505110" sldId="444"/>
-        </pc:sldMkLst>
-      </pc:sldChg>
-      <pc:sldChg chg="add del">
-        <pc:chgData name="Adrien Osakwe" userId="7a3e290c-eb83-484b-8e3d-d46ef2333477" providerId="ADAL" clId="{6FBBC003-63E5-4DAA-8405-CD7EEDECBC2E}" dt="2024-02-14T03:45:16.997" v="2966" actId="2696"/>
-        <pc:sldMkLst>
-          <pc:docMk/>
-          <pc:sldMk cId="3288183379" sldId="445"/>
-        </pc:sldMkLst>
-      </pc:sldChg>
-      <pc:sldChg chg="modSp del mod">
-        <pc:chgData name="Adrien Osakwe" userId="7a3e290c-eb83-484b-8e3d-d46ef2333477" providerId="ADAL" clId="{6FBBC003-63E5-4DAA-8405-CD7EEDECBC2E}" dt="2024-02-14T02:39:17.480" v="2962" actId="2696"/>
-        <pc:sldMkLst>
-          <pc:docMk/>
-          <pc:sldMk cId="3964093048" sldId="445"/>
-        </pc:sldMkLst>
-      </pc:sldChg>
-      <pc:sldChg chg="add">
-        <pc:chgData name="Adrien Osakwe" userId="7a3e290c-eb83-484b-8e3d-d46ef2333477" providerId="ADAL" clId="{6FBBC003-63E5-4DAA-8405-CD7EEDECBC2E}" dt="2024-02-14T03:45:21.495" v="2967"/>
-        <pc:sldMkLst>
-          <pc:docMk/>
-          <pc:sldMk cId="4109084214" sldId="445"/>
-        </pc:sldMkLst>
-      </pc:sldChg>
-      <pc:sldChg chg="modSp mod">
-        <pc:chgData name="Adrien Osakwe" userId="7a3e290c-eb83-484b-8e3d-d46ef2333477" providerId="ADAL" clId="{6FBBC003-63E5-4DAA-8405-CD7EEDECBC2E}" dt="2024-02-13T14:49:28.195" v="227" actId="113"/>
-        <pc:sldMkLst>
-          <pc:docMk/>
-          <pc:sldMk cId="250423083" sldId="446"/>
-        </pc:sldMkLst>
-      </pc:sldChg>
-      <pc:sldChg chg="modSp mod">
-        <pc:chgData name="Adrien Osakwe" userId="7a3e290c-eb83-484b-8e3d-d46ef2333477" providerId="ADAL" clId="{6FBBC003-63E5-4DAA-8405-CD7EEDECBC2E}" dt="2024-02-13T14:49:35.677" v="229" actId="113"/>
-        <pc:sldMkLst>
-          <pc:docMk/>
-          <pc:sldMk cId="241318341" sldId="447"/>
-        </pc:sldMkLst>
-      </pc:sldChg>
-      <pc:sldChg chg="modSp mod">
-        <pc:chgData name="Adrien Osakwe" userId="7a3e290c-eb83-484b-8e3d-d46ef2333477" providerId="ADAL" clId="{6FBBC003-63E5-4DAA-8405-CD7EEDECBC2E}" dt="2024-02-13T14:49:33.805" v="228" actId="113"/>
-        <pc:sldMkLst>
-          <pc:docMk/>
-          <pc:sldMk cId="3470290159" sldId="448"/>
-        </pc:sldMkLst>
-      </pc:sldChg>
-      <pc:sldChg chg="modSp mod">
-        <pc:chgData name="Adrien Osakwe" userId="7a3e290c-eb83-484b-8e3d-d46ef2333477" providerId="ADAL" clId="{6FBBC003-63E5-4DAA-8405-CD7EEDECBC2E}" dt="2024-02-13T14:49:38.270" v="230" actId="113"/>
-        <pc:sldMkLst>
-          <pc:docMk/>
-          <pc:sldMk cId="4269158014" sldId="449"/>
-        </pc:sldMkLst>
-      </pc:sldChg>
-      <pc:sldChg chg="modSp mod">
-        <pc:chgData name="Adrien Osakwe" userId="7a3e290c-eb83-484b-8e3d-d46ef2333477" providerId="ADAL" clId="{6FBBC003-63E5-4DAA-8405-CD7EEDECBC2E}" dt="2024-02-13T14:49:42.160" v="231" actId="113"/>
-        <pc:sldMkLst>
-          <pc:docMk/>
-          <pc:sldMk cId="3813321520" sldId="450"/>
-        </pc:sldMkLst>
-      </pc:sldChg>
-      <pc:sldChg chg="modSp mod">
-        <pc:chgData name="Adrien Osakwe" userId="7a3e290c-eb83-484b-8e3d-d46ef2333477" providerId="ADAL" clId="{6FBBC003-63E5-4DAA-8405-CD7EEDECBC2E}" dt="2024-02-13T14:49:45.404" v="232" actId="113"/>
-        <pc:sldMkLst>
-          <pc:docMk/>
-          <pc:sldMk cId="450508802" sldId="451"/>
-        </pc:sldMkLst>
-      </pc:sldChg>
-      <pc:sldChg chg="modSp mod">
-        <pc:chgData name="Adrien Osakwe" userId="7a3e290c-eb83-484b-8e3d-d46ef2333477" providerId="ADAL" clId="{6FBBC003-63E5-4DAA-8405-CD7EEDECBC2E}" dt="2024-02-13T14:49:47.728" v="233" actId="113"/>
-        <pc:sldMkLst>
-          <pc:docMk/>
-          <pc:sldMk cId="1454694018" sldId="452"/>
-        </pc:sldMkLst>
-      </pc:sldChg>
-      <pc:sldChg chg="del">
-        <pc:chgData name="Adrien Osakwe" userId="7a3e290c-eb83-484b-8e3d-d46ef2333477" providerId="ADAL" clId="{6FBBC003-63E5-4DAA-8405-CD7EEDECBC2E}" dt="2024-02-13T14:50:03.708" v="235" actId="47"/>
-        <pc:sldMkLst>
-          <pc:docMk/>
-          <pc:sldMk cId="920428551" sldId="455"/>
-        </pc:sldMkLst>
-      </pc:sldChg>
-      <pc:sldChg chg="modSp new mod ord">
-        <pc:chgData name="Adrien Osakwe" userId="7a3e290c-eb83-484b-8e3d-d46ef2333477" providerId="ADAL" clId="{6FBBC003-63E5-4DAA-8405-CD7EEDECBC2E}" dt="2024-02-13T14:51:12.178" v="398"/>
-        <pc:sldMkLst>
-          <pc:docMk/>
-          <pc:sldMk cId="3549088750" sldId="455"/>
-        </pc:sldMkLst>
-      </pc:sldChg>
-      <pc:sldChg chg="new del ord">
-        <pc:chgData name="Adrien Osakwe" userId="7a3e290c-eb83-484b-8e3d-d46ef2333477" providerId="ADAL" clId="{6FBBC003-63E5-4DAA-8405-CD7EEDECBC2E}" dt="2024-02-13T19:36:25.973" v="404" actId="47"/>
-        <pc:sldMkLst>
-          <pc:docMk/>
-          <pc:sldMk cId="243438360" sldId="456"/>
-        </pc:sldMkLst>
-      </pc:sldChg>
-      <pc:sldChg chg="new del">
-        <pc:chgData name="Adrien Osakwe" userId="7a3e290c-eb83-484b-8e3d-d46ef2333477" providerId="ADAL" clId="{6FBBC003-63E5-4DAA-8405-CD7EEDECBC2E}" dt="2024-02-13T19:36:18.868" v="400" actId="680"/>
-        <pc:sldMkLst>
-          <pc:docMk/>
-          <pc:sldMk cId="2037220900" sldId="456"/>
-        </pc:sldMkLst>
-      </pc:sldChg>
-      <pc:sldChg chg="del">
-        <pc:chgData name="Adrien Osakwe" userId="7a3e290c-eb83-484b-8e3d-d46ef2333477" providerId="ADAL" clId="{6FBBC003-63E5-4DAA-8405-CD7EEDECBC2E}" dt="2024-02-13T14:50:02.022" v="234" actId="47"/>
-        <pc:sldMkLst>
-          <pc:docMk/>
-          <pc:sldMk cId="2446723814" sldId="456"/>
-        </pc:sldMkLst>
-      </pc:sldChg>
-      <pc:sldChg chg="modSp new del mod ord">
-        <pc:chgData name="Adrien Osakwe" userId="7a3e290c-eb83-484b-8e3d-d46ef2333477" providerId="ADAL" clId="{6FBBC003-63E5-4DAA-8405-CD7EEDECBC2E}" dt="2024-02-14T04:12:39.422" v="3248" actId="47"/>
-        <pc:sldMkLst>
-          <pc:docMk/>
-          <pc:sldMk cId="3430613274" sldId="456"/>
-        </pc:sldMkLst>
-      </pc:sldChg>
-      <pc:sldChg chg="modSp new mod modAnim">
-        <pc:chgData name="Adrien Osakwe" userId="7a3e290c-eb83-484b-8e3d-d46ef2333477" providerId="ADAL" clId="{6FBBC003-63E5-4DAA-8405-CD7EEDECBC2E}" dt="2024-02-14T04:29:53.166" v="3294"/>
-        <pc:sldMkLst>
-          <pc:docMk/>
-          <pc:sldMk cId="4274729827" sldId="457"/>
-        </pc:sldMkLst>
-      </pc:sldChg>
-      <pc:sldChg chg="addSp delSp modSp new mod">
-        <pc:chgData name="Adrien Osakwe" userId="7a3e290c-eb83-484b-8e3d-d46ef2333477" providerId="ADAL" clId="{6FBBC003-63E5-4DAA-8405-CD7EEDECBC2E}" dt="2024-02-14T04:45:28.242" v="3380" actId="1076"/>
-        <pc:sldMkLst>
-          <pc:docMk/>
-          <pc:sldMk cId="3241240956" sldId="458"/>
-        </pc:sldMkLst>
-      </pc:sldChg>
-      <pc:sldChg chg="add del">
-        <pc:chgData name="Adrien Osakwe" userId="7a3e290c-eb83-484b-8e3d-d46ef2333477" providerId="ADAL" clId="{6FBBC003-63E5-4DAA-8405-CD7EEDECBC2E}" dt="2024-02-13T22:15:34.169" v="1126" actId="47"/>
-        <pc:sldMkLst>
-          <pc:docMk/>
-          <pc:sldMk cId="3582742575" sldId="458"/>
-        </pc:sldMkLst>
-      </pc:sldChg>
-      <pc:sldChg chg="new del">
-        <pc:chgData name="Adrien Osakwe" userId="7a3e290c-eb83-484b-8e3d-d46ef2333477" providerId="ADAL" clId="{6FBBC003-63E5-4DAA-8405-CD7EEDECBC2E}" dt="2024-02-14T00:47:16.043" v="1369" actId="47"/>
-        <pc:sldMkLst>
-          <pc:docMk/>
-          <pc:sldMk cId="1250385595" sldId="459"/>
-        </pc:sldMkLst>
-      </pc:sldChg>
-      <pc:sldChg chg="new del">
-        <pc:chgData name="Adrien Osakwe" userId="7a3e290c-eb83-484b-8e3d-d46ef2333477" providerId="ADAL" clId="{6FBBC003-63E5-4DAA-8405-CD7EEDECBC2E}" dt="2024-02-14T00:47:11.127" v="1367" actId="47"/>
-        <pc:sldMkLst>
-          <pc:docMk/>
-          <pc:sldMk cId="2002959969" sldId="459"/>
-        </pc:sldMkLst>
-      </pc:sldChg>
-      <pc:sldChg chg="modSp new mod">
-        <pc:chgData name="Adrien Osakwe" userId="7a3e290c-eb83-484b-8e3d-d46ef2333477" providerId="ADAL" clId="{6FBBC003-63E5-4DAA-8405-CD7EEDECBC2E}" dt="2024-02-14T04:27:33.333" v="3277" actId="20577"/>
-        <pc:sldMkLst>
-          <pc:docMk/>
-          <pc:sldMk cId="2253242404" sldId="459"/>
-        </pc:sldMkLst>
-      </pc:sldChg>
-      <pc:sldChg chg="new del">
-        <pc:chgData name="Adrien Osakwe" userId="7a3e290c-eb83-484b-8e3d-d46ef2333477" providerId="ADAL" clId="{6FBBC003-63E5-4DAA-8405-CD7EEDECBC2E}" dt="2024-02-14T00:52:25.276" v="1546" actId="47"/>
-        <pc:sldMkLst>
-          <pc:docMk/>
-          <pc:sldMk cId="2113721749" sldId="460"/>
-        </pc:sldMkLst>
-      </pc:sldChg>
-      <pc:sldChg chg="addSp delSp modSp new mod modAnim">
-        <pc:chgData name="Adrien Osakwe" userId="7a3e290c-eb83-484b-8e3d-d46ef2333477" providerId="ADAL" clId="{6FBBC003-63E5-4DAA-8405-CD7EEDECBC2E}" dt="2024-02-14T04:28:12.365" v="3288" actId="12"/>
-        <pc:sldMkLst>
-          <pc:docMk/>
-          <pc:sldMk cId="4225761275" sldId="460"/>
-        </pc:sldMkLst>
-      </pc:sldChg>
-      <pc:sldChg chg="addSp modSp new del mod">
-        <pc:chgData name="Adrien Osakwe" userId="7a3e290c-eb83-484b-8e3d-d46ef2333477" providerId="ADAL" clId="{6FBBC003-63E5-4DAA-8405-CD7EEDECBC2E}" dt="2024-02-14T00:59:52.860" v="1983" actId="47"/>
-        <pc:sldMkLst>
-          <pc:docMk/>
-          <pc:sldMk cId="69382932" sldId="461"/>
-        </pc:sldMkLst>
-      </pc:sldChg>
-      <pc:sldChg chg="addSp delSp modSp new mod modAnim">
-        <pc:chgData name="Adrien Osakwe" userId="7a3e290c-eb83-484b-8e3d-d46ef2333477" providerId="ADAL" clId="{6FBBC003-63E5-4DAA-8405-CD7EEDECBC2E}" dt="2024-02-14T04:30:08.580" v="3296"/>
-        <pc:sldMkLst>
-          <pc:docMk/>
-          <pc:sldMk cId="2801728874" sldId="461"/>
-        </pc:sldMkLst>
-      </pc:sldChg>
-      <pc:sldChg chg="addSp delSp modSp new mod">
-        <pc:chgData name="Adrien Osakwe" userId="7a3e290c-eb83-484b-8e3d-d46ef2333477" providerId="ADAL" clId="{6FBBC003-63E5-4DAA-8405-CD7EEDECBC2E}" dt="2024-02-14T01:41:39.448" v="2595" actId="14100"/>
-        <pc:sldMkLst>
-          <pc:docMk/>
-          <pc:sldMk cId="2048934135" sldId="462"/>
-        </pc:sldMkLst>
-      </pc:sldChg>
-      <pc:sldChg chg="modSp new del mod">
-        <pc:chgData name="Adrien Osakwe" userId="7a3e290c-eb83-484b-8e3d-d46ef2333477" providerId="ADAL" clId="{6FBBC003-63E5-4DAA-8405-CD7EEDECBC2E}" dt="2024-02-14T02:34:52.397" v="2655" actId="47"/>
-        <pc:sldMkLst>
-          <pc:docMk/>
-          <pc:sldMk cId="1107828797" sldId="463"/>
-        </pc:sldMkLst>
-      </pc:sldChg>
-      <pc:sldChg chg="modSp new mod modShow">
-        <pc:chgData name="Adrien Osakwe" userId="7a3e290c-eb83-484b-8e3d-d46ef2333477" providerId="ADAL" clId="{6FBBC003-63E5-4DAA-8405-CD7EEDECBC2E}" dt="2024-02-14T16:01:30.496" v="3472" actId="729"/>
-        <pc:sldMkLst>
-          <pc:docMk/>
-          <pc:sldMk cId="1154444114" sldId="463"/>
-        </pc:sldMkLst>
-      </pc:sldChg>
-      <pc:sldChg chg="modSp new mod modAnim">
-        <pc:chgData name="Adrien Osakwe" userId="7a3e290c-eb83-484b-8e3d-d46ef2333477" providerId="ADAL" clId="{6FBBC003-63E5-4DAA-8405-CD7EEDECBC2E}" dt="2024-02-14T04:36:09.146" v="3354"/>
-        <pc:sldMkLst>
-          <pc:docMk/>
-          <pc:sldMk cId="3316432801" sldId="464"/>
-        </pc:sldMkLst>
-      </pc:sldChg>
-      <pc:sldChg chg="modSp new del mod">
-        <pc:chgData name="Adrien Osakwe" userId="7a3e290c-eb83-484b-8e3d-d46ef2333477" providerId="ADAL" clId="{6FBBC003-63E5-4DAA-8405-CD7EEDECBC2E}" dt="2024-02-14T03:45:23.973" v="2968" actId="47"/>
-        <pc:sldMkLst>
-          <pc:docMk/>
-          <pc:sldMk cId="3391832148" sldId="465"/>
-        </pc:sldMkLst>
-      </pc:sldChg>
-      <pc:sldChg chg="modSp new mod">
-        <pc:chgData name="Adrien Osakwe" userId="7a3e290c-eb83-484b-8e3d-d46ef2333477" providerId="ADAL" clId="{6FBBC003-63E5-4DAA-8405-CD7EEDECBC2E}" dt="2024-02-14T03:58:38.991" v="3241" actId="113"/>
-        <pc:sldMkLst>
-          <pc:docMk/>
-          <pc:sldMk cId="3455158526" sldId="466"/>
-        </pc:sldMkLst>
-      </pc:sldChg>
-      <pc:sldChg chg="modSp add mod">
-        <pc:chgData name="Adrien Osakwe" userId="7a3e290c-eb83-484b-8e3d-d46ef2333477" providerId="ADAL" clId="{6FBBC003-63E5-4DAA-8405-CD7EEDECBC2E}" dt="2024-02-14T04:50:25.132" v="3471" actId="113"/>
-        <pc:sldMkLst>
-          <pc:docMk/>
-          <pc:sldMk cId="1696923615" sldId="467"/>
-        </pc:sldMkLst>
-      </pc:sldChg>
-      <pc:sldChg chg="addSp delSp modSp new mod">
-        <pc:chgData name="Adrien Osakwe" userId="7a3e290c-eb83-484b-8e3d-d46ef2333477" providerId="ADAL" clId="{6FBBC003-63E5-4DAA-8405-CD7EEDECBC2E}" dt="2024-02-14T04:31:51.966" v="3303" actId="14100"/>
-        <pc:sldMkLst>
-          <pc:docMk/>
-          <pc:sldMk cId="1381298653" sldId="468"/>
-        </pc:sldMkLst>
-      </pc:sldChg>
-      <pc:sldChg chg="addSp delSp modSp add mod">
-        <pc:chgData name="Adrien Osakwe" userId="7a3e290c-eb83-484b-8e3d-d46ef2333477" providerId="ADAL" clId="{6FBBC003-63E5-4DAA-8405-CD7EEDECBC2E}" dt="2024-02-14T04:35:28.149" v="3351" actId="14100"/>
-        <pc:sldMkLst>
-          <pc:docMk/>
-          <pc:sldMk cId="1069205501" sldId="469"/>
-        </pc:sldMkLst>
-      </pc:sldChg>
-      <pc:sldChg chg="addSp modSp new mod ord">
-        <pc:chgData name="Adrien Osakwe" userId="7a3e290c-eb83-484b-8e3d-d46ef2333477" providerId="ADAL" clId="{6FBBC003-63E5-4DAA-8405-CD7EEDECBC2E}" dt="2024-02-14T04:49:21.479" v="3469" actId="1036"/>
-        <pc:sldMkLst>
-          <pc:docMk/>
-          <pc:sldMk cId="495471787" sldId="470"/>
-        </pc:sldMkLst>
-      </pc:sldChg>
-      <pc:sldChg chg="new del ord">
-        <pc:chgData name="Adrien Osakwe" userId="7a3e290c-eb83-484b-8e3d-d46ef2333477" providerId="ADAL" clId="{6FBBC003-63E5-4DAA-8405-CD7EEDECBC2E}" dt="2024-02-14T04:45:50.059" v="3384" actId="47"/>
-        <pc:sldMkLst>
-          <pc:docMk/>
-          <pc:sldMk cId="3563781567" sldId="470"/>
-        </pc:sldMkLst>
-      </pc:sldChg>
-    </pc:docChg>
-  </pc:docChgLst>
-</pc:chgInfo>
-</file>
-
 <file path=ppt/notesMasters/notesMaster1.xml><?xml version="1.0" encoding="utf-8"?>
 <p:notesMaster xmlns:a="http://schemas.openxmlformats.org/drawingml/2006/main" xmlns:r="http://schemas.openxmlformats.org/officeDocument/2006/relationships" xmlns:p="http://schemas.openxmlformats.org/presentationml/2006/main">
   <p:cSld>
@@ -2414,7 +353,7 @@
           <a:p>
             <a:fld id="{217E5156-1B5D-054E-B5B2-E1B1BA160252}" type="datetimeFigureOut">
               <a:rPr lang="fr-FR" smtClean="0"/>
-              <a:t>13/02/2025</a:t>
+              <a:t>14/04/2025</a:t>
             </a:fld>
             <a:endParaRPr lang="fr-FR"/>
           </a:p>
@@ -2554,15 +493,10 @@
         </p:txBody>
       </p:sp>
     </p:spTree>
-    <p:extLst>
-      <p:ext uri="{BB962C8B-B14F-4D97-AF65-F5344CB8AC3E}">
-        <p14:creationId xmlns:p14="http://schemas.microsoft.com/office/powerpoint/2010/main" val="517014248"/>
-      </p:ext>
-    </p:extLst>
   </p:cSld>
   <p:clrMap bg1="lt1" tx1="dk1" bg2="lt2" tx2="dk2" accent1="accent1" accent2="accent2" accent3="accent3" accent4="accent4" accent5="accent5" accent6="accent6" hlink="hlink" folHlink="folHlink"/>
   <p:notesStyle>
-    <a:lvl1pPr marL="0" algn="l" defTabSz="913884" rtl="0" eaLnBrk="1" latinLnBrk="0" hangingPunct="1">
+    <a:lvl1pPr marL="0" algn="l" defTabSz="913765" rtl="0" eaLnBrk="1" latinLnBrk="0" hangingPunct="1">
       <a:defRPr sz="1200" kern="1200">
         <a:solidFill>
           <a:schemeClr val="tx1"/>
@@ -2572,7 +506,7 @@
         <a:cs typeface="+mn-cs"/>
       </a:defRPr>
     </a:lvl1pPr>
-    <a:lvl2pPr marL="456942" algn="l" defTabSz="913884" rtl="0" eaLnBrk="1" latinLnBrk="0" hangingPunct="1">
+    <a:lvl2pPr marL="457200" algn="l" defTabSz="913765" rtl="0" eaLnBrk="1" latinLnBrk="0" hangingPunct="1">
       <a:defRPr sz="1200" kern="1200">
         <a:solidFill>
           <a:schemeClr val="tx1"/>
@@ -2582,7 +516,7 @@
         <a:cs typeface="+mn-cs"/>
       </a:defRPr>
     </a:lvl2pPr>
-    <a:lvl3pPr marL="913884" algn="l" defTabSz="913884" rtl="0" eaLnBrk="1" latinLnBrk="0" hangingPunct="1">
+    <a:lvl3pPr marL="913765" algn="l" defTabSz="913765" rtl="0" eaLnBrk="1" latinLnBrk="0" hangingPunct="1">
       <a:defRPr sz="1200" kern="1200">
         <a:solidFill>
           <a:schemeClr val="tx1"/>
@@ -2592,7 +526,7 @@
         <a:cs typeface="+mn-cs"/>
       </a:defRPr>
     </a:lvl3pPr>
-    <a:lvl4pPr marL="1370825" algn="l" defTabSz="913884" rtl="0" eaLnBrk="1" latinLnBrk="0" hangingPunct="1">
+    <a:lvl4pPr marL="1370965" algn="l" defTabSz="913765" rtl="0" eaLnBrk="1" latinLnBrk="0" hangingPunct="1">
       <a:defRPr sz="1200" kern="1200">
         <a:solidFill>
           <a:schemeClr val="tx1"/>
@@ -2602,7 +536,7 @@
         <a:cs typeface="+mn-cs"/>
       </a:defRPr>
     </a:lvl4pPr>
-    <a:lvl5pPr marL="1827765" algn="l" defTabSz="913884" rtl="0" eaLnBrk="1" latinLnBrk="0" hangingPunct="1">
+    <a:lvl5pPr marL="1827530" algn="l" defTabSz="913765" rtl="0" eaLnBrk="1" latinLnBrk="0" hangingPunct="1">
       <a:defRPr sz="1200" kern="1200">
         <a:solidFill>
           <a:schemeClr val="tx1"/>
@@ -2612,7 +546,7 @@
         <a:cs typeface="+mn-cs"/>
       </a:defRPr>
     </a:lvl5pPr>
-    <a:lvl6pPr marL="2284705" algn="l" defTabSz="913884" rtl="0" eaLnBrk="1" latinLnBrk="0" hangingPunct="1">
+    <a:lvl6pPr marL="2284730" algn="l" defTabSz="913765" rtl="0" eaLnBrk="1" latinLnBrk="0" hangingPunct="1">
       <a:defRPr sz="1200" kern="1200">
         <a:solidFill>
           <a:schemeClr val="tx1"/>
@@ -2622,7 +556,7 @@
         <a:cs typeface="+mn-cs"/>
       </a:defRPr>
     </a:lvl6pPr>
-    <a:lvl7pPr marL="2741647" algn="l" defTabSz="913884" rtl="0" eaLnBrk="1" latinLnBrk="0" hangingPunct="1">
+    <a:lvl7pPr marL="2741930" algn="l" defTabSz="913765" rtl="0" eaLnBrk="1" latinLnBrk="0" hangingPunct="1">
       <a:defRPr sz="1200" kern="1200">
         <a:solidFill>
           <a:schemeClr val="tx1"/>
@@ -2632,7 +566,7 @@
         <a:cs typeface="+mn-cs"/>
       </a:defRPr>
     </a:lvl7pPr>
-    <a:lvl8pPr marL="3198590" algn="l" defTabSz="913884" rtl="0" eaLnBrk="1" latinLnBrk="0" hangingPunct="1">
+    <a:lvl8pPr marL="3198495" algn="l" defTabSz="913765" rtl="0" eaLnBrk="1" latinLnBrk="0" hangingPunct="1">
       <a:defRPr sz="1200" kern="1200">
         <a:solidFill>
           <a:schemeClr val="tx1"/>
@@ -2642,7 +576,7 @@
         <a:cs typeface="+mn-cs"/>
       </a:defRPr>
     </a:lvl8pPr>
-    <a:lvl9pPr marL="3655532" algn="l" defTabSz="913884" rtl="0" eaLnBrk="1" latinLnBrk="0" hangingPunct="1">
+    <a:lvl9pPr marL="3655695" algn="l" defTabSz="913765" rtl="0" eaLnBrk="1" latinLnBrk="0" hangingPunct="1">
       <a:defRPr sz="1200" kern="1200">
         <a:solidFill>
           <a:schemeClr val="tx1"/>
@@ -2728,11 +662,6 @@
         </p:txBody>
       </p:sp>
     </p:spTree>
-    <p:extLst>
-      <p:ext uri="{BB962C8B-B14F-4D97-AF65-F5344CB8AC3E}">
-        <p14:creationId xmlns:p14="http://schemas.microsoft.com/office/powerpoint/2010/main" val="1315445168"/>
-      </p:ext>
-    </p:extLst>
   </p:cSld>
   <p:clrMapOvr>
     <a:masterClrMapping/>
@@ -2812,11 +741,6 @@
         </p:txBody>
       </p:sp>
     </p:spTree>
-    <p:extLst>
-      <p:ext uri="{BB962C8B-B14F-4D97-AF65-F5344CB8AC3E}">
-        <p14:creationId xmlns:p14="http://schemas.microsoft.com/office/powerpoint/2010/main" val="4078767736"/>
-      </p:ext>
-    </p:extLst>
   </p:cSld>
   <p:clrMapOvr>
     <a:masterClrMapping/>
@@ -2896,11 +820,6 @@
         </p:txBody>
       </p:sp>
     </p:spTree>
-    <p:extLst>
-      <p:ext uri="{BB962C8B-B14F-4D97-AF65-F5344CB8AC3E}">
-        <p14:creationId xmlns:p14="http://schemas.microsoft.com/office/powerpoint/2010/main" val="130218688"/>
-      </p:ext>
-    </p:extLst>
   </p:cSld>
   <p:clrMapOvr>
     <a:masterClrMapping/>
@@ -2980,11 +899,6 @@
         </p:txBody>
       </p:sp>
     </p:spTree>
-    <p:extLst>
-      <p:ext uri="{BB962C8B-B14F-4D97-AF65-F5344CB8AC3E}">
-        <p14:creationId xmlns:p14="http://schemas.microsoft.com/office/powerpoint/2010/main" val="1266625109"/>
-      </p:ext>
-    </p:extLst>
   </p:cSld>
   <p:clrMapOvr>
     <a:masterClrMapping/>
@@ -3064,11 +978,6 @@
         </p:txBody>
       </p:sp>
     </p:spTree>
-    <p:extLst>
-      <p:ext uri="{BB962C8B-B14F-4D97-AF65-F5344CB8AC3E}">
-        <p14:creationId xmlns:p14="http://schemas.microsoft.com/office/powerpoint/2010/main" val="203554864"/>
-      </p:ext>
-    </p:extLst>
   </p:cSld>
   <p:clrMapOvr>
     <a:masterClrMapping/>
@@ -3148,11 +1057,6 @@
         </p:txBody>
       </p:sp>
     </p:spTree>
-    <p:extLst>
-      <p:ext uri="{BB962C8B-B14F-4D97-AF65-F5344CB8AC3E}">
-        <p14:creationId xmlns:p14="http://schemas.microsoft.com/office/powerpoint/2010/main" val="3578849614"/>
-      </p:ext>
-    </p:extLst>
   </p:cSld>
   <p:clrMapOvr>
     <a:masterClrMapping/>
@@ -3165,13 +1069,7 @@
   <p:cSld>
     <p:spTree>
       <p:nvGrpSpPr>
-        <p:cNvPr id="1" name="">
-          <a:extLst>
-            <a:ext uri="{FF2B5EF4-FFF2-40B4-BE49-F238E27FC236}">
-              <a16:creationId xmlns:a16="http://schemas.microsoft.com/office/drawing/2014/main" id="{97EFC333-CDBC-9231-4600-81BC68A9DE48}"/>
-            </a:ext>
-          </a:extLst>
-        </p:cNvPr>
+        <p:cNvPr id="1" name=""/>
         <p:cNvGrpSpPr/>
         <p:nvPr/>
       </p:nvGrpSpPr>
@@ -3185,13 +1083,7 @@
       </p:grpSpPr>
       <p:sp>
         <p:nvSpPr>
-          <p:cNvPr id="2" name="Slide Image Placeholder 1">
-            <a:extLst>
-              <a:ext uri="{FF2B5EF4-FFF2-40B4-BE49-F238E27FC236}">
-                <a16:creationId xmlns:a16="http://schemas.microsoft.com/office/drawing/2014/main" id="{6424790C-FF9C-E68D-6C81-F272364DCC8D}"/>
-              </a:ext>
-            </a:extLst>
-          </p:cNvPr>
+          <p:cNvPr id="2" name="Slide Image Placeholder 1"/>
           <p:cNvSpPr>
             <a:spLocks noGrp="1" noRot="1" noChangeAspect="1"/>
           </p:cNvSpPr>
@@ -3203,13 +1095,7 @@
       </p:sp>
       <p:sp>
         <p:nvSpPr>
-          <p:cNvPr id="3" name="Notes Placeholder 2">
-            <a:extLst>
-              <a:ext uri="{FF2B5EF4-FFF2-40B4-BE49-F238E27FC236}">
-                <a16:creationId xmlns:a16="http://schemas.microsoft.com/office/drawing/2014/main" id="{4551042D-28BD-FCE6-5DD7-1E2FD2B46B18}"/>
-              </a:ext>
-            </a:extLst>
-          </p:cNvPr>
+          <p:cNvPr id="3" name="Notes Placeholder 2"/>
           <p:cNvSpPr>
             <a:spLocks noGrp="1"/>
           </p:cNvSpPr>
@@ -3228,13 +1114,7 @@
       </p:sp>
       <p:sp>
         <p:nvSpPr>
-          <p:cNvPr id="4" name="Slide Number Placeholder 3">
-            <a:extLst>
-              <a:ext uri="{FF2B5EF4-FFF2-40B4-BE49-F238E27FC236}">
-                <a16:creationId xmlns:a16="http://schemas.microsoft.com/office/drawing/2014/main" id="{562F34C6-0FBF-A3DB-D569-F4D81F35A333}"/>
-              </a:ext>
-            </a:extLst>
-          </p:cNvPr>
+          <p:cNvPr id="4" name="Slide Number Placeholder 3"/>
           <p:cNvSpPr>
             <a:spLocks noGrp="1"/>
           </p:cNvSpPr>
@@ -3256,11 +1136,6 @@
         </p:txBody>
       </p:sp>
     </p:spTree>
-    <p:extLst>
-      <p:ext uri="{BB962C8B-B14F-4D97-AF65-F5344CB8AC3E}">
-        <p14:creationId xmlns:p14="http://schemas.microsoft.com/office/powerpoint/2010/main" val="2311670849"/>
-      </p:ext>
-    </p:extLst>
   </p:cSld>
   <p:clrMapOvr>
     <a:masterClrMapping/>
@@ -3340,11 +1215,6 @@
         </p:txBody>
       </p:sp>
     </p:spTree>
-    <p:extLst>
-      <p:ext uri="{BB962C8B-B14F-4D97-AF65-F5344CB8AC3E}">
-        <p14:creationId xmlns:p14="http://schemas.microsoft.com/office/powerpoint/2010/main" val="1748650652"/>
-      </p:ext>
-    </p:extLst>
   </p:cSld>
   <p:clrMapOvr>
     <a:masterClrMapping/>
@@ -3371,13 +1241,7 @@
       </p:grpSpPr>
       <p:sp>
         <p:nvSpPr>
-          <p:cNvPr id="8" name="ZoneTexte 7">
-            <a:extLst>
-              <a:ext uri="{FF2B5EF4-FFF2-40B4-BE49-F238E27FC236}">
-                <a16:creationId xmlns:a16="http://schemas.microsoft.com/office/drawing/2014/main" id="{8C014499-7A01-1C4B-B8B6-23CF018A7AFA}"/>
-              </a:ext>
-            </a:extLst>
-          </p:cNvPr>
+          <p:cNvPr id="8" name="ZoneTexte 7"/>
           <p:cNvSpPr txBox="1"/>
           <p:nvPr userDrawn="1"/>
         </p:nvSpPr>
@@ -3397,19 +1261,13 @@
           </a:bodyPr>
           <a:lstStyle/>
           <a:p>
-            <a:endParaRPr lang="fr-FR" sz="923" dirty="0"/>
+            <a:endParaRPr lang="fr-FR" sz="925" dirty="0"/>
           </a:p>
         </p:txBody>
       </p:sp>
       <p:sp>
         <p:nvSpPr>
-          <p:cNvPr id="13" name="Rectangle 12">
-            <a:extLst>
-              <a:ext uri="{FF2B5EF4-FFF2-40B4-BE49-F238E27FC236}">
-                <a16:creationId xmlns:a16="http://schemas.microsoft.com/office/drawing/2014/main" id="{B26714F2-9487-9A49-A920-C9C4DB6F97C5}"/>
-              </a:ext>
-            </a:extLst>
-          </p:cNvPr>
+          <p:cNvPr id="13" name="Rectangle 12"/>
           <p:cNvSpPr/>
           <p:nvPr userDrawn="1"/>
         </p:nvSpPr>
@@ -3457,19 +1315,13 @@
           <a:lstStyle/>
           <a:p>
             <a:pPr algn="ctr"/>
-            <a:endParaRPr lang="fr-FR" sz="923"/>
+            <a:endParaRPr lang="fr-FR" sz="925"/>
           </a:p>
         </p:txBody>
       </p:sp>
       <p:pic>
         <p:nvPicPr>
-          <p:cNvPr id="14" name="Espace réservé du contenu 5">
-            <a:extLst>
-              <a:ext uri="{FF2B5EF4-FFF2-40B4-BE49-F238E27FC236}">
-                <a16:creationId xmlns:a16="http://schemas.microsoft.com/office/drawing/2014/main" id="{4590415E-2F4F-B34C-975F-7509179742F1}"/>
-              </a:ext>
-            </a:extLst>
-          </p:cNvPr>
+          <p:cNvPr id="14" name="Espace réservé du contenu 5"/>
           <p:cNvPicPr>
             <a:picLocks noChangeAspect="1"/>
           </p:cNvPicPr>
@@ -3493,16 +1345,8 @@
       </p:pic>
       <p:sp>
         <p:nvSpPr>
-          <p:cNvPr id="17" name="Espace réservé du contenu 2">
-            <a:extLst>
-              <a:ext uri="{FF2B5EF4-FFF2-40B4-BE49-F238E27FC236}">
-                <a16:creationId xmlns:a16="http://schemas.microsoft.com/office/drawing/2014/main" id="{38C73947-7933-1149-81E2-2A6481ACE834}"/>
-              </a:ext>
-            </a:extLst>
-          </p:cNvPr>
-          <p:cNvSpPr txBox="1">
-            <a:spLocks/>
-          </p:cNvSpPr>
+          <p:cNvPr id="17" name="Espace réservé du contenu 2"/>
+          <p:cNvSpPr txBox="1"/>
           <p:nvPr userDrawn="1"/>
         </p:nvSpPr>
         <p:spPr>
@@ -3687,13 +1531,13 @@
               <a:buNone/>
             </a:pPr>
             <a:r>
-              <a:rPr lang="en-CA" sz="2002" b="1" u="sng" dirty="0">
+              <a:rPr lang="en-CA" sz="2000" b="1" u="sng" dirty="0">
                 <a:latin typeface="+mj-lt"/>
               </a:rPr>
               <a:t>Mission</a:t>
             </a:r>
             <a:r>
-              <a:rPr lang="en-CA" sz="2002" dirty="0">
+              <a:rPr lang="en-CA" sz="2000" dirty="0">
                 <a:latin typeface="+mj-lt"/>
               </a:rPr>
               <a:t> : aims to deliver inter-disciplinary research programs and empower the use of data in health research and health care delivery</a:t>
@@ -3703,7 +1547,7 @@
             <a:pPr marL="0" indent="0">
               <a:buNone/>
             </a:pPr>
-            <a:endParaRPr lang="en-CA" sz="2002" dirty="0">
+            <a:endParaRPr lang="en-CA" sz="2000" dirty="0">
               <a:latin typeface="+mj-lt"/>
             </a:endParaRPr>
           </a:p>
@@ -3711,7 +1555,7 @@
             <a:pPr marL="0" indent="0">
               <a:buNone/>
             </a:pPr>
-            <a:endParaRPr lang="en-CA" sz="2002" dirty="0">
+            <a:endParaRPr lang="en-CA" sz="2000" dirty="0">
               <a:latin typeface="+mj-lt"/>
             </a:endParaRPr>
           </a:p>
@@ -3719,7 +1563,7 @@
             <a:pPr marL="0" indent="0">
               <a:buNone/>
             </a:pPr>
-            <a:endParaRPr lang="en-CA" sz="2002" dirty="0">
+            <a:endParaRPr lang="en-CA" sz="2000" dirty="0">
               <a:latin typeface="+mj-lt"/>
             </a:endParaRPr>
           </a:p>
@@ -3727,7 +1571,7 @@
             <a:pPr marL="0" indent="0">
               <a:buNone/>
             </a:pPr>
-            <a:endParaRPr lang="en-CA" sz="2002" dirty="0">
+            <a:endParaRPr lang="en-CA" sz="2000" dirty="0">
               <a:latin typeface="+mj-lt"/>
             </a:endParaRPr>
           </a:p>
@@ -3735,7 +1579,7 @@
             <a:pPr marL="0" indent="0">
               <a:buNone/>
             </a:pPr>
-            <a:endParaRPr lang="en-CA" sz="2002" dirty="0">
+            <a:endParaRPr lang="en-CA" sz="2000" dirty="0">
               <a:latin typeface="+mj-lt"/>
             </a:endParaRPr>
           </a:p>
@@ -3743,7 +1587,7 @@
             <a:pPr marL="0" indent="0">
               <a:buNone/>
             </a:pPr>
-            <a:endParaRPr lang="en-CA" sz="2002" dirty="0">
+            <a:endParaRPr lang="en-CA" sz="2000" dirty="0">
               <a:latin typeface="+mj-lt"/>
             </a:endParaRPr>
           </a:p>
@@ -3751,7 +1595,7 @@
             <a:pPr marL="0" indent="0">
               <a:buNone/>
             </a:pPr>
-            <a:endParaRPr lang="en-CA" sz="2002" dirty="0">
+            <a:endParaRPr lang="en-CA" sz="2000" dirty="0">
               <a:latin typeface="+mj-lt"/>
             </a:endParaRPr>
           </a:p>
@@ -3759,7 +1603,7 @@
             <a:pPr marL="0" indent="0">
               <a:buNone/>
             </a:pPr>
-            <a:endParaRPr lang="en-CA" sz="2002" dirty="0">
+            <a:endParaRPr lang="en-CA" sz="2000" dirty="0">
               <a:latin typeface="+mj-lt"/>
             </a:endParaRPr>
           </a:p>
@@ -3767,7 +1611,7 @@
             <a:pPr marL="0" indent="0">
               <a:buNone/>
             </a:pPr>
-            <a:endParaRPr lang="en-CA" sz="2002" dirty="0">
+            <a:endParaRPr lang="en-CA" sz="2000" dirty="0">
               <a:latin typeface="+mj-lt"/>
             </a:endParaRPr>
           </a:p>
@@ -3792,7 +1636,7 @@
             </a:endParaRPr>
           </a:p>
           <a:p>
-            <a:endParaRPr lang="en-CA" sz="2002" dirty="0">
+            <a:endParaRPr lang="en-CA" sz="2000" dirty="0">
               <a:latin typeface="+mj-lt"/>
             </a:endParaRPr>
           </a:p>
@@ -3800,13 +1644,7 @@
       </p:sp>
       <p:pic>
         <p:nvPicPr>
-          <p:cNvPr id="18" name="Image 17">
-            <a:extLst>
-              <a:ext uri="{FF2B5EF4-FFF2-40B4-BE49-F238E27FC236}">
-                <a16:creationId xmlns:a16="http://schemas.microsoft.com/office/drawing/2014/main" id="{E31CC8AE-4D70-174F-9C92-FBBC12BFB767}"/>
-              </a:ext>
-            </a:extLst>
-          </p:cNvPr>
+          <p:cNvPr id="18" name="Image 17"/>
           <p:cNvPicPr>
             <a:picLocks noChangeAspect="1"/>
           </p:cNvPicPr>
@@ -3830,13 +1668,7 @@
       </p:pic>
       <p:pic>
         <p:nvPicPr>
-          <p:cNvPr id="2" name="Picture 1" descr="A close-up of a logo&#10;&#10;Description automatically generated">
-            <a:extLst>
-              <a:ext uri="{FF2B5EF4-FFF2-40B4-BE49-F238E27FC236}">
-                <a16:creationId xmlns:a16="http://schemas.microsoft.com/office/drawing/2014/main" id="{32E7C634-3E4C-4136-B1E6-433EF28D65A3}"/>
-              </a:ext>
-            </a:extLst>
-          </p:cNvPr>
+          <p:cNvPr id="2" name="Picture 1" descr="A close-up of a logo&#10;&#10;Description automatically generated"/>
           <p:cNvPicPr>
             <a:picLocks noChangeAspect="1"/>
           </p:cNvPicPr>
@@ -3859,11 +1691,6 @@
         </p:spPr>
       </p:pic>
     </p:spTree>
-    <p:extLst>
-      <p:ext uri="{BB962C8B-B14F-4D97-AF65-F5344CB8AC3E}">
-        <p14:creationId xmlns:p14="http://schemas.microsoft.com/office/powerpoint/2010/main" val="3264083727"/>
-      </p:ext>
-    </p:extLst>
   </p:cSld>
   <p:clrMapOvr>
     <a:masterClrMapping/>
@@ -3890,13 +1717,7 @@
       </p:grpSpPr>
       <p:sp>
         <p:nvSpPr>
-          <p:cNvPr id="8" name="ZoneTexte 7">
-            <a:extLst>
-              <a:ext uri="{FF2B5EF4-FFF2-40B4-BE49-F238E27FC236}">
-                <a16:creationId xmlns:a16="http://schemas.microsoft.com/office/drawing/2014/main" id="{8C014499-7A01-1C4B-B8B6-23CF018A7AFA}"/>
-              </a:ext>
-            </a:extLst>
-          </p:cNvPr>
+          <p:cNvPr id="8" name="ZoneTexte 7"/>
           <p:cNvSpPr txBox="1"/>
           <p:nvPr userDrawn="1"/>
         </p:nvSpPr>
@@ -3916,19 +1737,13 @@
           </a:bodyPr>
           <a:lstStyle/>
           <a:p>
-            <a:endParaRPr lang="fr-FR" sz="923" dirty="0"/>
+            <a:endParaRPr lang="fr-FR" sz="925" dirty="0"/>
           </a:p>
         </p:txBody>
       </p:sp>
       <p:sp>
         <p:nvSpPr>
-          <p:cNvPr id="13" name="Rectangle 12">
-            <a:extLst>
-              <a:ext uri="{FF2B5EF4-FFF2-40B4-BE49-F238E27FC236}">
-                <a16:creationId xmlns:a16="http://schemas.microsoft.com/office/drawing/2014/main" id="{B26714F2-9487-9A49-A920-C9C4DB6F97C5}"/>
-              </a:ext>
-            </a:extLst>
-          </p:cNvPr>
+          <p:cNvPr id="13" name="Rectangle 12"/>
           <p:cNvSpPr/>
           <p:nvPr userDrawn="1"/>
         </p:nvSpPr>
@@ -3976,19 +1791,13 @@
           <a:lstStyle/>
           <a:p>
             <a:pPr algn="ctr"/>
-            <a:endParaRPr lang="fr-FR" sz="923"/>
+            <a:endParaRPr lang="fr-FR" sz="925"/>
           </a:p>
         </p:txBody>
       </p:sp>
       <p:pic>
         <p:nvPicPr>
-          <p:cNvPr id="14" name="Espace réservé du contenu 5">
-            <a:extLst>
-              <a:ext uri="{FF2B5EF4-FFF2-40B4-BE49-F238E27FC236}">
-                <a16:creationId xmlns:a16="http://schemas.microsoft.com/office/drawing/2014/main" id="{4590415E-2F4F-B34C-975F-7509179742F1}"/>
-              </a:ext>
-            </a:extLst>
-          </p:cNvPr>
+          <p:cNvPr id="14" name="Espace réservé du contenu 5"/>
           <p:cNvPicPr>
             <a:picLocks noChangeAspect="1"/>
           </p:cNvPicPr>
@@ -4012,18 +1821,12 @@
       </p:pic>
       <p:sp>
         <p:nvSpPr>
-          <p:cNvPr id="3" name="Espace réservé du texte 2">
-            <a:extLst>
-              <a:ext uri="{FF2B5EF4-FFF2-40B4-BE49-F238E27FC236}">
-                <a16:creationId xmlns:a16="http://schemas.microsoft.com/office/drawing/2014/main" id="{5F469381-9221-664C-A297-50EE4CAEE002}"/>
-              </a:ext>
-            </a:extLst>
-          </p:cNvPr>
+          <p:cNvPr id="3" name="Espace réservé du texte 2"/>
           <p:cNvSpPr>
             <a:spLocks noGrp="1"/>
           </p:cNvSpPr>
           <p:nvPr>
-            <p:ph type="body" sz="quarter" idx="10"/>
+            <p:ph type="body" sz="quarter" idx="10" hasCustomPrompt="1"/>
           </p:nvPr>
         </p:nvSpPr>
         <p:spPr>
@@ -4050,13 +1853,7 @@
       </p:sp>
       <p:pic>
         <p:nvPicPr>
-          <p:cNvPr id="2" name="Picture 1" descr="A close-up of a logo&#10;&#10;Description automatically generated">
-            <a:extLst>
-              <a:ext uri="{FF2B5EF4-FFF2-40B4-BE49-F238E27FC236}">
-                <a16:creationId xmlns:a16="http://schemas.microsoft.com/office/drawing/2014/main" id="{3912B842-61AA-DE8F-1C57-2F28FF993E8E}"/>
-              </a:ext>
-            </a:extLst>
-          </p:cNvPr>
+          <p:cNvPr id="2" name="Picture 1" descr="A close-up of a logo&#10;&#10;Description automatically generated"/>
           <p:cNvPicPr>
             <a:picLocks noChangeAspect="1"/>
           </p:cNvPicPr>
@@ -4079,11 +1876,6 @@
         </p:spPr>
       </p:pic>
     </p:spTree>
-    <p:extLst>
-      <p:ext uri="{BB962C8B-B14F-4D97-AF65-F5344CB8AC3E}">
-        <p14:creationId xmlns:p14="http://schemas.microsoft.com/office/powerpoint/2010/main" val="322694191"/>
-      </p:ext>
-    </p:extLst>
   </p:cSld>
   <p:clrMapOvr>
     <a:masterClrMapping/>
@@ -4110,13 +1902,7 @@
       </p:grpSpPr>
       <p:sp>
         <p:nvSpPr>
-          <p:cNvPr id="8" name="ZoneTexte 7">
-            <a:extLst>
-              <a:ext uri="{FF2B5EF4-FFF2-40B4-BE49-F238E27FC236}">
-                <a16:creationId xmlns:a16="http://schemas.microsoft.com/office/drawing/2014/main" id="{8C014499-7A01-1C4B-B8B6-23CF018A7AFA}"/>
-              </a:ext>
-            </a:extLst>
-          </p:cNvPr>
+          <p:cNvPr id="8" name="ZoneTexte 7"/>
           <p:cNvSpPr txBox="1"/>
           <p:nvPr userDrawn="1"/>
         </p:nvSpPr>
@@ -4136,19 +1922,13 @@
           </a:bodyPr>
           <a:lstStyle/>
           <a:p>
-            <a:endParaRPr lang="fr-FR" sz="923" dirty="0"/>
+            <a:endParaRPr lang="fr-FR" sz="925" dirty="0"/>
           </a:p>
         </p:txBody>
       </p:sp>
       <p:sp>
         <p:nvSpPr>
-          <p:cNvPr id="13" name="Rectangle 12">
-            <a:extLst>
-              <a:ext uri="{FF2B5EF4-FFF2-40B4-BE49-F238E27FC236}">
-                <a16:creationId xmlns:a16="http://schemas.microsoft.com/office/drawing/2014/main" id="{B26714F2-9487-9A49-A920-C9C4DB6F97C5}"/>
-              </a:ext>
-            </a:extLst>
-          </p:cNvPr>
+          <p:cNvPr id="13" name="Rectangle 12"/>
           <p:cNvSpPr/>
           <p:nvPr userDrawn="1"/>
         </p:nvSpPr>
@@ -4196,19 +1976,13 @@
           <a:lstStyle/>
           <a:p>
             <a:pPr algn="ctr"/>
-            <a:endParaRPr lang="fr-FR" sz="923"/>
+            <a:endParaRPr lang="fr-FR" sz="925"/>
           </a:p>
         </p:txBody>
       </p:sp>
       <p:pic>
         <p:nvPicPr>
-          <p:cNvPr id="14" name="Espace réservé du contenu 5">
-            <a:extLst>
-              <a:ext uri="{FF2B5EF4-FFF2-40B4-BE49-F238E27FC236}">
-                <a16:creationId xmlns:a16="http://schemas.microsoft.com/office/drawing/2014/main" id="{4590415E-2F4F-B34C-975F-7509179742F1}"/>
-              </a:ext>
-            </a:extLst>
-          </p:cNvPr>
+          <p:cNvPr id="14" name="Espace réservé du contenu 5"/>
           <p:cNvPicPr>
             <a:picLocks noChangeAspect="1"/>
           </p:cNvPicPr>
@@ -4232,13 +2006,7 @@
       </p:pic>
       <p:sp>
         <p:nvSpPr>
-          <p:cNvPr id="6" name="Title 1">
-            <a:extLst>
-              <a:ext uri="{FF2B5EF4-FFF2-40B4-BE49-F238E27FC236}">
-                <a16:creationId xmlns:a16="http://schemas.microsoft.com/office/drawing/2014/main" id="{42401445-DB0B-D44D-B605-7A88A3BCCA23}"/>
-              </a:ext>
-            </a:extLst>
-          </p:cNvPr>
+          <p:cNvPr id="6" name="Title 1"/>
           <p:cNvSpPr>
             <a:spLocks noGrp="1"/>
           </p:cNvSpPr>
@@ -4270,13 +2038,7 @@
       </p:sp>
       <p:pic>
         <p:nvPicPr>
-          <p:cNvPr id="2" name="Picture 1" descr="A close-up of a logo&#10;&#10;Description automatically generated">
-            <a:extLst>
-              <a:ext uri="{FF2B5EF4-FFF2-40B4-BE49-F238E27FC236}">
-                <a16:creationId xmlns:a16="http://schemas.microsoft.com/office/drawing/2014/main" id="{46A07C23-87D0-3CD0-CDD8-163E9231650A}"/>
-              </a:ext>
-            </a:extLst>
-          </p:cNvPr>
+          <p:cNvPr id="2" name="Picture 1" descr="A close-up of a logo&#10;&#10;Description automatically generated"/>
           <p:cNvPicPr>
             <a:picLocks noChangeAspect="1"/>
           </p:cNvPicPr>
@@ -4299,11 +2061,6 @@
         </p:spPr>
       </p:pic>
     </p:spTree>
-    <p:extLst>
-      <p:ext uri="{BB962C8B-B14F-4D97-AF65-F5344CB8AC3E}">
-        <p14:creationId xmlns:p14="http://schemas.microsoft.com/office/powerpoint/2010/main" val="3350706779"/>
-      </p:ext>
-    </p:extLst>
   </p:cSld>
   <p:clrMapOvr>
     <a:masterClrMapping/>
@@ -4358,7 +2115,7 @@
             <a:spLocks noGrp="1"/>
           </p:cNvSpPr>
           <p:nvPr>
-            <p:ph idx="1"/>
+            <p:ph idx="1" hasCustomPrompt="1"/>
           </p:nvPr>
         </p:nvSpPr>
         <p:spPr/>
@@ -4381,13 +2138,7 @@
       </p:sp>
       <p:pic>
         <p:nvPicPr>
-          <p:cNvPr id="4" name="Picture 3" descr="A close-up of a logo&#10;&#10;Description automatically generated">
-            <a:extLst>
-              <a:ext uri="{FF2B5EF4-FFF2-40B4-BE49-F238E27FC236}">
-                <a16:creationId xmlns:a16="http://schemas.microsoft.com/office/drawing/2014/main" id="{25E8D640-4F2A-C273-93CD-ED27648644DC}"/>
-              </a:ext>
-            </a:extLst>
-          </p:cNvPr>
+          <p:cNvPr id="4" name="Picture 3" descr="A close-up of a logo&#10;&#10;Description automatically generated"/>
           <p:cNvPicPr>
             <a:picLocks noChangeAspect="1"/>
           </p:cNvPicPr>
@@ -4410,11 +2161,6 @@
         </p:spPr>
       </p:pic>
     </p:spTree>
-    <p:extLst>
-      <p:ext uri="{BB962C8B-B14F-4D97-AF65-F5344CB8AC3E}">
-        <p14:creationId xmlns:p14="http://schemas.microsoft.com/office/powerpoint/2010/main" val="910829051"/>
-      </p:ext>
-    </p:extLst>
   </p:cSld>
   <p:clrMapOvr>
     <a:masterClrMapping/>
@@ -4478,7 +2224,7 @@
             <a:spLocks noGrp="1"/>
           </p:cNvSpPr>
           <p:nvPr>
-            <p:ph type="body" idx="1"/>
+            <p:ph type="body" idx="1" hasCustomPrompt="1"/>
           </p:nvPr>
         </p:nvSpPr>
         <p:spPr>
@@ -4498,9 +2244,9 @@
                 </a:solidFill>
               </a:defRPr>
             </a:lvl1pPr>
-            <a:lvl2pPr marL="457088" indent="0">
+            <a:lvl2pPr marL="457200" indent="0">
               <a:buNone/>
-              <a:defRPr sz="2002">
+              <a:defRPr sz="2000">
                 <a:solidFill>
                   <a:schemeClr val="tx1">
                     <a:tint val="75000"/>
@@ -4508,7 +2254,7 @@
                 </a:solidFill>
               </a:defRPr>
             </a:lvl2pPr>
-            <a:lvl3pPr marL="914175" indent="0">
+            <a:lvl3pPr marL="914400" indent="0">
               <a:buNone/>
               <a:defRPr sz="1800">
                 <a:solidFill>
@@ -4518,9 +2264,9 @@
                 </a:solidFill>
               </a:defRPr>
             </a:lvl3pPr>
-            <a:lvl4pPr marL="1371255" indent="0">
+            <a:lvl4pPr marL="1370965" indent="0">
               <a:buNone/>
-              <a:defRPr sz="1598">
+              <a:defRPr sz="1600">
                 <a:solidFill>
                   <a:schemeClr val="tx1">
                     <a:tint val="75000"/>
@@ -4528,9 +2274,9 @@
                 </a:solidFill>
               </a:defRPr>
             </a:lvl4pPr>
-            <a:lvl5pPr marL="1828343" indent="0">
+            <a:lvl5pPr marL="1828165" indent="0">
               <a:buNone/>
-              <a:defRPr sz="1598">
+              <a:defRPr sz="1600">
                 <a:solidFill>
                   <a:schemeClr val="tx1">
                     <a:tint val="75000"/>
@@ -4538,9 +2284,9 @@
                 </a:solidFill>
               </a:defRPr>
             </a:lvl5pPr>
-            <a:lvl6pPr marL="2285430" indent="0">
+            <a:lvl6pPr marL="2285365" indent="0">
               <a:buNone/>
-              <a:defRPr sz="1598">
+              <a:defRPr sz="1600">
                 <a:solidFill>
                   <a:schemeClr val="tx1">
                     <a:tint val="75000"/>
@@ -4548,9 +2294,9 @@
                 </a:solidFill>
               </a:defRPr>
             </a:lvl6pPr>
-            <a:lvl7pPr marL="2742518" indent="0">
+            <a:lvl7pPr marL="2742565" indent="0">
               <a:buNone/>
-              <a:defRPr sz="1598">
+              <a:defRPr sz="1600">
                 <a:solidFill>
                   <a:schemeClr val="tx1">
                     <a:tint val="75000"/>
@@ -4558,9 +2304,9 @@
                 </a:solidFill>
               </a:defRPr>
             </a:lvl7pPr>
-            <a:lvl8pPr marL="3199598" indent="0">
+            <a:lvl8pPr marL="3199765" indent="0">
               <a:buNone/>
-              <a:defRPr sz="1598">
+              <a:defRPr sz="1600">
                 <a:solidFill>
                   <a:schemeClr val="tx1">
                     <a:tint val="75000"/>
@@ -4568,9 +2314,9 @@
                 </a:solidFill>
               </a:defRPr>
             </a:lvl8pPr>
-            <a:lvl9pPr marL="3656685" indent="0">
+            <a:lvl9pPr marL="3656965" indent="0">
               <a:buNone/>
-              <a:defRPr sz="1598">
+              <a:defRPr sz="1600">
                 <a:solidFill>
                   <a:schemeClr val="tx1">
                     <a:tint val="75000"/>
@@ -4595,13 +2341,7 @@
       </p:sp>
       <p:pic>
         <p:nvPicPr>
-          <p:cNvPr id="4" name="Picture 3" descr="A close-up of a logo&#10;&#10;Description automatically generated">
-            <a:extLst>
-              <a:ext uri="{FF2B5EF4-FFF2-40B4-BE49-F238E27FC236}">
-                <a16:creationId xmlns:a16="http://schemas.microsoft.com/office/drawing/2014/main" id="{B8B56C79-C699-74BA-2B42-5F3300D7BF5F}"/>
-              </a:ext>
-            </a:extLst>
-          </p:cNvPr>
+          <p:cNvPr id="4" name="Picture 3" descr="A close-up of a logo&#10;&#10;Description automatically generated"/>
           <p:cNvPicPr>
             <a:picLocks noChangeAspect="1"/>
           </p:cNvPicPr>
@@ -4624,11 +2364,6 @@
         </p:spPr>
       </p:pic>
     </p:spTree>
-    <p:extLst>
-      <p:ext uri="{BB962C8B-B14F-4D97-AF65-F5344CB8AC3E}">
-        <p14:creationId xmlns:p14="http://schemas.microsoft.com/office/powerpoint/2010/main" val="1311720174"/>
-      </p:ext>
-    </p:extLst>
   </p:cSld>
   <p:clrMapOvr>
     <a:masterClrMapping/>
@@ -4728,13 +2463,7 @@
       </p:sp>
       <p:pic>
         <p:nvPicPr>
-          <p:cNvPr id="5" name="Picture 4" descr="A close-up of a logo&#10;&#10;Description automatically generated">
-            <a:extLst>
-              <a:ext uri="{FF2B5EF4-FFF2-40B4-BE49-F238E27FC236}">
-                <a16:creationId xmlns:a16="http://schemas.microsoft.com/office/drawing/2014/main" id="{AA007C17-E97F-E07B-1C14-D41394EC80D6}"/>
-              </a:ext>
-            </a:extLst>
-          </p:cNvPr>
+          <p:cNvPr id="5" name="Picture 4" descr="A close-up of a logo&#10;&#10;Description automatically generated"/>
           <p:cNvPicPr>
             <a:picLocks noChangeAspect="1"/>
           </p:cNvPicPr>
@@ -4757,11 +2486,6 @@
         </p:spPr>
       </p:pic>
     </p:spTree>
-    <p:extLst>
-      <p:ext uri="{BB962C8B-B14F-4D97-AF65-F5344CB8AC3E}">
-        <p14:creationId xmlns:p14="http://schemas.microsoft.com/office/powerpoint/2010/main" val="1884908084"/>
-      </p:ext>
-    </p:extLst>
   </p:cSld>
   <p:clrMapOvr>
     <a:masterClrMapping/>
@@ -4811,13 +2535,7 @@
       </p:sp>
       <p:pic>
         <p:nvPicPr>
-          <p:cNvPr id="3" name="Picture 2" descr="A close-up of a logo&#10;&#10;Description automatically generated">
-            <a:extLst>
-              <a:ext uri="{FF2B5EF4-FFF2-40B4-BE49-F238E27FC236}">
-                <a16:creationId xmlns:a16="http://schemas.microsoft.com/office/drawing/2014/main" id="{C69E5790-C23F-BC76-928A-1D960C6FA536}"/>
-              </a:ext>
-            </a:extLst>
-          </p:cNvPr>
+          <p:cNvPr id="3" name="Picture 2" descr="A close-up of a logo&#10;&#10;Description automatically generated"/>
           <p:cNvPicPr>
             <a:picLocks noChangeAspect="1"/>
           </p:cNvPicPr>
@@ -4840,11 +2558,6 @@
         </p:spPr>
       </p:pic>
     </p:spTree>
-    <p:extLst>
-      <p:ext uri="{BB962C8B-B14F-4D97-AF65-F5344CB8AC3E}">
-        <p14:creationId xmlns:p14="http://schemas.microsoft.com/office/powerpoint/2010/main" val="3433175628"/>
-      </p:ext>
-    </p:extLst>
   </p:cSld>
   <p:clrMapOvr>
     <a:masterClrMapping/>
@@ -4871,13 +2584,7 @@
       </p:grpSpPr>
       <p:pic>
         <p:nvPicPr>
-          <p:cNvPr id="2" name="Picture 1" descr="A close-up of a logo&#10;&#10;Description automatically generated">
-            <a:extLst>
-              <a:ext uri="{FF2B5EF4-FFF2-40B4-BE49-F238E27FC236}">
-                <a16:creationId xmlns:a16="http://schemas.microsoft.com/office/drawing/2014/main" id="{D5EEAA7F-1EAC-3E0E-2A62-6D95ADE986AA}"/>
-              </a:ext>
-            </a:extLst>
-          </p:cNvPr>
+          <p:cNvPr id="2" name="Picture 1" descr="A close-up of a logo&#10;&#10;Description automatically generated"/>
           <p:cNvPicPr>
             <a:picLocks noChangeAspect="1"/>
           </p:cNvPicPr>
@@ -4900,11 +2607,6 @@
         </p:spPr>
       </p:pic>
     </p:spTree>
-    <p:extLst>
-      <p:ext uri="{BB962C8B-B14F-4D97-AF65-F5344CB8AC3E}">
-        <p14:creationId xmlns:p14="http://schemas.microsoft.com/office/powerpoint/2010/main" val="2110274006"/>
-      </p:ext>
-    </p:extLst>
   </p:cSld>
   <p:clrMapOvr>
     <a:masterClrMapping/>
@@ -4949,7 +2651,7 @@
           <a:bodyPr anchor="b"/>
           <a:lstStyle>
             <a:lvl1pPr>
-              <a:defRPr sz="3202"/>
+              <a:defRPr sz="3200"/>
             </a:lvl1pPr>
           </a:lstStyle>
           <a:p>
@@ -4982,39 +2684,39 @@
           <a:lstStyle>
             <a:lvl1pPr marL="0" indent="0">
               <a:buNone/>
-              <a:defRPr sz="3202"/>
+              <a:defRPr sz="3200"/>
             </a:lvl1pPr>
-            <a:lvl2pPr marL="457088" indent="0">
+            <a:lvl2pPr marL="457200" indent="0">
               <a:buNone/>
-              <a:defRPr sz="2798"/>
+              <a:defRPr sz="2800"/>
             </a:lvl2pPr>
-            <a:lvl3pPr marL="914175" indent="0">
+            <a:lvl3pPr marL="914400" indent="0">
               <a:buNone/>
               <a:defRPr sz="2400"/>
             </a:lvl3pPr>
-            <a:lvl4pPr marL="1371255" indent="0">
+            <a:lvl4pPr marL="1370965" indent="0">
               <a:buNone/>
-              <a:defRPr sz="2002"/>
+              <a:defRPr sz="2000"/>
             </a:lvl4pPr>
-            <a:lvl5pPr marL="1828343" indent="0">
+            <a:lvl5pPr marL="1828165" indent="0">
               <a:buNone/>
-              <a:defRPr sz="2002"/>
+              <a:defRPr sz="2000"/>
             </a:lvl5pPr>
-            <a:lvl6pPr marL="2285430" indent="0">
+            <a:lvl6pPr marL="2285365" indent="0">
               <a:buNone/>
-              <a:defRPr sz="2002"/>
+              <a:defRPr sz="2000"/>
             </a:lvl6pPr>
-            <a:lvl7pPr marL="2742518" indent="0">
+            <a:lvl7pPr marL="2742565" indent="0">
               <a:buNone/>
-              <a:defRPr sz="2002"/>
+              <a:defRPr sz="2000"/>
             </a:lvl7pPr>
-            <a:lvl8pPr marL="3199598" indent="0">
+            <a:lvl8pPr marL="3199765" indent="0">
               <a:buNone/>
-              <a:defRPr sz="2002"/>
+              <a:defRPr sz="2000"/>
             </a:lvl8pPr>
-            <a:lvl9pPr marL="3656685" indent="0">
+            <a:lvl9pPr marL="3656965" indent="0">
               <a:buNone/>
-              <a:defRPr sz="2002"/>
+              <a:defRPr sz="2000"/>
             </a:lvl9pPr>
           </a:lstStyle>
           <a:p>
@@ -5033,7 +2735,7 @@
             <a:spLocks noGrp="1"/>
           </p:cNvSpPr>
           <p:nvPr>
-            <p:ph type="body" sz="half" idx="2"/>
+            <p:ph type="body" sz="half" idx="2" hasCustomPrompt="1"/>
           </p:nvPr>
         </p:nvSpPr>
         <p:spPr>
@@ -5047,39 +2749,39 @@
           <a:lstStyle>
             <a:lvl1pPr marL="0" indent="0">
               <a:buNone/>
-              <a:defRPr sz="1598"/>
+              <a:defRPr sz="1600"/>
             </a:lvl1pPr>
-            <a:lvl2pPr marL="457088" indent="0">
+            <a:lvl2pPr marL="457200" indent="0">
               <a:buNone/>
-              <a:defRPr sz="1403"/>
+              <a:defRPr sz="1405"/>
             </a:lvl2pPr>
-            <a:lvl3pPr marL="914175" indent="0">
+            <a:lvl3pPr marL="914400" indent="0">
               <a:buNone/>
               <a:defRPr sz="1200"/>
             </a:lvl3pPr>
-            <a:lvl4pPr marL="1371255" indent="0">
+            <a:lvl4pPr marL="1370965" indent="0">
               <a:buNone/>
-              <a:defRPr sz="998"/>
+              <a:defRPr sz="1000"/>
             </a:lvl4pPr>
-            <a:lvl5pPr marL="1828343" indent="0">
+            <a:lvl5pPr marL="1828165" indent="0">
               <a:buNone/>
-              <a:defRPr sz="998"/>
+              <a:defRPr sz="1000"/>
             </a:lvl5pPr>
-            <a:lvl6pPr marL="2285430" indent="0">
+            <a:lvl6pPr marL="2285365" indent="0">
               <a:buNone/>
-              <a:defRPr sz="998"/>
+              <a:defRPr sz="1000"/>
             </a:lvl6pPr>
-            <a:lvl7pPr marL="2742518" indent="0">
+            <a:lvl7pPr marL="2742565" indent="0">
               <a:buNone/>
-              <a:defRPr sz="998"/>
+              <a:defRPr sz="1000"/>
             </a:lvl7pPr>
-            <a:lvl8pPr marL="3199598" indent="0">
+            <a:lvl8pPr marL="3199765" indent="0">
               <a:buNone/>
-              <a:defRPr sz="998"/>
+              <a:defRPr sz="1000"/>
             </a:lvl8pPr>
-            <a:lvl9pPr marL="3656685" indent="0">
+            <a:lvl9pPr marL="3656965" indent="0">
               <a:buNone/>
-              <a:defRPr sz="998"/>
+              <a:defRPr sz="1000"/>
             </a:lvl9pPr>
           </a:lstStyle>
           <a:p>
@@ -5098,13 +2800,7 @@
       </p:sp>
       <p:pic>
         <p:nvPicPr>
-          <p:cNvPr id="5" name="Picture 4" descr="A close-up of a logo&#10;&#10;Description automatically generated">
-            <a:extLst>
-              <a:ext uri="{FF2B5EF4-FFF2-40B4-BE49-F238E27FC236}">
-                <a16:creationId xmlns:a16="http://schemas.microsoft.com/office/drawing/2014/main" id="{4231E1BA-2B66-F075-D01A-13F01F7EF7AE}"/>
-              </a:ext>
-            </a:extLst>
-          </p:cNvPr>
+          <p:cNvPr id="5" name="Picture 4" descr="A close-up of a logo&#10;&#10;Description automatically generated"/>
           <p:cNvPicPr>
             <a:picLocks noChangeAspect="1"/>
           </p:cNvPicPr>
@@ -5127,11 +2823,6 @@
         </p:spPr>
       </p:pic>
     </p:spTree>
-    <p:extLst>
-      <p:ext uri="{BB962C8B-B14F-4D97-AF65-F5344CB8AC3E}">
-        <p14:creationId xmlns:p14="http://schemas.microsoft.com/office/powerpoint/2010/main" val="2749933113"/>
-      </p:ext>
-    </p:extLst>
   </p:cSld>
   <p:clrMapOvr>
     <a:masterClrMapping/>
@@ -5234,16 +2925,8 @@
       </p:sp>
       <p:grpSp>
         <p:nvGrpSpPr>
-          <p:cNvPr id="14" name="Group 11">
-            <a:extLst>
-              <a:ext uri="{FF2B5EF4-FFF2-40B4-BE49-F238E27FC236}">
-                <a16:creationId xmlns:a16="http://schemas.microsoft.com/office/drawing/2014/main" id="{8ADF8589-063A-1546-8085-07B315CCB283}"/>
-              </a:ext>
-            </a:extLst>
-          </p:cNvPr>
-          <p:cNvGrpSpPr>
-            <a:grpSpLocks/>
-          </p:cNvGrpSpPr>
+          <p:cNvPr id="14" name="Group 11"/>
+          <p:cNvGrpSpPr/>
           <p:nvPr userDrawn="1"/>
         </p:nvGrpSpPr>
         <p:grpSpPr bwMode="auto">
@@ -5256,13 +2939,7 @@
         </p:grpSpPr>
         <p:sp>
           <p:nvSpPr>
-            <p:cNvPr id="15" name="Rectangle 14">
-              <a:extLst>
-                <a:ext uri="{FF2B5EF4-FFF2-40B4-BE49-F238E27FC236}">
-                  <a16:creationId xmlns:a16="http://schemas.microsoft.com/office/drawing/2014/main" id="{7CD4AE55-E3E4-8E48-A531-035261AD147D}"/>
-                </a:ext>
-              </a:extLst>
-            </p:cNvPr>
+            <p:cNvPr id="15" name="Rectangle 14"/>
             <p:cNvSpPr/>
             <p:nvPr userDrawn="1"/>
           </p:nvSpPr>
@@ -5300,7 +2977,7 @@
             <a:bodyPr anchor="ctr"/>
             <a:lstStyle/>
             <a:p>
-              <a:pPr algn="ctr" defTabSz="456353" fontAlgn="auto">
+              <a:pPr algn="ctr" defTabSz="456565" fontAlgn="auto">
                 <a:spcBef>
                   <a:spcPts val="0"/>
                 </a:spcBef>
@@ -5309,7 +2986,7 @@
                 </a:spcAft>
                 <a:defRPr/>
               </a:pPr>
-              <a:endParaRPr lang="en-US" sz="923" dirty="0">
+              <a:endParaRPr lang="en-US" sz="925" dirty="0">
                 <a:latin typeface="Open Sans Light"/>
               </a:endParaRPr>
             </a:p>
@@ -5317,13 +2994,7 @@
         </p:sp>
         <p:sp>
           <p:nvSpPr>
-            <p:cNvPr id="16" name="Rectangle 15">
-              <a:extLst>
-                <a:ext uri="{FF2B5EF4-FFF2-40B4-BE49-F238E27FC236}">
-                  <a16:creationId xmlns:a16="http://schemas.microsoft.com/office/drawing/2014/main" id="{5753BF61-1322-C642-81B1-2BEA6A9D7516}"/>
-                </a:ext>
-              </a:extLst>
-            </p:cNvPr>
+            <p:cNvPr id="16" name="Rectangle 15"/>
             <p:cNvSpPr/>
             <p:nvPr userDrawn="1"/>
           </p:nvSpPr>
@@ -5361,7 +3032,7 @@
             <a:bodyPr anchor="ctr"/>
             <a:lstStyle/>
             <a:p>
-              <a:pPr algn="ctr" defTabSz="456353" fontAlgn="auto">
+              <a:pPr algn="ctr" defTabSz="456565" fontAlgn="auto">
                 <a:spcBef>
                   <a:spcPts val="0"/>
                 </a:spcBef>
@@ -5370,7 +3041,7 @@
                 </a:spcAft>
                 <a:defRPr/>
               </a:pPr>
-              <a:endParaRPr lang="en-US" sz="923" dirty="0">
+              <a:endParaRPr lang="en-US" sz="925" dirty="0">
                 <a:latin typeface="Open Sans Light"/>
               </a:endParaRPr>
             </a:p>
@@ -5378,13 +3049,7 @@
         </p:sp>
         <p:sp>
           <p:nvSpPr>
-            <p:cNvPr id="17" name="Rectangle 16">
-              <a:extLst>
-                <a:ext uri="{FF2B5EF4-FFF2-40B4-BE49-F238E27FC236}">
-                  <a16:creationId xmlns:a16="http://schemas.microsoft.com/office/drawing/2014/main" id="{505D8262-7348-B74A-B1E5-C429BF3920A3}"/>
-                </a:ext>
-              </a:extLst>
-            </p:cNvPr>
+            <p:cNvPr id="17" name="Rectangle 16"/>
             <p:cNvSpPr/>
             <p:nvPr userDrawn="1"/>
           </p:nvSpPr>
@@ -5422,7 +3087,7 @@
             <a:bodyPr anchor="ctr"/>
             <a:lstStyle/>
             <a:p>
-              <a:pPr algn="ctr" defTabSz="456353" fontAlgn="auto">
+              <a:pPr algn="ctr" defTabSz="456565" fontAlgn="auto">
                 <a:spcBef>
                   <a:spcPts val="0"/>
                 </a:spcBef>
@@ -5431,7 +3096,7 @@
                 </a:spcAft>
                 <a:defRPr/>
               </a:pPr>
-              <a:endParaRPr lang="en-US" sz="923" dirty="0">
+              <a:endParaRPr lang="en-US" sz="925" dirty="0">
                 <a:latin typeface="Open Sans Light"/>
               </a:endParaRPr>
             </a:p>
@@ -5439,13 +3104,7 @@
         </p:sp>
         <p:sp>
           <p:nvSpPr>
-            <p:cNvPr id="18" name="Rectangle 17">
-              <a:extLst>
-                <a:ext uri="{FF2B5EF4-FFF2-40B4-BE49-F238E27FC236}">
-                  <a16:creationId xmlns:a16="http://schemas.microsoft.com/office/drawing/2014/main" id="{7AE6F6EB-C764-0142-9907-8F053728961D}"/>
-                </a:ext>
-              </a:extLst>
-            </p:cNvPr>
+            <p:cNvPr id="18" name="Rectangle 17"/>
             <p:cNvSpPr/>
             <p:nvPr userDrawn="1"/>
           </p:nvSpPr>
@@ -5483,7 +3142,7 @@
             <a:bodyPr anchor="ctr"/>
             <a:lstStyle/>
             <a:p>
-              <a:pPr algn="ctr" defTabSz="456353" fontAlgn="auto">
+              <a:pPr algn="ctr" defTabSz="456565" fontAlgn="auto">
                 <a:spcBef>
                   <a:spcPts val="0"/>
                 </a:spcBef>
@@ -5492,7 +3151,7 @@
                 </a:spcAft>
                 <a:defRPr/>
               </a:pPr>
-              <a:endParaRPr lang="en-US" sz="923" dirty="0">
+              <a:endParaRPr lang="en-US" sz="925" dirty="0">
                 <a:latin typeface="Open Sans Light"/>
               </a:endParaRPr>
             </a:p>
@@ -5500,13 +3159,7 @@
         </p:sp>
         <p:sp>
           <p:nvSpPr>
-            <p:cNvPr id="19" name="Rectangle 18">
-              <a:extLst>
-                <a:ext uri="{FF2B5EF4-FFF2-40B4-BE49-F238E27FC236}">
-                  <a16:creationId xmlns:a16="http://schemas.microsoft.com/office/drawing/2014/main" id="{894EFFE0-7781-6F4A-8329-190CB533253E}"/>
-                </a:ext>
-              </a:extLst>
-            </p:cNvPr>
+            <p:cNvPr id="19" name="Rectangle 18"/>
             <p:cNvSpPr/>
             <p:nvPr userDrawn="1"/>
           </p:nvSpPr>
@@ -5544,7 +3197,7 @@
             <a:bodyPr anchor="ctr"/>
             <a:lstStyle/>
             <a:p>
-              <a:pPr algn="ctr" defTabSz="456353" fontAlgn="auto">
+              <a:pPr algn="ctr" defTabSz="456565" fontAlgn="auto">
                 <a:spcBef>
                   <a:spcPts val="0"/>
                 </a:spcBef>
@@ -5553,7 +3206,7 @@
                 </a:spcAft>
                 <a:defRPr/>
               </a:pPr>
-              <a:endParaRPr lang="en-US" sz="923" dirty="0">
+              <a:endParaRPr lang="en-US" sz="925" dirty="0">
                 <a:latin typeface="Open Sans Light"/>
               </a:endParaRPr>
             </a:p>
@@ -5562,13 +3215,7 @@
       </p:grpSp>
       <p:pic>
         <p:nvPicPr>
-          <p:cNvPr id="21" name="Image 20">
-            <a:extLst>
-              <a:ext uri="{FF2B5EF4-FFF2-40B4-BE49-F238E27FC236}">
-                <a16:creationId xmlns:a16="http://schemas.microsoft.com/office/drawing/2014/main" id="{BBA76F50-A55F-9245-A363-154E7DFB1C4B}"/>
-              </a:ext>
-            </a:extLst>
-          </p:cNvPr>
+          <p:cNvPr id="21" name="Image 20"/>
           <p:cNvPicPr>
             <a:picLocks noChangeAspect="1"/>
           </p:cNvPicPr>
@@ -5592,13 +3239,7 @@
       </p:pic>
       <p:pic>
         <p:nvPicPr>
-          <p:cNvPr id="4" name="Picture 3" descr="A close-up of a logo&#10;&#10;Description automatically generated">
-            <a:extLst>
-              <a:ext uri="{FF2B5EF4-FFF2-40B4-BE49-F238E27FC236}">
-                <a16:creationId xmlns:a16="http://schemas.microsoft.com/office/drawing/2014/main" id="{324E6FFA-69DC-6C4F-0AA7-6FD47215DCBF}"/>
-              </a:ext>
-            </a:extLst>
-          </p:cNvPr>
+          <p:cNvPr id="4" name="Picture 3" descr="A close-up of a logo&#10;&#10;Description automatically generated"/>
           <p:cNvPicPr>
             <a:picLocks noChangeAspect="1"/>
           </p:cNvPicPr>
@@ -5621,27 +3262,22 @@
         </p:spPr>
       </p:pic>
     </p:spTree>
-    <p:extLst>
-      <p:ext uri="{BB962C8B-B14F-4D97-AF65-F5344CB8AC3E}">
-        <p14:creationId xmlns:p14="http://schemas.microsoft.com/office/powerpoint/2010/main" val="1449374226"/>
-      </p:ext>
-    </p:extLst>
   </p:cSld>
   <p:clrMap bg1="lt1" tx1="dk1" bg2="lt2" tx2="dk2" accent1="accent1" accent2="accent2" accent3="accent3" accent4="accent4" accent5="accent5" accent6="accent6" hlink="hlink" folHlink="folHlink"/>
   <p:sldLayoutIdLst>
-    <p:sldLayoutId id="2147483661" r:id="rId1"/>
-    <p:sldLayoutId id="2147483670" r:id="rId2"/>
-    <p:sldLayoutId id="2147483671" r:id="rId3"/>
-    <p:sldLayoutId id="2147483662" r:id="rId4"/>
-    <p:sldLayoutId id="2147483663" r:id="rId5"/>
-    <p:sldLayoutId id="2147483664" r:id="rId6"/>
-    <p:sldLayoutId id="2147483666" r:id="rId7"/>
-    <p:sldLayoutId id="2147483667" r:id="rId8"/>
-    <p:sldLayoutId id="2147483669" r:id="rId9"/>
+    <p:sldLayoutId id="2147483649" r:id="rId1"/>
+    <p:sldLayoutId id="2147483650" r:id="rId2"/>
+    <p:sldLayoutId id="2147483651" r:id="rId3"/>
+    <p:sldLayoutId id="2147483652" r:id="rId4"/>
+    <p:sldLayoutId id="2147483653" r:id="rId5"/>
+    <p:sldLayoutId id="2147483654" r:id="rId6"/>
+    <p:sldLayoutId id="2147483655" r:id="rId7"/>
+    <p:sldLayoutId id="2147483656" r:id="rId8"/>
+    <p:sldLayoutId id="2147483657" r:id="rId9"/>
   </p:sldLayoutIdLst>
   <p:txStyles>
     <p:titleStyle>
-      <a:lvl1pPr algn="l" defTabSz="914175" rtl="0" eaLnBrk="1" latinLnBrk="0" hangingPunct="1">
+      <a:lvl1pPr algn="l" defTabSz="914400" rtl="0" eaLnBrk="1" latinLnBrk="0" hangingPunct="1">
         <a:lnSpc>
           <a:spcPct val="90000"/>
         </a:lnSpc>
@@ -5649,7 +3285,7 @@
           <a:spcPct val="0"/>
         </a:spcBef>
         <a:buNone/>
-        <a:defRPr sz="4403" kern="1200">
+        <a:defRPr sz="4405" kern="1200">
           <a:solidFill>
             <a:schemeClr val="tx1"/>
           </a:solidFill>
@@ -5660,16 +3296,16 @@
       </a:lvl1pPr>
     </p:titleStyle>
     <p:bodyStyle>
-      <a:lvl1pPr marL="228540" indent="-228540" algn="l" defTabSz="914175" rtl="0" eaLnBrk="1" latinLnBrk="0" hangingPunct="1">
+      <a:lvl1pPr marL="228600" indent="-228600" algn="l" defTabSz="914400" rtl="0" eaLnBrk="1" latinLnBrk="0" hangingPunct="1">
         <a:lnSpc>
           <a:spcPct val="90000"/>
         </a:lnSpc>
         <a:spcBef>
-          <a:spcPts val="998"/>
+          <a:spcPts val="1000"/>
         </a:spcBef>
         <a:buFont typeface="Arial" panose="020B0604020202020204" pitchFamily="34" charset="0"/>
         <a:buChar char="•"/>
-        <a:defRPr sz="2798" kern="1200">
+        <a:defRPr sz="2800" kern="1200">
           <a:solidFill>
             <a:schemeClr val="tx1"/>
           </a:solidFill>
@@ -5678,12 +3314,12 @@
           <a:cs typeface="+mn-cs"/>
         </a:defRPr>
       </a:lvl1pPr>
-      <a:lvl2pPr marL="685628" indent="-228540" algn="l" defTabSz="914175" rtl="0" eaLnBrk="1" latinLnBrk="0" hangingPunct="1">
+      <a:lvl2pPr marL="685800" indent="-228600" algn="l" defTabSz="914400" rtl="0" eaLnBrk="1" latinLnBrk="0" hangingPunct="1">
         <a:lnSpc>
           <a:spcPct val="90000"/>
         </a:lnSpc>
         <a:spcBef>
-          <a:spcPts val="503"/>
+          <a:spcPts val="505"/>
         </a:spcBef>
         <a:buFont typeface="Arial" panose="020B0604020202020204" pitchFamily="34" charset="0"/>
         <a:buChar char="•"/>
@@ -5696,16 +3332,16 @@
           <a:cs typeface="+mn-cs"/>
         </a:defRPr>
       </a:lvl2pPr>
-      <a:lvl3pPr marL="1142715" indent="-228540" algn="l" defTabSz="914175" rtl="0" eaLnBrk="1" latinLnBrk="0" hangingPunct="1">
+      <a:lvl3pPr marL="1143000" indent="-228600" algn="l" defTabSz="914400" rtl="0" eaLnBrk="1" latinLnBrk="0" hangingPunct="1">
         <a:lnSpc>
           <a:spcPct val="90000"/>
         </a:lnSpc>
         <a:spcBef>
-          <a:spcPts val="503"/>
+          <a:spcPts val="505"/>
         </a:spcBef>
         <a:buFont typeface="Arial" panose="020B0604020202020204" pitchFamily="34" charset="0"/>
         <a:buChar char="•"/>
-        <a:defRPr sz="2002" kern="1200">
+        <a:defRPr sz="2000" kern="1200">
           <a:solidFill>
             <a:schemeClr val="tx1"/>
           </a:solidFill>
@@ -5714,12 +3350,12 @@
           <a:cs typeface="+mn-cs"/>
         </a:defRPr>
       </a:lvl3pPr>
-      <a:lvl4pPr marL="1599803" indent="-228540" algn="l" defTabSz="914175" rtl="0" eaLnBrk="1" latinLnBrk="0" hangingPunct="1">
+      <a:lvl4pPr marL="1599565" indent="-228600" algn="l" defTabSz="914400" rtl="0" eaLnBrk="1" latinLnBrk="0" hangingPunct="1">
         <a:lnSpc>
           <a:spcPct val="90000"/>
         </a:lnSpc>
         <a:spcBef>
-          <a:spcPts val="503"/>
+          <a:spcPts val="505"/>
         </a:spcBef>
         <a:buFont typeface="Arial" panose="020B0604020202020204" pitchFamily="34" charset="0"/>
         <a:buChar char="•"/>
@@ -5732,12 +3368,12 @@
           <a:cs typeface="+mn-cs"/>
         </a:defRPr>
       </a:lvl4pPr>
-      <a:lvl5pPr marL="2056883" indent="-228540" algn="l" defTabSz="914175" rtl="0" eaLnBrk="1" latinLnBrk="0" hangingPunct="1">
+      <a:lvl5pPr marL="2056765" indent="-228600" algn="l" defTabSz="914400" rtl="0" eaLnBrk="1" latinLnBrk="0" hangingPunct="1">
         <a:lnSpc>
           <a:spcPct val="90000"/>
         </a:lnSpc>
         <a:spcBef>
-          <a:spcPts val="503"/>
+          <a:spcPts val="505"/>
         </a:spcBef>
         <a:buFont typeface="Arial" panose="020B0604020202020204" pitchFamily="34" charset="0"/>
         <a:buChar char="•"/>
@@ -5750,12 +3386,12 @@
           <a:cs typeface="+mn-cs"/>
         </a:defRPr>
       </a:lvl5pPr>
-      <a:lvl6pPr marL="2513970" indent="-228540" algn="l" defTabSz="914175" rtl="0" eaLnBrk="1" latinLnBrk="0" hangingPunct="1">
+      <a:lvl6pPr marL="2513965" indent="-228600" algn="l" defTabSz="914400" rtl="0" eaLnBrk="1" latinLnBrk="0" hangingPunct="1">
         <a:lnSpc>
           <a:spcPct val="90000"/>
         </a:lnSpc>
         <a:spcBef>
-          <a:spcPts val="503"/>
+          <a:spcPts val="505"/>
         </a:spcBef>
         <a:buFont typeface="Arial" panose="020B0604020202020204" pitchFamily="34" charset="0"/>
         <a:buChar char="•"/>
@@ -5768,12 +3404,12 @@
           <a:cs typeface="+mn-cs"/>
         </a:defRPr>
       </a:lvl6pPr>
-      <a:lvl7pPr marL="2971058" indent="-228540" algn="l" defTabSz="914175" rtl="0" eaLnBrk="1" latinLnBrk="0" hangingPunct="1">
+      <a:lvl7pPr marL="2971165" indent="-228600" algn="l" defTabSz="914400" rtl="0" eaLnBrk="1" latinLnBrk="0" hangingPunct="1">
         <a:lnSpc>
           <a:spcPct val="90000"/>
         </a:lnSpc>
         <a:spcBef>
-          <a:spcPts val="503"/>
+          <a:spcPts val="505"/>
         </a:spcBef>
         <a:buFont typeface="Arial" panose="020B0604020202020204" pitchFamily="34" charset="0"/>
         <a:buChar char="•"/>
@@ -5786,12 +3422,12 @@
           <a:cs typeface="+mn-cs"/>
         </a:defRPr>
       </a:lvl7pPr>
-      <a:lvl8pPr marL="3428145" indent="-228540" algn="l" defTabSz="914175" rtl="0" eaLnBrk="1" latinLnBrk="0" hangingPunct="1">
+      <a:lvl8pPr marL="3428365" indent="-228600" algn="l" defTabSz="914400" rtl="0" eaLnBrk="1" latinLnBrk="0" hangingPunct="1">
         <a:lnSpc>
           <a:spcPct val="90000"/>
         </a:lnSpc>
         <a:spcBef>
-          <a:spcPts val="503"/>
+          <a:spcPts val="505"/>
         </a:spcBef>
         <a:buFont typeface="Arial" panose="020B0604020202020204" pitchFamily="34" charset="0"/>
         <a:buChar char="•"/>
@@ -5804,12 +3440,12 @@
           <a:cs typeface="+mn-cs"/>
         </a:defRPr>
       </a:lvl8pPr>
-      <a:lvl9pPr marL="3885225" indent="-228540" algn="l" defTabSz="914175" rtl="0" eaLnBrk="1" latinLnBrk="0" hangingPunct="1">
+      <a:lvl9pPr marL="3884930" indent="-228600" algn="l" defTabSz="914400" rtl="0" eaLnBrk="1" latinLnBrk="0" hangingPunct="1">
         <a:lnSpc>
           <a:spcPct val="90000"/>
         </a:lnSpc>
         <a:spcBef>
-          <a:spcPts val="503"/>
+          <a:spcPts val="505"/>
         </a:spcBef>
         <a:buFont typeface="Arial" panose="020B0604020202020204" pitchFamily="34" charset="0"/>
         <a:buChar char="•"/>
@@ -5827,7 +3463,7 @@
       <a:defPPr>
         <a:defRPr lang="en-US"/>
       </a:defPPr>
-      <a:lvl1pPr marL="0" algn="l" defTabSz="914175" rtl="0" eaLnBrk="1" latinLnBrk="0" hangingPunct="1">
+      <a:lvl1pPr marL="0" algn="l" defTabSz="914400" rtl="0" eaLnBrk="1" latinLnBrk="0" hangingPunct="1">
         <a:defRPr sz="1800" kern="1200">
           <a:solidFill>
             <a:schemeClr val="tx1"/>
@@ -5837,7 +3473,7 @@
           <a:cs typeface="+mn-cs"/>
         </a:defRPr>
       </a:lvl1pPr>
-      <a:lvl2pPr marL="457088" algn="l" defTabSz="914175" rtl="0" eaLnBrk="1" latinLnBrk="0" hangingPunct="1">
+      <a:lvl2pPr marL="457200" algn="l" defTabSz="914400" rtl="0" eaLnBrk="1" latinLnBrk="0" hangingPunct="1">
         <a:defRPr sz="1800" kern="1200">
           <a:solidFill>
             <a:schemeClr val="tx1"/>
@@ -5847,7 +3483,7 @@
           <a:cs typeface="+mn-cs"/>
         </a:defRPr>
       </a:lvl2pPr>
-      <a:lvl3pPr marL="914175" algn="l" defTabSz="914175" rtl="0" eaLnBrk="1" latinLnBrk="0" hangingPunct="1">
+      <a:lvl3pPr marL="914400" algn="l" defTabSz="914400" rtl="0" eaLnBrk="1" latinLnBrk="0" hangingPunct="1">
         <a:defRPr sz="1800" kern="1200">
           <a:solidFill>
             <a:schemeClr val="tx1"/>
@@ -5857,7 +3493,7 @@
           <a:cs typeface="+mn-cs"/>
         </a:defRPr>
       </a:lvl3pPr>
-      <a:lvl4pPr marL="1371255" algn="l" defTabSz="914175" rtl="0" eaLnBrk="1" latinLnBrk="0" hangingPunct="1">
+      <a:lvl4pPr marL="1370965" algn="l" defTabSz="914400" rtl="0" eaLnBrk="1" latinLnBrk="0" hangingPunct="1">
         <a:defRPr sz="1800" kern="1200">
           <a:solidFill>
             <a:schemeClr val="tx1"/>
@@ -5867,7 +3503,7 @@
           <a:cs typeface="+mn-cs"/>
         </a:defRPr>
       </a:lvl4pPr>
-      <a:lvl5pPr marL="1828343" algn="l" defTabSz="914175" rtl="0" eaLnBrk="1" latinLnBrk="0" hangingPunct="1">
+      <a:lvl5pPr marL="1828165" algn="l" defTabSz="914400" rtl="0" eaLnBrk="1" latinLnBrk="0" hangingPunct="1">
         <a:defRPr sz="1800" kern="1200">
           <a:solidFill>
             <a:schemeClr val="tx1"/>
@@ -5877,7 +3513,7 @@
           <a:cs typeface="+mn-cs"/>
         </a:defRPr>
       </a:lvl5pPr>
-      <a:lvl6pPr marL="2285430" algn="l" defTabSz="914175" rtl="0" eaLnBrk="1" latinLnBrk="0" hangingPunct="1">
+      <a:lvl6pPr marL="2285365" algn="l" defTabSz="914400" rtl="0" eaLnBrk="1" latinLnBrk="0" hangingPunct="1">
         <a:defRPr sz="1800" kern="1200">
           <a:solidFill>
             <a:schemeClr val="tx1"/>
@@ -5887,7 +3523,7 @@
           <a:cs typeface="+mn-cs"/>
         </a:defRPr>
       </a:lvl6pPr>
-      <a:lvl7pPr marL="2742518" algn="l" defTabSz="914175" rtl="0" eaLnBrk="1" latinLnBrk="0" hangingPunct="1">
+      <a:lvl7pPr marL="2742565" algn="l" defTabSz="914400" rtl="0" eaLnBrk="1" latinLnBrk="0" hangingPunct="1">
         <a:defRPr sz="1800" kern="1200">
           <a:solidFill>
             <a:schemeClr val="tx1"/>
@@ -5897,7 +3533,7 @@
           <a:cs typeface="+mn-cs"/>
         </a:defRPr>
       </a:lvl7pPr>
-      <a:lvl8pPr marL="3199598" algn="l" defTabSz="914175" rtl="0" eaLnBrk="1" latinLnBrk="0" hangingPunct="1">
+      <a:lvl8pPr marL="3199765" algn="l" defTabSz="914400" rtl="0" eaLnBrk="1" latinLnBrk="0" hangingPunct="1">
         <a:defRPr sz="1800" kern="1200">
           <a:solidFill>
             <a:schemeClr val="tx1"/>
@@ -5907,7 +3543,7 @@
           <a:cs typeface="+mn-cs"/>
         </a:defRPr>
       </a:lvl8pPr>
-      <a:lvl9pPr marL="3656685" algn="l" defTabSz="914175" rtl="0" eaLnBrk="1" latinLnBrk="0" hangingPunct="1">
+      <a:lvl9pPr marL="3656965" algn="l" defTabSz="914400" rtl="0" eaLnBrk="1" latinLnBrk="0" hangingPunct="1">
         <a:defRPr sz="1800" kern="1200">
           <a:solidFill>
             <a:schemeClr val="tx1"/>
@@ -5941,13 +3577,7 @@
       </p:grpSpPr>
       <p:sp>
         <p:nvSpPr>
-          <p:cNvPr id="2" name="Text Placeholder 1">
-            <a:extLst>
-              <a:ext uri="{FF2B5EF4-FFF2-40B4-BE49-F238E27FC236}">
-                <a16:creationId xmlns:a16="http://schemas.microsoft.com/office/drawing/2014/main" id="{61F76E59-D580-A296-5A62-406F6DCAB852}"/>
-              </a:ext>
-            </a:extLst>
-          </p:cNvPr>
+          <p:cNvPr id="2" name="Text Placeholder 1"/>
           <p:cNvSpPr>
             <a:spLocks noGrp="1"/>
           </p:cNvSpPr>
@@ -5987,7 +3617,7 @@
               <a:rPr lang="en-CA" sz="2400" b="1" dirty="0">
                 <a:hlinkClick r:id="rId2"/>
               </a:rPr>
-              <a:t>https://github.com/aosakwe/MiCM_IntroToRProgramming</a:t>
+              <a:t>https://github.com/Bangli666/IntroRacademic</a:t>
             </a:r>
             <a:endParaRPr lang="en-CA" sz="2400" b="1" dirty="0"/>
           </a:p>
@@ -6028,13 +3658,7 @@
       </p:sp>
       <p:pic>
         <p:nvPicPr>
-          <p:cNvPr id="4" name="Picture 3">
-            <a:extLst>
-              <a:ext uri="{FF2B5EF4-FFF2-40B4-BE49-F238E27FC236}">
-                <a16:creationId xmlns:a16="http://schemas.microsoft.com/office/drawing/2014/main" id="{3A27BC43-468B-8D8C-AF92-D6539092A3DD}"/>
-              </a:ext>
-            </a:extLst>
-          </p:cNvPr>
+          <p:cNvPr id="4" name="Picture 3"/>
           <p:cNvPicPr>
             <a:picLocks noChangeAspect="1"/>
           </p:cNvPicPr>
@@ -6058,13 +3682,7 @@
       </p:pic>
       <p:sp>
         <p:nvSpPr>
-          <p:cNvPr id="5" name="Arrow: Up 4">
-            <a:extLst>
-              <a:ext uri="{FF2B5EF4-FFF2-40B4-BE49-F238E27FC236}">
-                <a16:creationId xmlns:a16="http://schemas.microsoft.com/office/drawing/2014/main" id="{350B9146-DDAB-0C38-579E-C879A16F7697}"/>
-              </a:ext>
-            </a:extLst>
-          </p:cNvPr>
+          <p:cNvPr id="5" name="Arrow: Up 4"/>
           <p:cNvSpPr/>
           <p:nvPr/>
         </p:nvSpPr>
@@ -6109,13 +3727,7 @@
       </p:sp>
       <p:pic>
         <p:nvPicPr>
-          <p:cNvPr id="7" name="Picture 6">
-            <a:extLst>
-              <a:ext uri="{FF2B5EF4-FFF2-40B4-BE49-F238E27FC236}">
-                <a16:creationId xmlns:a16="http://schemas.microsoft.com/office/drawing/2014/main" id="{9DA5C643-5E47-70A5-622A-9B7D040262CA}"/>
-              </a:ext>
-            </a:extLst>
-          </p:cNvPr>
+          <p:cNvPr id="7" name="Picture 6"/>
           <p:cNvPicPr>
             <a:picLocks noChangeAspect="1"/>
           </p:cNvPicPr>
@@ -6139,13 +3751,7 @@
       </p:pic>
       <p:sp>
         <p:nvSpPr>
-          <p:cNvPr id="8" name="Arrow: Up 7">
-            <a:extLst>
-              <a:ext uri="{FF2B5EF4-FFF2-40B4-BE49-F238E27FC236}">
-                <a16:creationId xmlns:a16="http://schemas.microsoft.com/office/drawing/2014/main" id="{A480A3C8-DE8E-C59D-7748-6846CDA71D86}"/>
-              </a:ext>
-            </a:extLst>
-          </p:cNvPr>
+          <p:cNvPr id="8" name="Arrow: Up 7"/>
           <p:cNvSpPr/>
           <p:nvPr/>
         </p:nvSpPr>
@@ -6189,11 +3795,6 @@
         </p:txBody>
       </p:sp>
     </p:spTree>
-    <p:extLst>
-      <p:ext uri="{BB962C8B-B14F-4D97-AF65-F5344CB8AC3E}">
-        <p14:creationId xmlns:p14="http://schemas.microsoft.com/office/powerpoint/2010/main" val="495471787"/>
-      </p:ext>
-    </p:extLst>
   </p:cSld>
   <p:clrMapOvr>
     <a:masterClrMapping/>
@@ -6220,13 +3821,7 @@
       </p:grpSpPr>
       <p:sp>
         <p:nvSpPr>
-          <p:cNvPr id="3" name="Espace réservé du contenu 2">
-            <a:extLst>
-              <a:ext uri="{FF2B5EF4-FFF2-40B4-BE49-F238E27FC236}">
-                <a16:creationId xmlns:a16="http://schemas.microsoft.com/office/drawing/2014/main" id="{87B93719-7A3D-1148-9FCA-AF4A65C4BC41}"/>
-              </a:ext>
-            </a:extLst>
-          </p:cNvPr>
+          <p:cNvPr id="3" name="Espace réservé du contenu 2"/>
           <p:cNvSpPr>
             <a:spLocks noGrp="1"/>
           </p:cNvSpPr>
@@ -6292,13 +3887,7 @@
       </p:sp>
       <p:pic>
         <p:nvPicPr>
-          <p:cNvPr id="6" name="Content Placeholder 5" descr="Logo&#10;&#10;Description automatically generated">
-            <a:extLst>
-              <a:ext uri="{FF2B5EF4-FFF2-40B4-BE49-F238E27FC236}">
-                <a16:creationId xmlns:a16="http://schemas.microsoft.com/office/drawing/2014/main" id="{2035D997-3B6D-9001-3F5D-EE6293D78264}"/>
-              </a:ext>
-            </a:extLst>
-          </p:cNvPr>
+          <p:cNvPr id="6" name="Content Placeholder 5" descr="Logo&#10;&#10;Description automatically generated"/>
           <p:cNvPicPr>
             <a:picLocks noGrp="1" noChangeAspect="1"/>
           </p:cNvPicPr>
@@ -6321,16 +3910,8 @@
       </p:pic>
       <p:sp>
         <p:nvSpPr>
-          <p:cNvPr id="7" name="Espace réservé du contenu 2">
-            <a:extLst>
-              <a:ext uri="{FF2B5EF4-FFF2-40B4-BE49-F238E27FC236}">
-                <a16:creationId xmlns:a16="http://schemas.microsoft.com/office/drawing/2014/main" id="{FD6C6E3F-B6D9-D7AB-1339-C28B48B6A34F}"/>
-              </a:ext>
-            </a:extLst>
-          </p:cNvPr>
-          <p:cNvSpPr txBox="1">
-            <a:spLocks/>
-          </p:cNvSpPr>
+          <p:cNvPr id="7" name="Espace réservé du contenu 2"/>
+          <p:cNvSpPr txBox="1"/>
           <p:nvPr/>
         </p:nvSpPr>
         <p:spPr>
@@ -6347,100 +3928,100 @@
             <a:noAutofit/>
           </a:bodyPr>
           <a:lstStyle>
-            <a:lvl1pPr marL="228540" indent="-228540" defTabSz="914175">
+            <a:lvl1pPr marL="228600" indent="-228600" defTabSz="914400">
               <a:lnSpc>
                 <a:spcPct val="90000"/>
               </a:lnSpc>
               <a:spcBef>
-                <a:spcPts val="998"/>
+                <a:spcPts val="1000"/>
               </a:spcBef>
               <a:buFont typeface="Arial" panose="020B0604020202020204" pitchFamily="34" charset="0"/>
               <a:buChar char="•"/>
               <a:defRPr sz="2200"/>
             </a:lvl1pPr>
-            <a:lvl2pPr marL="685628" indent="-228540" defTabSz="914175">
+            <a:lvl2pPr marL="685800" indent="-228600" defTabSz="914400">
               <a:lnSpc>
                 <a:spcPct val="90000"/>
               </a:lnSpc>
               <a:spcBef>
-                <a:spcPts val="503"/>
+                <a:spcPts val="505"/>
               </a:spcBef>
               <a:buFont typeface="Arial" panose="020B0604020202020204" pitchFamily="34" charset="0"/>
               <a:buChar char="•"/>
               <a:defRPr sz="2400"/>
             </a:lvl2pPr>
-            <a:lvl3pPr marL="1142715" indent="-228540" defTabSz="914175">
+            <a:lvl3pPr marL="1143000" indent="-228600" defTabSz="914400">
               <a:lnSpc>
                 <a:spcPct val="90000"/>
               </a:lnSpc>
               <a:spcBef>
-                <a:spcPts val="503"/>
+                <a:spcPts val="505"/>
               </a:spcBef>
               <a:buFont typeface="Arial" panose="020B0604020202020204" pitchFamily="34" charset="0"/>
               <a:buChar char="•"/>
-              <a:defRPr sz="2002"/>
+              <a:defRPr sz="2000"/>
             </a:lvl3pPr>
-            <a:lvl4pPr marL="1599803" indent="-228540" defTabSz="914175">
+            <a:lvl4pPr marL="1599565" indent="-228600" defTabSz="914400">
               <a:lnSpc>
                 <a:spcPct val="90000"/>
               </a:lnSpc>
               <a:spcBef>
-                <a:spcPts val="503"/>
+                <a:spcPts val="505"/>
               </a:spcBef>
               <a:buFont typeface="Arial" panose="020B0604020202020204" pitchFamily="34" charset="0"/>
               <a:buChar char="•"/>
               <a:defRPr sz="1800"/>
             </a:lvl4pPr>
-            <a:lvl5pPr marL="2056883" indent="-228540" defTabSz="914175">
+            <a:lvl5pPr marL="2056765" indent="-228600" defTabSz="914400">
               <a:lnSpc>
                 <a:spcPct val="90000"/>
               </a:lnSpc>
               <a:spcBef>
-                <a:spcPts val="503"/>
+                <a:spcPts val="505"/>
               </a:spcBef>
               <a:buFont typeface="Arial" panose="020B0604020202020204" pitchFamily="34" charset="0"/>
               <a:buChar char="•"/>
               <a:defRPr sz="1800"/>
             </a:lvl5pPr>
-            <a:lvl6pPr marL="2513970" indent="-228540" defTabSz="914175">
+            <a:lvl6pPr marL="2513965" indent="-228600" defTabSz="914400">
               <a:lnSpc>
                 <a:spcPct val="90000"/>
               </a:lnSpc>
               <a:spcBef>
-                <a:spcPts val="503"/>
+                <a:spcPts val="505"/>
               </a:spcBef>
               <a:buFont typeface="Arial" panose="020B0604020202020204" pitchFamily="34" charset="0"/>
               <a:buChar char="•"/>
               <a:defRPr sz="1800"/>
             </a:lvl6pPr>
-            <a:lvl7pPr marL="2971058" indent="-228540" defTabSz="914175">
+            <a:lvl7pPr marL="2971165" indent="-228600" defTabSz="914400">
               <a:lnSpc>
                 <a:spcPct val="90000"/>
               </a:lnSpc>
               <a:spcBef>
-                <a:spcPts val="503"/>
+                <a:spcPts val="505"/>
               </a:spcBef>
               <a:buFont typeface="Arial" panose="020B0604020202020204" pitchFamily="34" charset="0"/>
               <a:buChar char="•"/>
               <a:defRPr sz="1800"/>
             </a:lvl7pPr>
-            <a:lvl8pPr marL="3428145" indent="-228540" defTabSz="914175">
+            <a:lvl8pPr marL="3428365" indent="-228600" defTabSz="914400">
               <a:lnSpc>
                 <a:spcPct val="90000"/>
               </a:lnSpc>
               <a:spcBef>
-                <a:spcPts val="503"/>
+                <a:spcPts val="505"/>
               </a:spcBef>
               <a:buFont typeface="Arial" panose="020B0604020202020204" pitchFamily="34" charset="0"/>
               <a:buChar char="•"/>
               <a:defRPr sz="1800"/>
             </a:lvl8pPr>
-            <a:lvl9pPr marL="3885225" indent="-228540" defTabSz="914175">
+            <a:lvl9pPr marL="3884930" indent="-228600" defTabSz="914400">
               <a:lnSpc>
                 <a:spcPct val="90000"/>
               </a:lnSpc>
               <a:spcBef>
-                <a:spcPts val="503"/>
+                <a:spcPts val="505"/>
               </a:spcBef>
               <a:buFont typeface="Arial" panose="020B0604020202020204" pitchFamily="34" charset="0"/>
               <a:buChar char="•"/>
@@ -6494,13 +4075,7 @@
       </p:sp>
       <p:sp>
         <p:nvSpPr>
-          <p:cNvPr id="9" name="TextBox 8">
-            <a:extLst>
-              <a:ext uri="{FF2B5EF4-FFF2-40B4-BE49-F238E27FC236}">
-                <a16:creationId xmlns:a16="http://schemas.microsoft.com/office/drawing/2014/main" id="{B72C41C9-3FB3-E3E3-F50D-FAB44C615F31}"/>
-              </a:ext>
-            </a:extLst>
-          </p:cNvPr>
+          <p:cNvPr id="9" name="TextBox 8"/>
           <p:cNvSpPr txBox="1"/>
           <p:nvPr/>
         </p:nvSpPr>
@@ -6541,11 +4116,6 @@
         </p:txBody>
       </p:sp>
     </p:spTree>
-    <p:extLst>
-      <p:ext uri="{BB962C8B-B14F-4D97-AF65-F5344CB8AC3E}">
-        <p14:creationId xmlns:p14="http://schemas.microsoft.com/office/powerpoint/2010/main" val="3891667287"/>
-      </p:ext>
-    </p:extLst>
   </p:cSld>
   <p:clrMapOvr>
     <a:masterClrMapping/>
@@ -6896,13 +4466,7 @@
       </p:grpSpPr>
       <p:sp>
         <p:nvSpPr>
-          <p:cNvPr id="2" name="Title 1">
-            <a:extLst>
-              <a:ext uri="{FF2B5EF4-FFF2-40B4-BE49-F238E27FC236}">
-                <a16:creationId xmlns:a16="http://schemas.microsoft.com/office/drawing/2014/main" id="{9634F73A-3D52-92E5-6A10-CB334DD84C20}"/>
-              </a:ext>
-            </a:extLst>
-          </p:cNvPr>
+          <p:cNvPr id="2" name="Title 1"/>
           <p:cNvSpPr>
             <a:spLocks noGrp="1"/>
           </p:cNvSpPr>
@@ -6924,13 +4488,7 @@
       </p:sp>
       <p:sp>
         <p:nvSpPr>
-          <p:cNvPr id="3" name="Content Placeholder 2">
-            <a:extLst>
-              <a:ext uri="{FF2B5EF4-FFF2-40B4-BE49-F238E27FC236}">
-                <a16:creationId xmlns:a16="http://schemas.microsoft.com/office/drawing/2014/main" id="{C7E16A4E-467E-1C66-F364-D1BBB942C101}"/>
-              </a:ext>
-            </a:extLst>
-          </p:cNvPr>
+          <p:cNvPr id="3" name="Content Placeholder 2"/>
           <p:cNvSpPr>
             <a:spLocks noGrp="1"/>
           </p:cNvSpPr>
@@ -6987,11 +4545,6 @@
         </p:txBody>
       </p:sp>
     </p:spTree>
-    <p:extLst>
-      <p:ext uri="{BB962C8B-B14F-4D97-AF65-F5344CB8AC3E}">
-        <p14:creationId xmlns:p14="http://schemas.microsoft.com/office/powerpoint/2010/main" val="98069860"/>
-      </p:ext>
-    </p:extLst>
   </p:cSld>
   <p:clrMapOvr>
     <a:masterClrMapping/>
@@ -7391,13 +4944,7 @@
       </p:grpSpPr>
       <p:sp>
         <p:nvSpPr>
-          <p:cNvPr id="2" name="Title 1">
-            <a:extLst>
-              <a:ext uri="{FF2B5EF4-FFF2-40B4-BE49-F238E27FC236}">
-                <a16:creationId xmlns:a16="http://schemas.microsoft.com/office/drawing/2014/main" id="{C9812741-E421-CF59-A1C9-EDFC7254474C}"/>
-              </a:ext>
-            </a:extLst>
-          </p:cNvPr>
+          <p:cNvPr id="2" name="Title 1"/>
           <p:cNvSpPr>
             <a:spLocks noGrp="1"/>
           </p:cNvSpPr>
@@ -7420,13 +4967,7 @@
       </p:sp>
       <p:sp>
         <p:nvSpPr>
-          <p:cNvPr id="3" name="Content Placeholder 2">
-            <a:extLst>
-              <a:ext uri="{FF2B5EF4-FFF2-40B4-BE49-F238E27FC236}">
-                <a16:creationId xmlns:a16="http://schemas.microsoft.com/office/drawing/2014/main" id="{B0AD9D8C-5054-F950-C81C-670098FBE156}"/>
-              </a:ext>
-            </a:extLst>
-          </p:cNvPr>
+          <p:cNvPr id="3" name="Content Placeholder 2"/>
           <p:cNvSpPr>
             <a:spLocks noGrp="1"/>
           </p:cNvSpPr>
@@ -7541,11 +5082,6 @@
         </p:txBody>
       </p:sp>
     </p:spTree>
-    <p:extLst>
-      <p:ext uri="{BB962C8B-B14F-4D97-AF65-F5344CB8AC3E}">
-        <p14:creationId xmlns:p14="http://schemas.microsoft.com/office/powerpoint/2010/main" val="4274729827"/>
-      </p:ext>
-    </p:extLst>
   </p:cSld>
   <p:clrMapOvr>
     <a:masterClrMapping/>
@@ -7793,13 +5329,7 @@
       </p:grpSpPr>
       <p:sp>
         <p:nvSpPr>
-          <p:cNvPr id="2" name="Title 1">
-            <a:extLst>
-              <a:ext uri="{FF2B5EF4-FFF2-40B4-BE49-F238E27FC236}">
-                <a16:creationId xmlns:a16="http://schemas.microsoft.com/office/drawing/2014/main" id="{A9D5EE11-CC3B-121C-2B86-5907DB74C1A5}"/>
-              </a:ext>
-            </a:extLst>
-          </p:cNvPr>
+          <p:cNvPr id="2" name="Title 1"/>
           <p:cNvSpPr>
             <a:spLocks noGrp="1"/>
           </p:cNvSpPr>
@@ -7822,13 +5352,7 @@
       </p:sp>
       <p:sp>
         <p:nvSpPr>
-          <p:cNvPr id="3" name="Content Placeholder 2">
-            <a:extLst>
-              <a:ext uri="{FF2B5EF4-FFF2-40B4-BE49-F238E27FC236}">
-                <a16:creationId xmlns:a16="http://schemas.microsoft.com/office/drawing/2014/main" id="{934E10ED-038D-248F-33C3-05378C376D16}"/>
-              </a:ext>
-            </a:extLst>
-          </p:cNvPr>
+          <p:cNvPr id="3" name="Content Placeholder 2"/>
           <p:cNvSpPr>
             <a:spLocks noGrp="1"/>
           </p:cNvSpPr>
@@ -7903,13 +5427,7 @@
       </p:sp>
       <p:pic>
         <p:nvPicPr>
-          <p:cNvPr id="4" name="Content Placeholder 5" descr="Logo&#10;&#10;Description automatically generated">
-            <a:extLst>
-              <a:ext uri="{FF2B5EF4-FFF2-40B4-BE49-F238E27FC236}">
-                <a16:creationId xmlns:a16="http://schemas.microsoft.com/office/drawing/2014/main" id="{3AF31699-D8EE-4D45-8DB9-887D5BBCCDE6}"/>
-              </a:ext>
-            </a:extLst>
-          </p:cNvPr>
+          <p:cNvPr id="4" name="Content Placeholder 5" descr="Logo&#10;&#10;Description automatically generated"/>
           <p:cNvPicPr>
             <a:picLocks noChangeAspect="1"/>
           </p:cNvPicPr>
@@ -7933,13 +5451,7 @@
       </p:pic>
       <p:pic>
         <p:nvPicPr>
-          <p:cNvPr id="8" name="Picture 7">
-            <a:extLst>
-              <a:ext uri="{FF2B5EF4-FFF2-40B4-BE49-F238E27FC236}">
-                <a16:creationId xmlns:a16="http://schemas.microsoft.com/office/drawing/2014/main" id="{7C3B467E-821D-F9CB-77CA-71BFE36C386C}"/>
-              </a:ext>
-            </a:extLst>
-          </p:cNvPr>
+          <p:cNvPr id="8" name="Picture 7"/>
           <p:cNvPicPr>
             <a:picLocks noChangeAspect="1"/>
           </p:cNvPicPr>
@@ -7948,7 +5460,9 @@
         <p:blipFill rotWithShape="1">
           <a:blip r:embed="rId3"/>
           <a:srcRect t="1004"/>
-          <a:stretch/>
+          <a:stretch>
+            <a:fillRect/>
+          </a:stretch>
         </p:blipFill>
         <p:spPr>
           <a:xfrm>
@@ -7961,11 +5475,6 @@
         </p:spPr>
       </p:pic>
     </p:spTree>
-    <p:extLst>
-      <p:ext uri="{BB962C8B-B14F-4D97-AF65-F5344CB8AC3E}">
-        <p14:creationId xmlns:p14="http://schemas.microsoft.com/office/powerpoint/2010/main" val="2801728874"/>
-      </p:ext>
-    </p:extLst>
   </p:cSld>
   <p:clrMapOvr>
     <a:masterClrMapping/>
@@ -8244,13 +5753,7 @@
       </p:grpSpPr>
       <p:pic>
         <p:nvPicPr>
-          <p:cNvPr id="5" name="Picture 4">
-            <a:extLst>
-              <a:ext uri="{FF2B5EF4-FFF2-40B4-BE49-F238E27FC236}">
-                <a16:creationId xmlns:a16="http://schemas.microsoft.com/office/drawing/2014/main" id="{21D84D00-1FAE-1622-2E48-6833C8A32518}"/>
-              </a:ext>
-            </a:extLst>
-          </p:cNvPr>
+          <p:cNvPr id="5" name="Picture 4"/>
           <p:cNvPicPr>
             <a:picLocks noChangeAspect="1"/>
           </p:cNvPicPr>
@@ -8273,11 +5776,6 @@
         </p:spPr>
       </p:pic>
     </p:spTree>
-    <p:extLst>
-      <p:ext uri="{BB962C8B-B14F-4D97-AF65-F5344CB8AC3E}">
-        <p14:creationId xmlns:p14="http://schemas.microsoft.com/office/powerpoint/2010/main" val="1381298653"/>
-      </p:ext>
-    </p:extLst>
   </p:cSld>
   <p:clrMapOvr>
     <a:masterClrMapping/>
@@ -8304,13 +5802,7 @@
       </p:grpSpPr>
       <p:pic>
         <p:nvPicPr>
-          <p:cNvPr id="5" name="Picture 4">
-            <a:extLst>
-              <a:ext uri="{FF2B5EF4-FFF2-40B4-BE49-F238E27FC236}">
-                <a16:creationId xmlns:a16="http://schemas.microsoft.com/office/drawing/2014/main" id="{AB43CA56-8BBF-85D6-B5BA-7A6232B10075}"/>
-              </a:ext>
-            </a:extLst>
-          </p:cNvPr>
+          <p:cNvPr id="5" name="Picture 4"/>
           <p:cNvPicPr>
             <a:picLocks noChangeAspect="1"/>
           </p:cNvPicPr>
@@ -8334,13 +5826,7 @@
       </p:pic>
       <p:sp>
         <p:nvSpPr>
-          <p:cNvPr id="6" name="Rectangle 5">
-            <a:extLst>
-              <a:ext uri="{FF2B5EF4-FFF2-40B4-BE49-F238E27FC236}">
-                <a16:creationId xmlns:a16="http://schemas.microsoft.com/office/drawing/2014/main" id="{60FC3492-0525-B7D3-C7EC-0293C4436286}"/>
-              </a:ext>
-            </a:extLst>
-          </p:cNvPr>
+          <p:cNvPr id="6" name="Rectangle 5"/>
           <p:cNvSpPr/>
           <p:nvPr/>
         </p:nvSpPr>
@@ -8386,13 +5872,7 @@
       </p:sp>
       <p:sp>
         <p:nvSpPr>
-          <p:cNvPr id="7" name="Rectangle 6">
-            <a:extLst>
-              <a:ext uri="{FF2B5EF4-FFF2-40B4-BE49-F238E27FC236}">
-                <a16:creationId xmlns:a16="http://schemas.microsoft.com/office/drawing/2014/main" id="{CED16953-8F90-3617-668F-897342721F2C}"/>
-              </a:ext>
-            </a:extLst>
-          </p:cNvPr>
+          <p:cNvPr id="7" name="Rectangle 6"/>
           <p:cNvSpPr/>
           <p:nvPr/>
         </p:nvSpPr>
@@ -8438,13 +5918,7 @@
       </p:sp>
       <p:sp>
         <p:nvSpPr>
-          <p:cNvPr id="8" name="Rectangle 7">
-            <a:extLst>
-              <a:ext uri="{FF2B5EF4-FFF2-40B4-BE49-F238E27FC236}">
-                <a16:creationId xmlns:a16="http://schemas.microsoft.com/office/drawing/2014/main" id="{04D0206C-FDD4-0CA7-9EA2-A1AAB7C5A3BC}"/>
-              </a:ext>
-            </a:extLst>
-          </p:cNvPr>
+          <p:cNvPr id="8" name="Rectangle 7"/>
           <p:cNvSpPr/>
           <p:nvPr/>
         </p:nvSpPr>
@@ -8490,13 +5964,7 @@
       </p:sp>
       <p:sp>
         <p:nvSpPr>
-          <p:cNvPr id="9" name="Rectangle 8">
-            <a:extLst>
-              <a:ext uri="{FF2B5EF4-FFF2-40B4-BE49-F238E27FC236}">
-                <a16:creationId xmlns:a16="http://schemas.microsoft.com/office/drawing/2014/main" id="{7B4EAB9C-DB99-E683-2A6F-F7ACCD59A1C2}"/>
-              </a:ext>
-            </a:extLst>
-          </p:cNvPr>
+          <p:cNvPr id="9" name="Rectangle 8"/>
           <p:cNvSpPr/>
           <p:nvPr/>
         </p:nvSpPr>
@@ -8542,13 +6010,7 @@
       </p:sp>
       <p:sp>
         <p:nvSpPr>
-          <p:cNvPr id="10" name="Arrow: Down 9">
-            <a:extLst>
-              <a:ext uri="{FF2B5EF4-FFF2-40B4-BE49-F238E27FC236}">
-                <a16:creationId xmlns:a16="http://schemas.microsoft.com/office/drawing/2014/main" id="{F79D85A1-0A24-81BC-140C-33BCE757E4AA}"/>
-              </a:ext>
-            </a:extLst>
-          </p:cNvPr>
+          <p:cNvPr id="10" name="Arrow: Down 9"/>
           <p:cNvSpPr/>
           <p:nvPr/>
         </p:nvSpPr>
@@ -8588,13 +6050,7 @@
       </p:sp>
       <p:sp>
         <p:nvSpPr>
-          <p:cNvPr id="11" name="Arrow: Down 10">
-            <a:extLst>
-              <a:ext uri="{FF2B5EF4-FFF2-40B4-BE49-F238E27FC236}">
-                <a16:creationId xmlns:a16="http://schemas.microsoft.com/office/drawing/2014/main" id="{91E19A34-D091-B75F-CB9E-A4A89A651F0E}"/>
-              </a:ext>
-            </a:extLst>
-          </p:cNvPr>
+          <p:cNvPr id="11" name="Arrow: Down 10"/>
           <p:cNvSpPr/>
           <p:nvPr/>
         </p:nvSpPr>
@@ -8634,13 +6090,7 @@
       </p:sp>
       <p:sp>
         <p:nvSpPr>
-          <p:cNvPr id="12" name="Arrow: Down 11">
-            <a:extLst>
-              <a:ext uri="{FF2B5EF4-FFF2-40B4-BE49-F238E27FC236}">
-                <a16:creationId xmlns:a16="http://schemas.microsoft.com/office/drawing/2014/main" id="{B8A76522-419B-E808-8F28-60E5DAFF3BE1}"/>
-              </a:ext>
-            </a:extLst>
-          </p:cNvPr>
+          <p:cNvPr id="12" name="Arrow: Down 11"/>
           <p:cNvSpPr/>
           <p:nvPr/>
         </p:nvSpPr>
@@ -8680,13 +6130,7 @@
       </p:sp>
       <p:sp>
         <p:nvSpPr>
-          <p:cNvPr id="13" name="Arrow: Down 12">
-            <a:extLst>
-              <a:ext uri="{FF2B5EF4-FFF2-40B4-BE49-F238E27FC236}">
-                <a16:creationId xmlns:a16="http://schemas.microsoft.com/office/drawing/2014/main" id="{5F1501B4-9A7B-6D2C-32AC-BCECF8F737E2}"/>
-              </a:ext>
-            </a:extLst>
-          </p:cNvPr>
+          <p:cNvPr id="13" name="Arrow: Down 12"/>
           <p:cNvSpPr/>
           <p:nvPr/>
         </p:nvSpPr>
@@ -8726,13 +6170,7 @@
       </p:sp>
       <p:sp>
         <p:nvSpPr>
-          <p:cNvPr id="14" name="TextBox 13">
-            <a:extLst>
-              <a:ext uri="{FF2B5EF4-FFF2-40B4-BE49-F238E27FC236}">
-                <a16:creationId xmlns:a16="http://schemas.microsoft.com/office/drawing/2014/main" id="{52AE3262-76B8-841B-67E7-5549F9CCFCA1}"/>
-              </a:ext>
-            </a:extLst>
-          </p:cNvPr>
+          <p:cNvPr id="14" name="TextBox 13"/>
           <p:cNvSpPr txBox="1"/>
           <p:nvPr/>
         </p:nvSpPr>
@@ -8762,13 +6200,7 @@
       </p:sp>
       <p:sp>
         <p:nvSpPr>
-          <p:cNvPr id="15" name="TextBox 14">
-            <a:extLst>
-              <a:ext uri="{FF2B5EF4-FFF2-40B4-BE49-F238E27FC236}">
-                <a16:creationId xmlns:a16="http://schemas.microsoft.com/office/drawing/2014/main" id="{86D462B3-E1BA-CAAB-220B-E60B5EA2BC50}"/>
-              </a:ext>
-            </a:extLst>
-          </p:cNvPr>
+          <p:cNvPr id="15" name="TextBox 14"/>
           <p:cNvSpPr txBox="1"/>
           <p:nvPr/>
         </p:nvSpPr>
@@ -8798,13 +6230,7 @@
       </p:sp>
       <p:sp>
         <p:nvSpPr>
-          <p:cNvPr id="16" name="TextBox 15">
-            <a:extLst>
-              <a:ext uri="{FF2B5EF4-FFF2-40B4-BE49-F238E27FC236}">
-                <a16:creationId xmlns:a16="http://schemas.microsoft.com/office/drawing/2014/main" id="{B9D35B4B-5236-0ED6-E316-7DB15B009090}"/>
-              </a:ext>
-            </a:extLst>
-          </p:cNvPr>
+          <p:cNvPr id="16" name="TextBox 15"/>
           <p:cNvSpPr txBox="1"/>
           <p:nvPr/>
         </p:nvSpPr>
@@ -8834,13 +6260,7 @@
       </p:sp>
       <p:sp>
         <p:nvSpPr>
-          <p:cNvPr id="17" name="TextBox 16">
-            <a:extLst>
-              <a:ext uri="{FF2B5EF4-FFF2-40B4-BE49-F238E27FC236}">
-                <a16:creationId xmlns:a16="http://schemas.microsoft.com/office/drawing/2014/main" id="{DF21D9B7-27F4-C94D-A89A-C7288E67B1A2}"/>
-              </a:ext>
-            </a:extLst>
-          </p:cNvPr>
+          <p:cNvPr id="17" name="TextBox 16"/>
           <p:cNvSpPr txBox="1"/>
           <p:nvPr/>
         </p:nvSpPr>
@@ -8869,11 +6289,6 @@
         </p:txBody>
       </p:sp>
     </p:spTree>
-    <p:extLst>
-      <p:ext uri="{BB962C8B-B14F-4D97-AF65-F5344CB8AC3E}">
-        <p14:creationId xmlns:p14="http://schemas.microsoft.com/office/powerpoint/2010/main" val="2048934135"/>
-      </p:ext>
-    </p:extLst>
   </p:cSld>
   <p:clrMapOvr>
     <a:masterClrMapping/>
@@ -8900,13 +6315,7 @@
       </p:grpSpPr>
       <p:sp>
         <p:nvSpPr>
-          <p:cNvPr id="2" name="Title 1">
-            <a:extLst>
-              <a:ext uri="{FF2B5EF4-FFF2-40B4-BE49-F238E27FC236}">
-                <a16:creationId xmlns:a16="http://schemas.microsoft.com/office/drawing/2014/main" id="{E961C9E1-74EF-A90A-DC4C-C0F9823CF87A}"/>
-              </a:ext>
-            </a:extLst>
-          </p:cNvPr>
+          <p:cNvPr id="2" name="Title 1"/>
           <p:cNvSpPr>
             <a:spLocks noGrp="1"/>
           </p:cNvSpPr>
@@ -8953,13 +6362,7 @@
       </p:sp>
       <p:sp>
         <p:nvSpPr>
-          <p:cNvPr id="3" name="TextBox 2">
-            <a:extLst>
-              <a:ext uri="{FF2B5EF4-FFF2-40B4-BE49-F238E27FC236}">
-                <a16:creationId xmlns:a16="http://schemas.microsoft.com/office/drawing/2014/main" id="{772D1D89-C5BD-55D7-65EA-A7308CAD97CC}"/>
-              </a:ext>
-            </a:extLst>
-          </p:cNvPr>
+          <p:cNvPr id="3" name="TextBox 2"/>
           <p:cNvSpPr txBox="1"/>
           <p:nvPr/>
         </p:nvSpPr>
@@ -9061,11 +6464,6 @@
         </p:txBody>
       </p:sp>
     </p:spTree>
-    <p:extLst>
-      <p:ext uri="{BB962C8B-B14F-4D97-AF65-F5344CB8AC3E}">
-        <p14:creationId xmlns:p14="http://schemas.microsoft.com/office/powerpoint/2010/main" val="2428786264"/>
-      </p:ext>
-    </p:extLst>
   </p:cSld>
   <p:clrMapOvr>
     <a:masterClrMapping/>
@@ -9092,13 +6490,7 @@
       </p:grpSpPr>
       <p:sp>
         <p:nvSpPr>
-          <p:cNvPr id="2" name="Title 1">
-            <a:extLst>
-              <a:ext uri="{FF2B5EF4-FFF2-40B4-BE49-F238E27FC236}">
-                <a16:creationId xmlns:a16="http://schemas.microsoft.com/office/drawing/2014/main" id="{F386E018-C289-2477-6303-E95DD2DDFDDC}"/>
-              </a:ext>
-            </a:extLst>
-          </p:cNvPr>
+          <p:cNvPr id="2" name="Title 1"/>
           <p:cNvSpPr>
             <a:spLocks noGrp="1"/>
           </p:cNvSpPr>
@@ -9127,23 +6519,12 @@
       </p:sp>
       <p:graphicFrame>
         <p:nvGraphicFramePr>
-          <p:cNvPr id="4" name="Table 4">
-            <a:extLst>
-              <a:ext uri="{FF2B5EF4-FFF2-40B4-BE49-F238E27FC236}">
-                <a16:creationId xmlns:a16="http://schemas.microsoft.com/office/drawing/2014/main" id="{C3F49445-7219-ECDE-60D5-3FD2B89229B8}"/>
-              </a:ext>
-            </a:extLst>
-          </p:cNvPr>
+          <p:cNvPr id="4" name="Table 4"/>
           <p:cNvGraphicFramePr>
             <a:graphicFrameLocks noGrp="1"/>
           </p:cNvGraphicFramePr>
           <p:nvPr>
             <p:ph idx="1"/>
-            <p:extLst>
-              <p:ext uri="{D42A27DB-BD31-4B8C-83A1-F6EECF244321}">
-                <p14:modId xmlns:p14="http://schemas.microsoft.com/office/powerpoint/2010/main" val="3397308751"/>
-              </p:ext>
-            </p:extLst>
           </p:nvPr>
         </p:nvGraphicFramePr>
         <p:xfrm>
@@ -9160,14 +6541,14 @@
                 <a:gridCol w="2916555">
                   <a:extLst>
                     <a:ext uri="{9D8B030D-6E8A-4147-A177-3AD203B41FA5}">
-                      <a16:colId xmlns:a16="http://schemas.microsoft.com/office/drawing/2014/main" val="936129304"/>
+                      <a16:colId xmlns:a16="http://schemas.microsoft.com/office/drawing/2014/main" val="20000"/>
                     </a:ext>
                   </a:extLst>
                 </a:gridCol>
                 <a:gridCol w="2523494">
                   <a:extLst>
                     <a:ext uri="{9D8B030D-6E8A-4147-A177-3AD203B41FA5}">
-                      <a16:colId xmlns:a16="http://schemas.microsoft.com/office/drawing/2014/main" val="730272126"/>
+                      <a16:colId xmlns:a16="http://schemas.microsoft.com/office/drawing/2014/main" val="20001"/>
                     </a:ext>
                   </a:extLst>
                 </a:gridCol>
@@ -9273,7 +6654,7 @@
                 </a:tc>
                 <a:extLst>
                   <a:ext uri="{0D108BD9-81ED-4DB2-BD59-A6C34878D82A}">
-                    <a16:rowId xmlns:a16="http://schemas.microsoft.com/office/drawing/2014/main" val="3933388355"/>
+                    <a16:rowId xmlns:a16="http://schemas.microsoft.com/office/drawing/2014/main" val="10000"/>
                   </a:ext>
                 </a:extLst>
               </a:tr>
@@ -9399,7 +6780,7 @@
                 </a:tc>
                 <a:extLst>
                   <a:ext uri="{0D108BD9-81ED-4DB2-BD59-A6C34878D82A}">
-                    <a16:rowId xmlns:a16="http://schemas.microsoft.com/office/drawing/2014/main" val="1554334092"/>
+                    <a16:rowId xmlns:a16="http://schemas.microsoft.com/office/drawing/2014/main" val="10001"/>
                   </a:ext>
                 </a:extLst>
               </a:tr>
@@ -9516,7 +6897,7 @@
                 </a:tc>
                 <a:extLst>
                   <a:ext uri="{0D108BD9-81ED-4DB2-BD59-A6C34878D82A}">
-                    <a16:rowId xmlns:a16="http://schemas.microsoft.com/office/drawing/2014/main" val="4055091693"/>
+                    <a16:rowId xmlns:a16="http://schemas.microsoft.com/office/drawing/2014/main" val="10002"/>
                   </a:ext>
                 </a:extLst>
               </a:tr>
@@ -9633,7 +7014,7 @@
                 </a:tc>
                 <a:extLst>
                   <a:ext uri="{0D108BD9-81ED-4DB2-BD59-A6C34878D82A}">
-                    <a16:rowId xmlns:a16="http://schemas.microsoft.com/office/drawing/2014/main" val="1445983833"/>
+                    <a16:rowId xmlns:a16="http://schemas.microsoft.com/office/drawing/2014/main" val="10003"/>
                   </a:ext>
                 </a:extLst>
               </a:tr>
@@ -9750,7 +7131,7 @@
                 </a:tc>
                 <a:extLst>
                   <a:ext uri="{0D108BD9-81ED-4DB2-BD59-A6C34878D82A}">
-                    <a16:rowId xmlns:a16="http://schemas.microsoft.com/office/drawing/2014/main" val="3229785468"/>
+                    <a16:rowId xmlns:a16="http://schemas.microsoft.com/office/drawing/2014/main" val="10004"/>
                   </a:ext>
                 </a:extLst>
               </a:tr>
@@ -9861,7 +7242,7 @@
                 </a:tc>
                 <a:extLst>
                   <a:ext uri="{0D108BD9-81ED-4DB2-BD59-A6C34878D82A}">
-                    <a16:rowId xmlns:a16="http://schemas.microsoft.com/office/drawing/2014/main" val="2262257273"/>
+                    <a16:rowId xmlns:a16="http://schemas.microsoft.com/office/drawing/2014/main" val="10005"/>
                   </a:ext>
                 </a:extLst>
               </a:tr>
@@ -9870,11 +7251,6 @@
         </a:graphic>
       </p:graphicFrame>
     </p:spTree>
-    <p:extLst>
-      <p:ext uri="{BB962C8B-B14F-4D97-AF65-F5344CB8AC3E}">
-        <p14:creationId xmlns:p14="http://schemas.microsoft.com/office/powerpoint/2010/main" val="1212990023"/>
-      </p:ext>
-    </p:extLst>
   </p:cSld>
   <p:clrMapOvr>
     <a:masterClrMapping/>
@@ -9901,13 +7277,7 @@
       </p:grpSpPr>
       <p:sp>
         <p:nvSpPr>
-          <p:cNvPr id="2" name="Title 1">
-            <a:extLst>
-              <a:ext uri="{FF2B5EF4-FFF2-40B4-BE49-F238E27FC236}">
-                <a16:creationId xmlns:a16="http://schemas.microsoft.com/office/drawing/2014/main" id="{9634F73A-3D52-92E5-6A10-CB334DD84C20}"/>
-              </a:ext>
-            </a:extLst>
-          </p:cNvPr>
+          <p:cNvPr id="2" name="Title 1"/>
           <p:cNvSpPr>
             <a:spLocks noGrp="1"/>
           </p:cNvSpPr>
@@ -9929,23 +7299,9 @@
       </p:sp>
       <p:graphicFrame>
         <p:nvGraphicFramePr>
-          <p:cNvPr id="6" name="Table 4">
-            <a:extLst>
-              <a:ext uri="{FF2B5EF4-FFF2-40B4-BE49-F238E27FC236}">
-                <a16:creationId xmlns:a16="http://schemas.microsoft.com/office/drawing/2014/main" id="{1CCCAAEC-0C0C-6803-FF0D-76478E24A0FD}"/>
-              </a:ext>
-            </a:extLst>
-          </p:cNvPr>
-          <p:cNvGraphicFramePr>
-            <a:graphicFrameLocks/>
-          </p:cNvGraphicFramePr>
-          <p:nvPr>
-            <p:extLst>
-              <p:ext uri="{D42A27DB-BD31-4B8C-83A1-F6EECF244321}">
-                <p14:modId xmlns:p14="http://schemas.microsoft.com/office/powerpoint/2010/main" val="1399210674"/>
-              </p:ext>
-            </p:extLst>
-          </p:nvPr>
+          <p:cNvPr id="6" name="Table 4"/>
+          <p:cNvGraphicFramePr/>
+          <p:nvPr/>
         </p:nvGraphicFramePr>
         <p:xfrm>
           <a:off x="1683568" y="2055105"/>
@@ -9961,14 +7317,14 @@
                 <a:gridCol w="2916555">
                   <a:extLst>
                     <a:ext uri="{9D8B030D-6E8A-4147-A177-3AD203B41FA5}">
-                      <a16:colId xmlns:a16="http://schemas.microsoft.com/office/drawing/2014/main" val="936129304"/>
+                      <a16:colId xmlns:a16="http://schemas.microsoft.com/office/drawing/2014/main" val="20000"/>
                     </a:ext>
                   </a:extLst>
                 </a:gridCol>
                 <a:gridCol w="2523494">
                   <a:extLst>
                     <a:ext uri="{9D8B030D-6E8A-4147-A177-3AD203B41FA5}">
-                      <a16:colId xmlns:a16="http://schemas.microsoft.com/office/drawing/2014/main" val="730272126"/>
+                      <a16:colId xmlns:a16="http://schemas.microsoft.com/office/drawing/2014/main" val="20001"/>
                     </a:ext>
                   </a:extLst>
                 </a:gridCol>
@@ -10074,7 +7430,7 @@
                 </a:tc>
                 <a:extLst>
                   <a:ext uri="{0D108BD9-81ED-4DB2-BD59-A6C34878D82A}">
-                    <a16:rowId xmlns:a16="http://schemas.microsoft.com/office/drawing/2014/main" val="3933388355"/>
+                    <a16:rowId xmlns:a16="http://schemas.microsoft.com/office/drawing/2014/main" val="10000"/>
                   </a:ext>
                 </a:extLst>
               </a:tr>
@@ -10191,7 +7547,7 @@
                 </a:tc>
                 <a:extLst>
                   <a:ext uri="{0D108BD9-81ED-4DB2-BD59-A6C34878D82A}">
-                    <a16:rowId xmlns:a16="http://schemas.microsoft.com/office/drawing/2014/main" val="1554334092"/>
+                    <a16:rowId xmlns:a16="http://schemas.microsoft.com/office/drawing/2014/main" val="10001"/>
                   </a:ext>
                 </a:extLst>
               </a:tr>
@@ -10308,7 +7664,7 @@
                 </a:tc>
                 <a:extLst>
                   <a:ext uri="{0D108BD9-81ED-4DB2-BD59-A6C34878D82A}">
-                    <a16:rowId xmlns:a16="http://schemas.microsoft.com/office/drawing/2014/main" val="4055091693"/>
+                    <a16:rowId xmlns:a16="http://schemas.microsoft.com/office/drawing/2014/main" val="10002"/>
                   </a:ext>
                 </a:extLst>
               </a:tr>
@@ -10425,7 +7781,7 @@
                 </a:tc>
                 <a:extLst>
                   <a:ext uri="{0D108BD9-81ED-4DB2-BD59-A6C34878D82A}">
-                    <a16:rowId xmlns:a16="http://schemas.microsoft.com/office/drawing/2014/main" val="780242098"/>
+                    <a16:rowId xmlns:a16="http://schemas.microsoft.com/office/drawing/2014/main" val="10003"/>
                   </a:ext>
                 </a:extLst>
               </a:tr>
@@ -10542,7 +7898,7 @@
                 </a:tc>
                 <a:extLst>
                   <a:ext uri="{0D108BD9-81ED-4DB2-BD59-A6C34878D82A}">
-                    <a16:rowId xmlns:a16="http://schemas.microsoft.com/office/drawing/2014/main" val="1445983833"/>
+                    <a16:rowId xmlns:a16="http://schemas.microsoft.com/office/drawing/2014/main" val="10004"/>
                   </a:ext>
                 </a:extLst>
               </a:tr>
@@ -10605,7 +7961,7 @@
                     <a:bodyPr/>
                     <a:lstStyle/>
                     <a:p>
-                      <a:pPr marL="0" marR="0" indent="0" algn="ctr" defTabSz="914175" rtl="0" eaLnBrk="1" fontAlgn="auto" latinLnBrk="0" hangingPunct="1">
+                      <a:pPr marL="0" marR="0" indent="0" algn="ctr" defTabSz="914400" rtl="0" eaLnBrk="1" fontAlgn="auto" latinLnBrk="0" hangingPunct="1">
                         <a:lnSpc>
                           <a:spcPct val="100000"/>
                         </a:lnSpc>
@@ -10619,11 +7975,10 @@
                         <a:buSzTx/>
                         <a:buFontTx/>
                         <a:buNone/>
-                        <a:tabLst/>
                         <a:defRPr/>
                       </a:pPr>
                       <a:r>
-                        <a:rPr lang="en-MX" sz="1800" kern="1200" dirty="0">
+                        <a:rPr lang="en-US" sz="1800" kern="1200" dirty="0">
                           <a:solidFill>
                             <a:schemeClr val="dk1"/>
                           </a:solidFill>
@@ -10680,7 +8035,7 @@
                 </a:tc>
                 <a:extLst>
                   <a:ext uri="{0D108BD9-81ED-4DB2-BD59-A6C34878D82A}">
-                    <a16:rowId xmlns:a16="http://schemas.microsoft.com/office/drawing/2014/main" val="2784306263"/>
+                    <a16:rowId xmlns:a16="http://schemas.microsoft.com/office/drawing/2014/main" val="10005"/>
                   </a:ext>
                 </a:extLst>
               </a:tr>
@@ -10689,11 +8044,6 @@
         </a:graphic>
       </p:graphicFrame>
     </p:spTree>
-    <p:extLst>
-      <p:ext uri="{BB962C8B-B14F-4D97-AF65-F5344CB8AC3E}">
-        <p14:creationId xmlns:p14="http://schemas.microsoft.com/office/powerpoint/2010/main" val="2267835305"/>
-      </p:ext>
-    </p:extLst>
   </p:cSld>
   <p:clrMapOvr>
     <a:masterClrMapping/>
@@ -10720,13 +8070,7 @@
       </p:grpSpPr>
       <p:sp>
         <p:nvSpPr>
-          <p:cNvPr id="2" name="Title 1">
-            <a:extLst>
-              <a:ext uri="{FF2B5EF4-FFF2-40B4-BE49-F238E27FC236}">
-                <a16:creationId xmlns:a16="http://schemas.microsoft.com/office/drawing/2014/main" id="{9634F73A-3D52-92E5-6A10-CB334DD84C20}"/>
-              </a:ext>
-            </a:extLst>
-          </p:cNvPr>
+          <p:cNvPr id="2" name="Title 1"/>
           <p:cNvSpPr>
             <a:spLocks noGrp="1"/>
           </p:cNvSpPr>
@@ -10748,23 +8092,9 @@
       </p:sp>
       <p:graphicFrame>
         <p:nvGraphicFramePr>
-          <p:cNvPr id="6" name="Table 4">
-            <a:extLst>
-              <a:ext uri="{FF2B5EF4-FFF2-40B4-BE49-F238E27FC236}">
-                <a16:creationId xmlns:a16="http://schemas.microsoft.com/office/drawing/2014/main" id="{1CCCAAEC-0C0C-6803-FF0D-76478E24A0FD}"/>
-              </a:ext>
-            </a:extLst>
-          </p:cNvPr>
-          <p:cNvGraphicFramePr>
-            <a:graphicFrameLocks/>
-          </p:cNvGraphicFramePr>
-          <p:nvPr>
-            <p:extLst>
-              <p:ext uri="{D42A27DB-BD31-4B8C-83A1-F6EECF244321}">
-                <p14:modId xmlns:p14="http://schemas.microsoft.com/office/powerpoint/2010/main" val="475536364"/>
-              </p:ext>
-            </p:extLst>
-          </p:nvPr>
+          <p:cNvPr id="6" name="Table 4"/>
+          <p:cNvGraphicFramePr/>
+          <p:nvPr/>
         </p:nvGraphicFramePr>
         <p:xfrm>
           <a:off x="1595886" y="2405833"/>
@@ -10780,14 +8110,14 @@
                 <a:gridCol w="2916555">
                   <a:extLst>
                     <a:ext uri="{9D8B030D-6E8A-4147-A177-3AD203B41FA5}">
-                      <a16:colId xmlns:a16="http://schemas.microsoft.com/office/drawing/2014/main" val="936129304"/>
+                      <a16:colId xmlns:a16="http://schemas.microsoft.com/office/drawing/2014/main" val="20000"/>
                     </a:ext>
                   </a:extLst>
                 </a:gridCol>
                 <a:gridCol w="2523494">
                   <a:extLst>
                     <a:ext uri="{9D8B030D-6E8A-4147-A177-3AD203B41FA5}">
-                      <a16:colId xmlns:a16="http://schemas.microsoft.com/office/drawing/2014/main" val="730272126"/>
+                      <a16:colId xmlns:a16="http://schemas.microsoft.com/office/drawing/2014/main" val="20001"/>
                     </a:ext>
                   </a:extLst>
                 </a:gridCol>
@@ -10893,7 +8223,7 @@
                 </a:tc>
                 <a:extLst>
                   <a:ext uri="{0D108BD9-81ED-4DB2-BD59-A6C34878D82A}">
-                    <a16:rowId xmlns:a16="http://schemas.microsoft.com/office/drawing/2014/main" val="3933388355"/>
+                    <a16:rowId xmlns:a16="http://schemas.microsoft.com/office/drawing/2014/main" val="10000"/>
                   </a:ext>
                 </a:extLst>
               </a:tr>
@@ -11010,7 +8340,7 @@
                 </a:tc>
                 <a:extLst>
                   <a:ext uri="{0D108BD9-81ED-4DB2-BD59-A6C34878D82A}">
-                    <a16:rowId xmlns:a16="http://schemas.microsoft.com/office/drawing/2014/main" val="1554334092"/>
+                    <a16:rowId xmlns:a16="http://schemas.microsoft.com/office/drawing/2014/main" val="10001"/>
                   </a:ext>
                 </a:extLst>
               </a:tr>
@@ -11127,7 +8457,7 @@
                 </a:tc>
                 <a:extLst>
                   <a:ext uri="{0D108BD9-81ED-4DB2-BD59-A6C34878D82A}">
-                    <a16:rowId xmlns:a16="http://schemas.microsoft.com/office/drawing/2014/main" val="4055091693"/>
+                    <a16:rowId xmlns:a16="http://schemas.microsoft.com/office/drawing/2014/main" val="10002"/>
                   </a:ext>
                 </a:extLst>
               </a:tr>
@@ -11240,7 +8570,7 @@
                 </a:tc>
                 <a:extLst>
                   <a:ext uri="{0D108BD9-81ED-4DB2-BD59-A6C34878D82A}">
-                    <a16:rowId xmlns:a16="http://schemas.microsoft.com/office/drawing/2014/main" val="1445983833"/>
+                    <a16:rowId xmlns:a16="http://schemas.microsoft.com/office/drawing/2014/main" val="10003"/>
                   </a:ext>
                 </a:extLst>
               </a:tr>
@@ -11249,11 +8579,6 @@
         </a:graphic>
       </p:graphicFrame>
     </p:spTree>
-    <p:extLst>
-      <p:ext uri="{BB962C8B-B14F-4D97-AF65-F5344CB8AC3E}">
-        <p14:creationId xmlns:p14="http://schemas.microsoft.com/office/powerpoint/2010/main" val="2889724734"/>
-      </p:ext>
-    </p:extLst>
   </p:cSld>
   <p:clrMapOvr>
     <a:masterClrMapping/>
@@ -11280,13 +8605,7 @@
       </p:grpSpPr>
       <p:sp>
         <p:nvSpPr>
-          <p:cNvPr id="2" name="Title 1">
-            <a:extLst>
-              <a:ext uri="{FF2B5EF4-FFF2-40B4-BE49-F238E27FC236}">
-                <a16:creationId xmlns:a16="http://schemas.microsoft.com/office/drawing/2014/main" id="{D93C00C8-C4EE-C6CE-86E8-2F381261BEDB}"/>
-              </a:ext>
-            </a:extLst>
-          </p:cNvPr>
+          <p:cNvPr id="2" name="Title 1"/>
           <p:cNvSpPr>
             <a:spLocks noGrp="1"/>
           </p:cNvSpPr>
@@ -11333,7 +8652,7 @@
                   <a:srgbClr val="69B0A0"/>
                 </a:solidFill>
               </a:rPr>
-              <a:t>Lead: Adrien Osakwe</a:t>
+              <a:t>Lead: Bangli Cao</a:t>
             </a:r>
             <a:br>
               <a:rPr lang="en-US" sz="3100" b="1" dirty="0">
@@ -11348,7 +8667,7 @@
                   <a:srgbClr val="69B0A0"/>
                 </a:solidFill>
               </a:rPr>
-              <a:t>Facilitator: Bangli Cao</a:t>
+              <a:t>Facilitator: Chen-Yang Su</a:t>
             </a:r>
             <a:br>
               <a:rPr lang="en-CA" sz="6600" dirty="0">
@@ -11362,22 +8681,14 @@
             </a:br>
             <a:r>
               <a:rPr lang="en-CA" sz="2200" dirty="0"/>
-              <a:t>February 13, 2025</a:t>
+              <a:t>April 11, 2025</a:t>
             </a:r>
             <a:br>
               <a:rPr lang="en-CA" sz="2200" dirty="0"/>
             </a:br>
             <a:r>
               <a:rPr lang="en-CA" sz="2200" dirty="0"/>
-              <a:t>Materials adapted from Larisa M. Soto and </a:t>
-            </a:r>
-            <a:r>
-              <a:rPr lang="en-CA" sz="2200" dirty="0" err="1"/>
-              <a:t>Xiaoqi</a:t>
-            </a:r>
-            <a:r>
-              <a:rPr lang="en-CA" sz="2200" dirty="0"/>
-              <a:t> Xie</a:t>
+              <a:t>Materials adapted from Adrien Osakwe</a:t>
             </a:r>
             <a:endParaRPr lang="en-US" sz="2200" dirty="0">
               <a:solidFill>
@@ -11391,11 +8702,6 @@
         </p:txBody>
       </p:sp>
     </p:spTree>
-    <p:extLst>
-      <p:ext uri="{BB962C8B-B14F-4D97-AF65-F5344CB8AC3E}">
-        <p14:creationId xmlns:p14="http://schemas.microsoft.com/office/powerpoint/2010/main" val="3440444125"/>
-      </p:ext>
-    </p:extLst>
   </p:cSld>
   <p:clrMapOvr>
     <a:masterClrMapping/>
@@ -11422,13 +8728,7 @@
       </p:grpSpPr>
       <p:sp>
         <p:nvSpPr>
-          <p:cNvPr id="2" name="Title 1">
-            <a:extLst>
-              <a:ext uri="{FF2B5EF4-FFF2-40B4-BE49-F238E27FC236}">
-                <a16:creationId xmlns:a16="http://schemas.microsoft.com/office/drawing/2014/main" id="{9634F73A-3D52-92E5-6A10-CB334DD84C20}"/>
-              </a:ext>
-            </a:extLst>
-          </p:cNvPr>
+          <p:cNvPr id="2" name="Title 1"/>
           <p:cNvSpPr>
             <a:spLocks noGrp="1"/>
           </p:cNvSpPr>
@@ -11450,23 +8750,9 @@
       </p:sp>
       <p:graphicFrame>
         <p:nvGraphicFramePr>
-          <p:cNvPr id="6" name="Table 4">
-            <a:extLst>
-              <a:ext uri="{FF2B5EF4-FFF2-40B4-BE49-F238E27FC236}">
-                <a16:creationId xmlns:a16="http://schemas.microsoft.com/office/drawing/2014/main" id="{1CCCAAEC-0C0C-6803-FF0D-76478E24A0FD}"/>
-              </a:ext>
-            </a:extLst>
-          </p:cNvPr>
-          <p:cNvGraphicFramePr>
-            <a:graphicFrameLocks/>
-          </p:cNvGraphicFramePr>
-          <p:nvPr>
-            <p:extLst>
-              <p:ext uri="{D42A27DB-BD31-4B8C-83A1-F6EECF244321}">
-                <p14:modId xmlns:p14="http://schemas.microsoft.com/office/powerpoint/2010/main" val="667259920"/>
-              </p:ext>
-            </p:extLst>
-          </p:nvPr>
+          <p:cNvPr id="6" name="Table 4"/>
+          <p:cNvGraphicFramePr/>
+          <p:nvPr/>
         </p:nvGraphicFramePr>
         <p:xfrm>
           <a:off x="264041" y="1402563"/>
@@ -11482,14 +8768,14 @@
                 <a:gridCol w="3292971">
                   <a:extLst>
                     <a:ext uri="{9D8B030D-6E8A-4147-A177-3AD203B41FA5}">
-                      <a16:colId xmlns:a16="http://schemas.microsoft.com/office/drawing/2014/main" val="936129304"/>
+                      <a16:colId xmlns:a16="http://schemas.microsoft.com/office/drawing/2014/main" val="20000"/>
                     </a:ext>
                   </a:extLst>
                 </a:gridCol>
                 <a:gridCol w="1636780">
                   <a:extLst>
                     <a:ext uri="{9D8B030D-6E8A-4147-A177-3AD203B41FA5}">
-                      <a16:colId xmlns:a16="http://schemas.microsoft.com/office/drawing/2014/main" val="730272126"/>
+                      <a16:colId xmlns:a16="http://schemas.microsoft.com/office/drawing/2014/main" val="20001"/>
                     </a:ext>
                   </a:extLst>
                 </a:gridCol>
@@ -11595,7 +8881,7 @@
                 </a:tc>
                 <a:extLst>
                   <a:ext uri="{0D108BD9-81ED-4DB2-BD59-A6C34878D82A}">
-                    <a16:rowId xmlns:a16="http://schemas.microsoft.com/office/drawing/2014/main" val="3933388355"/>
+                    <a16:rowId xmlns:a16="http://schemas.microsoft.com/office/drawing/2014/main" val="10000"/>
                   </a:ext>
                 </a:extLst>
               </a:tr>
@@ -11712,7 +8998,7 @@
                 </a:tc>
                 <a:extLst>
                   <a:ext uri="{0D108BD9-81ED-4DB2-BD59-A6C34878D82A}">
-                    <a16:rowId xmlns:a16="http://schemas.microsoft.com/office/drawing/2014/main" val="1554334092"/>
+                    <a16:rowId xmlns:a16="http://schemas.microsoft.com/office/drawing/2014/main" val="10001"/>
                   </a:ext>
                 </a:extLst>
               </a:tr>
@@ -11829,7 +9115,7 @@
                 </a:tc>
                 <a:extLst>
                   <a:ext uri="{0D108BD9-81ED-4DB2-BD59-A6C34878D82A}">
-                    <a16:rowId xmlns:a16="http://schemas.microsoft.com/office/drawing/2014/main" val="4055091693"/>
+                    <a16:rowId xmlns:a16="http://schemas.microsoft.com/office/drawing/2014/main" val="10002"/>
                   </a:ext>
                 </a:extLst>
               </a:tr>
@@ -11946,7 +9232,7 @@
                 </a:tc>
                 <a:extLst>
                   <a:ext uri="{0D108BD9-81ED-4DB2-BD59-A6C34878D82A}">
-                    <a16:rowId xmlns:a16="http://schemas.microsoft.com/office/drawing/2014/main" val="1594211539"/>
+                    <a16:rowId xmlns:a16="http://schemas.microsoft.com/office/drawing/2014/main" val="10003"/>
                   </a:ext>
                 </a:extLst>
               </a:tr>
@@ -12063,7 +9349,7 @@
                 </a:tc>
                 <a:extLst>
                   <a:ext uri="{0D108BD9-81ED-4DB2-BD59-A6C34878D82A}">
-                    <a16:rowId xmlns:a16="http://schemas.microsoft.com/office/drawing/2014/main" val="1445983833"/>
+                    <a16:rowId xmlns:a16="http://schemas.microsoft.com/office/drawing/2014/main" val="10004"/>
                   </a:ext>
                 </a:extLst>
               </a:tr>
@@ -12180,7 +9466,7 @@
                 </a:tc>
                 <a:extLst>
                   <a:ext uri="{0D108BD9-81ED-4DB2-BD59-A6C34878D82A}">
-                    <a16:rowId xmlns:a16="http://schemas.microsoft.com/office/drawing/2014/main" val="1749700124"/>
+                    <a16:rowId xmlns:a16="http://schemas.microsoft.com/office/drawing/2014/main" val="10005"/>
                   </a:ext>
                 </a:extLst>
               </a:tr>
@@ -12297,7 +9583,7 @@
                 </a:tc>
                 <a:extLst>
                   <a:ext uri="{0D108BD9-81ED-4DB2-BD59-A6C34878D82A}">
-                    <a16:rowId xmlns:a16="http://schemas.microsoft.com/office/drawing/2014/main" val="1109123089"/>
+                    <a16:rowId xmlns:a16="http://schemas.microsoft.com/office/drawing/2014/main" val="10006"/>
                   </a:ext>
                 </a:extLst>
               </a:tr>
@@ -12414,7 +9700,7 @@
                 </a:tc>
                 <a:extLst>
                   <a:ext uri="{0D108BD9-81ED-4DB2-BD59-A6C34878D82A}">
-                    <a16:rowId xmlns:a16="http://schemas.microsoft.com/office/drawing/2014/main" val="9367279"/>
+                    <a16:rowId xmlns:a16="http://schemas.microsoft.com/office/drawing/2014/main" val="10007"/>
                   </a:ext>
                 </a:extLst>
               </a:tr>
@@ -12479,7 +9765,7 @@
                     <a:bodyPr/>
                     <a:lstStyle/>
                     <a:p>
-                      <a:pPr marL="0" marR="0" lvl="0" indent="0" algn="ctr" defTabSz="914175" rtl="0" eaLnBrk="1" fontAlgn="auto" latinLnBrk="0" hangingPunct="1">
+                      <a:pPr marL="0" marR="0" lvl="0" indent="0" algn="ctr" defTabSz="914400" rtl="0" eaLnBrk="1" fontAlgn="auto" latinLnBrk="0" hangingPunct="1">
                         <a:lnSpc>
                           <a:spcPct val="100000"/>
                         </a:lnSpc>
@@ -12493,7 +9779,6 @@
                         <a:buSzTx/>
                         <a:buFontTx/>
                         <a:buNone/>
-                        <a:tabLst/>
                         <a:defRPr/>
                       </a:pPr>
                       <a:r>
@@ -12547,7 +9832,7 @@
                 </a:tc>
                 <a:extLst>
                   <a:ext uri="{0D108BD9-81ED-4DB2-BD59-A6C34878D82A}">
-                    <a16:rowId xmlns:a16="http://schemas.microsoft.com/office/drawing/2014/main" val="1434557665"/>
+                    <a16:rowId xmlns:a16="http://schemas.microsoft.com/office/drawing/2014/main" val="10008"/>
                   </a:ext>
                 </a:extLst>
               </a:tr>
@@ -12610,7 +9895,7 @@
                     <a:bodyPr/>
                     <a:lstStyle/>
                     <a:p>
-                      <a:pPr marL="0" marR="0" lvl="0" indent="0" algn="ctr" defTabSz="914175" rtl="0" eaLnBrk="1" fontAlgn="auto" latinLnBrk="0" hangingPunct="1">
+                      <a:pPr marL="0" marR="0" lvl="0" indent="0" algn="ctr" defTabSz="914400" rtl="0" eaLnBrk="1" fontAlgn="auto" latinLnBrk="0" hangingPunct="1">
                         <a:lnSpc>
                           <a:spcPct val="100000"/>
                         </a:lnSpc>
@@ -12624,7 +9909,6 @@
                         <a:buSzTx/>
                         <a:buFontTx/>
                         <a:buNone/>
-                        <a:tabLst/>
                         <a:defRPr/>
                       </a:pPr>
                       <a:r>
@@ -12676,7 +9960,7 @@
                 </a:tc>
                 <a:extLst>
                   <a:ext uri="{0D108BD9-81ED-4DB2-BD59-A6C34878D82A}">
-                    <a16:rowId xmlns:a16="http://schemas.microsoft.com/office/drawing/2014/main" val="3251137570"/>
+                    <a16:rowId xmlns:a16="http://schemas.microsoft.com/office/drawing/2014/main" val="10009"/>
                   </a:ext>
                 </a:extLst>
               </a:tr>
@@ -12685,11 +9969,6 @@
         </a:graphic>
       </p:graphicFrame>
     </p:spTree>
-    <p:extLst>
-      <p:ext uri="{BB962C8B-B14F-4D97-AF65-F5344CB8AC3E}">
-        <p14:creationId xmlns:p14="http://schemas.microsoft.com/office/powerpoint/2010/main" val="701040556"/>
-      </p:ext>
-    </p:extLst>
   </p:cSld>
   <p:clrMapOvr>
     <a:masterClrMapping/>
@@ -12716,13 +9995,7 @@
       </p:grpSpPr>
       <p:sp>
         <p:nvSpPr>
-          <p:cNvPr id="2" name="Title 1">
-            <a:extLst>
-              <a:ext uri="{FF2B5EF4-FFF2-40B4-BE49-F238E27FC236}">
-                <a16:creationId xmlns:a16="http://schemas.microsoft.com/office/drawing/2014/main" id="{F386E018-C289-2477-6303-E95DD2DDFDDC}"/>
-              </a:ext>
-            </a:extLst>
-          </p:cNvPr>
+          <p:cNvPr id="2" name="Title 1"/>
           <p:cNvSpPr>
             <a:spLocks noGrp="1"/>
           </p:cNvSpPr>
@@ -12751,23 +10024,12 @@
       </p:sp>
       <p:graphicFrame>
         <p:nvGraphicFramePr>
-          <p:cNvPr id="4" name="Table 4">
-            <a:extLst>
-              <a:ext uri="{FF2B5EF4-FFF2-40B4-BE49-F238E27FC236}">
-                <a16:creationId xmlns:a16="http://schemas.microsoft.com/office/drawing/2014/main" id="{C3F49445-7219-ECDE-60D5-3FD2B89229B8}"/>
-              </a:ext>
-            </a:extLst>
-          </p:cNvPr>
+          <p:cNvPr id="4" name="Table 4"/>
           <p:cNvGraphicFramePr>
             <a:graphicFrameLocks noGrp="1"/>
           </p:cNvGraphicFramePr>
           <p:nvPr>
             <p:ph idx="1"/>
-            <p:extLst>
-              <p:ext uri="{D42A27DB-BD31-4B8C-83A1-F6EECF244321}">
-                <p14:modId xmlns:p14="http://schemas.microsoft.com/office/powerpoint/2010/main" val="3936893755"/>
-              </p:ext>
-            </p:extLst>
           </p:nvPr>
         </p:nvGraphicFramePr>
         <p:xfrm>
@@ -12784,14 +10046,14 @@
                 <a:gridCol w="2916555">
                   <a:extLst>
                     <a:ext uri="{9D8B030D-6E8A-4147-A177-3AD203B41FA5}">
-                      <a16:colId xmlns:a16="http://schemas.microsoft.com/office/drawing/2014/main" val="936129304"/>
+                      <a16:colId xmlns:a16="http://schemas.microsoft.com/office/drawing/2014/main" val="20000"/>
                     </a:ext>
                   </a:extLst>
                 </a:gridCol>
                 <a:gridCol w="2523494">
                   <a:extLst>
                     <a:ext uri="{9D8B030D-6E8A-4147-A177-3AD203B41FA5}">
-                      <a16:colId xmlns:a16="http://schemas.microsoft.com/office/drawing/2014/main" val="730272126"/>
+                      <a16:colId xmlns:a16="http://schemas.microsoft.com/office/drawing/2014/main" val="20001"/>
                     </a:ext>
                   </a:extLst>
                 </a:gridCol>
@@ -12897,7 +10159,7 @@
                 </a:tc>
                 <a:extLst>
                   <a:ext uri="{0D108BD9-81ED-4DB2-BD59-A6C34878D82A}">
-                    <a16:rowId xmlns:a16="http://schemas.microsoft.com/office/drawing/2014/main" val="3933388355"/>
+                    <a16:rowId xmlns:a16="http://schemas.microsoft.com/office/drawing/2014/main" val="10000"/>
                   </a:ext>
                 </a:extLst>
               </a:tr>
@@ -13014,7 +10276,7 @@
                 </a:tc>
                 <a:extLst>
                   <a:ext uri="{0D108BD9-81ED-4DB2-BD59-A6C34878D82A}">
-                    <a16:rowId xmlns:a16="http://schemas.microsoft.com/office/drawing/2014/main" val="1554334092"/>
+                    <a16:rowId xmlns:a16="http://schemas.microsoft.com/office/drawing/2014/main" val="10001"/>
                   </a:ext>
                 </a:extLst>
               </a:tr>
@@ -13131,7 +10393,7 @@
                 </a:tc>
                 <a:extLst>
                   <a:ext uri="{0D108BD9-81ED-4DB2-BD59-A6C34878D82A}">
-                    <a16:rowId xmlns:a16="http://schemas.microsoft.com/office/drawing/2014/main" val="4055091693"/>
+                    <a16:rowId xmlns:a16="http://schemas.microsoft.com/office/drawing/2014/main" val="10002"/>
                   </a:ext>
                 </a:extLst>
               </a:tr>
@@ -13248,7 +10510,7 @@
                 </a:tc>
                 <a:extLst>
                   <a:ext uri="{0D108BD9-81ED-4DB2-BD59-A6C34878D82A}">
-                    <a16:rowId xmlns:a16="http://schemas.microsoft.com/office/drawing/2014/main" val="1445983833"/>
+                    <a16:rowId xmlns:a16="http://schemas.microsoft.com/office/drawing/2014/main" val="10003"/>
                   </a:ext>
                 </a:extLst>
               </a:tr>
@@ -13365,7 +10627,7 @@
                 </a:tc>
                 <a:extLst>
                   <a:ext uri="{0D108BD9-81ED-4DB2-BD59-A6C34878D82A}">
-                    <a16:rowId xmlns:a16="http://schemas.microsoft.com/office/drawing/2014/main" val="3229785468"/>
+                    <a16:rowId xmlns:a16="http://schemas.microsoft.com/office/drawing/2014/main" val="10004"/>
                   </a:ext>
                 </a:extLst>
               </a:tr>
@@ -13476,7 +10738,7 @@
                 </a:tc>
                 <a:extLst>
                   <a:ext uri="{0D108BD9-81ED-4DB2-BD59-A6C34878D82A}">
-                    <a16:rowId xmlns:a16="http://schemas.microsoft.com/office/drawing/2014/main" val="35520602"/>
+                    <a16:rowId xmlns:a16="http://schemas.microsoft.com/office/drawing/2014/main" val="10005"/>
                   </a:ext>
                 </a:extLst>
               </a:tr>
@@ -13485,11 +10747,6 @@
         </a:graphic>
       </p:graphicFrame>
     </p:spTree>
-    <p:extLst>
-      <p:ext uri="{BB962C8B-B14F-4D97-AF65-F5344CB8AC3E}">
-        <p14:creationId xmlns:p14="http://schemas.microsoft.com/office/powerpoint/2010/main" val="1491768522"/>
-      </p:ext>
-    </p:extLst>
   </p:cSld>
   <p:clrMapOvr>
     <a:masterClrMapping/>
@@ -13516,13 +10773,7 @@
       </p:grpSpPr>
       <p:sp>
         <p:nvSpPr>
-          <p:cNvPr id="2" name="Title 1">
-            <a:extLst>
-              <a:ext uri="{FF2B5EF4-FFF2-40B4-BE49-F238E27FC236}">
-                <a16:creationId xmlns:a16="http://schemas.microsoft.com/office/drawing/2014/main" id="{3620DD55-D04D-15A8-6EBD-0A8293532C8D}"/>
-              </a:ext>
-            </a:extLst>
-          </p:cNvPr>
+          <p:cNvPr id="2" name="Title 1"/>
           <p:cNvSpPr>
             <a:spLocks noGrp="1"/>
           </p:cNvSpPr>
@@ -13544,13 +10795,7 @@
       </p:sp>
       <p:pic>
         <p:nvPicPr>
-          <p:cNvPr id="6" name="Content Placeholder 5" descr="Diagram&#10;&#10;Description automatically generated">
-            <a:extLst>
-              <a:ext uri="{FF2B5EF4-FFF2-40B4-BE49-F238E27FC236}">
-                <a16:creationId xmlns:a16="http://schemas.microsoft.com/office/drawing/2014/main" id="{1510E55D-E3F2-E293-6853-04F41439852F}"/>
-              </a:ext>
-            </a:extLst>
-          </p:cNvPr>
+          <p:cNvPr id="6" name="Content Placeholder 5" descr="Diagram&#10;&#10;Description automatically generated"/>
           <p:cNvPicPr>
             <a:picLocks noGrp="1" noChangeAspect="1"/>
           </p:cNvPicPr>
@@ -13572,11 +10817,6 @@
         </p:spPr>
       </p:pic>
     </p:spTree>
-    <p:extLst>
-      <p:ext uri="{BB962C8B-B14F-4D97-AF65-F5344CB8AC3E}">
-        <p14:creationId xmlns:p14="http://schemas.microsoft.com/office/powerpoint/2010/main" val="1880436319"/>
-      </p:ext>
-    </p:extLst>
   </p:cSld>
   <p:clrMapOvr>
     <a:masterClrMapping/>
@@ -13603,13 +10843,7 @@
       </p:grpSpPr>
       <p:sp>
         <p:nvSpPr>
-          <p:cNvPr id="2" name="Title 1">
-            <a:extLst>
-              <a:ext uri="{FF2B5EF4-FFF2-40B4-BE49-F238E27FC236}">
-                <a16:creationId xmlns:a16="http://schemas.microsoft.com/office/drawing/2014/main" id="{3620DD55-D04D-15A8-6EBD-0A8293532C8D}"/>
-              </a:ext>
-            </a:extLst>
-          </p:cNvPr>
+          <p:cNvPr id="2" name="Title 1"/>
           <p:cNvSpPr>
             <a:spLocks noGrp="1"/>
           </p:cNvSpPr>
@@ -13631,13 +10865,7 @@
       </p:sp>
       <p:sp>
         <p:nvSpPr>
-          <p:cNvPr id="4" name="Content Placeholder 3">
-            <a:extLst>
-              <a:ext uri="{FF2B5EF4-FFF2-40B4-BE49-F238E27FC236}">
-                <a16:creationId xmlns:a16="http://schemas.microsoft.com/office/drawing/2014/main" id="{EB345061-CBD1-8BF8-B9DA-A2590994AD5E}"/>
-              </a:ext>
-            </a:extLst>
-          </p:cNvPr>
+          <p:cNvPr id="4" name="Content Placeholder 3"/>
           <p:cNvSpPr>
             <a:spLocks noGrp="1"/>
           </p:cNvSpPr>
@@ -13675,13 +10903,7 @@
       </p:sp>
       <p:pic>
         <p:nvPicPr>
-          <p:cNvPr id="5" name="Content Placeholder 3">
-            <a:extLst>
-              <a:ext uri="{FF2B5EF4-FFF2-40B4-BE49-F238E27FC236}">
-                <a16:creationId xmlns:a16="http://schemas.microsoft.com/office/drawing/2014/main" id="{CCDD5D10-1374-47DC-8E92-79C7586523D2}"/>
-              </a:ext>
-            </a:extLst>
-          </p:cNvPr>
+          <p:cNvPr id="5" name="Content Placeholder 3"/>
           <p:cNvPicPr>
             <a:picLocks noChangeAspect="1"/>
           </p:cNvPicPr>
@@ -13704,11 +10926,6 @@
         </p:spPr>
       </p:pic>
     </p:spTree>
-    <p:extLst>
-      <p:ext uri="{BB962C8B-B14F-4D97-AF65-F5344CB8AC3E}">
-        <p14:creationId xmlns:p14="http://schemas.microsoft.com/office/powerpoint/2010/main" val="3223212124"/>
-      </p:ext>
-    </p:extLst>
   </p:cSld>
   <p:clrMapOvr>
     <a:masterClrMapping/>
@@ -13735,13 +10952,7 @@
       </p:grpSpPr>
       <p:sp>
         <p:nvSpPr>
-          <p:cNvPr id="2" name="Title 1">
-            <a:extLst>
-              <a:ext uri="{FF2B5EF4-FFF2-40B4-BE49-F238E27FC236}">
-                <a16:creationId xmlns:a16="http://schemas.microsoft.com/office/drawing/2014/main" id="{3620DD55-D04D-15A8-6EBD-0A8293532C8D}"/>
-              </a:ext>
-            </a:extLst>
-          </p:cNvPr>
+          <p:cNvPr id="2" name="Title 1"/>
           <p:cNvSpPr>
             <a:spLocks noGrp="1"/>
           </p:cNvSpPr>
@@ -13763,13 +10974,7 @@
       </p:sp>
       <p:pic>
         <p:nvPicPr>
-          <p:cNvPr id="7" name="Picture 6" descr="Diagram, engineering drawing&#10;&#10;Description automatically generated">
-            <a:extLst>
-              <a:ext uri="{FF2B5EF4-FFF2-40B4-BE49-F238E27FC236}">
-                <a16:creationId xmlns:a16="http://schemas.microsoft.com/office/drawing/2014/main" id="{C1920284-4CB7-F127-9832-3A0D4E06581E}"/>
-              </a:ext>
-            </a:extLst>
-          </p:cNvPr>
+          <p:cNvPr id="7" name="Picture 6" descr="Diagram, engineering drawing&#10;&#10;Description automatically generated"/>
           <p:cNvPicPr>
             <a:picLocks noChangeAspect="1"/>
           </p:cNvPicPr>
@@ -13793,13 +10998,7 @@
       </p:pic>
       <p:pic>
         <p:nvPicPr>
-          <p:cNvPr id="9" name="Picture 8" descr="A picture containing diagram&#10;&#10;Description automatically generated">
-            <a:extLst>
-              <a:ext uri="{FF2B5EF4-FFF2-40B4-BE49-F238E27FC236}">
-                <a16:creationId xmlns:a16="http://schemas.microsoft.com/office/drawing/2014/main" id="{111A5905-312C-42E6-58B5-01CA3BAC7402}"/>
-              </a:ext>
-            </a:extLst>
-          </p:cNvPr>
+          <p:cNvPr id="9" name="Picture 8" descr="A picture containing diagram&#10;&#10;Description automatically generated"/>
           <p:cNvPicPr>
             <a:picLocks noChangeAspect="1"/>
           </p:cNvPicPr>
@@ -13822,11 +11021,6 @@
         </p:spPr>
       </p:pic>
     </p:spTree>
-    <p:extLst>
-      <p:ext uri="{BB962C8B-B14F-4D97-AF65-F5344CB8AC3E}">
-        <p14:creationId xmlns:p14="http://schemas.microsoft.com/office/powerpoint/2010/main" val="108575568"/>
-      </p:ext>
-    </p:extLst>
   </p:cSld>
   <p:clrMapOvr>
     <a:masterClrMapping/>
@@ -13853,13 +11047,7 @@
       </p:grpSpPr>
       <p:sp>
         <p:nvSpPr>
-          <p:cNvPr id="2" name="Title 1">
-            <a:extLst>
-              <a:ext uri="{FF2B5EF4-FFF2-40B4-BE49-F238E27FC236}">
-                <a16:creationId xmlns:a16="http://schemas.microsoft.com/office/drawing/2014/main" id="{3620DD55-D04D-15A8-6EBD-0A8293532C8D}"/>
-              </a:ext>
-            </a:extLst>
-          </p:cNvPr>
+          <p:cNvPr id="2" name="Title 1"/>
           <p:cNvSpPr>
             <a:spLocks noGrp="1"/>
           </p:cNvSpPr>
@@ -13881,13 +11069,7 @@
       </p:sp>
       <p:sp>
         <p:nvSpPr>
-          <p:cNvPr id="4" name="Content Placeholder 3">
-            <a:extLst>
-              <a:ext uri="{FF2B5EF4-FFF2-40B4-BE49-F238E27FC236}">
-                <a16:creationId xmlns:a16="http://schemas.microsoft.com/office/drawing/2014/main" id="{EB345061-CBD1-8BF8-B9DA-A2590994AD5E}"/>
-              </a:ext>
-            </a:extLst>
-          </p:cNvPr>
+          <p:cNvPr id="4" name="Content Placeholder 3"/>
           <p:cNvSpPr>
             <a:spLocks noGrp="1"/>
           </p:cNvSpPr>
@@ -13950,13 +11132,7 @@
       </p:sp>
       <p:pic>
         <p:nvPicPr>
-          <p:cNvPr id="5" name="Content Placeholder 5" descr="Diagram&#10;&#10;Description automatically generated">
-            <a:extLst>
-              <a:ext uri="{FF2B5EF4-FFF2-40B4-BE49-F238E27FC236}">
-                <a16:creationId xmlns:a16="http://schemas.microsoft.com/office/drawing/2014/main" id="{D6A63BE9-D597-3EB8-B0E8-FC107E519F9D}"/>
-              </a:ext>
-            </a:extLst>
-          </p:cNvPr>
+          <p:cNvPr id="5" name="Content Placeholder 5" descr="Diagram&#10;&#10;Description automatically generated"/>
           <p:cNvPicPr>
             <a:picLocks noChangeAspect="1"/>
           </p:cNvPicPr>
@@ -13965,7 +11141,9 @@
         <p:blipFill rotWithShape="1">
           <a:blip r:embed="rId2"/>
           <a:srcRect l="46973" t="21619" r="13061"/>
-          <a:stretch/>
+          <a:stretch>
+            <a:fillRect/>
+          </a:stretch>
         </p:blipFill>
         <p:spPr>
           <a:xfrm>
@@ -13978,11 +11156,6 @@
         </p:spPr>
       </p:pic>
     </p:spTree>
-    <p:extLst>
-      <p:ext uri="{BB962C8B-B14F-4D97-AF65-F5344CB8AC3E}">
-        <p14:creationId xmlns:p14="http://schemas.microsoft.com/office/powerpoint/2010/main" val="3281809004"/>
-      </p:ext>
-    </p:extLst>
   </p:cSld>
   <p:clrMapOvr>
     <a:masterClrMapping/>
@@ -14009,13 +11182,7 @@
       </p:grpSpPr>
       <p:sp>
         <p:nvSpPr>
-          <p:cNvPr id="2" name="Title 1">
-            <a:extLst>
-              <a:ext uri="{FF2B5EF4-FFF2-40B4-BE49-F238E27FC236}">
-                <a16:creationId xmlns:a16="http://schemas.microsoft.com/office/drawing/2014/main" id="{3620DD55-D04D-15A8-6EBD-0A8293532C8D}"/>
-              </a:ext>
-            </a:extLst>
-          </p:cNvPr>
+          <p:cNvPr id="2" name="Title 1"/>
           <p:cNvSpPr>
             <a:spLocks noGrp="1"/>
           </p:cNvSpPr>
@@ -14037,13 +11204,7 @@
       </p:sp>
       <p:sp>
         <p:nvSpPr>
-          <p:cNvPr id="4" name="Content Placeholder 3">
-            <a:extLst>
-              <a:ext uri="{FF2B5EF4-FFF2-40B4-BE49-F238E27FC236}">
-                <a16:creationId xmlns:a16="http://schemas.microsoft.com/office/drawing/2014/main" id="{EB345061-CBD1-8BF8-B9DA-A2590994AD5E}"/>
-              </a:ext>
-            </a:extLst>
-          </p:cNvPr>
+          <p:cNvPr id="4" name="Content Placeholder 3"/>
           <p:cNvSpPr>
             <a:spLocks noGrp="1"/>
           </p:cNvSpPr>
@@ -14078,17 +11239,47 @@
               <a:t>Extremely powerful when combined with some built-in functions </a:t>
             </a:r>
           </a:p>
+          <a:p>
+            <a:r>
+              <a:rPr lang="en-US" altLang="zh-CN" dirty="0" err="1"/>
+              <a:t>lm</a:t>
+            </a:r>
+            <a:r>
+              <a:rPr lang="en-US" altLang="zh-CN" dirty="0"/>
+              <a:t>() and </a:t>
+            </a:r>
+            <a:r>
+              <a:rPr lang="en-US" altLang="zh-CN" dirty="0" err="1"/>
+              <a:t>glm</a:t>
+            </a:r>
+            <a:r>
+              <a:rPr lang="en-US" altLang="zh-CN" dirty="0"/>
+              <a:t>() </a:t>
+            </a:r>
+          </a:p>
+          <a:p>
+            <a:r>
+              <a:rPr lang="en-US" dirty="0" err="1"/>
+              <a:t>lapply</a:t>
+            </a:r>
+            <a:r>
+              <a:rPr lang="en-US" dirty="0"/>
+              <a:t>() and </a:t>
+            </a:r>
+            <a:r>
+              <a:rPr lang="en-US" dirty="0" err="1"/>
+              <a:t>sapply</a:t>
+            </a:r>
+            <a:r>
+              <a:rPr lang="en-US" dirty="0"/>
+              <a:t>()</a:t>
+            </a:r>
+          </a:p>
         </p:txBody>
       </p:sp>
       <p:pic>
         <p:nvPicPr>
-          <p:cNvPr id="3" name="Content Placeholder 5" descr="Diagram&#10;&#10;Description automatically generated">
-            <a:extLst>
-              <a:ext uri="{FF2B5EF4-FFF2-40B4-BE49-F238E27FC236}">
-                <a16:creationId xmlns:a16="http://schemas.microsoft.com/office/drawing/2014/main" id="{8B5BCD60-E9F1-FDFD-2AAF-FE9EBDC65A8A}"/>
-              </a:ext>
-            </a:extLst>
-          </p:cNvPr>
+          <p:cNvPr id="3" name="Content Placeholder 5" descr="Diagram&#10;&#10;Description automatically generated"/>
           <p:cNvPicPr>
             <a:picLocks noChangeAspect="1"/>
           </p:cNvPicPr>
@@ -14097,7 +11288,9 @@
         <p:blipFill rotWithShape="1">
           <a:blip r:embed="rId2"/>
           <a:srcRect l="28483" t="22492" r="53026"/>
-          <a:stretch/>
+          <a:stretch>
+            <a:fillRect/>
+          </a:stretch>
         </p:blipFill>
         <p:spPr>
           <a:xfrm>
@@ -14110,11 +11303,6 @@
         </p:spPr>
       </p:pic>
     </p:spTree>
-    <p:extLst>
-      <p:ext uri="{BB962C8B-B14F-4D97-AF65-F5344CB8AC3E}">
-        <p14:creationId xmlns:p14="http://schemas.microsoft.com/office/powerpoint/2010/main" val="4245281921"/>
-      </p:ext>
-    </p:extLst>
   </p:cSld>
   <p:clrMapOvr>
     <a:masterClrMapping/>
@@ -14141,13 +11329,7 @@
       </p:grpSpPr>
       <p:sp>
         <p:nvSpPr>
-          <p:cNvPr id="2" name="Title 1">
-            <a:extLst>
-              <a:ext uri="{FF2B5EF4-FFF2-40B4-BE49-F238E27FC236}">
-                <a16:creationId xmlns:a16="http://schemas.microsoft.com/office/drawing/2014/main" id="{3620DD55-D04D-15A8-6EBD-0A8293532C8D}"/>
-              </a:ext>
-            </a:extLst>
-          </p:cNvPr>
+          <p:cNvPr id="2" name="Title 1"/>
           <p:cNvSpPr>
             <a:spLocks noGrp="1"/>
           </p:cNvSpPr>
@@ -14169,13 +11351,7 @@
       </p:sp>
       <p:pic>
         <p:nvPicPr>
-          <p:cNvPr id="5" name="Content Placeholder 4" descr="Diagram, engineering drawing&#10;&#10;Description automatically generated">
-            <a:extLst>
-              <a:ext uri="{FF2B5EF4-FFF2-40B4-BE49-F238E27FC236}">
-                <a16:creationId xmlns:a16="http://schemas.microsoft.com/office/drawing/2014/main" id="{EA411EF0-27F2-A91A-9183-4AC0C6663195}"/>
-              </a:ext>
-            </a:extLst>
-          </p:cNvPr>
+          <p:cNvPr id="5" name="Content Placeholder 4" descr="Diagram, engineering drawing&#10;&#10;Description automatically generated"/>
           <p:cNvPicPr>
             <a:picLocks noGrp="1" noChangeAspect="1"/>
           </p:cNvPicPr>
@@ -14186,7 +11362,9 @@
         <p:blipFill rotWithShape="1">
           <a:blip r:embed="rId2"/>
           <a:srcRect r="70909"/>
-          <a:stretch/>
+          <a:stretch>
+            <a:fillRect/>
+          </a:stretch>
         </p:blipFill>
         <p:spPr>
           <a:xfrm>
@@ -14197,13 +11375,7 @@
       </p:pic>
       <p:pic>
         <p:nvPicPr>
-          <p:cNvPr id="3" name="Content Placeholder 4" descr="Diagram, engineering drawing&#10;&#10;Description automatically generated">
-            <a:extLst>
-              <a:ext uri="{FF2B5EF4-FFF2-40B4-BE49-F238E27FC236}">
-                <a16:creationId xmlns:a16="http://schemas.microsoft.com/office/drawing/2014/main" id="{7C58AECD-9410-DDB8-6440-F8EE6F273E2C}"/>
-              </a:ext>
-            </a:extLst>
-          </p:cNvPr>
+          <p:cNvPr id="3" name="Content Placeholder 4" descr="Diagram, engineering drawing&#10;&#10;Description automatically generated"/>
           <p:cNvPicPr>
             <a:picLocks noChangeAspect="1"/>
           </p:cNvPicPr>
@@ -14212,7 +11384,9 @@
         <p:blipFill rotWithShape="1">
           <a:blip r:embed="rId2"/>
           <a:srcRect l="55970" r="9325"/>
-          <a:stretch/>
+          <a:stretch>
+            <a:fillRect/>
+          </a:stretch>
         </p:blipFill>
         <p:spPr>
           <a:xfrm>
@@ -14225,11 +11399,6 @@
         </p:spPr>
       </p:pic>
     </p:spTree>
-    <p:extLst>
-      <p:ext uri="{BB962C8B-B14F-4D97-AF65-F5344CB8AC3E}">
-        <p14:creationId xmlns:p14="http://schemas.microsoft.com/office/powerpoint/2010/main" val="1410062465"/>
-      </p:ext>
-    </p:extLst>
   </p:cSld>
   <p:clrMapOvr>
     <a:masterClrMapping/>
@@ -14256,13 +11425,7 @@
       </p:grpSpPr>
       <p:sp>
         <p:nvSpPr>
-          <p:cNvPr id="2" name="Title 1">
-            <a:extLst>
-              <a:ext uri="{FF2B5EF4-FFF2-40B4-BE49-F238E27FC236}">
-                <a16:creationId xmlns:a16="http://schemas.microsoft.com/office/drawing/2014/main" id="{A205774C-A5AA-2BD0-C9AA-43BF61AA2CE1}"/>
-              </a:ext>
-            </a:extLst>
-          </p:cNvPr>
+          <p:cNvPr id="2" name="Title 1"/>
           <p:cNvSpPr>
             <a:spLocks noGrp="1"/>
           </p:cNvSpPr>
@@ -14284,15 +11447,11 @@
         </p:txBody>
       </p:sp>
     </p:spTree>
-    <p:extLst>
-      <p:ext uri="{BB962C8B-B14F-4D97-AF65-F5344CB8AC3E}">
-        <p14:creationId xmlns:p14="http://schemas.microsoft.com/office/powerpoint/2010/main" val="1154444114"/>
-      </p:ext>
-    </p:extLst>
   </p:cSld>
   <p:clrMapOvr>
     <a:masterClrMapping/>
   </p:clrMapOvr>
+  <p:transition/>
 </p:sld>
 </file>
 
@@ -14301,13 +11460,7 @@
   <p:cSld>
     <p:spTree>
       <p:nvGrpSpPr>
-        <p:cNvPr id="1" name="">
-          <a:extLst>
-            <a:ext uri="{FF2B5EF4-FFF2-40B4-BE49-F238E27FC236}">
-              <a16:creationId xmlns:a16="http://schemas.microsoft.com/office/drawing/2014/main" id="{E0ADC6C8-6F9C-B829-89A7-400BD3647C14}"/>
-            </a:ext>
-          </a:extLst>
-        </p:cNvPr>
+        <p:cNvPr id="1" name=""/>
         <p:cNvGrpSpPr/>
         <p:nvPr/>
       </p:nvGrpSpPr>
@@ -14321,13 +11474,7 @@
       </p:grpSpPr>
       <p:sp>
         <p:nvSpPr>
-          <p:cNvPr id="2" name="Title 1">
-            <a:extLst>
-              <a:ext uri="{FF2B5EF4-FFF2-40B4-BE49-F238E27FC236}">
-                <a16:creationId xmlns:a16="http://schemas.microsoft.com/office/drawing/2014/main" id="{8591FE0D-51F4-AA6B-8BE7-3B428DC7F52A}"/>
-              </a:ext>
-            </a:extLst>
-          </p:cNvPr>
+          <p:cNvPr id="2" name="Title 1"/>
           <p:cNvSpPr>
             <a:spLocks noGrp="1"/>
           </p:cNvSpPr>
@@ -14375,13 +11522,7 @@
       </p:sp>
       <p:sp>
         <p:nvSpPr>
-          <p:cNvPr id="5" name="TextBox 4">
-            <a:extLst>
-              <a:ext uri="{FF2B5EF4-FFF2-40B4-BE49-F238E27FC236}">
-                <a16:creationId xmlns:a16="http://schemas.microsoft.com/office/drawing/2014/main" id="{3723E59E-8E1C-40C4-C88E-97B1AA723776}"/>
-              </a:ext>
-            </a:extLst>
-          </p:cNvPr>
+          <p:cNvPr id="5" name="TextBox 4"/>
           <p:cNvSpPr txBox="1"/>
           <p:nvPr/>
         </p:nvSpPr>
@@ -14459,11 +11600,6 @@
         </p:txBody>
       </p:sp>
     </p:spTree>
-    <p:extLst>
-      <p:ext uri="{BB962C8B-B14F-4D97-AF65-F5344CB8AC3E}">
-        <p14:creationId xmlns:p14="http://schemas.microsoft.com/office/powerpoint/2010/main" val="439019801"/>
-      </p:ext>
-    </p:extLst>
   </p:cSld>
   <p:clrMapOvr>
     <a:masterClrMapping/>
@@ -14490,13 +11626,7 @@
       </p:grpSpPr>
       <p:pic>
         <p:nvPicPr>
-          <p:cNvPr id="6" name="Content Placeholder 5" descr="A map of a city&#10;&#10;Description automatically generated">
-            <a:extLst>
-              <a:ext uri="{FF2B5EF4-FFF2-40B4-BE49-F238E27FC236}">
-                <a16:creationId xmlns:a16="http://schemas.microsoft.com/office/drawing/2014/main" id="{D0078521-6D64-1BCE-B884-04EC922C6743}"/>
-              </a:ext>
-            </a:extLst>
-          </p:cNvPr>
+          <p:cNvPr id="6" name="Content Placeholder 5" descr="A map of a city&#10;&#10;Description automatically generated"/>
           <p:cNvPicPr>
             <a:picLocks noGrp="1" noChangeAspect="1"/>
           </p:cNvPicPr>
@@ -14507,7 +11637,9 @@
         <p:blipFill rotWithShape="1">
           <a:blip r:embed="rId2"/>
           <a:srcRect r="34815"/>
-          <a:stretch/>
+          <a:stretch>
+            <a:fillRect/>
+          </a:stretch>
         </p:blipFill>
         <p:spPr>
           <a:xfrm>
@@ -14521,13 +11653,7 @@
       </p:pic>
       <p:sp>
         <p:nvSpPr>
-          <p:cNvPr id="4" name="Content Placeholder 3">
-            <a:extLst>
-              <a:ext uri="{FF2B5EF4-FFF2-40B4-BE49-F238E27FC236}">
-                <a16:creationId xmlns:a16="http://schemas.microsoft.com/office/drawing/2014/main" id="{8AE12D43-9137-DB7C-570B-E48AB2308897}"/>
-              </a:ext>
-            </a:extLst>
-          </p:cNvPr>
+          <p:cNvPr id="4" name="Content Placeholder 3"/>
           <p:cNvSpPr>
             <a:spLocks noGrp="1"/>
           </p:cNvSpPr>
@@ -14559,13 +11685,7 @@
       </p:sp>
       <p:sp>
         <p:nvSpPr>
-          <p:cNvPr id="8" name="TextBox 7">
-            <a:extLst>
-              <a:ext uri="{FF2B5EF4-FFF2-40B4-BE49-F238E27FC236}">
-                <a16:creationId xmlns:a16="http://schemas.microsoft.com/office/drawing/2014/main" id="{2A92A9C4-6F5B-9A18-012E-5626D25E3582}"/>
-              </a:ext>
-            </a:extLst>
-          </p:cNvPr>
+          <p:cNvPr id="8" name="TextBox 7"/>
           <p:cNvSpPr txBox="1"/>
           <p:nvPr/>
         </p:nvSpPr>
@@ -14605,26 +11725,20 @@
                 </a:solidFill>
                 <a:effectLst/>
                 <a:latin typeface="Helvetica" pitchFamily="2" charset="0"/>
-                <a:cs typeface="Calibri"/>
+                <a:cs typeface="Calibri" panose="020F0502020204030204"/>
               </a:rPr>
               <a:t>eliver quality workshops designed to help biomedical researchers develop the skills they need to succeed.</a:t>
             </a:r>
             <a:endParaRPr lang="en-CA" sz="1800">
               <a:latin typeface="Helvetica" pitchFamily="2" charset="0"/>
-              <a:cs typeface="Calibri"/>
+              <a:cs typeface="Calibri" panose="020F0502020204030204"/>
             </a:endParaRPr>
           </a:p>
         </p:txBody>
       </p:sp>
       <p:pic>
         <p:nvPicPr>
-          <p:cNvPr id="10" name="Picture 9" descr="A logo with a letter m&#10;&#10;Description automatically generated">
-            <a:extLst>
-              <a:ext uri="{FF2B5EF4-FFF2-40B4-BE49-F238E27FC236}">
-                <a16:creationId xmlns:a16="http://schemas.microsoft.com/office/drawing/2014/main" id="{E494228A-9E5D-1800-FDEC-760556611BD3}"/>
-              </a:ext>
-            </a:extLst>
-          </p:cNvPr>
+          <p:cNvPr id="10" name="Picture 9" descr="A logo with a letter m&#10;&#10;Description automatically generated"/>
           <p:cNvPicPr>
             <a:picLocks noChangeAspect="1"/>
           </p:cNvPicPr>
@@ -14648,13 +11762,7 @@
       </p:pic>
       <p:pic>
         <p:nvPicPr>
-          <p:cNvPr id="12" name="Picture 11" descr="A qr code with black squares&#10;&#10;Description automatically generated">
-            <a:extLst>
-              <a:ext uri="{FF2B5EF4-FFF2-40B4-BE49-F238E27FC236}">
-                <a16:creationId xmlns:a16="http://schemas.microsoft.com/office/drawing/2014/main" id="{333BAB40-358F-BE60-7494-578A1971B335}"/>
-              </a:ext>
-            </a:extLst>
-          </p:cNvPr>
+          <p:cNvPr id="12" name="Picture 11" descr="A qr code with black squares&#10;&#10;Description automatically generated"/>
           <p:cNvPicPr>
             <a:picLocks noChangeAspect="1"/>
           </p:cNvPicPr>
@@ -14678,13 +11786,7 @@
       </p:pic>
       <p:sp>
         <p:nvSpPr>
-          <p:cNvPr id="13" name="TextBox 12">
-            <a:extLst>
-              <a:ext uri="{FF2B5EF4-FFF2-40B4-BE49-F238E27FC236}">
-                <a16:creationId xmlns:a16="http://schemas.microsoft.com/office/drawing/2014/main" id="{174C1E59-2F37-F73C-4DFA-8971D19A54AE}"/>
-              </a:ext>
-            </a:extLst>
-          </p:cNvPr>
+          <p:cNvPr id="13" name="TextBox 12"/>
           <p:cNvSpPr txBox="1"/>
           <p:nvPr/>
         </p:nvSpPr>
@@ -14706,33 +11808,27 @@
           <a:p>
             <a:pPr algn="ctr"/>
             <a:r>
-              <a:rPr lang="en-CA" sz="1800"/>
+              <a:rPr lang="en-CA" sz="1800" dirty="0"/>
               <a:t>Scan the QR code to sign up </a:t>
             </a:r>
           </a:p>
           <a:p>
             <a:pPr algn="ctr"/>
             <a:r>
-              <a:rPr lang="en-CA" sz="1800"/>
+              <a:rPr lang="en-CA" sz="1800" dirty="0"/>
               <a:t>for our </a:t>
             </a:r>
             <a:r>
-              <a:rPr lang="en-CA" sz="1800" b="1"/>
+              <a:rPr lang="en-CA" sz="1800" b="1" dirty="0"/>
               <a:t>mailing list</a:t>
             </a:r>
-            <a:endParaRPr lang="en-CA" sz="1800"/>
+            <a:endParaRPr lang="en-CA" sz="1800" dirty="0"/>
           </a:p>
         </p:txBody>
       </p:sp>
       <p:sp>
         <p:nvSpPr>
-          <p:cNvPr id="3" name="TextBox 2">
-            <a:extLst>
-              <a:ext uri="{FF2B5EF4-FFF2-40B4-BE49-F238E27FC236}">
-                <a16:creationId xmlns:a16="http://schemas.microsoft.com/office/drawing/2014/main" id="{8E0D0C58-4777-B836-81EE-F027A53CFFAF}"/>
-              </a:ext>
-            </a:extLst>
-          </p:cNvPr>
+          <p:cNvPr id="3" name="TextBox 2"/>
           <p:cNvSpPr txBox="1"/>
           <p:nvPr/>
         </p:nvSpPr>
@@ -14773,11 +11869,6 @@
         </p:txBody>
       </p:sp>
     </p:spTree>
-    <p:extLst>
-      <p:ext uri="{BB962C8B-B14F-4D97-AF65-F5344CB8AC3E}">
-        <p14:creationId xmlns:p14="http://schemas.microsoft.com/office/powerpoint/2010/main" val="1324269546"/>
-      </p:ext>
-    </p:extLst>
   </p:cSld>
   <p:clrMapOvr>
     <a:masterClrMapping/>
@@ -14790,13 +11881,7 @@
   <p:cSld>
     <p:spTree>
       <p:nvGrpSpPr>
-        <p:cNvPr id="1" name="">
-          <a:extLst>
-            <a:ext uri="{FF2B5EF4-FFF2-40B4-BE49-F238E27FC236}">
-              <a16:creationId xmlns:a16="http://schemas.microsoft.com/office/drawing/2014/main" id="{BCC0637B-FF4E-B04C-200E-6EF27E413EC6}"/>
-            </a:ext>
-          </a:extLst>
-        </p:cNvPr>
+        <p:cNvPr id="1" name=""/>
         <p:cNvGrpSpPr/>
         <p:nvPr/>
       </p:nvGrpSpPr>
@@ -14810,13 +11895,7 @@
       </p:grpSpPr>
       <p:sp>
         <p:nvSpPr>
-          <p:cNvPr id="2" name="Title 1">
-            <a:extLst>
-              <a:ext uri="{FF2B5EF4-FFF2-40B4-BE49-F238E27FC236}">
-                <a16:creationId xmlns:a16="http://schemas.microsoft.com/office/drawing/2014/main" id="{8F3E4CE9-0AE0-A934-6C7B-4EBD04A4BCB8}"/>
-              </a:ext>
-            </a:extLst>
-          </p:cNvPr>
+          <p:cNvPr id="2" name="Title 1"/>
           <p:cNvSpPr>
             <a:spLocks noGrp="1"/>
           </p:cNvSpPr>
@@ -14838,13 +11917,7 @@
       </p:sp>
       <p:pic>
         <p:nvPicPr>
-          <p:cNvPr id="5" name="Content Placeholder 4" descr="Graphical user interface, text, application&#10;&#10;Description automatically generated">
-            <a:extLst>
-              <a:ext uri="{FF2B5EF4-FFF2-40B4-BE49-F238E27FC236}">
-                <a16:creationId xmlns:a16="http://schemas.microsoft.com/office/drawing/2014/main" id="{8E671FE4-EB30-2AEC-25FB-07636FA787C7}"/>
-              </a:ext>
-            </a:extLst>
-          </p:cNvPr>
+          <p:cNvPr id="5" name="Content Placeholder 4" descr="Graphical user interface, text, application&#10;&#10;Description automatically generated"/>
           <p:cNvPicPr>
             <a:picLocks noGrp="1" noChangeAspect="1"/>
           </p:cNvPicPr>
@@ -14867,13 +11940,7 @@
       </p:pic>
       <p:sp>
         <p:nvSpPr>
-          <p:cNvPr id="7" name="TextBox 6">
-            <a:extLst>
-              <a:ext uri="{FF2B5EF4-FFF2-40B4-BE49-F238E27FC236}">
-                <a16:creationId xmlns:a16="http://schemas.microsoft.com/office/drawing/2014/main" id="{834FD533-D1DC-FF56-B12C-8AE7A8553CBF}"/>
-              </a:ext>
-            </a:extLst>
-          </p:cNvPr>
+          <p:cNvPr id="7" name="TextBox 6"/>
           <p:cNvSpPr txBox="1"/>
           <p:nvPr/>
         </p:nvSpPr>
@@ -14948,16 +12015,8 @@
       </p:sp>
       <p:sp>
         <p:nvSpPr>
-          <p:cNvPr id="8" name="Content Placeholder 3">
-            <a:extLst>
-              <a:ext uri="{FF2B5EF4-FFF2-40B4-BE49-F238E27FC236}">
-                <a16:creationId xmlns:a16="http://schemas.microsoft.com/office/drawing/2014/main" id="{FD4F6AE8-53DD-047B-1CD5-EB8E6696FFCE}"/>
-              </a:ext>
-            </a:extLst>
-          </p:cNvPr>
-          <p:cNvSpPr txBox="1">
-            <a:spLocks/>
-          </p:cNvSpPr>
+          <p:cNvPr id="8" name="Content Placeholder 3"/>
+          <p:cNvSpPr txBox="1"/>
           <p:nvPr/>
         </p:nvSpPr>
         <p:spPr>
@@ -14974,16 +12033,16 @@
             <a:normAutofit/>
           </a:bodyPr>
           <a:lstStyle>
-            <a:lvl1pPr marL="228540" indent="-228540" algn="l" defTabSz="914175" rtl="0" eaLnBrk="1" latinLnBrk="0" hangingPunct="1">
+            <a:lvl1pPr marL="228600" indent="-228600" algn="l" defTabSz="914400" rtl="0" eaLnBrk="1" latinLnBrk="0" hangingPunct="1">
               <a:lnSpc>
                 <a:spcPct val="90000"/>
               </a:lnSpc>
               <a:spcBef>
-                <a:spcPts val="998"/>
+                <a:spcPts val="1000"/>
               </a:spcBef>
               <a:buFont typeface="Arial" panose="020B0604020202020204" pitchFamily="34" charset="0"/>
               <a:buChar char="•"/>
-              <a:defRPr sz="2798" kern="1200">
+              <a:defRPr sz="2800" kern="1200">
                 <a:solidFill>
                   <a:schemeClr val="tx1"/>
                 </a:solidFill>
@@ -14992,12 +12051,12 @@
                 <a:cs typeface="+mn-cs"/>
               </a:defRPr>
             </a:lvl1pPr>
-            <a:lvl2pPr marL="685628" indent="-228540" algn="l" defTabSz="914175" rtl="0" eaLnBrk="1" latinLnBrk="0" hangingPunct="1">
+            <a:lvl2pPr marL="685800" indent="-228600" algn="l" defTabSz="914400" rtl="0" eaLnBrk="1" latinLnBrk="0" hangingPunct="1">
               <a:lnSpc>
                 <a:spcPct val="90000"/>
               </a:lnSpc>
               <a:spcBef>
-                <a:spcPts val="503"/>
+                <a:spcPts val="505"/>
               </a:spcBef>
               <a:buFont typeface="Arial" panose="020B0604020202020204" pitchFamily="34" charset="0"/>
               <a:buChar char="•"/>
@@ -15010,16 +12069,16 @@
                 <a:cs typeface="+mn-cs"/>
               </a:defRPr>
             </a:lvl2pPr>
-            <a:lvl3pPr marL="1142715" indent="-228540" algn="l" defTabSz="914175" rtl="0" eaLnBrk="1" latinLnBrk="0" hangingPunct="1">
+            <a:lvl3pPr marL="1143000" indent="-228600" algn="l" defTabSz="914400" rtl="0" eaLnBrk="1" latinLnBrk="0" hangingPunct="1">
               <a:lnSpc>
                 <a:spcPct val="90000"/>
               </a:lnSpc>
               <a:spcBef>
-                <a:spcPts val="503"/>
+                <a:spcPts val="505"/>
               </a:spcBef>
               <a:buFont typeface="Arial" panose="020B0604020202020204" pitchFamily="34" charset="0"/>
               <a:buChar char="•"/>
-              <a:defRPr sz="2002" kern="1200">
+              <a:defRPr sz="2000" kern="1200">
                 <a:solidFill>
                   <a:schemeClr val="tx1"/>
                 </a:solidFill>
@@ -15028,12 +12087,12 @@
                 <a:cs typeface="+mn-cs"/>
               </a:defRPr>
             </a:lvl3pPr>
-            <a:lvl4pPr marL="1599803" indent="-228540" algn="l" defTabSz="914175" rtl="0" eaLnBrk="1" latinLnBrk="0" hangingPunct="1">
+            <a:lvl4pPr marL="1599565" indent="-228600" algn="l" defTabSz="914400" rtl="0" eaLnBrk="1" latinLnBrk="0" hangingPunct="1">
               <a:lnSpc>
                 <a:spcPct val="90000"/>
               </a:lnSpc>
               <a:spcBef>
-                <a:spcPts val="503"/>
+                <a:spcPts val="505"/>
               </a:spcBef>
               <a:buFont typeface="Arial" panose="020B0604020202020204" pitchFamily="34" charset="0"/>
               <a:buChar char="•"/>
@@ -15046,12 +12105,12 @@
                 <a:cs typeface="+mn-cs"/>
               </a:defRPr>
             </a:lvl4pPr>
-            <a:lvl5pPr marL="2056883" indent="-228540" algn="l" defTabSz="914175" rtl="0" eaLnBrk="1" latinLnBrk="0" hangingPunct="1">
+            <a:lvl5pPr marL="2056765" indent="-228600" algn="l" defTabSz="914400" rtl="0" eaLnBrk="1" latinLnBrk="0" hangingPunct="1">
               <a:lnSpc>
                 <a:spcPct val="90000"/>
               </a:lnSpc>
               <a:spcBef>
-                <a:spcPts val="503"/>
+                <a:spcPts val="505"/>
               </a:spcBef>
               <a:buFont typeface="Arial" panose="020B0604020202020204" pitchFamily="34" charset="0"/>
               <a:buChar char="•"/>
@@ -15064,12 +12123,12 @@
                 <a:cs typeface="+mn-cs"/>
               </a:defRPr>
             </a:lvl5pPr>
-            <a:lvl6pPr marL="2513970" indent="-228540" algn="l" defTabSz="914175" rtl="0" eaLnBrk="1" latinLnBrk="0" hangingPunct="1">
+            <a:lvl6pPr marL="2513965" indent="-228600" algn="l" defTabSz="914400" rtl="0" eaLnBrk="1" latinLnBrk="0" hangingPunct="1">
               <a:lnSpc>
                 <a:spcPct val="90000"/>
               </a:lnSpc>
               <a:spcBef>
-                <a:spcPts val="503"/>
+                <a:spcPts val="505"/>
               </a:spcBef>
               <a:buFont typeface="Arial" panose="020B0604020202020204" pitchFamily="34" charset="0"/>
               <a:buChar char="•"/>
@@ -15082,12 +12141,12 @@
                 <a:cs typeface="+mn-cs"/>
               </a:defRPr>
             </a:lvl6pPr>
-            <a:lvl7pPr marL="2971058" indent="-228540" algn="l" defTabSz="914175" rtl="0" eaLnBrk="1" latinLnBrk="0" hangingPunct="1">
+            <a:lvl7pPr marL="2971165" indent="-228600" algn="l" defTabSz="914400" rtl="0" eaLnBrk="1" latinLnBrk="0" hangingPunct="1">
               <a:lnSpc>
                 <a:spcPct val="90000"/>
               </a:lnSpc>
               <a:spcBef>
-                <a:spcPts val="503"/>
+                <a:spcPts val="505"/>
               </a:spcBef>
               <a:buFont typeface="Arial" panose="020B0604020202020204" pitchFamily="34" charset="0"/>
               <a:buChar char="•"/>
@@ -15100,12 +12159,12 @@
                 <a:cs typeface="+mn-cs"/>
               </a:defRPr>
             </a:lvl7pPr>
-            <a:lvl8pPr marL="3428145" indent="-228540" algn="l" defTabSz="914175" rtl="0" eaLnBrk="1" latinLnBrk="0" hangingPunct="1">
+            <a:lvl8pPr marL="3428365" indent="-228600" algn="l" defTabSz="914400" rtl="0" eaLnBrk="1" latinLnBrk="0" hangingPunct="1">
               <a:lnSpc>
                 <a:spcPct val="90000"/>
               </a:lnSpc>
               <a:spcBef>
-                <a:spcPts val="503"/>
+                <a:spcPts val="505"/>
               </a:spcBef>
               <a:buFont typeface="Arial" panose="020B0604020202020204" pitchFamily="34" charset="0"/>
               <a:buChar char="•"/>
@@ -15118,12 +12177,12 @@
                 <a:cs typeface="+mn-cs"/>
               </a:defRPr>
             </a:lvl8pPr>
-            <a:lvl9pPr marL="3885225" indent="-228540" algn="l" defTabSz="914175" rtl="0" eaLnBrk="1" latinLnBrk="0" hangingPunct="1">
+            <a:lvl9pPr marL="3884930" indent="-228600" algn="l" defTabSz="914400" rtl="0" eaLnBrk="1" latinLnBrk="0" hangingPunct="1">
               <a:lnSpc>
                 <a:spcPct val="90000"/>
               </a:lnSpc>
               <a:spcBef>
-                <a:spcPts val="503"/>
+                <a:spcPts val="505"/>
               </a:spcBef>
               <a:buFont typeface="Arial" panose="020B0604020202020204" pitchFamily="34" charset="0"/>
               <a:buChar char="•"/>
@@ -15146,11 +12205,6 @@
         </p:txBody>
       </p:sp>
     </p:spTree>
-    <p:extLst>
-      <p:ext uri="{BB962C8B-B14F-4D97-AF65-F5344CB8AC3E}">
-        <p14:creationId xmlns:p14="http://schemas.microsoft.com/office/powerpoint/2010/main" val="4191426825"/>
-      </p:ext>
-    </p:extLst>
   </p:cSld>
   <p:clrMapOvr>
     <a:masterClrMapping/>
@@ -15163,13 +12217,7 @@
   <p:cSld>
     <p:spTree>
       <p:nvGrpSpPr>
-        <p:cNvPr id="1" name="">
-          <a:extLst>
-            <a:ext uri="{FF2B5EF4-FFF2-40B4-BE49-F238E27FC236}">
-              <a16:creationId xmlns:a16="http://schemas.microsoft.com/office/drawing/2014/main" id="{A4F6A380-8D28-B3B9-9BB8-091212F1929C}"/>
-            </a:ext>
-          </a:extLst>
-        </p:cNvPr>
+        <p:cNvPr id="1" name=""/>
         <p:cNvGrpSpPr/>
         <p:nvPr/>
       </p:nvGrpSpPr>
@@ -15183,13 +12231,7 @@
       </p:grpSpPr>
       <p:sp>
         <p:nvSpPr>
-          <p:cNvPr id="2" name="Title 1">
-            <a:extLst>
-              <a:ext uri="{FF2B5EF4-FFF2-40B4-BE49-F238E27FC236}">
-                <a16:creationId xmlns:a16="http://schemas.microsoft.com/office/drawing/2014/main" id="{C9FF499C-FAF1-B340-FFAA-CA47FB5037D6}"/>
-              </a:ext>
-            </a:extLst>
-          </p:cNvPr>
+          <p:cNvPr id="2" name="Title 1"/>
           <p:cNvSpPr>
             <a:spLocks noGrp="1"/>
           </p:cNvSpPr>
@@ -15211,13 +12253,7 @@
       </p:sp>
       <p:sp>
         <p:nvSpPr>
-          <p:cNvPr id="7" name="TextBox 6">
-            <a:extLst>
-              <a:ext uri="{FF2B5EF4-FFF2-40B4-BE49-F238E27FC236}">
-                <a16:creationId xmlns:a16="http://schemas.microsoft.com/office/drawing/2014/main" id="{CCB554DF-B2F5-F610-5A3C-D6F9FCB69ECC}"/>
-              </a:ext>
-            </a:extLst>
-          </p:cNvPr>
+          <p:cNvPr id="7" name="TextBox 6"/>
           <p:cNvSpPr txBox="1"/>
           <p:nvPr/>
         </p:nvSpPr>
@@ -15292,13 +12328,7 @@
       </p:sp>
       <p:sp>
         <p:nvSpPr>
-          <p:cNvPr id="4" name="Content Placeholder 3">
-            <a:extLst>
-              <a:ext uri="{FF2B5EF4-FFF2-40B4-BE49-F238E27FC236}">
-                <a16:creationId xmlns:a16="http://schemas.microsoft.com/office/drawing/2014/main" id="{76D00039-EC33-930A-19E6-E895D7608F63}"/>
-              </a:ext>
-            </a:extLst>
-          </p:cNvPr>
+          <p:cNvPr id="4" name="Content Placeholder 3"/>
           <p:cNvSpPr>
             <a:spLocks noGrp="1"/>
           </p:cNvSpPr>
@@ -15325,13 +12355,7 @@
       </p:sp>
       <p:pic>
         <p:nvPicPr>
-          <p:cNvPr id="8" name="Picture 7" descr="A picture containing text&#10;&#10;Description automatically generated">
-            <a:extLst>
-              <a:ext uri="{FF2B5EF4-FFF2-40B4-BE49-F238E27FC236}">
-                <a16:creationId xmlns:a16="http://schemas.microsoft.com/office/drawing/2014/main" id="{31AA2FDB-699B-03D0-B99A-D880A47F4D0D}"/>
-              </a:ext>
-            </a:extLst>
-          </p:cNvPr>
+          <p:cNvPr id="8" name="Picture 7" descr="A picture containing text&#10;&#10;Description automatically generated"/>
           <p:cNvPicPr>
             <a:picLocks noChangeAspect="1"/>
           </p:cNvPicPr>
@@ -15354,11 +12378,6 @@
         </p:spPr>
       </p:pic>
     </p:spTree>
-    <p:extLst>
-      <p:ext uri="{BB962C8B-B14F-4D97-AF65-F5344CB8AC3E}">
-        <p14:creationId xmlns:p14="http://schemas.microsoft.com/office/powerpoint/2010/main" val="1956759140"/>
-      </p:ext>
-    </p:extLst>
   </p:cSld>
   <p:clrMapOvr>
     <a:masterClrMapping/>
@@ -15371,13 +12390,7 @@
   <p:cSld>
     <p:spTree>
       <p:nvGrpSpPr>
-        <p:cNvPr id="1" name="">
-          <a:extLst>
-            <a:ext uri="{FF2B5EF4-FFF2-40B4-BE49-F238E27FC236}">
-              <a16:creationId xmlns:a16="http://schemas.microsoft.com/office/drawing/2014/main" id="{E34DD681-84A8-D0D3-1568-FD2843332930}"/>
-            </a:ext>
-          </a:extLst>
-        </p:cNvPr>
+        <p:cNvPr id="1" name=""/>
         <p:cNvGrpSpPr/>
         <p:nvPr/>
       </p:nvGrpSpPr>
@@ -15391,13 +12404,7 @@
       </p:grpSpPr>
       <p:sp>
         <p:nvSpPr>
-          <p:cNvPr id="2" name="Title 1">
-            <a:extLst>
-              <a:ext uri="{FF2B5EF4-FFF2-40B4-BE49-F238E27FC236}">
-                <a16:creationId xmlns:a16="http://schemas.microsoft.com/office/drawing/2014/main" id="{9CA7AC7A-051B-BC46-FBA5-42206D3FC751}"/>
-              </a:ext>
-            </a:extLst>
-          </p:cNvPr>
+          <p:cNvPr id="2" name="Title 1"/>
           <p:cNvSpPr>
             <a:spLocks noGrp="1"/>
           </p:cNvSpPr>
@@ -15419,13 +12426,7 @@
       </p:sp>
       <p:sp>
         <p:nvSpPr>
-          <p:cNvPr id="7" name="TextBox 6">
-            <a:extLst>
-              <a:ext uri="{FF2B5EF4-FFF2-40B4-BE49-F238E27FC236}">
-                <a16:creationId xmlns:a16="http://schemas.microsoft.com/office/drawing/2014/main" id="{BEB96999-87E2-84DE-CEDA-6D562CF46C39}"/>
-              </a:ext>
-            </a:extLst>
-          </p:cNvPr>
+          <p:cNvPr id="7" name="TextBox 6"/>
           <p:cNvSpPr txBox="1"/>
           <p:nvPr/>
         </p:nvSpPr>
@@ -15500,13 +12501,7 @@
       </p:sp>
       <p:sp>
         <p:nvSpPr>
-          <p:cNvPr id="4" name="Content Placeholder 3">
-            <a:extLst>
-              <a:ext uri="{FF2B5EF4-FFF2-40B4-BE49-F238E27FC236}">
-                <a16:creationId xmlns:a16="http://schemas.microsoft.com/office/drawing/2014/main" id="{C8345F1B-E2FD-E61D-FF67-8297D91B2B60}"/>
-              </a:ext>
-            </a:extLst>
-          </p:cNvPr>
+          <p:cNvPr id="4" name="Content Placeholder 3"/>
           <p:cNvSpPr>
             <a:spLocks noGrp="1"/>
           </p:cNvSpPr>
@@ -15533,13 +12528,7 @@
       </p:sp>
       <p:pic>
         <p:nvPicPr>
-          <p:cNvPr id="5" name="Picture 4">
-            <a:extLst>
-              <a:ext uri="{FF2B5EF4-FFF2-40B4-BE49-F238E27FC236}">
-                <a16:creationId xmlns:a16="http://schemas.microsoft.com/office/drawing/2014/main" id="{62DB9843-4D51-C463-6F90-03DF4AAE751E}"/>
-              </a:ext>
-            </a:extLst>
-          </p:cNvPr>
+          <p:cNvPr id="5" name="Picture 4"/>
           <p:cNvPicPr>
             <a:picLocks noChangeAspect="1"/>
           </p:cNvPicPr>
@@ -15562,11 +12551,6 @@
         </p:spPr>
       </p:pic>
     </p:spTree>
-    <p:extLst>
-      <p:ext uri="{BB962C8B-B14F-4D97-AF65-F5344CB8AC3E}">
-        <p14:creationId xmlns:p14="http://schemas.microsoft.com/office/powerpoint/2010/main" val="1069205501"/>
-      </p:ext>
-    </p:extLst>
   </p:cSld>
   <p:clrMapOvr>
     <a:masterClrMapping/>
@@ -15593,13 +12577,7 @@
       </p:grpSpPr>
       <p:sp>
         <p:nvSpPr>
-          <p:cNvPr id="2" name="Title 1">
-            <a:extLst>
-              <a:ext uri="{FF2B5EF4-FFF2-40B4-BE49-F238E27FC236}">
-                <a16:creationId xmlns:a16="http://schemas.microsoft.com/office/drawing/2014/main" id="{075A143D-F1CE-CEF2-D8E9-905C9FCCD680}"/>
-              </a:ext>
-            </a:extLst>
-          </p:cNvPr>
+          <p:cNvPr id="2" name="Title 1"/>
           <p:cNvSpPr>
             <a:spLocks noGrp="1"/>
           </p:cNvSpPr>
@@ -15622,13 +12600,7 @@
       </p:sp>
       <p:sp>
         <p:nvSpPr>
-          <p:cNvPr id="3" name="Content Placeholder 2">
-            <a:extLst>
-              <a:ext uri="{FF2B5EF4-FFF2-40B4-BE49-F238E27FC236}">
-                <a16:creationId xmlns:a16="http://schemas.microsoft.com/office/drawing/2014/main" id="{5AEA167F-FD9A-F1A3-C048-AC602E3B1DB4}"/>
-              </a:ext>
-            </a:extLst>
-          </p:cNvPr>
+          <p:cNvPr id="3" name="Content Placeholder 2"/>
           <p:cNvSpPr>
             <a:spLocks noGrp="1"/>
           </p:cNvSpPr>
@@ -15653,7 +12625,7 @@
             </a:r>
           </a:p>
           <a:p>
-            <a:pPr marL="971438" lvl="1" indent="-514350">
+            <a:pPr marL="971550" lvl="1" indent="-514350">
               <a:buFont typeface="+mj-lt"/>
               <a:buAutoNum type="arabicPeriod"/>
             </a:pPr>
@@ -15663,14 +12635,14 @@
             </a:r>
           </a:p>
           <a:p>
-            <a:pPr marL="971438" lvl="1" indent="-514350">
+            <a:pPr marL="971550" lvl="1" indent="-514350">
               <a:buFont typeface="+mj-lt"/>
               <a:buAutoNum type="arabicPeriod"/>
             </a:pPr>
             <a:endParaRPr lang="en-CA" dirty="0"/>
           </a:p>
           <a:p>
-            <a:pPr marL="971438" lvl="1" indent="-514350">
+            <a:pPr marL="971550" lvl="1" indent="-514350">
               <a:buFont typeface="+mj-lt"/>
               <a:buAutoNum type="arabicPeriod"/>
             </a:pPr>
@@ -15687,11 +12659,6 @@
         </p:txBody>
       </p:sp>
     </p:spTree>
-    <p:extLst>
-      <p:ext uri="{BB962C8B-B14F-4D97-AF65-F5344CB8AC3E}">
-        <p14:creationId xmlns:p14="http://schemas.microsoft.com/office/powerpoint/2010/main" val="3316432801"/>
-      </p:ext>
-    </p:extLst>
   </p:cSld>
   <p:clrMapOvr>
     <a:masterClrMapping/>
@@ -15881,13 +12848,7 @@
   <p:cSld>
     <p:spTree>
       <p:nvGrpSpPr>
-        <p:cNvPr id="1" name="">
-          <a:extLst>
-            <a:ext uri="{FF2B5EF4-FFF2-40B4-BE49-F238E27FC236}">
-              <a16:creationId xmlns:a16="http://schemas.microsoft.com/office/drawing/2014/main" id="{D3FF6749-35E8-3324-8C48-31BD7361EBC3}"/>
-            </a:ext>
-          </a:extLst>
-        </p:cNvPr>
+        <p:cNvPr id="1" name=""/>
         <p:cNvGrpSpPr/>
         <p:nvPr/>
       </p:nvGrpSpPr>
@@ -15901,13 +12862,7 @@
       </p:grpSpPr>
       <p:sp>
         <p:nvSpPr>
-          <p:cNvPr id="2" name="Title 1">
-            <a:extLst>
-              <a:ext uri="{FF2B5EF4-FFF2-40B4-BE49-F238E27FC236}">
-                <a16:creationId xmlns:a16="http://schemas.microsoft.com/office/drawing/2014/main" id="{A768FDBC-4734-1281-DEAC-FB87CA5F0177}"/>
-              </a:ext>
-            </a:extLst>
-          </p:cNvPr>
+          <p:cNvPr id="2" name="Title 1"/>
           <p:cNvSpPr>
             <a:spLocks noGrp="1"/>
           </p:cNvSpPr>
@@ -15929,13 +12884,7 @@
       </p:sp>
       <p:pic>
         <p:nvPicPr>
-          <p:cNvPr id="6" name="Picture 5" descr="Diagram&#10;&#10;Description automatically generated with medium confidence">
-            <a:extLst>
-              <a:ext uri="{FF2B5EF4-FFF2-40B4-BE49-F238E27FC236}">
-                <a16:creationId xmlns:a16="http://schemas.microsoft.com/office/drawing/2014/main" id="{0AD5A4F3-E6B7-B0C3-A92B-857039AD24EF}"/>
-              </a:ext>
-            </a:extLst>
-          </p:cNvPr>
+          <p:cNvPr id="6" name="Picture 5" descr="Diagram&#10;&#10;Description automatically generated with medium confidence"/>
           <p:cNvPicPr>
             <a:picLocks noChangeAspect="1"/>
           </p:cNvPicPr>
@@ -15958,11 +12907,6 @@
         </p:spPr>
       </p:pic>
     </p:spTree>
-    <p:extLst>
-      <p:ext uri="{BB962C8B-B14F-4D97-AF65-F5344CB8AC3E}">
-        <p14:creationId xmlns:p14="http://schemas.microsoft.com/office/powerpoint/2010/main" val="513973128"/>
-      </p:ext>
-    </p:extLst>
   </p:cSld>
   <p:clrMapOvr>
     <a:masterClrMapping/>
@@ -15975,13 +12919,7 @@
   <p:cSld>
     <p:spTree>
       <p:nvGrpSpPr>
-        <p:cNvPr id="1" name="">
-          <a:extLst>
-            <a:ext uri="{FF2B5EF4-FFF2-40B4-BE49-F238E27FC236}">
-              <a16:creationId xmlns:a16="http://schemas.microsoft.com/office/drawing/2014/main" id="{92CD7F5D-B15A-D329-226B-69019C56074E}"/>
-            </a:ext>
-          </a:extLst>
-        </p:cNvPr>
+        <p:cNvPr id="1" name=""/>
         <p:cNvGrpSpPr/>
         <p:nvPr/>
       </p:nvGrpSpPr>
@@ -15995,13 +12933,7 @@
       </p:grpSpPr>
       <p:sp>
         <p:nvSpPr>
-          <p:cNvPr id="2" name="Title 1">
-            <a:extLst>
-              <a:ext uri="{FF2B5EF4-FFF2-40B4-BE49-F238E27FC236}">
-                <a16:creationId xmlns:a16="http://schemas.microsoft.com/office/drawing/2014/main" id="{68774EE9-F5FC-CDCB-418C-978745FA0534}"/>
-              </a:ext>
-            </a:extLst>
-          </p:cNvPr>
+          <p:cNvPr id="2" name="Title 1"/>
           <p:cNvSpPr>
             <a:spLocks noGrp="1"/>
           </p:cNvSpPr>
@@ -16023,13 +12955,7 @@
       </p:sp>
       <p:sp>
         <p:nvSpPr>
-          <p:cNvPr id="3" name="Content Placeholder 2">
-            <a:extLst>
-              <a:ext uri="{FF2B5EF4-FFF2-40B4-BE49-F238E27FC236}">
-                <a16:creationId xmlns:a16="http://schemas.microsoft.com/office/drawing/2014/main" id="{42A3705A-7C76-1D91-98A4-FDF659EF67C1}"/>
-              </a:ext>
-            </a:extLst>
-          </p:cNvPr>
+          <p:cNvPr id="3" name="Content Placeholder 2"/>
           <p:cNvSpPr>
             <a:spLocks noGrp="1"/>
           </p:cNvSpPr>
@@ -16062,11 +12988,6 @@
         </p:txBody>
       </p:sp>
     </p:spTree>
-    <p:extLst>
-      <p:ext uri="{BB962C8B-B14F-4D97-AF65-F5344CB8AC3E}">
-        <p14:creationId xmlns:p14="http://schemas.microsoft.com/office/powerpoint/2010/main" val="4109084214"/>
-      </p:ext>
-    </p:extLst>
   </p:cSld>
   <p:clrMapOvr>
     <a:masterClrMapping/>
@@ -16093,13 +13014,7 @@
       </p:grpSpPr>
       <p:sp>
         <p:nvSpPr>
-          <p:cNvPr id="2" name="Title 1">
-            <a:extLst>
-              <a:ext uri="{FF2B5EF4-FFF2-40B4-BE49-F238E27FC236}">
-                <a16:creationId xmlns:a16="http://schemas.microsoft.com/office/drawing/2014/main" id="{3AED58DE-1FD8-8309-4531-AF6D29A01307}"/>
-              </a:ext>
-            </a:extLst>
-          </p:cNvPr>
+          <p:cNvPr id="2" name="Title 1"/>
           <p:cNvSpPr>
             <a:spLocks noGrp="1"/>
           </p:cNvSpPr>
@@ -16122,13 +13037,7 @@
       </p:sp>
       <p:sp>
         <p:nvSpPr>
-          <p:cNvPr id="3" name="Content Placeholder 2">
-            <a:extLst>
-              <a:ext uri="{FF2B5EF4-FFF2-40B4-BE49-F238E27FC236}">
-                <a16:creationId xmlns:a16="http://schemas.microsoft.com/office/drawing/2014/main" id="{27FC0DF9-5CCC-EE49-89A0-38BBA08349F7}"/>
-              </a:ext>
-            </a:extLst>
-          </p:cNvPr>
+          <p:cNvPr id="3" name="Content Placeholder 2"/>
           <p:cNvSpPr>
             <a:spLocks noGrp="1"/>
           </p:cNvSpPr>
@@ -16183,11 +13092,6 @@
         </p:txBody>
       </p:sp>
     </p:spTree>
-    <p:extLst>
-      <p:ext uri="{BB962C8B-B14F-4D97-AF65-F5344CB8AC3E}">
-        <p14:creationId xmlns:p14="http://schemas.microsoft.com/office/powerpoint/2010/main" val="3455158526"/>
-      </p:ext>
-    </p:extLst>
   </p:cSld>
   <p:clrMapOvr>
     <a:masterClrMapping/>
@@ -16200,13 +13104,7 @@
   <p:cSld>
     <p:spTree>
       <p:nvGrpSpPr>
-        <p:cNvPr id="1" name="">
-          <a:extLst>
-            <a:ext uri="{FF2B5EF4-FFF2-40B4-BE49-F238E27FC236}">
-              <a16:creationId xmlns:a16="http://schemas.microsoft.com/office/drawing/2014/main" id="{21A0C3A4-7338-7712-8D95-E6AD7C121739}"/>
-            </a:ext>
-          </a:extLst>
-        </p:cNvPr>
+        <p:cNvPr id="1" name=""/>
         <p:cNvGrpSpPr/>
         <p:nvPr/>
       </p:nvGrpSpPr>
@@ -16220,13 +13118,7 @@
       </p:grpSpPr>
       <p:pic>
         <p:nvPicPr>
-          <p:cNvPr id="2" name="Graphic 1" descr="Programmer female with solid fill">
-            <a:extLst>
-              <a:ext uri="{FF2B5EF4-FFF2-40B4-BE49-F238E27FC236}">
-                <a16:creationId xmlns:a16="http://schemas.microsoft.com/office/drawing/2014/main" id="{756070B3-9BB5-6FCC-5A1C-026EF222F00C}"/>
-              </a:ext>
-            </a:extLst>
-          </p:cNvPr>
+          <p:cNvPr id="2" name="Graphic 1" descr="Programmer female with solid fill"/>
           <p:cNvPicPr>
             <a:picLocks noChangeAspect="1"/>
           </p:cNvPicPr>
@@ -16255,11 +13147,6 @@
         </p:spPr>
       </p:pic>
     </p:spTree>
-    <p:extLst>
-      <p:ext uri="{BB962C8B-B14F-4D97-AF65-F5344CB8AC3E}">
-        <p14:creationId xmlns:p14="http://schemas.microsoft.com/office/powerpoint/2010/main" val="2459570573"/>
-      </p:ext>
-    </p:extLst>
   </p:cSld>
   <p:clrMapOvr>
     <a:masterClrMapping/>
@@ -16286,13 +13173,7 @@
       </p:grpSpPr>
       <p:sp>
         <p:nvSpPr>
-          <p:cNvPr id="2" name="Title 1">
-            <a:extLst>
-              <a:ext uri="{FF2B5EF4-FFF2-40B4-BE49-F238E27FC236}">
-                <a16:creationId xmlns:a16="http://schemas.microsoft.com/office/drawing/2014/main" id="{E961C9E1-74EF-A90A-DC4C-C0F9823CF87A}"/>
-              </a:ext>
-            </a:extLst>
-          </p:cNvPr>
+          <p:cNvPr id="2" name="Title 1"/>
           <p:cNvSpPr>
             <a:spLocks noGrp="1"/>
           </p:cNvSpPr>
@@ -16328,13 +13209,7 @@
       </p:sp>
       <p:sp>
         <p:nvSpPr>
-          <p:cNvPr id="5" name="TextBox 4">
-            <a:extLst>
-              <a:ext uri="{FF2B5EF4-FFF2-40B4-BE49-F238E27FC236}">
-                <a16:creationId xmlns:a16="http://schemas.microsoft.com/office/drawing/2014/main" id="{B5C65067-8301-83CF-6944-C733754CC10E}"/>
-              </a:ext>
-            </a:extLst>
-          </p:cNvPr>
+          <p:cNvPr id="5" name="TextBox 4"/>
           <p:cNvSpPr txBox="1"/>
           <p:nvPr/>
         </p:nvSpPr>
@@ -16430,11 +13305,6 @@
         </p:txBody>
       </p:sp>
     </p:spTree>
-    <p:extLst>
-      <p:ext uri="{BB962C8B-B14F-4D97-AF65-F5344CB8AC3E}">
-        <p14:creationId xmlns:p14="http://schemas.microsoft.com/office/powerpoint/2010/main" val="4293633584"/>
-      </p:ext>
-    </p:extLst>
   </p:cSld>
   <p:clrMapOvr>
     <a:masterClrMapping/>
@@ -16461,13 +13331,7 @@
       </p:grpSpPr>
       <p:pic>
         <p:nvPicPr>
-          <p:cNvPr id="2" name="Graphic 1" descr="Programmer female with solid fill">
-            <a:extLst>
-              <a:ext uri="{FF2B5EF4-FFF2-40B4-BE49-F238E27FC236}">
-                <a16:creationId xmlns:a16="http://schemas.microsoft.com/office/drawing/2014/main" id="{79210FCD-0A78-2B0B-8F4F-746848DA1890}"/>
-              </a:ext>
-            </a:extLst>
-          </p:cNvPr>
+          <p:cNvPr id="2" name="Graphic 1" descr="Programmer female with solid fill"/>
           <p:cNvPicPr>
             <a:picLocks noChangeAspect="1"/>
           </p:cNvPicPr>
@@ -16496,11 +13360,6 @@
         </p:spPr>
       </p:pic>
     </p:spTree>
-    <p:extLst>
-      <p:ext uri="{BB962C8B-B14F-4D97-AF65-F5344CB8AC3E}">
-        <p14:creationId xmlns:p14="http://schemas.microsoft.com/office/powerpoint/2010/main" val="2659381662"/>
-      </p:ext>
-    </p:extLst>
   </p:cSld>
   <p:clrMapOvr>
     <a:masterClrMapping/>
@@ -16513,13 +13372,7 @@
   <p:cSld>
     <p:spTree>
       <p:nvGrpSpPr>
-        <p:cNvPr id="1" name="">
-          <a:extLst>
-            <a:ext uri="{FF2B5EF4-FFF2-40B4-BE49-F238E27FC236}">
-              <a16:creationId xmlns:a16="http://schemas.microsoft.com/office/drawing/2014/main" id="{C39F2376-9E04-ED70-502E-4CB0F87AB963}"/>
-            </a:ext>
-          </a:extLst>
-        </p:cNvPr>
+        <p:cNvPr id="1" name=""/>
         <p:cNvGrpSpPr/>
         <p:nvPr/>
       </p:nvGrpSpPr>
@@ -16533,13 +13386,7 @@
       </p:grpSpPr>
       <p:sp>
         <p:nvSpPr>
-          <p:cNvPr id="17" name="TextBox 16">
-            <a:extLst>
-              <a:ext uri="{FF2B5EF4-FFF2-40B4-BE49-F238E27FC236}">
-                <a16:creationId xmlns:a16="http://schemas.microsoft.com/office/drawing/2014/main" id="{16AE1CEB-BA97-61DD-841E-10CAC5F24A90}"/>
-              </a:ext>
-            </a:extLst>
-          </p:cNvPr>
+          <p:cNvPr id="17" name="TextBox 16"/>
           <p:cNvSpPr txBox="1"/>
           <p:nvPr/>
         </p:nvSpPr>
@@ -16572,45 +13419,9 @@
           </a:p>
         </p:txBody>
       </p:sp>
-      <p:pic>
-        <p:nvPicPr>
-          <p:cNvPr id="4" name="Picture 3">
-            <a:extLst>
-              <a:ext uri="{FF2B5EF4-FFF2-40B4-BE49-F238E27FC236}">
-                <a16:creationId xmlns:a16="http://schemas.microsoft.com/office/drawing/2014/main" id="{7C19C895-4399-89B8-DCCC-8181165094DF}"/>
-              </a:ext>
-            </a:extLst>
-          </p:cNvPr>
-          <p:cNvPicPr>
-            <a:picLocks noChangeAspect="1"/>
-          </p:cNvPicPr>
-          <p:nvPr/>
-        </p:nvPicPr>
-        <p:blipFill>
-          <a:blip r:embed="rId3"/>
-          <a:stretch>
-            <a:fillRect/>
-          </a:stretch>
-        </p:blipFill>
-        <p:spPr>
-          <a:xfrm>
-            <a:off x="1007248" y="1945919"/>
-            <a:ext cx="6811326" cy="3277057"/>
-          </a:xfrm>
-          <a:prstGeom prst="rect">
-            <a:avLst/>
-          </a:prstGeom>
-        </p:spPr>
-      </p:pic>
       <p:sp>
         <p:nvSpPr>
-          <p:cNvPr id="6" name="Rectangle 5">
-            <a:extLst>
-              <a:ext uri="{FF2B5EF4-FFF2-40B4-BE49-F238E27FC236}">
-                <a16:creationId xmlns:a16="http://schemas.microsoft.com/office/drawing/2014/main" id="{573637BB-7408-0828-6BB1-1D8D6339B867}"/>
-              </a:ext>
-            </a:extLst>
-          </p:cNvPr>
+          <p:cNvPr id="6" name="Rectangle 5"/>
           <p:cNvSpPr/>
           <p:nvPr/>
         </p:nvSpPr>
@@ -16653,12 +13464,31 @@
           </a:p>
         </p:txBody>
       </p:sp>
+      <p:pic>
+        <p:nvPicPr>
+          <p:cNvPr id="3" name="Picture 2"/>
+          <p:cNvPicPr>
+            <a:picLocks noChangeAspect="1"/>
+          </p:cNvPicPr>
+          <p:nvPr/>
+        </p:nvPicPr>
+        <p:blipFill>
+          <a:blip r:embed="rId3"/>
+          <a:stretch>
+            <a:fillRect/>
+          </a:stretch>
+        </p:blipFill>
+        <p:spPr>
+          <a:xfrm>
+            <a:off x="1372791" y="2043367"/>
+            <a:ext cx="6261811" cy="3040696"/>
+          </a:xfrm>
+          <a:prstGeom prst="rect">
+            <a:avLst/>
+          </a:prstGeom>
+        </p:spPr>
+      </p:pic>
     </p:spTree>
-    <p:extLst>
-      <p:ext uri="{BB962C8B-B14F-4D97-AF65-F5344CB8AC3E}">
-        <p14:creationId xmlns:p14="http://schemas.microsoft.com/office/powerpoint/2010/main" val="3301951615"/>
-      </p:ext>
-    </p:extLst>
   </p:cSld>
   <p:clrMapOvr>
     <a:masterClrMapping/>
@@ -16685,13 +13515,7 @@
       </p:grpSpPr>
       <p:sp>
         <p:nvSpPr>
-          <p:cNvPr id="2" name="Title 1">
-            <a:extLst>
-              <a:ext uri="{FF2B5EF4-FFF2-40B4-BE49-F238E27FC236}">
-                <a16:creationId xmlns:a16="http://schemas.microsoft.com/office/drawing/2014/main" id="{E961C9E1-74EF-A90A-DC4C-C0F9823CF87A}"/>
-              </a:ext>
-            </a:extLst>
-          </p:cNvPr>
+          <p:cNvPr id="2" name="Title 1"/>
           <p:cNvSpPr>
             <a:spLocks noGrp="1"/>
           </p:cNvSpPr>
@@ -16744,13 +13568,7 @@
       </p:sp>
       <p:sp>
         <p:nvSpPr>
-          <p:cNvPr id="5" name="TextBox 4">
-            <a:extLst>
-              <a:ext uri="{FF2B5EF4-FFF2-40B4-BE49-F238E27FC236}">
-                <a16:creationId xmlns:a16="http://schemas.microsoft.com/office/drawing/2014/main" id="{B5C65067-8301-83CF-6944-C733754CC10E}"/>
-              </a:ext>
-            </a:extLst>
-          </p:cNvPr>
+          <p:cNvPr id="5" name="TextBox 4"/>
           <p:cNvSpPr txBox="1"/>
           <p:nvPr/>
         </p:nvSpPr>
@@ -16832,11 +13650,6 @@
         </p:txBody>
       </p:sp>
     </p:spTree>
-    <p:extLst>
-      <p:ext uri="{BB962C8B-B14F-4D97-AF65-F5344CB8AC3E}">
-        <p14:creationId xmlns:p14="http://schemas.microsoft.com/office/powerpoint/2010/main" val="1189678410"/>
-      </p:ext>
-    </p:extLst>
   </p:cSld>
   <p:clrMapOvr>
     <a:masterClrMapping/>
@@ -16863,13 +13676,7 @@
       </p:grpSpPr>
       <p:sp>
         <p:nvSpPr>
-          <p:cNvPr id="2" name="Title 1">
-            <a:extLst>
-              <a:ext uri="{FF2B5EF4-FFF2-40B4-BE49-F238E27FC236}">
-                <a16:creationId xmlns:a16="http://schemas.microsoft.com/office/drawing/2014/main" id="{E11A2FE4-61F1-3554-8F3B-1705FD9D4745}"/>
-              </a:ext>
-            </a:extLst>
-          </p:cNvPr>
+          <p:cNvPr id="2" name="Title 1"/>
           <p:cNvSpPr>
             <a:spLocks noGrp="1"/>
           </p:cNvSpPr>
@@ -16891,13 +13698,7 @@
       </p:sp>
       <p:pic>
         <p:nvPicPr>
-          <p:cNvPr id="11" name="Picture 10" descr="Diagram&#10;&#10;Description automatically generated">
-            <a:extLst>
-              <a:ext uri="{FF2B5EF4-FFF2-40B4-BE49-F238E27FC236}">
-                <a16:creationId xmlns:a16="http://schemas.microsoft.com/office/drawing/2014/main" id="{1C99CE6A-FBBF-26D0-BFD1-7E41279209F2}"/>
-              </a:ext>
-            </a:extLst>
-          </p:cNvPr>
+          <p:cNvPr id="11" name="Picture 10" descr="Diagram&#10;&#10;Description automatically generated"/>
           <p:cNvPicPr>
             <a:picLocks noChangeAspect="1"/>
           </p:cNvPicPr>
@@ -16920,11 +13721,6 @@
         </p:spPr>
       </p:pic>
     </p:spTree>
-    <p:extLst>
-      <p:ext uri="{BB962C8B-B14F-4D97-AF65-F5344CB8AC3E}">
-        <p14:creationId xmlns:p14="http://schemas.microsoft.com/office/powerpoint/2010/main" val="250423083"/>
-      </p:ext>
-    </p:extLst>
   </p:cSld>
   <p:clrMapOvr>
     <a:masterClrMapping/>
@@ -16951,13 +13747,7 @@
       </p:grpSpPr>
       <p:sp>
         <p:nvSpPr>
-          <p:cNvPr id="2" name="Title 1">
-            <a:extLst>
-              <a:ext uri="{FF2B5EF4-FFF2-40B4-BE49-F238E27FC236}">
-                <a16:creationId xmlns:a16="http://schemas.microsoft.com/office/drawing/2014/main" id="{AAF16BF1-9540-6F86-3C8C-5D87158B4291}"/>
-              </a:ext>
-            </a:extLst>
-          </p:cNvPr>
+          <p:cNvPr id="2" name="Title 1"/>
           <p:cNvSpPr>
             <a:spLocks noGrp="1"/>
           </p:cNvSpPr>
@@ -16979,13 +13769,7 @@
       </p:sp>
       <p:pic>
         <p:nvPicPr>
-          <p:cNvPr id="5" name="Picture 4" descr="A picture containing diagram&#10;&#10;Description automatically generated">
-            <a:extLst>
-              <a:ext uri="{FF2B5EF4-FFF2-40B4-BE49-F238E27FC236}">
-                <a16:creationId xmlns:a16="http://schemas.microsoft.com/office/drawing/2014/main" id="{59A23B08-BB67-1E47-2C87-F8A79EB944AF}"/>
-              </a:ext>
-            </a:extLst>
-          </p:cNvPr>
+          <p:cNvPr id="5" name="Picture 4" descr="A picture containing diagram&#10;&#10;Description automatically generated"/>
           <p:cNvPicPr>
             <a:picLocks noChangeAspect="1"/>
           </p:cNvPicPr>
@@ -17009,13 +13793,7 @@
       </p:pic>
       <p:sp>
         <p:nvSpPr>
-          <p:cNvPr id="7" name="TextBox 6">
-            <a:extLst>
-              <a:ext uri="{FF2B5EF4-FFF2-40B4-BE49-F238E27FC236}">
-                <a16:creationId xmlns:a16="http://schemas.microsoft.com/office/drawing/2014/main" id="{CEBB8CA8-601C-2BC6-38DD-5BDF913A9161}"/>
-              </a:ext>
-            </a:extLst>
-          </p:cNvPr>
+          <p:cNvPr id="7" name="TextBox 6"/>
           <p:cNvSpPr txBox="1"/>
           <p:nvPr/>
         </p:nvSpPr>
@@ -17106,11 +13884,6 @@
         </p:txBody>
       </p:sp>
     </p:spTree>
-    <p:extLst>
-      <p:ext uri="{BB962C8B-B14F-4D97-AF65-F5344CB8AC3E}">
-        <p14:creationId xmlns:p14="http://schemas.microsoft.com/office/powerpoint/2010/main" val="3470290159"/>
-      </p:ext>
-    </p:extLst>
   </p:cSld>
   <p:clrMapOvr>
     <a:masterClrMapping/>
@@ -17137,13 +13910,7 @@
       </p:grpSpPr>
       <p:sp>
         <p:nvSpPr>
-          <p:cNvPr id="2" name="Title 1">
-            <a:extLst>
-              <a:ext uri="{FF2B5EF4-FFF2-40B4-BE49-F238E27FC236}">
-                <a16:creationId xmlns:a16="http://schemas.microsoft.com/office/drawing/2014/main" id="{2A2DE474-1991-C233-FDCC-453473EEC5E9}"/>
-              </a:ext>
-            </a:extLst>
-          </p:cNvPr>
+          <p:cNvPr id="2" name="Title 1"/>
           <p:cNvSpPr>
             <a:spLocks noGrp="1"/>
           </p:cNvSpPr>
@@ -17165,13 +13932,7 @@
       </p:sp>
       <p:pic>
         <p:nvPicPr>
-          <p:cNvPr id="4" name="Picture 3">
-            <a:extLst>
-              <a:ext uri="{FF2B5EF4-FFF2-40B4-BE49-F238E27FC236}">
-                <a16:creationId xmlns:a16="http://schemas.microsoft.com/office/drawing/2014/main" id="{5DD999DF-7389-E19F-D735-27B03F947D95}"/>
-              </a:ext>
-            </a:extLst>
-          </p:cNvPr>
+          <p:cNvPr id="4" name="Picture 3"/>
           <p:cNvPicPr>
             <a:picLocks noChangeAspect="1"/>
           </p:cNvPicPr>
@@ -17180,7 +13941,9 @@
         <p:blipFill rotWithShape="1">
           <a:blip r:embed="rId2"/>
           <a:srcRect t="15385"/>
-          <a:stretch/>
+          <a:stretch>
+            <a:fillRect/>
+          </a:stretch>
         </p:blipFill>
         <p:spPr>
           <a:xfrm>
@@ -17194,13 +13957,7 @@
       </p:pic>
       <p:sp>
         <p:nvSpPr>
-          <p:cNvPr id="7" name="TextBox 6">
-            <a:extLst>
-              <a:ext uri="{FF2B5EF4-FFF2-40B4-BE49-F238E27FC236}">
-                <a16:creationId xmlns:a16="http://schemas.microsoft.com/office/drawing/2014/main" id="{6137B414-1590-8EBC-807A-B91807D305CC}"/>
-              </a:ext>
-            </a:extLst>
-          </p:cNvPr>
+          <p:cNvPr id="7" name="TextBox 6"/>
           <p:cNvSpPr txBox="1"/>
           <p:nvPr/>
         </p:nvSpPr>
@@ -17291,11 +14048,6 @@
         </p:txBody>
       </p:sp>
     </p:spTree>
-    <p:extLst>
-      <p:ext uri="{BB962C8B-B14F-4D97-AF65-F5344CB8AC3E}">
-        <p14:creationId xmlns:p14="http://schemas.microsoft.com/office/powerpoint/2010/main" val="241318341"/>
-      </p:ext>
-    </p:extLst>
   </p:cSld>
   <p:clrMapOvr>
     <a:masterClrMapping/>
@@ -17322,13 +14074,7 @@
       </p:grpSpPr>
       <p:sp>
         <p:nvSpPr>
-          <p:cNvPr id="2" name="Title 1">
-            <a:extLst>
-              <a:ext uri="{FF2B5EF4-FFF2-40B4-BE49-F238E27FC236}">
-                <a16:creationId xmlns:a16="http://schemas.microsoft.com/office/drawing/2014/main" id="{4FF08540-0B5D-8DB7-A5E2-3E6AAEB2C396}"/>
-              </a:ext>
-            </a:extLst>
-          </p:cNvPr>
+          <p:cNvPr id="2" name="Title 1"/>
           <p:cNvSpPr>
             <a:spLocks noGrp="1"/>
           </p:cNvSpPr>
@@ -17350,13 +14096,7 @@
       </p:sp>
       <p:pic>
         <p:nvPicPr>
-          <p:cNvPr id="5" name="Picture 4" descr="Diagram, schematic&#10;&#10;Description automatically generated">
-            <a:extLst>
-              <a:ext uri="{FF2B5EF4-FFF2-40B4-BE49-F238E27FC236}">
-                <a16:creationId xmlns:a16="http://schemas.microsoft.com/office/drawing/2014/main" id="{DCF75B7C-56EC-35C2-870C-75839875D3A9}"/>
-              </a:ext>
-            </a:extLst>
-          </p:cNvPr>
+          <p:cNvPr id="5" name="Picture 4" descr="Diagram, schematic&#10;&#10;Description automatically generated"/>
           <p:cNvPicPr>
             <a:picLocks noChangeAspect="1"/>
           </p:cNvPicPr>
@@ -17380,13 +14120,7 @@
       </p:pic>
       <p:sp>
         <p:nvSpPr>
-          <p:cNvPr id="6" name="TextBox 5">
-            <a:extLst>
-              <a:ext uri="{FF2B5EF4-FFF2-40B4-BE49-F238E27FC236}">
-                <a16:creationId xmlns:a16="http://schemas.microsoft.com/office/drawing/2014/main" id="{5461B265-C13B-8E90-5A02-7E610D001C07}"/>
-              </a:ext>
-            </a:extLst>
-          </p:cNvPr>
+          <p:cNvPr id="6" name="TextBox 5"/>
           <p:cNvSpPr txBox="1"/>
           <p:nvPr/>
         </p:nvSpPr>
@@ -17477,11 +14211,6 @@
         </p:txBody>
       </p:sp>
     </p:spTree>
-    <p:extLst>
-      <p:ext uri="{BB962C8B-B14F-4D97-AF65-F5344CB8AC3E}">
-        <p14:creationId xmlns:p14="http://schemas.microsoft.com/office/powerpoint/2010/main" val="4269158014"/>
-      </p:ext>
-    </p:extLst>
   </p:cSld>
   <p:clrMapOvr>
     <a:masterClrMapping/>
@@ -17508,13 +14237,7 @@
       </p:grpSpPr>
       <p:pic>
         <p:nvPicPr>
-          <p:cNvPr id="4" name="Graphic 3" descr="Programmer female with solid fill">
-            <a:extLst>
-              <a:ext uri="{FF2B5EF4-FFF2-40B4-BE49-F238E27FC236}">
-                <a16:creationId xmlns:a16="http://schemas.microsoft.com/office/drawing/2014/main" id="{70DE0736-483F-677A-8E95-94D086D3C63F}"/>
-              </a:ext>
-            </a:extLst>
-          </p:cNvPr>
+          <p:cNvPr id="4" name="Graphic 3" descr="Programmer female with solid fill"/>
           <p:cNvPicPr>
             <a:picLocks noChangeAspect="1"/>
           </p:cNvPicPr>
@@ -17543,11 +14266,6 @@
         </p:spPr>
       </p:pic>
     </p:spTree>
-    <p:extLst>
-      <p:ext uri="{BB962C8B-B14F-4D97-AF65-F5344CB8AC3E}">
-        <p14:creationId xmlns:p14="http://schemas.microsoft.com/office/powerpoint/2010/main" val="97489599"/>
-      </p:ext>
-    </p:extLst>
   </p:cSld>
   <p:clrMapOvr>
     <a:masterClrMapping/>
@@ -17560,13 +14278,7 @@
   <p:cSld>
     <p:spTree>
       <p:nvGrpSpPr>
-        <p:cNvPr id="1" name="">
-          <a:extLst>
-            <a:ext uri="{FF2B5EF4-FFF2-40B4-BE49-F238E27FC236}">
-              <a16:creationId xmlns:a16="http://schemas.microsoft.com/office/drawing/2014/main" id="{93F4787B-9263-2AD7-FBDF-DAA35301AF49}"/>
-            </a:ext>
-          </a:extLst>
-        </p:cNvPr>
+        <p:cNvPr id="1" name=""/>
         <p:cNvGrpSpPr/>
         <p:nvPr/>
       </p:nvGrpSpPr>
@@ -17580,13 +14292,7 @@
       </p:grpSpPr>
       <p:sp>
         <p:nvSpPr>
-          <p:cNvPr id="2" name="Title 1">
-            <a:extLst>
-              <a:ext uri="{FF2B5EF4-FFF2-40B4-BE49-F238E27FC236}">
-                <a16:creationId xmlns:a16="http://schemas.microsoft.com/office/drawing/2014/main" id="{275215DD-9573-CB3F-4E8F-9ACFC56A3C4B}"/>
-              </a:ext>
-            </a:extLst>
-          </p:cNvPr>
+          <p:cNvPr id="2" name="Title 1"/>
           <p:cNvSpPr>
             <a:spLocks noGrp="1"/>
           </p:cNvSpPr>
@@ -17608,11 +14314,6 @@
         </p:txBody>
       </p:sp>
     </p:spTree>
-    <p:extLst>
-      <p:ext uri="{BB962C8B-B14F-4D97-AF65-F5344CB8AC3E}">
-        <p14:creationId xmlns:p14="http://schemas.microsoft.com/office/powerpoint/2010/main" val="1696923615"/>
-      </p:ext>
-    </p:extLst>
   </p:cSld>
   <p:clrMapOvr>
     <a:masterClrMapping/>
@@ -17639,13 +14340,7 @@
       </p:grpSpPr>
       <p:sp>
         <p:nvSpPr>
-          <p:cNvPr id="2" name="Title 1">
-            <a:extLst>
-              <a:ext uri="{FF2B5EF4-FFF2-40B4-BE49-F238E27FC236}">
-                <a16:creationId xmlns:a16="http://schemas.microsoft.com/office/drawing/2014/main" id="{E961C9E1-74EF-A90A-DC4C-C0F9823CF87A}"/>
-              </a:ext>
-            </a:extLst>
-          </p:cNvPr>
+          <p:cNvPr id="2" name="Title 1"/>
           <p:cNvSpPr>
             <a:spLocks noGrp="1"/>
           </p:cNvSpPr>
@@ -17693,13 +14388,7 @@
       </p:sp>
       <p:sp>
         <p:nvSpPr>
-          <p:cNvPr id="5" name="TextBox 4">
-            <a:extLst>
-              <a:ext uri="{FF2B5EF4-FFF2-40B4-BE49-F238E27FC236}">
-                <a16:creationId xmlns:a16="http://schemas.microsoft.com/office/drawing/2014/main" id="{B5C65067-8301-83CF-6944-C733754CC10E}"/>
-              </a:ext>
-            </a:extLst>
-          </p:cNvPr>
+          <p:cNvPr id="5" name="TextBox 4"/>
           <p:cNvSpPr txBox="1"/>
           <p:nvPr/>
         </p:nvSpPr>
@@ -17793,11 +14482,6 @@
         </p:txBody>
       </p:sp>
     </p:spTree>
-    <p:extLst>
-      <p:ext uri="{BB962C8B-B14F-4D97-AF65-F5344CB8AC3E}">
-        <p14:creationId xmlns:p14="http://schemas.microsoft.com/office/powerpoint/2010/main" val="2444987695"/>
-      </p:ext>
-    </p:extLst>
   </p:cSld>
   <p:clrMapOvr>
     <a:masterClrMapping/>
@@ -17824,13 +14508,7 @@
       </p:grpSpPr>
       <p:sp>
         <p:nvSpPr>
-          <p:cNvPr id="2" name="Title 1">
-            <a:extLst>
-              <a:ext uri="{FF2B5EF4-FFF2-40B4-BE49-F238E27FC236}">
-                <a16:creationId xmlns:a16="http://schemas.microsoft.com/office/drawing/2014/main" id="{211D8088-01E9-EE27-2DAC-710310E22041}"/>
-              </a:ext>
-            </a:extLst>
-          </p:cNvPr>
+          <p:cNvPr id="2" name="Title 1"/>
           <p:cNvSpPr>
             <a:spLocks noGrp="1"/>
           </p:cNvSpPr>
@@ -17852,13 +14530,7 @@
       </p:sp>
       <p:pic>
         <p:nvPicPr>
-          <p:cNvPr id="5" name="Picture 4" descr="Diagram&#10;&#10;Description automatically generated">
-            <a:extLst>
-              <a:ext uri="{FF2B5EF4-FFF2-40B4-BE49-F238E27FC236}">
-                <a16:creationId xmlns:a16="http://schemas.microsoft.com/office/drawing/2014/main" id="{103BDE6D-9E0C-DB65-264D-EAB3B7C683B3}"/>
-              </a:ext>
-            </a:extLst>
-          </p:cNvPr>
+          <p:cNvPr id="5" name="Picture 4" descr="Diagram&#10;&#10;Description automatically generated"/>
           <p:cNvPicPr>
             <a:picLocks noChangeAspect="1"/>
           </p:cNvPicPr>
@@ -17867,7 +14539,9 @@
         <p:blipFill rotWithShape="1">
           <a:blip r:embed="rId2"/>
           <a:srcRect b="12022"/>
-          <a:stretch/>
+          <a:stretch>
+            <a:fillRect/>
+          </a:stretch>
         </p:blipFill>
         <p:spPr>
           <a:xfrm>
@@ -17880,11 +14554,6 @@
         </p:spPr>
       </p:pic>
     </p:spTree>
-    <p:extLst>
-      <p:ext uri="{BB962C8B-B14F-4D97-AF65-F5344CB8AC3E}">
-        <p14:creationId xmlns:p14="http://schemas.microsoft.com/office/powerpoint/2010/main" val="3813321520"/>
-      </p:ext>
-    </p:extLst>
   </p:cSld>
   <p:clrMapOvr>
     <a:masterClrMapping/>
@@ -17911,13 +14580,7 @@
       </p:grpSpPr>
       <p:pic>
         <p:nvPicPr>
-          <p:cNvPr id="2" name="Graphic 1" descr="Programmer female with solid fill">
-            <a:extLst>
-              <a:ext uri="{FF2B5EF4-FFF2-40B4-BE49-F238E27FC236}">
-                <a16:creationId xmlns:a16="http://schemas.microsoft.com/office/drawing/2014/main" id="{2E2F79D3-19E5-8341-6850-851EAB62359B}"/>
-              </a:ext>
-            </a:extLst>
-          </p:cNvPr>
+          <p:cNvPr id="2" name="Graphic 1" descr="Programmer female with solid fill"/>
           <p:cNvPicPr>
             <a:picLocks noChangeAspect="1"/>
           </p:cNvPicPr>
@@ -17946,11 +14609,6 @@
         </p:spPr>
       </p:pic>
     </p:spTree>
-    <p:extLst>
-      <p:ext uri="{BB962C8B-B14F-4D97-AF65-F5344CB8AC3E}">
-        <p14:creationId xmlns:p14="http://schemas.microsoft.com/office/powerpoint/2010/main" val="3380746435"/>
-      </p:ext>
-    </p:extLst>
   </p:cSld>
   <p:clrMapOvr>
     <a:masterClrMapping/>
@@ -17977,13 +14635,7 @@
       </p:grpSpPr>
       <p:grpSp>
         <p:nvGrpSpPr>
-          <p:cNvPr id="16" name="Group 15">
-            <a:extLst>
-              <a:ext uri="{FF2B5EF4-FFF2-40B4-BE49-F238E27FC236}">
-                <a16:creationId xmlns:a16="http://schemas.microsoft.com/office/drawing/2014/main" id="{7CC81CB7-1EDD-55C6-3B98-ACECA03BA4EC}"/>
-              </a:ext>
-            </a:extLst>
-          </p:cNvPr>
+          <p:cNvPr id="16" name="Group 15"/>
           <p:cNvGrpSpPr/>
           <p:nvPr/>
         </p:nvGrpSpPr>
@@ -17997,13 +14649,7 @@
         </p:grpSpPr>
         <p:sp>
           <p:nvSpPr>
-            <p:cNvPr id="9" name="TextBox 8">
-              <a:extLst>
-                <a:ext uri="{FF2B5EF4-FFF2-40B4-BE49-F238E27FC236}">
-                  <a16:creationId xmlns:a16="http://schemas.microsoft.com/office/drawing/2014/main" id="{85E2DE13-CEEE-E647-8E4F-470D5A534248}"/>
-                </a:ext>
-              </a:extLst>
-            </p:cNvPr>
+            <p:cNvPr id="9" name="TextBox 8"/>
             <p:cNvSpPr txBox="1"/>
             <p:nvPr/>
           </p:nvSpPr>
@@ -18126,13 +14772,7 @@
         </p:sp>
         <p:sp>
           <p:nvSpPr>
-            <p:cNvPr id="5" name="Round Diagonal Corner Rectangle 4">
-              <a:extLst>
-                <a:ext uri="{FF2B5EF4-FFF2-40B4-BE49-F238E27FC236}">
-                  <a16:creationId xmlns:a16="http://schemas.microsoft.com/office/drawing/2014/main" id="{0DFF1146-E7D6-7DCA-58AC-7186A15FA11E}"/>
-                </a:ext>
-              </a:extLst>
-            </p:cNvPr>
+            <p:cNvPr id="5" name="Round Diagonal Corner Rectangle 4"/>
             <p:cNvSpPr/>
             <p:nvPr/>
           </p:nvSpPr>
@@ -18183,13 +14823,7 @@
         </p:sp>
         <p:sp>
           <p:nvSpPr>
-            <p:cNvPr id="15" name="TextBox 14">
-              <a:extLst>
-                <a:ext uri="{FF2B5EF4-FFF2-40B4-BE49-F238E27FC236}">
-                  <a16:creationId xmlns:a16="http://schemas.microsoft.com/office/drawing/2014/main" id="{08417DDA-6993-EE19-7F44-E793D90E2EED}"/>
-                </a:ext>
-              </a:extLst>
-            </p:cNvPr>
+            <p:cNvPr id="15" name="TextBox 14"/>
             <p:cNvSpPr txBox="1"/>
             <p:nvPr/>
           </p:nvSpPr>
@@ -18225,13 +14859,7 @@
       </p:grpSp>
       <p:grpSp>
         <p:nvGrpSpPr>
-          <p:cNvPr id="17" name="Group 16">
-            <a:extLst>
-              <a:ext uri="{FF2B5EF4-FFF2-40B4-BE49-F238E27FC236}">
-                <a16:creationId xmlns:a16="http://schemas.microsoft.com/office/drawing/2014/main" id="{3EA19582-54E0-F957-436E-76D62CA944C4}"/>
-              </a:ext>
-            </a:extLst>
-          </p:cNvPr>
+          <p:cNvPr id="17" name="Group 16"/>
           <p:cNvGrpSpPr/>
           <p:nvPr/>
         </p:nvGrpSpPr>
@@ -18245,13 +14873,7 @@
         </p:grpSpPr>
         <p:sp>
           <p:nvSpPr>
-            <p:cNvPr id="18" name="TextBox 17">
-              <a:extLst>
-                <a:ext uri="{FF2B5EF4-FFF2-40B4-BE49-F238E27FC236}">
-                  <a16:creationId xmlns:a16="http://schemas.microsoft.com/office/drawing/2014/main" id="{D476EB50-B182-D634-91ED-030D52EFDBED}"/>
-                </a:ext>
-              </a:extLst>
-            </p:cNvPr>
+            <p:cNvPr id="18" name="TextBox 17"/>
             <p:cNvSpPr txBox="1"/>
             <p:nvPr/>
           </p:nvSpPr>
@@ -18374,13 +14996,7 @@
         </p:sp>
         <p:sp>
           <p:nvSpPr>
-            <p:cNvPr id="19" name="Round Diagonal Corner Rectangle 18">
-              <a:extLst>
-                <a:ext uri="{FF2B5EF4-FFF2-40B4-BE49-F238E27FC236}">
-                  <a16:creationId xmlns:a16="http://schemas.microsoft.com/office/drawing/2014/main" id="{2382BD19-FA4A-77C0-B190-354729277522}"/>
-                </a:ext>
-              </a:extLst>
-            </p:cNvPr>
+            <p:cNvPr id="19" name="Round Diagonal Corner Rectangle 18"/>
             <p:cNvSpPr/>
             <p:nvPr/>
           </p:nvSpPr>
@@ -18431,13 +15047,7 @@
         </p:sp>
         <p:sp>
           <p:nvSpPr>
-            <p:cNvPr id="20" name="TextBox 19">
-              <a:extLst>
-                <a:ext uri="{FF2B5EF4-FFF2-40B4-BE49-F238E27FC236}">
-                  <a16:creationId xmlns:a16="http://schemas.microsoft.com/office/drawing/2014/main" id="{8E4AED3A-4774-CE72-A328-27D5587F6958}"/>
-                </a:ext>
-              </a:extLst>
-            </p:cNvPr>
+            <p:cNvPr id="20" name="TextBox 19"/>
             <p:cNvSpPr txBox="1"/>
             <p:nvPr/>
           </p:nvSpPr>
@@ -18473,13 +15083,7 @@
       </p:grpSp>
       <p:grpSp>
         <p:nvGrpSpPr>
-          <p:cNvPr id="2" name="Group 1">
-            <a:extLst>
-              <a:ext uri="{FF2B5EF4-FFF2-40B4-BE49-F238E27FC236}">
-                <a16:creationId xmlns:a16="http://schemas.microsoft.com/office/drawing/2014/main" id="{34A2480D-8A2E-B875-B2D9-0DEB22E4D564}"/>
-              </a:ext>
-            </a:extLst>
-          </p:cNvPr>
+          <p:cNvPr id="2" name="Group 1"/>
           <p:cNvGrpSpPr/>
           <p:nvPr/>
         </p:nvGrpSpPr>
@@ -18493,13 +15097,7 @@
         </p:grpSpPr>
         <p:sp>
           <p:nvSpPr>
-            <p:cNvPr id="3" name="TextBox 2">
-              <a:extLst>
-                <a:ext uri="{FF2B5EF4-FFF2-40B4-BE49-F238E27FC236}">
-                  <a16:creationId xmlns:a16="http://schemas.microsoft.com/office/drawing/2014/main" id="{D4D6E6DE-99E5-96A3-5557-7119B952F719}"/>
-                </a:ext>
-              </a:extLst>
-            </p:cNvPr>
+            <p:cNvPr id="3" name="TextBox 2"/>
             <p:cNvSpPr txBox="1"/>
             <p:nvPr/>
           </p:nvSpPr>
@@ -18618,13 +15216,7 @@
         </p:sp>
         <p:sp>
           <p:nvSpPr>
-            <p:cNvPr id="6" name="Round Diagonal Corner Rectangle 5">
-              <a:extLst>
-                <a:ext uri="{FF2B5EF4-FFF2-40B4-BE49-F238E27FC236}">
-                  <a16:creationId xmlns:a16="http://schemas.microsoft.com/office/drawing/2014/main" id="{BD0AC374-C5C6-034A-49F2-BE9B27C9772A}"/>
-                </a:ext>
-              </a:extLst>
-            </p:cNvPr>
+            <p:cNvPr id="6" name="Round Diagonal Corner Rectangle 5"/>
             <p:cNvSpPr/>
             <p:nvPr/>
           </p:nvSpPr>
@@ -18675,13 +15267,7 @@
         </p:sp>
         <p:sp>
           <p:nvSpPr>
-            <p:cNvPr id="7" name="TextBox 6">
-              <a:extLst>
-                <a:ext uri="{FF2B5EF4-FFF2-40B4-BE49-F238E27FC236}">
-                  <a16:creationId xmlns:a16="http://schemas.microsoft.com/office/drawing/2014/main" id="{F4D8E19C-3A06-8DB7-C648-7AAE3F20DF29}"/>
-                </a:ext>
-              </a:extLst>
-            </p:cNvPr>
+            <p:cNvPr id="7" name="TextBox 6"/>
             <p:cNvSpPr txBox="1"/>
             <p:nvPr/>
           </p:nvSpPr>
@@ -18717,16 +15303,8 @@
       </p:grpSp>
       <p:sp>
         <p:nvSpPr>
-          <p:cNvPr id="12" name="Titre 3">
-            <a:extLst>
-              <a:ext uri="{FF2B5EF4-FFF2-40B4-BE49-F238E27FC236}">
-                <a16:creationId xmlns:a16="http://schemas.microsoft.com/office/drawing/2014/main" id="{503F5533-65A3-F6D5-477E-31357CB6661E}"/>
-              </a:ext>
-            </a:extLst>
-          </p:cNvPr>
-          <p:cNvSpPr txBox="1">
-            <a:spLocks/>
-          </p:cNvSpPr>
+          <p:cNvPr id="12" name="Titre 3"/>
+          <p:cNvSpPr txBox="1"/>
           <p:nvPr/>
         </p:nvSpPr>
         <p:spPr>
@@ -18743,7 +15321,7 @@
             <a:normAutofit/>
           </a:bodyPr>
           <a:lstStyle>
-            <a:lvl1pPr algn="l" defTabSz="914175" rtl="0" eaLnBrk="1" latinLnBrk="0" hangingPunct="1">
+            <a:lvl1pPr algn="l" defTabSz="914400" rtl="0" eaLnBrk="1" latinLnBrk="0" hangingPunct="1">
               <a:lnSpc>
                 <a:spcPct val="90000"/>
               </a:lnSpc>
@@ -18775,11 +15353,6 @@
         </p:txBody>
       </p:sp>
     </p:spTree>
-    <p:extLst>
-      <p:ext uri="{BB962C8B-B14F-4D97-AF65-F5344CB8AC3E}">
-        <p14:creationId xmlns:p14="http://schemas.microsoft.com/office/powerpoint/2010/main" val="2289177498"/>
-      </p:ext>
-    </p:extLst>
   </p:cSld>
   <p:clrMapOvr>
     <a:masterClrMapping/>
@@ -18806,13 +15379,7 @@
       </p:grpSpPr>
       <p:sp>
         <p:nvSpPr>
-          <p:cNvPr id="2" name="Title 1">
-            <a:extLst>
-              <a:ext uri="{FF2B5EF4-FFF2-40B4-BE49-F238E27FC236}">
-                <a16:creationId xmlns:a16="http://schemas.microsoft.com/office/drawing/2014/main" id="{E961C9E1-74EF-A90A-DC4C-C0F9823CF87A}"/>
-              </a:ext>
-            </a:extLst>
-          </p:cNvPr>
+          <p:cNvPr id="2" name="Title 1"/>
           <p:cNvSpPr>
             <a:spLocks noGrp="1"/>
           </p:cNvSpPr>
@@ -18875,13 +15442,7 @@
       </p:sp>
       <p:sp>
         <p:nvSpPr>
-          <p:cNvPr id="5" name="TextBox 4">
-            <a:extLst>
-              <a:ext uri="{FF2B5EF4-FFF2-40B4-BE49-F238E27FC236}">
-                <a16:creationId xmlns:a16="http://schemas.microsoft.com/office/drawing/2014/main" id="{B5C65067-8301-83CF-6944-C733754CC10E}"/>
-              </a:ext>
-            </a:extLst>
-          </p:cNvPr>
+          <p:cNvPr id="5" name="TextBox 4"/>
           <p:cNvSpPr txBox="1"/>
           <p:nvPr/>
         </p:nvSpPr>
@@ -18939,11 +15500,6 @@
         </p:txBody>
       </p:sp>
     </p:spTree>
-    <p:extLst>
-      <p:ext uri="{BB962C8B-B14F-4D97-AF65-F5344CB8AC3E}">
-        <p14:creationId xmlns:p14="http://schemas.microsoft.com/office/powerpoint/2010/main" val="4003718646"/>
-      </p:ext>
-    </p:extLst>
   </p:cSld>
   <p:clrMapOvr>
     <a:masterClrMapping/>
@@ -18970,13 +15526,7 @@
       </p:grpSpPr>
       <p:sp>
         <p:nvSpPr>
-          <p:cNvPr id="2" name="Title 1">
-            <a:extLst>
-              <a:ext uri="{FF2B5EF4-FFF2-40B4-BE49-F238E27FC236}">
-                <a16:creationId xmlns:a16="http://schemas.microsoft.com/office/drawing/2014/main" id="{688AA46B-4732-0530-6F48-BF48D95D8BC4}"/>
-              </a:ext>
-            </a:extLst>
-          </p:cNvPr>
+          <p:cNvPr id="2" name="Title 1"/>
           <p:cNvSpPr>
             <a:spLocks noGrp="1"/>
           </p:cNvSpPr>
@@ -18998,13 +15548,7 @@
       </p:sp>
       <p:sp>
         <p:nvSpPr>
-          <p:cNvPr id="3" name="Content Placeholder 2">
-            <a:extLst>
-              <a:ext uri="{FF2B5EF4-FFF2-40B4-BE49-F238E27FC236}">
-                <a16:creationId xmlns:a16="http://schemas.microsoft.com/office/drawing/2014/main" id="{32713876-8DC3-8956-64D6-0531363E9959}"/>
-              </a:ext>
-            </a:extLst>
-          </p:cNvPr>
+          <p:cNvPr id="3" name="Content Placeholder 2"/>
           <p:cNvSpPr>
             <a:spLocks noGrp="1"/>
           </p:cNvSpPr>
@@ -19058,13 +15602,7 @@
       </p:sp>
       <p:sp>
         <p:nvSpPr>
-          <p:cNvPr id="4" name="TextBox 3">
-            <a:extLst>
-              <a:ext uri="{FF2B5EF4-FFF2-40B4-BE49-F238E27FC236}">
-                <a16:creationId xmlns:a16="http://schemas.microsoft.com/office/drawing/2014/main" id="{E479E549-E694-F66E-D719-C01F55AE1000}"/>
-              </a:ext>
-            </a:extLst>
-          </p:cNvPr>
+          <p:cNvPr id="4" name="TextBox 3"/>
           <p:cNvSpPr txBox="1"/>
           <p:nvPr/>
         </p:nvSpPr>
@@ -19135,11 +15673,6 @@
         </p:txBody>
       </p:sp>
     </p:spTree>
-    <p:extLst>
-      <p:ext uri="{BB962C8B-B14F-4D97-AF65-F5344CB8AC3E}">
-        <p14:creationId xmlns:p14="http://schemas.microsoft.com/office/powerpoint/2010/main" val="450508802"/>
-      </p:ext>
-    </p:extLst>
   </p:cSld>
   <p:clrMapOvr>
     <a:masterClrMapping/>
@@ -19166,13 +15699,7 @@
       </p:grpSpPr>
       <p:sp>
         <p:nvSpPr>
-          <p:cNvPr id="2" name="Title 1">
-            <a:extLst>
-              <a:ext uri="{FF2B5EF4-FFF2-40B4-BE49-F238E27FC236}">
-                <a16:creationId xmlns:a16="http://schemas.microsoft.com/office/drawing/2014/main" id="{024853B5-A1EE-C726-9AFD-9E1CC35A3FE1}"/>
-              </a:ext>
-            </a:extLst>
-          </p:cNvPr>
+          <p:cNvPr id="2" name="Title 1"/>
           <p:cNvSpPr>
             <a:spLocks noGrp="1"/>
           </p:cNvSpPr>
@@ -19194,13 +15721,7 @@
       </p:sp>
       <p:sp>
         <p:nvSpPr>
-          <p:cNvPr id="10" name="TextBox 9">
-            <a:extLst>
-              <a:ext uri="{FF2B5EF4-FFF2-40B4-BE49-F238E27FC236}">
-                <a16:creationId xmlns:a16="http://schemas.microsoft.com/office/drawing/2014/main" id="{E8462EC9-73E7-2C60-4361-1CB88CFC8054}"/>
-              </a:ext>
-            </a:extLst>
-          </p:cNvPr>
+          <p:cNvPr id="10" name="TextBox 9"/>
           <p:cNvSpPr txBox="1"/>
           <p:nvPr/>
         </p:nvSpPr>
@@ -19239,13 +15760,7 @@
             </a:r>
             <a:r>
               <a:rPr lang="en-US" sz="2400" dirty="0">
-                <a:hlinkClick r:id="rId2">
-                  <a:extLst>
-                    <a:ext uri="{A12FA001-AC4F-418D-AE19-62706E023703}">
-                      <ahyp:hlinkClr xmlns:ahyp="http://schemas.microsoft.com/office/drawing/2018/hyperlinkcolor" val="tx"/>
-                    </a:ext>
-                  </a:extLst>
-                </a:hlinkClick>
+                <a:hlinkClick r:id="rId2"/>
               </a:rPr>
               <a:t>medicaldata</a:t>
             </a:r>
@@ -19290,11 +15805,6 @@
         </p:txBody>
       </p:sp>
     </p:spTree>
-    <p:extLst>
-      <p:ext uri="{BB962C8B-B14F-4D97-AF65-F5344CB8AC3E}">
-        <p14:creationId xmlns:p14="http://schemas.microsoft.com/office/powerpoint/2010/main" val="1454694018"/>
-      </p:ext>
-    </p:extLst>
   </p:cSld>
   <p:clrMapOvr>
     <a:masterClrMapping/>
@@ -19321,13 +15831,7 @@
       </p:grpSpPr>
       <p:pic>
         <p:nvPicPr>
-          <p:cNvPr id="5" name="Content Placeholder 4" descr="Text&#10;&#10;Description automatically generated with medium confidence">
-            <a:extLst>
-              <a:ext uri="{FF2B5EF4-FFF2-40B4-BE49-F238E27FC236}">
-                <a16:creationId xmlns:a16="http://schemas.microsoft.com/office/drawing/2014/main" id="{B242CA6A-A73A-4F60-6FFB-8304C2049E35}"/>
-              </a:ext>
-            </a:extLst>
-          </p:cNvPr>
+          <p:cNvPr id="5" name="Content Placeholder 4" descr="Text&#10;&#10;Description automatically generated with medium confidence"/>
           <p:cNvPicPr>
             <a:picLocks noGrp="1" noChangeAspect="1"/>
           </p:cNvPicPr>
@@ -19350,13 +15854,7 @@
       </p:pic>
       <p:pic>
         <p:nvPicPr>
-          <p:cNvPr id="7" name="Picture 6" descr="Text, letter&#10;&#10;Description automatically generated">
-            <a:extLst>
-              <a:ext uri="{FF2B5EF4-FFF2-40B4-BE49-F238E27FC236}">
-                <a16:creationId xmlns:a16="http://schemas.microsoft.com/office/drawing/2014/main" id="{8B2003EE-5C09-7521-6561-9FCB8E7EAED4}"/>
-              </a:ext>
-            </a:extLst>
-          </p:cNvPr>
+          <p:cNvPr id="7" name="Picture 6" descr="Text, letter&#10;&#10;Description automatically generated"/>
           <p:cNvPicPr>
             <a:picLocks noChangeAspect="1"/>
           </p:cNvPicPr>
@@ -19365,7 +15863,9 @@
         <p:blipFill rotWithShape="1">
           <a:blip r:embed="rId4"/>
           <a:srcRect b="55151"/>
-          <a:stretch/>
+          <a:stretch>
+            <a:fillRect/>
+          </a:stretch>
         </p:blipFill>
         <p:spPr>
           <a:xfrm>
@@ -19378,11 +15878,6 @@
         </p:spPr>
       </p:pic>
     </p:spTree>
-    <p:extLst>
-      <p:ext uri="{BB962C8B-B14F-4D97-AF65-F5344CB8AC3E}">
-        <p14:creationId xmlns:p14="http://schemas.microsoft.com/office/powerpoint/2010/main" val="1256192499"/>
-      </p:ext>
-    </p:extLst>
   </p:cSld>
   <p:clrMapOvr>
     <a:masterClrMapping/>
@@ -19409,13 +15904,7 @@
       </p:grpSpPr>
       <p:pic>
         <p:nvPicPr>
-          <p:cNvPr id="4" name="Picture 3" descr="Text, letter&#10;&#10;Description automatically generated">
-            <a:extLst>
-              <a:ext uri="{FF2B5EF4-FFF2-40B4-BE49-F238E27FC236}">
-                <a16:creationId xmlns:a16="http://schemas.microsoft.com/office/drawing/2014/main" id="{8A5DCAA4-3598-AE10-1994-B92915AE2F59}"/>
-              </a:ext>
-            </a:extLst>
-          </p:cNvPr>
+          <p:cNvPr id="4" name="Picture 3" descr="Text, letter&#10;&#10;Description automatically generated"/>
           <p:cNvPicPr>
             <a:picLocks noChangeAspect="1"/>
           </p:cNvPicPr>
@@ -19424,7 +15913,9 @@
         <p:blipFill rotWithShape="1">
           <a:blip r:embed="rId2"/>
           <a:srcRect t="44558"/>
-          <a:stretch/>
+          <a:stretch>
+            <a:fillRect/>
+          </a:stretch>
         </p:blipFill>
         <p:spPr>
           <a:xfrm>
@@ -19437,11 +15928,6 @@
         </p:spPr>
       </p:pic>
     </p:spTree>
-    <p:extLst>
-      <p:ext uri="{BB962C8B-B14F-4D97-AF65-F5344CB8AC3E}">
-        <p14:creationId xmlns:p14="http://schemas.microsoft.com/office/powerpoint/2010/main" val="3594387439"/>
-      </p:ext>
-    </p:extLst>
   </p:cSld>
   <p:clrMapOvr>
     <a:masterClrMapping/>
@@ -19468,13 +15954,7 @@
       </p:grpSpPr>
       <p:sp>
         <p:nvSpPr>
-          <p:cNvPr id="2" name="Title 1">
-            <a:extLst>
-              <a:ext uri="{FF2B5EF4-FFF2-40B4-BE49-F238E27FC236}">
-                <a16:creationId xmlns:a16="http://schemas.microsoft.com/office/drawing/2014/main" id="{E961C9E1-74EF-A90A-DC4C-C0F9823CF87A}"/>
-              </a:ext>
-            </a:extLst>
-          </p:cNvPr>
+          <p:cNvPr id="2" name="Title 1"/>
           <p:cNvSpPr>
             <a:spLocks noGrp="1"/>
           </p:cNvSpPr>
@@ -19510,13 +15990,7 @@
       </p:sp>
       <p:sp>
         <p:nvSpPr>
-          <p:cNvPr id="5" name="TextBox 4">
-            <a:extLst>
-              <a:ext uri="{FF2B5EF4-FFF2-40B4-BE49-F238E27FC236}">
-                <a16:creationId xmlns:a16="http://schemas.microsoft.com/office/drawing/2014/main" id="{B5C65067-8301-83CF-6944-C733754CC10E}"/>
-              </a:ext>
-            </a:extLst>
-          </p:cNvPr>
+          <p:cNvPr id="5" name="TextBox 4"/>
           <p:cNvSpPr txBox="1"/>
           <p:nvPr/>
         </p:nvSpPr>
@@ -19584,11 +16058,6 @@
         </p:txBody>
       </p:sp>
     </p:spTree>
-    <p:extLst>
-      <p:ext uri="{BB962C8B-B14F-4D97-AF65-F5344CB8AC3E}">
-        <p14:creationId xmlns:p14="http://schemas.microsoft.com/office/powerpoint/2010/main" val="1346597622"/>
-      </p:ext>
-    </p:extLst>
   </p:cSld>
   <p:clrMapOvr>
     <a:masterClrMapping/>
@@ -19615,13 +16084,7 @@
       </p:grpSpPr>
       <p:sp>
         <p:nvSpPr>
-          <p:cNvPr id="2" name="Text Placeholder 1">
-            <a:extLst>
-              <a:ext uri="{FF2B5EF4-FFF2-40B4-BE49-F238E27FC236}">
-                <a16:creationId xmlns:a16="http://schemas.microsoft.com/office/drawing/2014/main" id="{8E7288D2-89CC-E287-6A33-A47D2F5614D8}"/>
-              </a:ext>
-            </a:extLst>
-          </p:cNvPr>
+          <p:cNvPr id="2" name="Text Placeholder 1"/>
           <p:cNvSpPr>
             <a:spLocks noGrp="1"/>
           </p:cNvSpPr>
@@ -19678,11 +16141,6 @@
         </p:txBody>
       </p:sp>
     </p:spTree>
-    <p:extLst>
-      <p:ext uri="{BB962C8B-B14F-4D97-AF65-F5344CB8AC3E}">
-        <p14:creationId xmlns:p14="http://schemas.microsoft.com/office/powerpoint/2010/main" val="3549088750"/>
-      </p:ext>
-    </p:extLst>
   </p:cSld>
   <p:clrMapOvr>
     <a:masterClrMapping/>
@@ -19691,7 +16149,7 @@
 </file>
 
 <file path=ppt/slides/slide57.xml><?xml version="1.0" encoding="utf-8"?>
-<p:sld xmlns:a="http://schemas.openxmlformats.org/drawingml/2006/main" xmlns:r="http://schemas.openxmlformats.org/officeDocument/2006/relationships" xmlns:p="http://schemas.openxmlformats.org/presentationml/2006/main">
+<p:sld xmlns:a="http://schemas.openxmlformats.org/drawingml/2006/main" xmlns:r="http://schemas.openxmlformats.org/officeDocument/2006/relationships" xmlns:p="http://schemas.openxmlformats.org/presentationml/2006/main" show="0">
   <p:cSld>
     <p:spTree>
       <p:nvGrpSpPr>
@@ -19709,13 +16167,7 @@
       </p:grpSpPr>
       <p:sp>
         <p:nvSpPr>
-          <p:cNvPr id="2" name="Text Placeholder 1">
-            <a:extLst>
-              <a:ext uri="{FF2B5EF4-FFF2-40B4-BE49-F238E27FC236}">
-                <a16:creationId xmlns:a16="http://schemas.microsoft.com/office/drawing/2014/main" id="{9153FADE-07F0-2C14-7F30-A360808CDA65}"/>
-              </a:ext>
-            </a:extLst>
-          </p:cNvPr>
+          <p:cNvPr id="2" name="Text Placeholder 1"/>
           <p:cNvSpPr>
             <a:spLocks noGrp="1"/>
           </p:cNvSpPr>
@@ -19737,6 +16189,17 @@
             </a:r>
           </a:p>
           <a:p>
+            <a:r>
+              <a:rPr lang="en-CA" dirty="0"/>
+              <a:t>2025 </a:t>
+            </a:r>
+            <a:r>
+              <a:rPr lang="en-US" altLang="zh-CN" dirty="0"/>
+              <a:t>Summer Series</a:t>
+            </a:r>
+            <a:endParaRPr lang="en-CA" dirty="0"/>
+          </a:p>
+          <a:p>
             <a:pPr marL="0" indent="0">
               <a:buNone/>
             </a:pPr>
@@ -19759,18 +16222,14 @@
           </a:p>
           <a:p>
             <a:r>
-              <a:rPr lang="en-CA"/>
+              <a:rPr lang="en-CA" dirty="0"/>
               <a:t>Regression</a:t>
             </a:r>
           </a:p>
           <a:p>
             <a:r>
-              <a:rPr lang="en-CA"/>
-              <a:t>Statistical </a:t>
-            </a:r>
-            <a:r>
               <a:rPr lang="en-CA" dirty="0"/>
-              <a:t>Analysis</a:t>
+              <a:t>Statistical Analysis</a:t>
             </a:r>
           </a:p>
           <a:p>
@@ -19778,46 +16237,12 @@
           </a:p>
         </p:txBody>
       </p:sp>
-      <p:pic>
-        <p:nvPicPr>
-          <p:cNvPr id="4" name="Picture 3">
-            <a:extLst>
-              <a:ext uri="{FF2B5EF4-FFF2-40B4-BE49-F238E27FC236}">
-                <a16:creationId xmlns:a16="http://schemas.microsoft.com/office/drawing/2014/main" id="{FFD733B6-352A-B23F-E203-324034C168DC}"/>
-              </a:ext>
-            </a:extLst>
-          </p:cNvPr>
-          <p:cNvPicPr>
-            <a:picLocks noChangeAspect="1"/>
-          </p:cNvPicPr>
-          <p:nvPr/>
-        </p:nvPicPr>
-        <p:blipFill>
-          <a:blip r:embed="rId2"/>
-          <a:stretch>
-            <a:fillRect/>
-          </a:stretch>
-        </p:blipFill>
-        <p:spPr>
-          <a:xfrm>
-            <a:off x="242628" y="4847655"/>
-            <a:ext cx="8658743" cy="368188"/>
-          </a:xfrm>
-          <a:prstGeom prst="rect">
-            <a:avLst/>
-          </a:prstGeom>
-        </p:spPr>
-      </p:pic>
     </p:spTree>
-    <p:extLst>
-      <p:ext uri="{BB962C8B-B14F-4D97-AF65-F5344CB8AC3E}">
-        <p14:creationId xmlns:p14="http://schemas.microsoft.com/office/powerpoint/2010/main" val="3241240956"/>
-      </p:ext>
-    </p:extLst>
   </p:cSld>
   <p:clrMapOvr>
     <a:masterClrMapping/>
   </p:clrMapOvr>
+  <p:transition/>
 </p:sld>
 </file>
 
@@ -19840,13 +16265,7 @@
       </p:grpSpPr>
       <p:sp>
         <p:nvSpPr>
-          <p:cNvPr id="2" name="Title 1">
-            <a:extLst>
-              <a:ext uri="{FF2B5EF4-FFF2-40B4-BE49-F238E27FC236}">
-                <a16:creationId xmlns:a16="http://schemas.microsoft.com/office/drawing/2014/main" id="{E03CDE7B-F6E0-3F35-CA16-9CBD538BDDC8}"/>
-              </a:ext>
-            </a:extLst>
-          </p:cNvPr>
+          <p:cNvPr id="2" name="Title 1"/>
           <p:cNvSpPr>
             <a:spLocks noGrp="1"/>
           </p:cNvSpPr>
@@ -19871,13 +16290,7 @@
       </p:sp>
       <p:sp>
         <p:nvSpPr>
-          <p:cNvPr id="4" name="TextBox 3">
-            <a:extLst>
-              <a:ext uri="{FF2B5EF4-FFF2-40B4-BE49-F238E27FC236}">
-                <a16:creationId xmlns:a16="http://schemas.microsoft.com/office/drawing/2014/main" id="{C55CD7EF-C880-CBCD-398D-7E3BB5D5062C}"/>
-              </a:ext>
-            </a:extLst>
-          </p:cNvPr>
+          <p:cNvPr id="4" name="TextBox 3"/>
           <p:cNvSpPr txBox="1"/>
           <p:nvPr/>
         </p:nvSpPr>
@@ -19909,13 +16322,7 @@
       </p:sp>
       <p:sp>
         <p:nvSpPr>
-          <p:cNvPr id="6" name="TextBox 5">
-            <a:extLst>
-              <a:ext uri="{FF2B5EF4-FFF2-40B4-BE49-F238E27FC236}">
-                <a16:creationId xmlns:a16="http://schemas.microsoft.com/office/drawing/2014/main" id="{B779A3F8-F204-0C4B-8C60-EB9078FAF391}"/>
-              </a:ext>
-            </a:extLst>
-          </p:cNvPr>
+          <p:cNvPr id="6" name="TextBox 5"/>
           <p:cNvSpPr txBox="1"/>
           <p:nvPr/>
         </p:nvSpPr>
@@ -19947,13 +16354,7 @@
       </p:sp>
       <p:sp>
         <p:nvSpPr>
-          <p:cNvPr id="7" name="TextBox 6">
-            <a:extLst>
-              <a:ext uri="{FF2B5EF4-FFF2-40B4-BE49-F238E27FC236}">
-                <a16:creationId xmlns:a16="http://schemas.microsoft.com/office/drawing/2014/main" id="{5B857086-E9A2-1558-824A-80776B62AF2C}"/>
-              </a:ext>
-            </a:extLst>
-          </p:cNvPr>
+          <p:cNvPr id="7" name="TextBox 6"/>
           <p:cNvSpPr txBox="1"/>
           <p:nvPr/>
         </p:nvSpPr>
@@ -19994,13 +16395,7 @@
       </p:sp>
       <p:sp>
         <p:nvSpPr>
-          <p:cNvPr id="10" name="Oval 9">
-            <a:extLst>
-              <a:ext uri="{FF2B5EF4-FFF2-40B4-BE49-F238E27FC236}">
-                <a16:creationId xmlns:a16="http://schemas.microsoft.com/office/drawing/2014/main" id="{41CD90ED-F12C-DA32-1A84-EF0356FB7921}"/>
-              </a:ext>
-            </a:extLst>
-          </p:cNvPr>
+          <p:cNvPr id="10" name="Oval 9"/>
           <p:cNvSpPr>
             <a:spLocks noChangeAspect="1"/>
           </p:cNvSpPr>
@@ -20055,13 +16450,7 @@
       </p:sp>
       <p:sp>
         <p:nvSpPr>
-          <p:cNvPr id="11" name="Oval 10">
-            <a:extLst>
-              <a:ext uri="{FF2B5EF4-FFF2-40B4-BE49-F238E27FC236}">
-                <a16:creationId xmlns:a16="http://schemas.microsoft.com/office/drawing/2014/main" id="{1B79FEFC-04D4-EE23-8047-B09F61F389B0}"/>
-              </a:ext>
-            </a:extLst>
-          </p:cNvPr>
+          <p:cNvPr id="11" name="Oval 10"/>
           <p:cNvSpPr>
             <a:spLocks noChangeAspect="1"/>
           </p:cNvSpPr>
@@ -20116,13 +16505,7 @@
       </p:sp>
       <p:sp>
         <p:nvSpPr>
-          <p:cNvPr id="12" name="Oval 11">
-            <a:extLst>
-              <a:ext uri="{FF2B5EF4-FFF2-40B4-BE49-F238E27FC236}">
-                <a16:creationId xmlns:a16="http://schemas.microsoft.com/office/drawing/2014/main" id="{B755A2CE-36C7-7C3A-E3EF-94EBD356F86C}"/>
-              </a:ext>
-            </a:extLst>
-          </p:cNvPr>
+          <p:cNvPr id="12" name="Oval 11"/>
           <p:cNvSpPr>
             <a:spLocks noChangeAspect="1"/>
           </p:cNvSpPr>
@@ -20175,13 +16558,7 @@
       </p:sp>
       <p:pic>
         <p:nvPicPr>
-          <p:cNvPr id="14" name="Graphic 13" descr="Clipboard with solid fill">
-            <a:extLst>
-              <a:ext uri="{FF2B5EF4-FFF2-40B4-BE49-F238E27FC236}">
-                <a16:creationId xmlns:a16="http://schemas.microsoft.com/office/drawing/2014/main" id="{060FE140-39DA-6155-D659-8C3C8FEDECAE}"/>
-              </a:ext>
-            </a:extLst>
-          </p:cNvPr>
+          <p:cNvPr id="14" name="Graphic 13" descr="Clipboard with solid fill"/>
           <p:cNvPicPr>
             <a:picLocks noChangeAspect="1"/>
           </p:cNvPicPr>
@@ -20211,13 +16588,7 @@
       </p:pic>
       <p:pic>
         <p:nvPicPr>
-          <p:cNvPr id="1026" name="Picture 2" descr="Co-curricular record approval logo">
-            <a:extLst>
-              <a:ext uri="{FF2B5EF4-FFF2-40B4-BE49-F238E27FC236}">
-                <a16:creationId xmlns:a16="http://schemas.microsoft.com/office/drawing/2014/main" id="{B21C3CDD-B849-1F66-A5B6-38B78BCAB0B1}"/>
-              </a:ext>
-            </a:extLst>
-          </p:cNvPr>
+          <p:cNvPr id="1026" name="Picture 2" descr="Co-curricular record approval logo"/>
           <p:cNvPicPr>
             <a:picLocks noChangeAspect="1" noChangeArrowheads="1"/>
           </p:cNvPicPr>
@@ -20258,57 +16629,29 @@
       </p:pic>
       <p:pic>
         <p:nvPicPr>
-          <p:cNvPr id="5" name="Picture 2">
-            <a:extLst>
-              <a:ext uri="{FF2B5EF4-FFF2-40B4-BE49-F238E27FC236}">
-                <a16:creationId xmlns:a16="http://schemas.microsoft.com/office/drawing/2014/main" id="{E8D5DA77-8A91-8C31-6E6C-C97671E7D73F}"/>
-              </a:ext>
-            </a:extLst>
-          </p:cNvPr>
+          <p:cNvPr id="8" name="Picture 7" descr="A qr code with black squares&#10;&#10;AI-generated content may be incorrect."/>
           <p:cNvPicPr>
-            <a:picLocks noChangeAspect="1" noChangeArrowheads="1"/>
+            <a:picLocks noChangeAspect="1"/>
           </p:cNvPicPr>
           <p:nvPr/>
         </p:nvPicPr>
         <p:blipFill>
-          <a:blip r:embed="rId5">
-            <a:extLst>
-              <a:ext uri="{28A0092B-C50C-407E-A947-70E740481C1C}">
-                <a14:useLocalDpi xmlns:a14="http://schemas.microsoft.com/office/drawing/2010/main" val="0"/>
-              </a:ext>
-            </a:extLst>
-          </a:blip>
-          <a:srcRect/>
+          <a:blip r:embed="rId5"/>
           <a:stretch>
             <a:fillRect/>
           </a:stretch>
         </p:blipFill>
-        <p:spPr bwMode="auto">
+        <p:spPr>
           <a:xfrm>
-            <a:off x="511496" y="2756576"/>
-            <a:ext cx="2294417" cy="2294417"/>
+            <a:off x="502483" y="2702873"/>
+            <a:ext cx="2294418" cy="2294418"/>
           </a:xfrm>
           <a:prstGeom prst="rect">
             <a:avLst/>
           </a:prstGeom>
-          <a:noFill/>
-          <a:extLst>
-            <a:ext uri="{909E8E84-426E-40DD-AFC4-6F175D3DCCD1}">
-              <a14:hiddenFill xmlns:a14="http://schemas.microsoft.com/office/drawing/2010/main">
-                <a:solidFill>
-                  <a:srgbClr val="FFFFFF"/>
-                </a:solidFill>
-              </a14:hiddenFill>
-            </a:ext>
-          </a:extLst>
         </p:spPr>
       </p:pic>
     </p:spTree>
-    <p:extLst>
-      <p:ext uri="{BB962C8B-B14F-4D97-AF65-F5344CB8AC3E}">
-        <p14:creationId xmlns:p14="http://schemas.microsoft.com/office/powerpoint/2010/main" val="25426801"/>
-      </p:ext>
-    </p:extLst>
   </p:cSld>
   <p:clrMapOvr>
     <a:masterClrMapping/>
@@ -20335,13 +16678,7 @@
       </p:grpSpPr>
       <p:sp>
         <p:nvSpPr>
-          <p:cNvPr id="4" name="Title 3">
-            <a:extLst>
-              <a:ext uri="{FF2B5EF4-FFF2-40B4-BE49-F238E27FC236}">
-                <a16:creationId xmlns:a16="http://schemas.microsoft.com/office/drawing/2014/main" id="{EFC8E292-E3B6-AD74-6FB7-1CB39C1D8A59}"/>
-              </a:ext>
-            </a:extLst>
-          </p:cNvPr>
+          <p:cNvPr id="4" name="Title 3"/>
           <p:cNvSpPr>
             <a:spLocks noGrp="1"/>
           </p:cNvSpPr>
@@ -20363,13 +16700,7 @@
       </p:sp>
       <p:sp>
         <p:nvSpPr>
-          <p:cNvPr id="5" name="Content Placeholder 4">
-            <a:extLst>
-              <a:ext uri="{FF2B5EF4-FFF2-40B4-BE49-F238E27FC236}">
-                <a16:creationId xmlns:a16="http://schemas.microsoft.com/office/drawing/2014/main" id="{9DB38F96-335D-B41D-4828-2F464D72959B}"/>
-              </a:ext>
-            </a:extLst>
-          </p:cNvPr>
+          <p:cNvPr id="5" name="Content Placeholder 4"/>
           <p:cNvSpPr>
             <a:spLocks noGrp="1"/>
           </p:cNvSpPr>
@@ -20397,19 +16728,7 @@
               <a:rPr lang="en-US" dirty="0">
                 <a:hlinkClick r:id="rId3"/>
               </a:rPr>
-              <a:t>RStudio </a:t>
-            </a:r>
-            <a:r>
-              <a:rPr lang="en-US" dirty="0" err="1">
-                <a:hlinkClick r:id="rId3"/>
-              </a:rPr>
-              <a:t>Cheatsheet</a:t>
-            </a:r>
-            <a:r>
-              <a:rPr lang="en-US" dirty="0">
-                <a:hlinkClick r:id="rId3"/>
-              </a:rPr>
-              <a:t> </a:t>
+              <a:t>R Cookbook</a:t>
             </a:r>
             <a:endParaRPr lang="en-US" dirty="0"/>
           </a:p>
@@ -20418,7 +16737,7 @@
               <a:rPr lang="en-US" dirty="0">
                 <a:hlinkClick r:id="rId4"/>
               </a:rPr>
-              <a:t>R ggplot2 </a:t>
+              <a:t>RStudio </a:t>
             </a:r>
             <a:r>
               <a:rPr lang="en-US" dirty="0" err="1">
@@ -20439,7 +16758,7 @@
               <a:rPr lang="en-US" dirty="0">
                 <a:hlinkClick r:id="rId5"/>
               </a:rPr>
-              <a:t>R dplyr </a:t>
+              <a:t>R ggplot2 </a:t>
             </a:r>
             <a:r>
               <a:rPr lang="en-US" dirty="0" err="1">
@@ -20447,6 +16766,12 @@
               </a:rPr>
               <a:t>Cheatsheet</a:t>
             </a:r>
+            <a:r>
+              <a:rPr lang="en-US" dirty="0">
+                <a:hlinkClick r:id="rId5"/>
+              </a:rPr>
+              <a:t> </a:t>
+            </a:r>
             <a:endParaRPr lang="en-US" dirty="0"/>
           </a:p>
           <a:p>
@@ -20454,6 +16779,48 @@
               <a:rPr lang="en-US" dirty="0">
                 <a:hlinkClick r:id="rId6"/>
               </a:rPr>
+              <a:t>R </a:t>
+            </a:r>
+            <a:r>
+              <a:rPr lang="en-US" dirty="0" err="1">
+                <a:hlinkClick r:id="rId6"/>
+              </a:rPr>
+              <a:t>dplyr</a:t>
+            </a:r>
+            <a:r>
+              <a:rPr lang="en-US" dirty="0">
+                <a:hlinkClick r:id="rId6"/>
+              </a:rPr>
+              <a:t> </a:t>
+            </a:r>
+            <a:r>
+              <a:rPr lang="en-US" dirty="0" err="1">
+                <a:hlinkClick r:id="rId6"/>
+              </a:rPr>
+              <a:t>Cheatsheet</a:t>
+            </a:r>
+            <a:endParaRPr lang="en-US" dirty="0"/>
+          </a:p>
+          <a:p>
+            <a:r>
+              <a:rPr lang="en-US" dirty="0">
+                <a:hlinkClick r:id="rId7"/>
+              </a:rPr>
+              <a:t>RS</a:t>
+            </a:r>
+            <a:r>
+              <a:rPr lang="en-US" altLang="zh-CN" dirty="0">
+                <a:hlinkClick r:id="rId7"/>
+              </a:rPr>
+              <a:t>tudio Shortcuts </a:t>
+            </a:r>
+            <a:endParaRPr lang="en-US" dirty="0"/>
+          </a:p>
+          <a:p>
+            <a:r>
+              <a:rPr lang="en-US" dirty="0">
+                <a:hlinkClick r:id="rId8"/>
+              </a:rPr>
               <a:t>More resources</a:t>
             </a:r>
             <a:endParaRPr lang="en-US" dirty="0"/>
@@ -20461,11 +16828,6 @@
         </p:txBody>
       </p:sp>
     </p:spTree>
-    <p:extLst>
-      <p:ext uri="{BB962C8B-B14F-4D97-AF65-F5344CB8AC3E}">
-        <p14:creationId xmlns:p14="http://schemas.microsoft.com/office/powerpoint/2010/main" val="2361305861"/>
-      </p:ext>
-    </p:extLst>
   </p:cSld>
   <p:clrMapOvr>
     <a:masterClrMapping/>
@@ -20492,13 +16854,7 @@
       </p:grpSpPr>
       <p:sp>
         <p:nvSpPr>
-          <p:cNvPr id="4" name="Titre 3">
-            <a:extLst>
-              <a:ext uri="{FF2B5EF4-FFF2-40B4-BE49-F238E27FC236}">
-                <a16:creationId xmlns:a16="http://schemas.microsoft.com/office/drawing/2014/main" id="{A45C165F-BC2D-0A42-B582-A27AE4DBB9CF}"/>
-              </a:ext>
-            </a:extLst>
-          </p:cNvPr>
+          <p:cNvPr id="4" name="Titre 3"/>
           <p:cNvSpPr>
             <a:spLocks noGrp="1"/>
           </p:cNvSpPr>
@@ -20532,13 +16888,7 @@
       </p:sp>
       <p:grpSp>
         <p:nvGrpSpPr>
-          <p:cNvPr id="16" name="Group 15">
-            <a:extLst>
-              <a:ext uri="{FF2B5EF4-FFF2-40B4-BE49-F238E27FC236}">
-                <a16:creationId xmlns:a16="http://schemas.microsoft.com/office/drawing/2014/main" id="{7CC81CB7-1EDD-55C6-3B98-ACECA03BA4EC}"/>
-              </a:ext>
-            </a:extLst>
-          </p:cNvPr>
+          <p:cNvPr id="16" name="Group 15"/>
           <p:cNvGrpSpPr/>
           <p:nvPr/>
         </p:nvGrpSpPr>
@@ -20552,13 +16902,7 @@
         </p:grpSpPr>
         <p:sp>
           <p:nvSpPr>
-            <p:cNvPr id="9" name="TextBox 8">
-              <a:extLst>
-                <a:ext uri="{FF2B5EF4-FFF2-40B4-BE49-F238E27FC236}">
-                  <a16:creationId xmlns:a16="http://schemas.microsoft.com/office/drawing/2014/main" id="{85E2DE13-CEEE-E647-8E4F-470D5A534248}"/>
-                </a:ext>
-              </a:extLst>
-            </p:cNvPr>
+            <p:cNvPr id="9" name="TextBox 8"/>
             <p:cNvSpPr txBox="1"/>
             <p:nvPr/>
           </p:nvSpPr>
@@ -20683,13 +17027,7 @@
         </p:sp>
         <p:sp>
           <p:nvSpPr>
-            <p:cNvPr id="5" name="Round Diagonal Corner Rectangle 4">
-              <a:extLst>
-                <a:ext uri="{FF2B5EF4-FFF2-40B4-BE49-F238E27FC236}">
-                  <a16:creationId xmlns:a16="http://schemas.microsoft.com/office/drawing/2014/main" id="{0DFF1146-E7D6-7DCA-58AC-7186A15FA11E}"/>
-                </a:ext>
-              </a:extLst>
-            </p:cNvPr>
+            <p:cNvPr id="5" name="Round Diagonal Corner Rectangle 4"/>
             <p:cNvSpPr/>
             <p:nvPr/>
           </p:nvSpPr>
@@ -20740,13 +17078,7 @@
         </p:sp>
         <p:sp>
           <p:nvSpPr>
-            <p:cNvPr id="15" name="TextBox 14">
-              <a:extLst>
-                <a:ext uri="{FF2B5EF4-FFF2-40B4-BE49-F238E27FC236}">
-                  <a16:creationId xmlns:a16="http://schemas.microsoft.com/office/drawing/2014/main" id="{08417DDA-6993-EE19-7F44-E793D90E2EED}"/>
-                </a:ext>
-              </a:extLst>
-            </p:cNvPr>
+            <p:cNvPr id="15" name="TextBox 14"/>
             <p:cNvSpPr txBox="1"/>
             <p:nvPr/>
           </p:nvSpPr>
@@ -20785,13 +17117,7 @@
       </p:grpSp>
       <p:grpSp>
         <p:nvGrpSpPr>
-          <p:cNvPr id="17" name="Group 16">
-            <a:extLst>
-              <a:ext uri="{FF2B5EF4-FFF2-40B4-BE49-F238E27FC236}">
-                <a16:creationId xmlns:a16="http://schemas.microsoft.com/office/drawing/2014/main" id="{3EA19582-54E0-F957-436E-76D62CA944C4}"/>
-              </a:ext>
-            </a:extLst>
-          </p:cNvPr>
+          <p:cNvPr id="17" name="Group 16"/>
           <p:cNvGrpSpPr/>
           <p:nvPr/>
         </p:nvGrpSpPr>
@@ -20805,13 +17131,7 @@
         </p:grpSpPr>
         <p:sp>
           <p:nvSpPr>
-            <p:cNvPr id="18" name="TextBox 17">
-              <a:extLst>
-                <a:ext uri="{FF2B5EF4-FFF2-40B4-BE49-F238E27FC236}">
-                  <a16:creationId xmlns:a16="http://schemas.microsoft.com/office/drawing/2014/main" id="{D476EB50-B182-D634-91ED-030D52EFDBED}"/>
-                </a:ext>
-              </a:extLst>
-            </p:cNvPr>
+            <p:cNvPr id="18" name="TextBox 17"/>
             <p:cNvSpPr txBox="1"/>
             <p:nvPr/>
           </p:nvSpPr>
@@ -20914,13 +17234,7 @@
         </p:sp>
         <p:sp>
           <p:nvSpPr>
-            <p:cNvPr id="19" name="Round Diagonal Corner Rectangle 18">
-              <a:extLst>
-                <a:ext uri="{FF2B5EF4-FFF2-40B4-BE49-F238E27FC236}">
-                  <a16:creationId xmlns:a16="http://schemas.microsoft.com/office/drawing/2014/main" id="{2382BD19-FA4A-77C0-B190-354729277522}"/>
-                </a:ext>
-              </a:extLst>
-            </p:cNvPr>
+            <p:cNvPr id="19" name="Round Diagonal Corner Rectangle 18"/>
             <p:cNvSpPr/>
             <p:nvPr/>
           </p:nvSpPr>
@@ -20971,13 +17285,7 @@
         </p:sp>
         <p:sp>
           <p:nvSpPr>
-            <p:cNvPr id="20" name="TextBox 19">
-              <a:extLst>
-                <a:ext uri="{FF2B5EF4-FFF2-40B4-BE49-F238E27FC236}">
-                  <a16:creationId xmlns:a16="http://schemas.microsoft.com/office/drawing/2014/main" id="{8E4AED3A-4774-CE72-A328-27D5587F6958}"/>
-                </a:ext>
-              </a:extLst>
-            </p:cNvPr>
+            <p:cNvPr id="20" name="TextBox 19"/>
             <p:cNvSpPr txBox="1"/>
             <p:nvPr/>
           </p:nvSpPr>
@@ -21013,13 +17321,7 @@
       </p:grpSp>
       <p:grpSp>
         <p:nvGrpSpPr>
-          <p:cNvPr id="8" name="Group 7">
-            <a:extLst>
-              <a:ext uri="{FF2B5EF4-FFF2-40B4-BE49-F238E27FC236}">
-                <a16:creationId xmlns:a16="http://schemas.microsoft.com/office/drawing/2014/main" id="{40870E13-8C46-3144-F075-ABDB40A04758}"/>
-              </a:ext>
-            </a:extLst>
-          </p:cNvPr>
+          <p:cNvPr id="8" name="Group 7"/>
           <p:cNvGrpSpPr/>
           <p:nvPr/>
         </p:nvGrpSpPr>
@@ -21033,13 +17335,7 @@
         </p:grpSpPr>
         <p:sp>
           <p:nvSpPr>
-            <p:cNvPr id="10" name="TextBox 9">
-              <a:extLst>
-                <a:ext uri="{FF2B5EF4-FFF2-40B4-BE49-F238E27FC236}">
-                  <a16:creationId xmlns:a16="http://schemas.microsoft.com/office/drawing/2014/main" id="{DC6B89DE-E4B6-0965-3CEC-0F6D1BB35138}"/>
-                </a:ext>
-              </a:extLst>
-            </p:cNvPr>
+            <p:cNvPr id="10" name="TextBox 9"/>
             <p:cNvSpPr txBox="1"/>
             <p:nvPr/>
           </p:nvSpPr>
@@ -21129,13 +17425,7 @@
         </p:sp>
         <p:sp>
           <p:nvSpPr>
-            <p:cNvPr id="11" name="Round Diagonal Corner Rectangle 10">
-              <a:extLst>
-                <a:ext uri="{FF2B5EF4-FFF2-40B4-BE49-F238E27FC236}">
-                  <a16:creationId xmlns:a16="http://schemas.microsoft.com/office/drawing/2014/main" id="{4E218EE5-CCF0-097F-FE58-356B5EE4A939}"/>
-                </a:ext>
-              </a:extLst>
-            </p:cNvPr>
+            <p:cNvPr id="11" name="Round Diagonal Corner Rectangle 10"/>
             <p:cNvSpPr/>
             <p:nvPr/>
           </p:nvSpPr>
@@ -21186,13 +17476,7 @@
         </p:sp>
         <p:sp>
           <p:nvSpPr>
-            <p:cNvPr id="12" name="TextBox 11">
-              <a:extLst>
-                <a:ext uri="{FF2B5EF4-FFF2-40B4-BE49-F238E27FC236}">
-                  <a16:creationId xmlns:a16="http://schemas.microsoft.com/office/drawing/2014/main" id="{DBEAE791-0E54-E0A2-256A-0097C8D0E3B6}"/>
-                </a:ext>
-              </a:extLst>
-            </p:cNvPr>
+            <p:cNvPr id="12" name="TextBox 11"/>
             <p:cNvSpPr txBox="1"/>
             <p:nvPr/>
           </p:nvSpPr>
@@ -21225,13 +17509,7 @@
       </p:grpSp>
       <p:grpSp>
         <p:nvGrpSpPr>
-          <p:cNvPr id="22" name="Group 21">
-            <a:extLst>
-              <a:ext uri="{FF2B5EF4-FFF2-40B4-BE49-F238E27FC236}">
-                <a16:creationId xmlns:a16="http://schemas.microsoft.com/office/drawing/2014/main" id="{BC0FC20B-884C-A1CB-A592-6A70C0DCFE32}"/>
-              </a:ext>
-            </a:extLst>
-          </p:cNvPr>
+          <p:cNvPr id="22" name="Group 21"/>
           <p:cNvGrpSpPr/>
           <p:nvPr/>
         </p:nvGrpSpPr>
@@ -21245,13 +17523,7 @@
         </p:grpSpPr>
         <p:sp>
           <p:nvSpPr>
-            <p:cNvPr id="23" name="TextBox 22">
-              <a:extLst>
-                <a:ext uri="{FF2B5EF4-FFF2-40B4-BE49-F238E27FC236}">
-                  <a16:creationId xmlns:a16="http://schemas.microsoft.com/office/drawing/2014/main" id="{BB75872D-FCA7-63A5-0F09-360F00FB000F}"/>
-                </a:ext>
-              </a:extLst>
-            </p:cNvPr>
+            <p:cNvPr id="23" name="TextBox 22"/>
             <p:cNvSpPr txBox="1"/>
             <p:nvPr/>
           </p:nvSpPr>
@@ -21364,13 +17636,7 @@
         </p:sp>
         <p:sp>
           <p:nvSpPr>
-            <p:cNvPr id="24" name="Round Diagonal Corner Rectangle 23">
-              <a:extLst>
-                <a:ext uri="{FF2B5EF4-FFF2-40B4-BE49-F238E27FC236}">
-                  <a16:creationId xmlns:a16="http://schemas.microsoft.com/office/drawing/2014/main" id="{DE735868-385C-ED8F-821B-81D6204D513C}"/>
-                </a:ext>
-              </a:extLst>
-            </p:cNvPr>
+            <p:cNvPr id="24" name="Round Diagonal Corner Rectangle 23"/>
             <p:cNvSpPr/>
             <p:nvPr/>
           </p:nvSpPr>
@@ -21416,13 +17682,7 @@
         </p:sp>
         <p:sp>
           <p:nvSpPr>
-            <p:cNvPr id="25" name="TextBox 24">
-              <a:extLst>
-                <a:ext uri="{FF2B5EF4-FFF2-40B4-BE49-F238E27FC236}">
-                  <a16:creationId xmlns:a16="http://schemas.microsoft.com/office/drawing/2014/main" id="{CFF70829-3EC5-9097-CB56-E13B46CC3462}"/>
-                </a:ext>
-              </a:extLst>
-            </p:cNvPr>
+            <p:cNvPr id="25" name="TextBox 24"/>
             <p:cNvSpPr txBox="1"/>
             <p:nvPr/>
           </p:nvSpPr>
@@ -21460,11 +17720,6 @@
         </p:sp>
       </p:grpSp>
     </p:spTree>
-    <p:extLst>
-      <p:ext uri="{BB962C8B-B14F-4D97-AF65-F5344CB8AC3E}">
-        <p14:creationId xmlns:p14="http://schemas.microsoft.com/office/powerpoint/2010/main" val="2200063611"/>
-      </p:ext>
-    </p:extLst>
   </p:cSld>
   <p:clrMapOvr>
     <a:masterClrMapping/>
@@ -21491,13 +17746,7 @@
       </p:grpSpPr>
       <p:sp>
         <p:nvSpPr>
-          <p:cNvPr id="2" name="Text Placeholder 1">
-            <a:extLst>
-              <a:ext uri="{FF2B5EF4-FFF2-40B4-BE49-F238E27FC236}">
-                <a16:creationId xmlns:a16="http://schemas.microsoft.com/office/drawing/2014/main" id="{63790065-44D7-7D04-5ACD-F7A7E982163F}"/>
-              </a:ext>
-            </a:extLst>
-          </p:cNvPr>
+          <p:cNvPr id="2" name="Text Placeholder 1"/>
           <p:cNvSpPr>
             <a:spLocks noGrp="1"/>
           </p:cNvSpPr>
@@ -21545,11 +17794,6 @@
         </p:txBody>
       </p:sp>
     </p:spTree>
-    <p:extLst>
-      <p:ext uri="{BB962C8B-B14F-4D97-AF65-F5344CB8AC3E}">
-        <p14:creationId xmlns:p14="http://schemas.microsoft.com/office/powerpoint/2010/main" val="2253242404"/>
-      </p:ext>
-    </p:extLst>
   </p:cSld>
   <p:clrMapOvr>
     <a:masterClrMapping/>
@@ -21576,13 +17820,7 @@
       </p:grpSpPr>
       <p:sp>
         <p:nvSpPr>
-          <p:cNvPr id="2" name="Title 1">
-            <a:extLst>
-              <a:ext uri="{FF2B5EF4-FFF2-40B4-BE49-F238E27FC236}">
-                <a16:creationId xmlns:a16="http://schemas.microsoft.com/office/drawing/2014/main" id="{E961C9E1-74EF-A90A-DC4C-C0F9823CF87A}"/>
-              </a:ext>
-            </a:extLst>
-          </p:cNvPr>
+          <p:cNvPr id="2" name="Title 1"/>
           <p:cNvSpPr>
             <a:spLocks noGrp="1"/>
           </p:cNvSpPr>
@@ -21602,7 +17840,7 @@
           </a:bodyPr>
           <a:lstStyle/>
           <a:p>
-            <a:pPr defTabSz="914226"/>
+            <a:pPr defTabSz="914400"/>
             <a:r>
               <a:rPr lang="en-US" sz="4000" b="1" dirty="0">
                 <a:solidFill>
@@ -21618,20 +17856,14 @@
       </p:sp>
       <p:sp>
         <p:nvSpPr>
-          <p:cNvPr id="5" name="TextBox 4">
-            <a:extLst>
-              <a:ext uri="{FF2B5EF4-FFF2-40B4-BE49-F238E27FC236}">
-                <a16:creationId xmlns:a16="http://schemas.microsoft.com/office/drawing/2014/main" id="{B5C65067-8301-83CF-6944-C733754CC10E}"/>
-              </a:ext>
-            </a:extLst>
-          </p:cNvPr>
+          <p:cNvPr id="5" name="TextBox 4"/>
           <p:cNvSpPr txBox="1"/>
           <p:nvPr/>
         </p:nvSpPr>
         <p:spPr>
           <a:xfrm>
             <a:off x="4572000" y="1979309"/>
-            <a:ext cx="4146115" cy="2586477"/>
+            <a:ext cx="4146115" cy="2309350"/>
           </a:xfrm>
           <a:prstGeom prst="rect">
             <a:avLst/>
@@ -21663,7 +17895,7 @@
             </a:pPr>
             <a:r>
               <a:rPr lang="en-US" dirty="0"/>
-              <a:t>Why Excel is not enough</a:t>
+              <a:t>What is R</a:t>
             </a:r>
           </a:p>
           <a:p>
@@ -21673,7 +17905,7 @@
             </a:pPr>
             <a:r>
               <a:rPr lang="en-US" dirty="0"/>
-              <a:t>What is R</a:t>
+              <a:t>Why R is important</a:t>
             </a:r>
           </a:p>
           <a:p>
@@ -21683,17 +17915,7 @@
             </a:pPr>
             <a:r>
               <a:rPr lang="en-US" dirty="0"/>
-              <a:t>What is an IDE</a:t>
-            </a:r>
-          </a:p>
-          <a:p>
-            <a:pPr marL="342900" indent="-342900">
-              <a:buFont typeface="Arial" panose="020B0604020202020204" pitchFamily="34" charset="0"/>
-              <a:buChar char="•"/>
-            </a:pPr>
-            <a:r>
-              <a:rPr lang="en-US" dirty="0"/>
-              <a:t>Basic Operations</a:t>
+              <a:t>How to use R with more convenience</a:t>
             </a:r>
           </a:p>
           <a:p>
@@ -21716,11 +17938,6 @@
         </p:txBody>
       </p:sp>
     </p:spTree>
-    <p:extLst>
-      <p:ext uri="{BB962C8B-B14F-4D97-AF65-F5344CB8AC3E}">
-        <p14:creationId xmlns:p14="http://schemas.microsoft.com/office/powerpoint/2010/main" val="4111024130"/>
-      </p:ext>
-    </p:extLst>
   </p:cSld>
   <p:clrMapOvr>
     <a:masterClrMapping/>
@@ -21747,13 +17964,7 @@
       </p:grpSpPr>
       <p:sp>
         <p:nvSpPr>
-          <p:cNvPr id="2" name="Title 1">
-            <a:extLst>
-              <a:ext uri="{FF2B5EF4-FFF2-40B4-BE49-F238E27FC236}">
-                <a16:creationId xmlns:a16="http://schemas.microsoft.com/office/drawing/2014/main" id="{B680034B-CD1F-8D43-E086-9DDD3B38C229}"/>
-              </a:ext>
-            </a:extLst>
-          </p:cNvPr>
+          <p:cNvPr id="2" name="Title 1"/>
           <p:cNvSpPr>
             <a:spLocks noGrp="1"/>
           </p:cNvSpPr>
@@ -21776,13 +17987,7 @@
       </p:sp>
       <p:sp>
         <p:nvSpPr>
-          <p:cNvPr id="3" name="Content Placeholder 2">
-            <a:extLst>
-              <a:ext uri="{FF2B5EF4-FFF2-40B4-BE49-F238E27FC236}">
-                <a16:creationId xmlns:a16="http://schemas.microsoft.com/office/drawing/2014/main" id="{A8222480-26B7-A632-A7D1-2FFF2A3669F8}"/>
-              </a:ext>
-            </a:extLst>
-          </p:cNvPr>
+          <p:cNvPr id="3" name="Content Placeholder 2"/>
           <p:cNvSpPr>
             <a:spLocks noGrp="1"/>
           </p:cNvSpPr>
@@ -21814,7 +18019,7 @@
             </a:r>
           </a:p>
           <a:p>
-            <a:pPr marL="914288" lvl="1" indent="-457200">
+            <a:pPr marL="914400" lvl="1" indent="-457200">
               <a:buFont typeface="+mj-lt"/>
               <a:buAutoNum type="arabicPeriod"/>
             </a:pPr>
@@ -21824,7 +18029,7 @@
             </a:r>
           </a:p>
           <a:p>
-            <a:pPr marL="914288" lvl="1" indent="-457200">
+            <a:pPr marL="914400" lvl="1" indent="-457200">
               <a:buFont typeface="+mj-lt"/>
               <a:buAutoNum type="arabicPeriod"/>
             </a:pPr>
@@ -21834,7 +18039,7 @@
             </a:r>
           </a:p>
           <a:p>
-            <a:pPr marL="914288" lvl="1" indent="-457200">
+            <a:pPr marL="914400" lvl="1" indent="-457200">
               <a:buFont typeface="+mj-lt"/>
               <a:buAutoNum type="arabicPeriod"/>
             </a:pPr>
@@ -21844,7 +18049,7 @@
             </a:r>
           </a:p>
           <a:p>
-            <a:pPr marL="914288" lvl="1" indent="-457200">
+            <a:pPr marL="914400" lvl="1" indent="-457200">
               <a:buFont typeface="+mj-lt"/>
               <a:buAutoNum type="arabicPeriod"/>
             </a:pPr>
@@ -21872,13 +18077,7 @@
       </p:sp>
       <p:pic>
         <p:nvPicPr>
-          <p:cNvPr id="5" name="Picture 2">
-            <a:extLst>
-              <a:ext uri="{FF2B5EF4-FFF2-40B4-BE49-F238E27FC236}">
-                <a16:creationId xmlns:a16="http://schemas.microsoft.com/office/drawing/2014/main" id="{379818F9-DDC4-2B98-4256-F0CB3669031D}"/>
-              </a:ext>
-            </a:extLst>
-          </p:cNvPr>
+          <p:cNvPr id="5" name="Picture 2"/>
           <p:cNvPicPr>
             <a:picLocks noChangeAspect="1" noChangeArrowheads="1"/>
           </p:cNvPicPr>
@@ -21919,13 +18118,7 @@
       </p:pic>
       <p:pic>
         <p:nvPicPr>
-          <p:cNvPr id="6" name="Content Placeholder 5" descr="Logo&#10;&#10;Description automatically generated">
-            <a:extLst>
-              <a:ext uri="{FF2B5EF4-FFF2-40B4-BE49-F238E27FC236}">
-                <a16:creationId xmlns:a16="http://schemas.microsoft.com/office/drawing/2014/main" id="{836B72A9-0E12-4EA9-71CF-C126ABA1ABC2}"/>
-              </a:ext>
-            </a:extLst>
-          </p:cNvPr>
+          <p:cNvPr id="6" name="Content Placeholder 5" descr="Logo&#10;&#10;Description automatically generated"/>
           <p:cNvPicPr>
             <a:picLocks noChangeAspect="1"/>
           </p:cNvPicPr>
@@ -21948,11 +18141,6 @@
         </p:spPr>
       </p:pic>
     </p:spTree>
-    <p:extLst>
-      <p:ext uri="{BB962C8B-B14F-4D97-AF65-F5344CB8AC3E}">
-        <p14:creationId xmlns:p14="http://schemas.microsoft.com/office/powerpoint/2010/main" val="4225761275"/>
-      </p:ext>
-    </p:extLst>
   </p:cSld>
   <p:clrMapOvr>
     <a:masterClrMapping/>
@@ -22372,7 +18560,7 @@
     </a:clrScheme>
     <a:fontScheme name="Thème Office">
       <a:majorFont>
-        <a:latin typeface="Calibri Light" panose="020F0302020204030204"/>
+        <a:latin typeface="Calibri Light"/>
         <a:ea typeface=""/>
         <a:cs typeface=""/>
         <a:font script="Jpan" typeface="游ゴシック Light"/>
@@ -22407,7 +18595,7 @@
         <a:font script="Geor" typeface="Sylfaen"/>
       </a:majorFont>
       <a:minorFont>
-        <a:latin typeface="Calibri" panose="020F0502020204030204"/>
+        <a:latin typeface="Calibri"/>
         <a:ea typeface=""/>
         <a:cs typeface=""/>
         <a:font script="Jpan" typeface="游ゴシック"/>
@@ -22633,7 +18821,7 @@
     </a:clrScheme>
     <a:fontScheme name="Office">
       <a:majorFont>
-        <a:latin typeface="Calibri Light" panose="020F0302020204030204"/>
+        <a:latin typeface="Calibri Light"/>
         <a:ea typeface=""/>
         <a:cs typeface=""/>
         <a:font script="Jpan" typeface="游ゴシック Light"/>
@@ -22666,26 +18854,9 @@
         <a:font script="Viet" typeface="Times New Roman"/>
         <a:font script="Uigh" typeface="Microsoft Uighur"/>
         <a:font script="Geor" typeface="Sylfaen"/>
-        <a:font script="Armn" typeface="Arial"/>
-        <a:font script="Bugi" typeface="Leelawadee UI"/>
-        <a:font script="Bopo" typeface="Microsoft JhengHei"/>
-        <a:font script="Java" typeface="Javanese Text"/>
-        <a:font script="Lisu" typeface="Segoe UI"/>
-        <a:font script="Mymr" typeface="Myanmar Text"/>
-        <a:font script="Nkoo" typeface="Ebrima"/>
-        <a:font script="Olck" typeface="Nirmala UI"/>
-        <a:font script="Osma" typeface="Ebrima"/>
-        <a:font script="Phag" typeface="Phagspa"/>
-        <a:font script="Syrn" typeface="Estrangelo Edessa"/>
-        <a:font script="Syrj" typeface="Estrangelo Edessa"/>
-        <a:font script="Syre" typeface="Estrangelo Edessa"/>
-        <a:font script="Sora" typeface="Nirmala UI"/>
-        <a:font script="Tale" typeface="Microsoft Tai Le"/>
-        <a:font script="Talu" typeface="Microsoft New Tai Lue"/>
-        <a:font script="Tfng" typeface="Ebrima"/>
       </a:majorFont>
       <a:minorFont>
-        <a:latin typeface="Calibri" panose="020F0502020204030204"/>
+        <a:latin typeface="Calibri"/>
         <a:ea typeface=""/>
         <a:cs typeface=""/>
         <a:font script="Jpan" typeface="游ゴシック"/>
@@ -22718,23 +18889,6 @@
         <a:font script="Viet" typeface="Arial"/>
         <a:font script="Uigh" typeface="Microsoft Uighur"/>
         <a:font script="Geor" typeface="Sylfaen"/>
-        <a:font script="Armn" typeface="Arial"/>
-        <a:font script="Bugi" typeface="Leelawadee UI"/>
-        <a:font script="Bopo" typeface="Microsoft JhengHei"/>
-        <a:font script="Java" typeface="Javanese Text"/>
-        <a:font script="Lisu" typeface="Segoe UI"/>
-        <a:font script="Mymr" typeface="Myanmar Text"/>
-        <a:font script="Nkoo" typeface="Ebrima"/>
-        <a:font script="Olck" typeface="Nirmala UI"/>
-        <a:font script="Osma" typeface="Ebrima"/>
-        <a:font script="Phag" typeface="Phagspa"/>
-        <a:font script="Syrn" typeface="Estrangelo Edessa"/>
-        <a:font script="Syrj" typeface="Estrangelo Edessa"/>
-        <a:font script="Syre" typeface="Estrangelo Edessa"/>
-        <a:font script="Sora" typeface="Nirmala UI"/>
-        <a:font script="Tale" typeface="Microsoft Tai Le"/>
-        <a:font script="Talu" typeface="Microsoft New Tai Lue"/>
-        <a:font script="Tfng" typeface="Ebrima"/>
       </a:minorFont>
     </a:fontScheme>
     <a:fmtScheme name="Office">
